--- a/docs/pptx/carbo/jx-carbo-linsubhr-ratio-sideeffect.pptx
+++ b/docs/pptx/carbo/jx-carbo-linsubhr-ratio-sideeffect.pptx
@@ -2271,7 +2271,7 @@
           </p:nvSpPr>
           <p:spPr>
             <a:xfrm>
-              <a:off x="817517" y="5114368"/>
+              <a:off x="817517" y="5142518"/>
               <a:ext cx="7799693" cy="0"/>
             </a:xfrm>
             <a:custGeom>
@@ -2314,7 +2314,7 @@
           </p:nvSpPr>
           <p:spPr>
             <a:xfrm>
-              <a:off x="817517" y="4244691"/>
+              <a:off x="817517" y="4313054"/>
               <a:ext cx="7799693" cy="0"/>
             </a:xfrm>
             <a:custGeom>
@@ -2357,7 +2357,7 @@
           </p:nvSpPr>
           <p:spPr>
             <a:xfrm>
-              <a:off x="817517" y="3375014"/>
+              <a:off x="817517" y="3483591"/>
               <a:ext cx="7799693" cy="0"/>
             </a:xfrm>
             <a:custGeom>
@@ -2400,7 +2400,7 @@
           </p:nvSpPr>
           <p:spPr>
             <a:xfrm>
-              <a:off x="817517" y="2505337"/>
+              <a:off x="817517" y="2654127"/>
               <a:ext cx="7799693" cy="0"/>
             </a:xfrm>
             <a:custGeom>
@@ -2443,15 +2443,15 @@
           </p:nvSpPr>
           <p:spPr>
             <a:xfrm>
-              <a:off x="1615213" y="1896563"/>
-              <a:ext cx="0" cy="3826579"/>
+              <a:off x="1615213" y="2073503"/>
+              <a:ext cx="0" cy="3649639"/>
             </a:xfrm>
             <a:custGeom>
               <a:avLst/>
               <a:pathLst>
-                <a:path w="0" h="3826579">
+                <a:path w="0" h="3649639">
                   <a:moveTo>
-                    <a:pt x="0" y="3826579"/>
+                    <a:pt x="0" y="3649639"/>
                   </a:moveTo>
                   <a:lnTo>
                     <a:pt x="0" y="0"/>
@@ -2486,15 +2486,15 @@
           </p:nvSpPr>
           <p:spPr>
             <a:xfrm>
-              <a:off x="3387871" y="1896563"/>
-              <a:ext cx="0" cy="3826579"/>
+              <a:off x="3387871" y="2073503"/>
+              <a:ext cx="0" cy="3649639"/>
             </a:xfrm>
             <a:custGeom>
               <a:avLst/>
               <a:pathLst>
-                <a:path w="0" h="3826579">
+                <a:path w="0" h="3649639">
                   <a:moveTo>
-                    <a:pt x="0" y="3826579"/>
+                    <a:pt x="0" y="3649639"/>
                   </a:moveTo>
                   <a:lnTo>
                     <a:pt x="0" y="0"/>
@@ -2529,15 +2529,15 @@
           </p:nvSpPr>
           <p:spPr>
             <a:xfrm>
-              <a:off x="5160528" y="1896563"/>
-              <a:ext cx="0" cy="3826579"/>
+              <a:off x="5160528" y="2073503"/>
+              <a:ext cx="0" cy="3649639"/>
             </a:xfrm>
             <a:custGeom>
               <a:avLst/>
               <a:pathLst>
-                <a:path w="0" h="3826579">
+                <a:path w="0" h="3649639">
                   <a:moveTo>
-                    <a:pt x="0" y="3826579"/>
+                    <a:pt x="0" y="3649639"/>
                   </a:moveTo>
                   <a:lnTo>
                     <a:pt x="0" y="0"/>
@@ -2572,15 +2572,15 @@
           </p:nvSpPr>
           <p:spPr>
             <a:xfrm>
-              <a:off x="6933186" y="1896563"/>
-              <a:ext cx="0" cy="3826579"/>
+              <a:off x="6933186" y="2073503"/>
+              <a:ext cx="0" cy="3649639"/>
             </a:xfrm>
             <a:custGeom>
               <a:avLst/>
               <a:pathLst>
-                <a:path w="0" h="3826579">
+                <a:path w="0" h="3649639">
                   <a:moveTo>
-                    <a:pt x="0" y="3826579"/>
+                    <a:pt x="0" y="3649639"/>
                   </a:moveTo>
                   <a:lnTo>
                     <a:pt x="0" y="0"/>
@@ -2615,7 +2615,7 @@
           </p:nvSpPr>
           <p:spPr>
             <a:xfrm>
-              <a:off x="817517" y="5549207"/>
+              <a:off x="817517" y="5557249"/>
               <a:ext cx="7799693" cy="0"/>
             </a:xfrm>
             <a:custGeom>
@@ -2658,7 +2658,7 @@
           </p:nvSpPr>
           <p:spPr>
             <a:xfrm>
-              <a:off x="817517" y="4679530"/>
+              <a:off x="817517" y="4727786"/>
               <a:ext cx="7799693" cy="0"/>
             </a:xfrm>
             <a:custGeom>
@@ -2701,7 +2701,7 @@
           </p:nvSpPr>
           <p:spPr>
             <a:xfrm>
-              <a:off x="817517" y="3809853"/>
+              <a:off x="817517" y="3898322"/>
               <a:ext cx="7799693" cy="0"/>
             </a:xfrm>
             <a:custGeom>
@@ -2744,7 +2744,7 @@
           </p:nvSpPr>
           <p:spPr>
             <a:xfrm>
-              <a:off x="817517" y="2940175"/>
+              <a:off x="817517" y="3068859"/>
               <a:ext cx="7799693" cy="0"/>
             </a:xfrm>
             <a:custGeom>
@@ -2787,7 +2787,7 @@
           </p:nvSpPr>
           <p:spPr>
             <a:xfrm>
-              <a:off x="817517" y="2070498"/>
+              <a:off x="817517" y="2239395"/>
               <a:ext cx="7799693" cy="0"/>
             </a:xfrm>
             <a:custGeom>
@@ -2830,15 +2830,15 @@
           </p:nvSpPr>
           <p:spPr>
             <a:xfrm>
-              <a:off x="2501542" y="1896563"/>
-              <a:ext cx="0" cy="3826579"/>
+              <a:off x="2501542" y="2073503"/>
+              <a:ext cx="0" cy="3649639"/>
             </a:xfrm>
             <a:custGeom>
               <a:avLst/>
               <a:pathLst>
-                <a:path w="0" h="3826579">
+                <a:path w="0" h="3649639">
                   <a:moveTo>
-                    <a:pt x="0" y="3826579"/>
+                    <a:pt x="0" y="3649639"/>
                   </a:moveTo>
                   <a:lnTo>
                     <a:pt x="0" y="0"/>
@@ -2873,15 +2873,15 @@
           </p:nvSpPr>
           <p:spPr>
             <a:xfrm>
-              <a:off x="4274200" y="1896563"/>
-              <a:ext cx="0" cy="3826579"/>
+              <a:off x="4274200" y="2073503"/>
+              <a:ext cx="0" cy="3649639"/>
             </a:xfrm>
             <a:custGeom>
               <a:avLst/>
               <a:pathLst>
-                <a:path w="0" h="3826579">
+                <a:path w="0" h="3649639">
                   <a:moveTo>
-                    <a:pt x="0" y="3826579"/>
+                    <a:pt x="0" y="3649639"/>
                   </a:moveTo>
                   <a:lnTo>
                     <a:pt x="0" y="0"/>
@@ -2916,15 +2916,15 @@
           </p:nvSpPr>
           <p:spPr>
             <a:xfrm>
-              <a:off x="6046857" y="1896563"/>
-              <a:ext cx="0" cy="3826579"/>
+              <a:off x="6046857" y="2073503"/>
+              <a:ext cx="0" cy="3649639"/>
             </a:xfrm>
             <a:custGeom>
               <a:avLst/>
               <a:pathLst>
-                <a:path w="0" h="3826579">
+                <a:path w="0" h="3649639">
                   <a:moveTo>
-                    <a:pt x="0" y="3826579"/>
+                    <a:pt x="0" y="3649639"/>
                   </a:moveTo>
                   <a:lnTo>
                     <a:pt x="0" y="0"/>
@@ -2959,15 +2959,15 @@
           </p:nvSpPr>
           <p:spPr>
             <a:xfrm>
-              <a:off x="7819515" y="1896563"/>
-              <a:ext cx="0" cy="3826579"/>
+              <a:off x="7819515" y="2073503"/>
+              <a:ext cx="0" cy="3649639"/>
             </a:xfrm>
             <a:custGeom>
               <a:avLst/>
               <a:pathLst>
-                <a:path w="0" h="3826579">
+                <a:path w="0" h="3649639">
                   <a:moveTo>
-                    <a:pt x="0" y="3826579"/>
+                    <a:pt x="0" y="3649639"/>
                   </a:moveTo>
                   <a:lnTo>
                     <a:pt x="0" y="0"/>
@@ -3002,561 +3002,561 @@
           </p:nvSpPr>
           <p:spPr>
             <a:xfrm>
-              <a:off x="817517" y="1896563"/>
-              <a:ext cx="7403783" cy="3573568"/>
+              <a:off x="817517" y="2073503"/>
+              <a:ext cx="7403783" cy="3408327"/>
             </a:xfrm>
             <a:custGeom>
               <a:avLst/>
               <a:pathLst>
-                <a:path w="7403783" h="3573568">
+                <a:path w="7403783" h="3408327">
                   <a:moveTo>
                     <a:pt x="1014842" y="0"/>
                   </a:moveTo>
                   <a:lnTo>
-                    <a:pt x="1043281" y="62673"/>
-                  </a:lnTo>
-                  <a:lnTo>
-                    <a:pt x="1119914" y="223968"/>
-                  </a:lnTo>
-                  <a:lnTo>
-                    <a:pt x="1196546" y="378015"/>
-                  </a:lnTo>
-                  <a:lnTo>
-                    <a:pt x="1273179" y="525142"/>
-                  </a:lnTo>
-                  <a:lnTo>
-                    <a:pt x="1349811" y="665658"/>
-                  </a:lnTo>
-                  <a:lnTo>
-                    <a:pt x="1426444" y="799861"/>
-                  </a:lnTo>
-                  <a:lnTo>
-                    <a:pt x="1503076" y="928034"/>
-                  </a:lnTo>
-                  <a:lnTo>
-                    <a:pt x="1579709" y="1050448"/>
-                  </a:lnTo>
-                  <a:lnTo>
-                    <a:pt x="1656342" y="1167363"/>
-                  </a:lnTo>
-                  <a:lnTo>
-                    <a:pt x="1732974" y="1279024"/>
-                  </a:lnTo>
-                  <a:lnTo>
-                    <a:pt x="1809607" y="1385669"/>
-                  </a:lnTo>
-                  <a:lnTo>
-                    <a:pt x="1886239" y="1487523"/>
-                  </a:lnTo>
-                  <a:lnTo>
-                    <a:pt x="1962872" y="1584800"/>
-                  </a:lnTo>
-                  <a:lnTo>
-                    <a:pt x="2039504" y="1677706"/>
-                  </a:lnTo>
-                  <a:lnTo>
-                    <a:pt x="2116137" y="1766439"/>
-                  </a:lnTo>
-                  <a:lnTo>
-                    <a:pt x="2192769" y="1851184"/>
-                  </a:lnTo>
-                  <a:lnTo>
-                    <a:pt x="2269402" y="1932122"/>
-                  </a:lnTo>
-                  <a:lnTo>
-                    <a:pt x="2346034" y="2009424"/>
-                  </a:lnTo>
-                  <a:lnTo>
-                    <a:pt x="2422667" y="2083252"/>
-                  </a:lnTo>
-                  <a:lnTo>
-                    <a:pt x="2499300" y="2153764"/>
-                  </a:lnTo>
-                  <a:lnTo>
-                    <a:pt x="2575932" y="2221107"/>
-                  </a:lnTo>
-                  <a:lnTo>
-                    <a:pt x="2652565" y="2285425"/>
-                  </a:lnTo>
-                  <a:lnTo>
-                    <a:pt x="2729197" y="2346853"/>
-                  </a:lnTo>
-                  <a:lnTo>
-                    <a:pt x="2805830" y="2405521"/>
-                  </a:lnTo>
-                  <a:lnTo>
-                    <a:pt x="2882462" y="2461553"/>
-                  </a:lnTo>
-                  <a:lnTo>
-                    <a:pt x="2959095" y="2515068"/>
-                  </a:lnTo>
-                  <a:lnTo>
-                    <a:pt x="3035727" y="2566178"/>
-                  </a:lnTo>
-                  <a:lnTo>
-                    <a:pt x="3112360" y="2614992"/>
-                  </a:lnTo>
-                  <a:lnTo>
-                    <a:pt x="3188993" y="2661613"/>
-                  </a:lnTo>
-                  <a:lnTo>
-                    <a:pt x="3265625" y="2706139"/>
-                  </a:lnTo>
-                  <a:lnTo>
-                    <a:pt x="3342258" y="2748665"/>
-                  </a:lnTo>
-                  <a:lnTo>
-                    <a:pt x="3418890" y="2785497"/>
-                  </a:lnTo>
-                  <a:lnTo>
-                    <a:pt x="3495523" y="2801291"/>
-                  </a:lnTo>
-                  <a:lnTo>
-                    <a:pt x="3572155" y="2816798"/>
-                  </a:lnTo>
-                  <a:lnTo>
-                    <a:pt x="3648788" y="2832023"/>
-                  </a:lnTo>
-                  <a:lnTo>
-                    <a:pt x="3725420" y="2846970"/>
-                  </a:lnTo>
-                  <a:lnTo>
-                    <a:pt x="3802053" y="2861645"/>
-                  </a:lnTo>
-                  <a:lnTo>
-                    <a:pt x="3878685" y="2876053"/>
-                  </a:lnTo>
-                  <a:lnTo>
-                    <a:pt x="3955318" y="2890198"/>
-                  </a:lnTo>
-                  <a:lnTo>
-                    <a:pt x="4031951" y="2904086"/>
-                  </a:lnTo>
-                  <a:lnTo>
-                    <a:pt x="4108583" y="2917721"/>
-                  </a:lnTo>
-                  <a:lnTo>
-                    <a:pt x="4185216" y="2931107"/>
-                  </a:lnTo>
-                  <a:lnTo>
-                    <a:pt x="4261848" y="2944250"/>
-                  </a:lnTo>
-                  <a:lnTo>
-                    <a:pt x="4338481" y="2957153"/>
-                  </a:lnTo>
-                  <a:lnTo>
-                    <a:pt x="4415113" y="2969821"/>
-                  </a:lnTo>
-                  <a:lnTo>
-                    <a:pt x="4491746" y="2982258"/>
-                  </a:lnTo>
-                  <a:lnTo>
-                    <a:pt x="4568378" y="2994469"/>
-                  </a:lnTo>
-                  <a:lnTo>
-                    <a:pt x="4645011" y="3006458"/>
-                  </a:lnTo>
-                  <a:lnTo>
-                    <a:pt x="4721644" y="3018228"/>
-                  </a:lnTo>
-                  <a:lnTo>
-                    <a:pt x="4798276" y="3029783"/>
-                  </a:lnTo>
-                  <a:lnTo>
-                    <a:pt x="4874909" y="3041128"/>
-                  </a:lnTo>
-                  <a:lnTo>
-                    <a:pt x="4951541" y="3052267"/>
-                  </a:lnTo>
-                  <a:lnTo>
-                    <a:pt x="5028174" y="3063203"/>
-                  </a:lnTo>
-                  <a:lnTo>
-                    <a:pt x="5104806" y="3073939"/>
-                  </a:lnTo>
-                  <a:lnTo>
-                    <a:pt x="5181439" y="3084480"/>
-                  </a:lnTo>
-                  <a:lnTo>
-                    <a:pt x="5258071" y="3094829"/>
-                  </a:lnTo>
-                  <a:lnTo>
-                    <a:pt x="5334704" y="3104989"/>
-                  </a:lnTo>
-                  <a:lnTo>
-                    <a:pt x="5411336" y="3114965"/>
-                  </a:lnTo>
-                  <a:lnTo>
-                    <a:pt x="5487969" y="3124758"/>
-                  </a:lnTo>
-                  <a:lnTo>
-                    <a:pt x="5564602" y="3134373"/>
-                  </a:lnTo>
-                  <a:lnTo>
-                    <a:pt x="5641234" y="3143814"/>
-                  </a:lnTo>
-                  <a:lnTo>
-                    <a:pt x="5717867" y="3153082"/>
-                  </a:lnTo>
-                  <a:lnTo>
-                    <a:pt x="5794499" y="3162181"/>
-                  </a:lnTo>
-                  <a:lnTo>
-                    <a:pt x="5871132" y="3171115"/>
-                  </a:lnTo>
-                  <a:lnTo>
-                    <a:pt x="5947764" y="3179886"/>
-                  </a:lnTo>
-                  <a:lnTo>
-                    <a:pt x="6024397" y="3188497"/>
-                  </a:lnTo>
-                  <a:lnTo>
-                    <a:pt x="6101029" y="3196951"/>
-                  </a:lnTo>
-                  <a:lnTo>
-                    <a:pt x="6177662" y="3205251"/>
-                  </a:lnTo>
-                  <a:lnTo>
-                    <a:pt x="6254294" y="3213400"/>
-                  </a:lnTo>
-                  <a:lnTo>
-                    <a:pt x="6330927" y="3221401"/>
-                  </a:lnTo>
-                  <a:lnTo>
-                    <a:pt x="6407560" y="3229256"/>
-                  </a:lnTo>
-                  <a:lnTo>
-                    <a:pt x="6484192" y="3236968"/>
-                  </a:lnTo>
-                  <a:lnTo>
-                    <a:pt x="6560825" y="3244539"/>
-                  </a:lnTo>
-                  <a:lnTo>
-                    <a:pt x="6637457" y="3251973"/>
-                  </a:lnTo>
-                  <a:lnTo>
-                    <a:pt x="6714090" y="3259271"/>
-                  </a:lnTo>
-                  <a:lnTo>
-                    <a:pt x="6790722" y="3266436"/>
-                  </a:lnTo>
-                  <a:lnTo>
-                    <a:pt x="6867355" y="3273470"/>
-                  </a:lnTo>
-                  <a:lnTo>
-                    <a:pt x="6943987" y="3280377"/>
-                  </a:lnTo>
-                  <a:lnTo>
-                    <a:pt x="7020620" y="3287158"/>
-                  </a:lnTo>
-                  <a:lnTo>
-                    <a:pt x="7097253" y="3293815"/>
-                  </a:lnTo>
-                  <a:lnTo>
-                    <a:pt x="7173885" y="3300351"/>
-                  </a:lnTo>
-                  <a:lnTo>
-                    <a:pt x="7250518" y="3306768"/>
-                  </a:lnTo>
-                  <a:lnTo>
-                    <a:pt x="7327150" y="3313068"/>
-                  </a:lnTo>
-                  <a:lnTo>
-                    <a:pt x="7403783" y="3319253"/>
-                  </a:lnTo>
-                  <a:lnTo>
-                    <a:pt x="7403783" y="3573568"/>
-                  </a:lnTo>
-                  <a:lnTo>
-                    <a:pt x="7327150" y="3569848"/>
-                  </a:lnTo>
-                  <a:lnTo>
-                    <a:pt x="7250518" y="3565953"/>
-                  </a:lnTo>
-                  <a:lnTo>
-                    <a:pt x="7173885" y="3561875"/>
-                  </a:lnTo>
-                  <a:lnTo>
-                    <a:pt x="7097253" y="3557604"/>
-                  </a:lnTo>
-                  <a:lnTo>
-                    <a:pt x="7020620" y="3553134"/>
-                  </a:lnTo>
-                  <a:lnTo>
-                    <a:pt x="6943987" y="3548452"/>
-                  </a:lnTo>
-                  <a:lnTo>
-                    <a:pt x="6867355" y="3543551"/>
-                  </a:lnTo>
-                  <a:lnTo>
-                    <a:pt x="6790722" y="3538419"/>
-                  </a:lnTo>
-                  <a:lnTo>
-                    <a:pt x="6714090" y="3533046"/>
-                  </a:lnTo>
-                  <a:lnTo>
-                    <a:pt x="6637457" y="3527419"/>
-                  </a:lnTo>
-                  <a:lnTo>
-                    <a:pt x="6560825" y="3521528"/>
-                  </a:lnTo>
-                  <a:lnTo>
-                    <a:pt x="6484192" y="3515360"/>
-                  </a:lnTo>
-                  <a:lnTo>
-                    <a:pt x="6407560" y="3508902"/>
-                  </a:lnTo>
-                  <a:lnTo>
-                    <a:pt x="6330927" y="3502140"/>
-                  </a:lnTo>
-                  <a:lnTo>
-                    <a:pt x="6254294" y="3495060"/>
-                  </a:lnTo>
-                  <a:lnTo>
-                    <a:pt x="6177662" y="3487647"/>
-                  </a:lnTo>
-                  <a:lnTo>
-                    <a:pt x="6101029" y="3479885"/>
-                  </a:lnTo>
-                  <a:lnTo>
-                    <a:pt x="6024397" y="3471758"/>
-                  </a:lnTo>
-                  <a:lnTo>
-                    <a:pt x="5947764" y="3463249"/>
-                  </a:lnTo>
-                  <a:lnTo>
-                    <a:pt x="5871132" y="3454339"/>
-                  </a:lnTo>
-                  <a:lnTo>
-                    <a:pt x="5794499" y="3445010"/>
-                  </a:lnTo>
-                  <a:lnTo>
-                    <a:pt x="5717867" y="3435243"/>
-                  </a:lnTo>
-                  <a:lnTo>
-                    <a:pt x="5641234" y="3425016"/>
-                  </a:lnTo>
-                  <a:lnTo>
-                    <a:pt x="5564602" y="3414307"/>
-                  </a:lnTo>
-                  <a:lnTo>
-                    <a:pt x="5487969" y="3403095"/>
-                  </a:lnTo>
-                  <a:lnTo>
-                    <a:pt x="5411336" y="3391356"/>
-                  </a:lnTo>
-                  <a:lnTo>
-                    <a:pt x="5334704" y="3379064"/>
-                  </a:lnTo>
-                  <a:lnTo>
-                    <a:pt x="5258071" y="3366194"/>
-                  </a:lnTo>
-                  <a:lnTo>
-                    <a:pt x="5181439" y="3352719"/>
-                  </a:lnTo>
-                  <a:lnTo>
-                    <a:pt x="5104806" y="3338610"/>
-                  </a:lnTo>
-                  <a:lnTo>
-                    <a:pt x="5028174" y="3323837"/>
-                  </a:lnTo>
-                  <a:lnTo>
-                    <a:pt x="4951541" y="3308369"/>
-                  </a:lnTo>
-                  <a:lnTo>
-                    <a:pt x="4874909" y="3292173"/>
-                  </a:lnTo>
-                  <a:lnTo>
-                    <a:pt x="4798276" y="3275216"/>
-                  </a:lnTo>
-                  <a:lnTo>
-                    <a:pt x="4721644" y="3257460"/>
-                  </a:lnTo>
-                  <a:lnTo>
-                    <a:pt x="4645011" y="3238870"/>
-                  </a:lnTo>
-                  <a:lnTo>
-                    <a:pt x="4568378" y="3219405"/>
-                  </a:lnTo>
-                  <a:lnTo>
-                    <a:pt x="4491746" y="3199024"/>
-                  </a:lnTo>
-                  <a:lnTo>
-                    <a:pt x="4415113" y="3177684"/>
-                  </a:lnTo>
-                  <a:lnTo>
-                    <a:pt x="4338481" y="3155341"/>
-                  </a:lnTo>
-                  <a:lnTo>
-                    <a:pt x="4261848" y="3131947"/>
-                  </a:lnTo>
-                  <a:lnTo>
-                    <a:pt x="4185216" y="3107452"/>
-                  </a:lnTo>
-                  <a:lnTo>
-                    <a:pt x="4108583" y="3081804"/>
-                  </a:lnTo>
-                  <a:lnTo>
-                    <a:pt x="4031951" y="3054950"/>
-                  </a:lnTo>
-                  <a:lnTo>
-                    <a:pt x="3955318" y="3026833"/>
-                  </a:lnTo>
-                  <a:lnTo>
-                    <a:pt x="3878685" y="2997393"/>
-                  </a:lnTo>
-                  <a:lnTo>
-                    <a:pt x="3802053" y="2966569"/>
-                  </a:lnTo>
-                  <a:lnTo>
-                    <a:pt x="3725420" y="2934294"/>
-                  </a:lnTo>
-                  <a:lnTo>
-                    <a:pt x="3648788" y="2900501"/>
-                  </a:lnTo>
-                  <a:lnTo>
-                    <a:pt x="3572155" y="2865118"/>
-                  </a:lnTo>
-                  <a:lnTo>
-                    <a:pt x="3495523" y="2828070"/>
-                  </a:lnTo>
-                  <a:lnTo>
-                    <a:pt x="3418890" y="2789280"/>
-                  </a:lnTo>
-                  <a:lnTo>
-                    <a:pt x="3342258" y="2769409"/>
-                  </a:lnTo>
-                  <a:lnTo>
-                    <a:pt x="3265625" y="2753022"/>
-                  </a:lnTo>
-                  <a:lnTo>
-                    <a:pt x="3188993" y="2736332"/>
-                  </a:lnTo>
-                  <a:lnTo>
-                    <a:pt x="3112360" y="2719332"/>
-                  </a:lnTo>
-                  <a:lnTo>
-                    <a:pt x="3035727" y="2702017"/>
-                  </a:lnTo>
-                  <a:lnTo>
-                    <a:pt x="2959095" y="2684380"/>
-                  </a:lnTo>
-                  <a:lnTo>
-                    <a:pt x="2882462" y="2666417"/>
-                  </a:lnTo>
-                  <a:lnTo>
-                    <a:pt x="2805830" y="2648120"/>
-                  </a:lnTo>
-                  <a:lnTo>
-                    <a:pt x="2729197" y="2629483"/>
-                  </a:lnTo>
-                  <a:lnTo>
-                    <a:pt x="2652565" y="2610501"/>
-                  </a:lnTo>
-                  <a:lnTo>
-                    <a:pt x="2575932" y="2591166"/>
-                  </a:lnTo>
-                  <a:lnTo>
-                    <a:pt x="2499300" y="2571473"/>
-                  </a:lnTo>
-                  <a:lnTo>
-                    <a:pt x="2422667" y="2551415"/>
-                  </a:lnTo>
-                  <a:lnTo>
-                    <a:pt x="2346034" y="2530984"/>
-                  </a:lnTo>
-                  <a:lnTo>
-                    <a:pt x="2269402" y="2510174"/>
-                  </a:lnTo>
-                  <a:lnTo>
-                    <a:pt x="2192769" y="2488979"/>
-                  </a:lnTo>
-                  <a:lnTo>
-                    <a:pt x="2116137" y="2467390"/>
-                  </a:lnTo>
-                  <a:lnTo>
-                    <a:pt x="2039504" y="2445400"/>
-                  </a:lnTo>
-                  <a:lnTo>
-                    <a:pt x="1962872" y="2423003"/>
-                  </a:lnTo>
-                  <a:lnTo>
-                    <a:pt x="1886239" y="2400190"/>
-                  </a:lnTo>
-                  <a:lnTo>
-                    <a:pt x="1809607" y="2376953"/>
-                  </a:lnTo>
-                  <a:lnTo>
-                    <a:pt x="1732974" y="2353286"/>
-                  </a:lnTo>
-                  <a:lnTo>
-                    <a:pt x="1656342" y="2329180"/>
-                  </a:lnTo>
-                  <a:lnTo>
-                    <a:pt x="1579709" y="2304626"/>
-                  </a:lnTo>
-                  <a:lnTo>
-                    <a:pt x="1503076" y="2279617"/>
-                  </a:lnTo>
-                  <a:lnTo>
-                    <a:pt x="1426444" y="2254144"/>
-                  </a:lnTo>
-                  <a:lnTo>
-                    <a:pt x="1349811" y="2228198"/>
-                  </a:lnTo>
-                  <a:lnTo>
-                    <a:pt x="1273179" y="2201771"/>
-                  </a:lnTo>
-                  <a:lnTo>
-                    <a:pt x="1196546" y="2174853"/>
-                  </a:lnTo>
-                  <a:lnTo>
-                    <a:pt x="1119914" y="2147437"/>
-                  </a:lnTo>
-                  <a:lnTo>
-                    <a:pt x="1043281" y="2119511"/>
-                  </a:lnTo>
-                  <a:lnTo>
-                    <a:pt x="966649" y="2091068"/>
-                  </a:lnTo>
-                  <a:lnTo>
-                    <a:pt x="890016" y="2062096"/>
-                  </a:lnTo>
-                  <a:lnTo>
-                    <a:pt x="813384" y="2032588"/>
-                  </a:lnTo>
-                  <a:lnTo>
-                    <a:pt x="736751" y="2002531"/>
-                  </a:lnTo>
-                  <a:lnTo>
-                    <a:pt x="660118" y="1971917"/>
-                  </a:lnTo>
-                  <a:lnTo>
-                    <a:pt x="583486" y="1940736"/>
-                  </a:lnTo>
-                  <a:lnTo>
-                    <a:pt x="506853" y="1908975"/>
-                  </a:lnTo>
-                  <a:lnTo>
-                    <a:pt x="430221" y="1876626"/>
-                  </a:lnTo>
-                  <a:lnTo>
-                    <a:pt x="353588" y="1843676"/>
-                  </a:lnTo>
-                  <a:lnTo>
-                    <a:pt x="276956" y="1810115"/>
-                  </a:lnTo>
-                  <a:lnTo>
-                    <a:pt x="200323" y="1775931"/>
-                  </a:lnTo>
-                  <a:lnTo>
-                    <a:pt x="123691" y="1741114"/>
-                  </a:lnTo>
-                  <a:lnTo>
-                    <a:pt x="47058" y="1705650"/>
-                  </a:lnTo>
-                  <a:lnTo>
-                    <a:pt x="0" y="1683468"/>
+                    <a:pt x="1043281" y="59775"/>
+                  </a:lnTo>
+                  <a:lnTo>
+                    <a:pt x="1119914" y="213611"/>
+                  </a:lnTo>
+                  <a:lnTo>
+                    <a:pt x="1196546" y="360536"/>
+                  </a:lnTo>
+                  <a:lnTo>
+                    <a:pt x="1273179" y="500859"/>
+                  </a:lnTo>
+                  <a:lnTo>
+                    <a:pt x="1349811" y="634878"/>
+                  </a:lnTo>
+                  <a:lnTo>
+                    <a:pt x="1426444" y="762875"/>
+                  </a:lnTo>
+                  <a:lnTo>
+                    <a:pt x="1503076" y="885122"/>
+                  </a:lnTo>
+                  <a:lnTo>
+                    <a:pt x="1579709" y="1001876"/>
+                  </a:lnTo>
+                  <a:lnTo>
+                    <a:pt x="1656342" y="1113384"/>
+                  </a:lnTo>
+                  <a:lnTo>
+                    <a:pt x="1732974" y="1219883"/>
+                  </a:lnTo>
+                  <a:lnTo>
+                    <a:pt x="1809607" y="1321596"/>
+                  </a:lnTo>
+                  <a:lnTo>
+                    <a:pt x="1886239" y="1418740"/>
+                  </a:lnTo>
+                  <a:lnTo>
+                    <a:pt x="1962872" y="1511519"/>
+                  </a:lnTo>
+                  <a:lnTo>
+                    <a:pt x="2039504" y="1600130"/>
+                  </a:lnTo>
+                  <a:lnTo>
+                    <a:pt x="2116137" y="1684759"/>
+                  </a:lnTo>
+                  <a:lnTo>
+                    <a:pt x="2192769" y="1765586"/>
+                  </a:lnTo>
+                  <a:lnTo>
+                    <a:pt x="2269402" y="1842782"/>
+                  </a:lnTo>
+                  <a:lnTo>
+                    <a:pt x="2346034" y="1916509"/>
+                  </a:lnTo>
+                  <a:lnTo>
+                    <a:pt x="2422667" y="1986924"/>
+                  </a:lnTo>
+                  <a:lnTo>
+                    <a:pt x="2499300" y="2054175"/>
+                  </a:lnTo>
+                  <a:lnTo>
+                    <a:pt x="2575932" y="2118404"/>
+                  </a:lnTo>
+                  <a:lnTo>
+                    <a:pt x="2652565" y="2179748"/>
+                  </a:lnTo>
+                  <a:lnTo>
+                    <a:pt x="2729197" y="2238335"/>
+                  </a:lnTo>
+                  <a:lnTo>
+                    <a:pt x="2805830" y="2294291"/>
+                  </a:lnTo>
+                  <a:lnTo>
+                    <a:pt x="2882462" y="2347732"/>
+                  </a:lnTo>
+                  <a:lnTo>
+                    <a:pt x="2959095" y="2398772"/>
+                  </a:lnTo>
+                  <a:lnTo>
+                    <a:pt x="3035727" y="2447519"/>
+                  </a:lnTo>
+                  <a:lnTo>
+                    <a:pt x="3112360" y="2494076"/>
+                  </a:lnTo>
+                  <a:lnTo>
+                    <a:pt x="3188993" y="2538541"/>
+                  </a:lnTo>
+                  <a:lnTo>
+                    <a:pt x="3265625" y="2581008"/>
+                  </a:lnTo>
+                  <a:lnTo>
+                    <a:pt x="3342258" y="2621568"/>
+                  </a:lnTo>
+                  <a:lnTo>
+                    <a:pt x="3418890" y="2656696"/>
+                  </a:lnTo>
+                  <a:lnTo>
+                    <a:pt x="3495523" y="2671761"/>
+                  </a:lnTo>
+                  <a:lnTo>
+                    <a:pt x="3572155" y="2686551"/>
+                  </a:lnTo>
+                  <a:lnTo>
+                    <a:pt x="3648788" y="2701071"/>
+                  </a:lnTo>
+                  <a:lnTo>
+                    <a:pt x="3725420" y="2715327"/>
+                  </a:lnTo>
+                  <a:lnTo>
+                    <a:pt x="3802053" y="2729324"/>
+                  </a:lnTo>
+                  <a:lnTo>
+                    <a:pt x="3878685" y="2743065"/>
+                  </a:lnTo>
+                  <a:lnTo>
+                    <a:pt x="3955318" y="2756557"/>
+                  </a:lnTo>
+                  <a:lnTo>
+                    <a:pt x="4031951" y="2769802"/>
+                  </a:lnTo>
+                  <a:lnTo>
+                    <a:pt x="4108583" y="2782806"/>
+                  </a:lnTo>
+                  <a:lnTo>
+                    <a:pt x="4185216" y="2795574"/>
+                  </a:lnTo>
+                  <a:lnTo>
+                    <a:pt x="4261848" y="2808109"/>
+                  </a:lnTo>
+                  <a:lnTo>
+                    <a:pt x="4338481" y="2820415"/>
+                  </a:lnTo>
+                  <a:lnTo>
+                    <a:pt x="4415113" y="2832497"/>
+                  </a:lnTo>
+                  <a:lnTo>
+                    <a:pt x="4491746" y="2844360"/>
+                  </a:lnTo>
+                  <a:lnTo>
+                    <a:pt x="4568378" y="2856006"/>
+                  </a:lnTo>
+                  <a:lnTo>
+                    <a:pt x="4645011" y="2867440"/>
+                  </a:lnTo>
+                  <a:lnTo>
+                    <a:pt x="4721644" y="2878666"/>
+                  </a:lnTo>
+                  <a:lnTo>
+                    <a:pt x="4798276" y="2889687"/>
+                  </a:lnTo>
+                  <a:lnTo>
+                    <a:pt x="4874909" y="2900508"/>
+                  </a:lnTo>
+                  <a:lnTo>
+                    <a:pt x="4951541" y="2911131"/>
+                  </a:lnTo>
+                  <a:lnTo>
+                    <a:pt x="5028174" y="2921561"/>
+                  </a:lnTo>
+                  <a:lnTo>
+                    <a:pt x="5104806" y="2931801"/>
+                  </a:lnTo>
+                  <a:lnTo>
+                    <a:pt x="5181439" y="2941855"/>
+                  </a:lnTo>
+                  <a:lnTo>
+                    <a:pt x="5258071" y="2951725"/>
+                  </a:lnTo>
+                  <a:lnTo>
+                    <a:pt x="5334704" y="2961416"/>
+                  </a:lnTo>
+                  <a:lnTo>
+                    <a:pt x="5411336" y="2970930"/>
+                  </a:lnTo>
+                  <a:lnTo>
+                    <a:pt x="5487969" y="2980271"/>
+                  </a:lnTo>
+                  <a:lnTo>
+                    <a:pt x="5564602" y="2989441"/>
+                  </a:lnTo>
+                  <a:lnTo>
+                    <a:pt x="5641234" y="2998445"/>
+                  </a:lnTo>
+                  <a:lnTo>
+                    <a:pt x="5717867" y="3007284"/>
+                  </a:lnTo>
+                  <a:lnTo>
+                    <a:pt x="5794499" y="3015963"/>
+                  </a:lnTo>
+                  <a:lnTo>
+                    <a:pt x="5871132" y="3024483"/>
+                  </a:lnTo>
+                  <a:lnTo>
+                    <a:pt x="5947764" y="3032849"/>
+                  </a:lnTo>
+                  <a:lnTo>
+                    <a:pt x="6024397" y="3041062"/>
+                  </a:lnTo>
+                  <a:lnTo>
+                    <a:pt x="6101029" y="3049125"/>
+                  </a:lnTo>
+                  <a:lnTo>
+                    <a:pt x="6177662" y="3057042"/>
+                  </a:lnTo>
+                  <a:lnTo>
+                    <a:pt x="6254294" y="3064814"/>
+                  </a:lnTo>
+                  <a:lnTo>
+                    <a:pt x="6330927" y="3072445"/>
+                  </a:lnTo>
+                  <a:lnTo>
+                    <a:pt x="6407560" y="3079936"/>
+                  </a:lnTo>
+                  <a:lnTo>
+                    <a:pt x="6484192" y="3087291"/>
+                  </a:lnTo>
+                  <a:lnTo>
+                    <a:pt x="6560825" y="3094513"/>
+                  </a:lnTo>
+                  <a:lnTo>
+                    <a:pt x="6637457" y="3101603"/>
+                  </a:lnTo>
+                  <a:lnTo>
+                    <a:pt x="6714090" y="3108563"/>
+                  </a:lnTo>
+                  <a:lnTo>
+                    <a:pt x="6790722" y="3115397"/>
+                  </a:lnTo>
+                  <a:lnTo>
+                    <a:pt x="6867355" y="3122106"/>
+                  </a:lnTo>
+                  <a:lnTo>
+                    <a:pt x="6943987" y="3128693"/>
+                  </a:lnTo>
+                  <a:lnTo>
+                    <a:pt x="7020620" y="3135161"/>
+                  </a:lnTo>
+                  <a:lnTo>
+                    <a:pt x="7097253" y="3141510"/>
+                  </a:lnTo>
+                  <a:lnTo>
+                    <a:pt x="7173885" y="3147744"/>
+                  </a:lnTo>
+                  <a:lnTo>
+                    <a:pt x="7250518" y="3153864"/>
+                  </a:lnTo>
+                  <a:lnTo>
+                    <a:pt x="7327150" y="3159873"/>
+                  </a:lnTo>
+                  <a:lnTo>
+                    <a:pt x="7403783" y="3165772"/>
+                  </a:lnTo>
+                  <a:lnTo>
+                    <a:pt x="7403783" y="3408327"/>
+                  </a:lnTo>
+                  <a:lnTo>
+                    <a:pt x="7327150" y="3404779"/>
+                  </a:lnTo>
+                  <a:lnTo>
+                    <a:pt x="7250518" y="3401064"/>
+                  </a:lnTo>
+                  <a:lnTo>
+                    <a:pt x="7173885" y="3397175"/>
+                  </a:lnTo>
+                  <a:lnTo>
+                    <a:pt x="7097253" y="3393102"/>
+                  </a:lnTo>
+                  <a:lnTo>
+                    <a:pt x="7020620" y="3388838"/>
+                  </a:lnTo>
+                  <a:lnTo>
+                    <a:pt x="6943987" y="3384373"/>
+                  </a:lnTo>
+                  <a:lnTo>
+                    <a:pt x="6867355" y="3379698"/>
+                  </a:lnTo>
+                  <a:lnTo>
+                    <a:pt x="6790722" y="3374804"/>
+                  </a:lnTo>
+                  <a:lnTo>
+                    <a:pt x="6714090" y="3369679"/>
+                  </a:lnTo>
+                  <a:lnTo>
+                    <a:pt x="6637457" y="3364313"/>
+                  </a:lnTo>
+                  <a:lnTo>
+                    <a:pt x="6560825" y="3358694"/>
+                  </a:lnTo>
+                  <a:lnTo>
+                    <a:pt x="6484192" y="3352811"/>
+                  </a:lnTo>
+                  <a:lnTo>
+                    <a:pt x="6407560" y="3346652"/>
+                  </a:lnTo>
+                  <a:lnTo>
+                    <a:pt x="6330927" y="3340203"/>
+                  </a:lnTo>
+                  <a:lnTo>
+                    <a:pt x="6254294" y="3333450"/>
+                  </a:lnTo>
+                  <a:lnTo>
+                    <a:pt x="6177662" y="3326380"/>
+                  </a:lnTo>
+                  <a:lnTo>
+                    <a:pt x="6101029" y="3318977"/>
+                  </a:lnTo>
+                  <a:lnTo>
+                    <a:pt x="6024397" y="3311225"/>
+                  </a:lnTo>
+                  <a:lnTo>
+                    <a:pt x="5947764" y="3303109"/>
+                  </a:lnTo>
+                  <a:lnTo>
+                    <a:pt x="5871132" y="3294612"/>
+                  </a:lnTo>
+                  <a:lnTo>
+                    <a:pt x="5794499" y="3285714"/>
+                  </a:lnTo>
+                  <a:lnTo>
+                    <a:pt x="5717867" y="3276398"/>
+                  </a:lnTo>
+                  <a:lnTo>
+                    <a:pt x="5641234" y="3266644"/>
+                  </a:lnTo>
+                  <a:lnTo>
+                    <a:pt x="5564602" y="3256431"/>
+                  </a:lnTo>
+                  <a:lnTo>
+                    <a:pt x="5487969" y="3245737"/>
+                  </a:lnTo>
+                  <a:lnTo>
+                    <a:pt x="5411336" y="3234541"/>
+                  </a:lnTo>
+                  <a:lnTo>
+                    <a:pt x="5334704" y="3222818"/>
+                  </a:lnTo>
+                  <a:lnTo>
+                    <a:pt x="5258071" y="3210543"/>
+                  </a:lnTo>
+                  <a:lnTo>
+                    <a:pt x="5181439" y="3197690"/>
+                  </a:lnTo>
+                  <a:lnTo>
+                    <a:pt x="5104806" y="3184234"/>
+                  </a:lnTo>
+                  <a:lnTo>
+                    <a:pt x="5028174" y="3170144"/>
+                  </a:lnTo>
+                  <a:lnTo>
+                    <a:pt x="4951541" y="3155391"/>
+                  </a:lnTo>
+                  <a:lnTo>
+                    <a:pt x="4874909" y="3139944"/>
+                  </a:lnTo>
+                  <a:lnTo>
+                    <a:pt x="4798276" y="3123771"/>
+                  </a:lnTo>
+                  <a:lnTo>
+                    <a:pt x="4721644" y="3106837"/>
+                  </a:lnTo>
+                  <a:lnTo>
+                    <a:pt x="4645011" y="3089106"/>
+                  </a:lnTo>
+                  <a:lnTo>
+                    <a:pt x="4568378" y="3070541"/>
+                  </a:lnTo>
+                  <a:lnTo>
+                    <a:pt x="4491746" y="3051102"/>
+                  </a:lnTo>
+                  <a:lnTo>
+                    <a:pt x="4415113" y="3030749"/>
+                  </a:lnTo>
+                  <a:lnTo>
+                    <a:pt x="4338481" y="3009439"/>
+                  </a:lnTo>
+                  <a:lnTo>
+                    <a:pt x="4261848" y="2987127"/>
+                  </a:lnTo>
+                  <a:lnTo>
+                    <a:pt x="4185216" y="2963764"/>
+                  </a:lnTo>
+                  <a:lnTo>
+                    <a:pt x="4108583" y="2939303"/>
+                  </a:lnTo>
+                  <a:lnTo>
+                    <a:pt x="4031951" y="2913691"/>
+                  </a:lnTo>
+                  <a:lnTo>
+                    <a:pt x="3955318" y="2886874"/>
+                  </a:lnTo>
+                  <a:lnTo>
+                    <a:pt x="3878685" y="2858795"/>
+                  </a:lnTo>
+                  <a:lnTo>
+                    <a:pt x="3802053" y="2829396"/>
+                  </a:lnTo>
+                  <a:lnTo>
+                    <a:pt x="3725420" y="2798613"/>
+                  </a:lnTo>
+                  <a:lnTo>
+                    <a:pt x="3648788" y="2766382"/>
+                  </a:lnTo>
+                  <a:lnTo>
+                    <a:pt x="3572155" y="2732636"/>
+                  </a:lnTo>
+                  <a:lnTo>
+                    <a:pt x="3495523" y="2697301"/>
+                  </a:lnTo>
+                  <a:lnTo>
+                    <a:pt x="3418890" y="2660305"/>
+                  </a:lnTo>
+                  <a:lnTo>
+                    <a:pt x="3342258" y="2641352"/>
+                  </a:lnTo>
+                  <a:lnTo>
+                    <a:pt x="3265625" y="2625724"/>
+                  </a:lnTo>
+                  <a:lnTo>
+                    <a:pt x="3188993" y="2609805"/>
+                  </a:lnTo>
+                  <a:lnTo>
+                    <a:pt x="3112360" y="2593591"/>
+                  </a:lnTo>
+                  <a:lnTo>
+                    <a:pt x="3035727" y="2577077"/>
+                  </a:lnTo>
+                  <a:lnTo>
+                    <a:pt x="2959095" y="2560256"/>
+                  </a:lnTo>
+                  <a:lnTo>
+                    <a:pt x="2882462" y="2543122"/>
+                  </a:lnTo>
+                  <a:lnTo>
+                    <a:pt x="2805830" y="2525671"/>
+                  </a:lnTo>
+                  <a:lnTo>
+                    <a:pt x="2729197" y="2507897"/>
+                  </a:lnTo>
+                  <a:lnTo>
+                    <a:pt x="2652565" y="2489792"/>
+                  </a:lnTo>
+                  <a:lnTo>
+                    <a:pt x="2575932" y="2471352"/>
+                  </a:lnTo>
+                  <a:lnTo>
+                    <a:pt x="2499300" y="2452569"/>
+                  </a:lnTo>
+                  <a:lnTo>
+                    <a:pt x="2422667" y="2433438"/>
+                  </a:lnTo>
+                  <a:lnTo>
+                    <a:pt x="2346034" y="2413952"/>
+                  </a:lnTo>
+                  <a:lnTo>
+                    <a:pt x="2269402" y="2394105"/>
+                  </a:lnTo>
+                  <a:lnTo>
+                    <a:pt x="2192769" y="2373889"/>
+                  </a:lnTo>
+                  <a:lnTo>
+                    <a:pt x="2116137" y="2353298"/>
+                  </a:lnTo>
+                  <a:lnTo>
+                    <a:pt x="2039504" y="2332326"/>
+                  </a:lnTo>
+                  <a:lnTo>
+                    <a:pt x="1962872" y="2310964"/>
+                  </a:lnTo>
+                  <a:lnTo>
+                    <a:pt x="1886239" y="2289206"/>
+                  </a:lnTo>
+                  <a:lnTo>
+                    <a:pt x="1809607" y="2267044"/>
+                  </a:lnTo>
+                  <a:lnTo>
+                    <a:pt x="1732974" y="2244471"/>
+                  </a:lnTo>
+                  <a:lnTo>
+                    <a:pt x="1656342" y="2221479"/>
+                  </a:lnTo>
+                  <a:lnTo>
+                    <a:pt x="1579709" y="2198061"/>
+                  </a:lnTo>
+                  <a:lnTo>
+                    <a:pt x="1503076" y="2174208"/>
+                  </a:lnTo>
+                  <a:lnTo>
+                    <a:pt x="1426444" y="2149913"/>
+                  </a:lnTo>
+                  <a:lnTo>
+                    <a:pt x="1349811" y="2125167"/>
+                  </a:lnTo>
+                  <a:lnTo>
+                    <a:pt x="1273179" y="2099962"/>
+                  </a:lnTo>
+                  <a:lnTo>
+                    <a:pt x="1196546" y="2074289"/>
+                  </a:lnTo>
+                  <a:lnTo>
+                    <a:pt x="1119914" y="2048140"/>
+                  </a:lnTo>
+                  <a:lnTo>
+                    <a:pt x="1043281" y="2021506"/>
+                  </a:lnTo>
+                  <a:lnTo>
+                    <a:pt x="966649" y="1994377"/>
+                  </a:lnTo>
+                  <a:lnTo>
+                    <a:pt x="890016" y="1966746"/>
+                  </a:lnTo>
+                  <a:lnTo>
+                    <a:pt x="813384" y="1938601"/>
+                  </a:lnTo>
+                  <a:lnTo>
+                    <a:pt x="736751" y="1909935"/>
+                  </a:lnTo>
+                  <a:lnTo>
+                    <a:pt x="660118" y="1880737"/>
+                  </a:lnTo>
+                  <a:lnTo>
+                    <a:pt x="583486" y="1850997"/>
+                  </a:lnTo>
+                  <a:lnTo>
+                    <a:pt x="506853" y="1820705"/>
+                  </a:lnTo>
+                  <a:lnTo>
+                    <a:pt x="430221" y="1789851"/>
+                  </a:lnTo>
+                  <a:lnTo>
+                    <a:pt x="353588" y="1758425"/>
+                  </a:lnTo>
+                  <a:lnTo>
+                    <a:pt x="276956" y="1726416"/>
+                  </a:lnTo>
+                  <a:lnTo>
+                    <a:pt x="200323" y="1693813"/>
+                  </a:lnTo>
+                  <a:lnTo>
+                    <a:pt x="123691" y="1660605"/>
+                  </a:lnTo>
+                  <a:lnTo>
+                    <a:pt x="47058" y="1626781"/>
+                  </a:lnTo>
+                  <a:lnTo>
+                    <a:pt x="0" y="1605625"/>
                   </a:lnTo>
                   <a:close/>
                 </a:path>
@@ -3582,267 +3582,267 @@
           </p:nvSpPr>
           <p:spPr>
             <a:xfrm>
-              <a:off x="1832360" y="1896563"/>
-              <a:ext cx="6388940" cy="3319253"/>
+              <a:off x="1832360" y="2073503"/>
+              <a:ext cx="6388940" cy="3165772"/>
             </a:xfrm>
             <a:custGeom>
               <a:avLst/>
               <a:pathLst>
-                <a:path w="6388940" h="3319253">
+                <a:path w="6388940" h="3165772">
                   <a:moveTo>
                     <a:pt x="0" y="0"/>
                   </a:moveTo>
                   <a:lnTo>
-                    <a:pt x="28439" y="62673"/>
-                  </a:lnTo>
-                  <a:lnTo>
-                    <a:pt x="105071" y="223968"/>
-                  </a:lnTo>
-                  <a:lnTo>
-                    <a:pt x="181704" y="378015"/>
-                  </a:lnTo>
-                  <a:lnTo>
-                    <a:pt x="258336" y="525142"/>
-                  </a:lnTo>
-                  <a:lnTo>
-                    <a:pt x="334969" y="665658"/>
-                  </a:lnTo>
-                  <a:lnTo>
-                    <a:pt x="411601" y="799861"/>
-                  </a:lnTo>
-                  <a:lnTo>
-                    <a:pt x="488234" y="928034"/>
-                  </a:lnTo>
-                  <a:lnTo>
-                    <a:pt x="564866" y="1050448"/>
-                  </a:lnTo>
-                  <a:lnTo>
-                    <a:pt x="641499" y="1167363"/>
-                  </a:lnTo>
-                  <a:lnTo>
-                    <a:pt x="718131" y="1279024"/>
-                  </a:lnTo>
-                  <a:lnTo>
-                    <a:pt x="794764" y="1385669"/>
-                  </a:lnTo>
-                  <a:lnTo>
-                    <a:pt x="871397" y="1487523"/>
-                  </a:lnTo>
-                  <a:lnTo>
-                    <a:pt x="948029" y="1584800"/>
-                  </a:lnTo>
-                  <a:lnTo>
-                    <a:pt x="1024662" y="1677706"/>
-                  </a:lnTo>
-                  <a:lnTo>
-                    <a:pt x="1101294" y="1766439"/>
-                  </a:lnTo>
-                  <a:lnTo>
-                    <a:pt x="1177927" y="1851184"/>
-                  </a:lnTo>
-                  <a:lnTo>
-                    <a:pt x="1254559" y="1932122"/>
-                  </a:lnTo>
-                  <a:lnTo>
-                    <a:pt x="1331192" y="2009424"/>
-                  </a:lnTo>
-                  <a:lnTo>
-                    <a:pt x="1407824" y="2083252"/>
-                  </a:lnTo>
-                  <a:lnTo>
-                    <a:pt x="1484457" y="2153764"/>
-                  </a:lnTo>
-                  <a:lnTo>
-                    <a:pt x="1561090" y="2221107"/>
-                  </a:lnTo>
-                  <a:lnTo>
-                    <a:pt x="1637722" y="2285425"/>
-                  </a:lnTo>
-                  <a:lnTo>
-                    <a:pt x="1714355" y="2346853"/>
-                  </a:lnTo>
-                  <a:lnTo>
-                    <a:pt x="1790987" y="2405521"/>
-                  </a:lnTo>
-                  <a:lnTo>
-                    <a:pt x="1867620" y="2461553"/>
-                  </a:lnTo>
-                  <a:lnTo>
-                    <a:pt x="1944252" y="2515068"/>
-                  </a:lnTo>
-                  <a:lnTo>
-                    <a:pt x="2020885" y="2566178"/>
-                  </a:lnTo>
-                  <a:lnTo>
-                    <a:pt x="2097517" y="2614992"/>
-                  </a:lnTo>
-                  <a:lnTo>
-                    <a:pt x="2174150" y="2661613"/>
-                  </a:lnTo>
-                  <a:lnTo>
-                    <a:pt x="2250782" y="2706139"/>
-                  </a:lnTo>
-                  <a:lnTo>
-                    <a:pt x="2327415" y="2748665"/>
-                  </a:lnTo>
-                  <a:lnTo>
-                    <a:pt x="2404048" y="2785497"/>
-                  </a:lnTo>
-                  <a:lnTo>
-                    <a:pt x="2480680" y="2801291"/>
-                  </a:lnTo>
-                  <a:lnTo>
-                    <a:pt x="2557313" y="2816798"/>
-                  </a:lnTo>
-                  <a:lnTo>
-                    <a:pt x="2633945" y="2832023"/>
-                  </a:lnTo>
-                  <a:lnTo>
-                    <a:pt x="2710578" y="2846970"/>
-                  </a:lnTo>
-                  <a:lnTo>
-                    <a:pt x="2787210" y="2861645"/>
-                  </a:lnTo>
-                  <a:lnTo>
-                    <a:pt x="2863843" y="2876053"/>
-                  </a:lnTo>
-                  <a:lnTo>
-                    <a:pt x="2940475" y="2890198"/>
-                  </a:lnTo>
-                  <a:lnTo>
-                    <a:pt x="3017108" y="2904086"/>
-                  </a:lnTo>
-                  <a:lnTo>
-                    <a:pt x="3093740" y="2917721"/>
-                  </a:lnTo>
-                  <a:lnTo>
-                    <a:pt x="3170373" y="2931107"/>
-                  </a:lnTo>
-                  <a:lnTo>
-                    <a:pt x="3247006" y="2944250"/>
-                  </a:lnTo>
-                  <a:lnTo>
-                    <a:pt x="3323638" y="2957153"/>
-                  </a:lnTo>
-                  <a:lnTo>
-                    <a:pt x="3400271" y="2969821"/>
-                  </a:lnTo>
-                  <a:lnTo>
-                    <a:pt x="3476903" y="2982258"/>
-                  </a:lnTo>
-                  <a:lnTo>
-                    <a:pt x="3553536" y="2994469"/>
-                  </a:lnTo>
-                  <a:lnTo>
-                    <a:pt x="3630168" y="3006458"/>
-                  </a:lnTo>
-                  <a:lnTo>
-                    <a:pt x="3706801" y="3018228"/>
-                  </a:lnTo>
-                  <a:lnTo>
-                    <a:pt x="3783433" y="3029783"/>
-                  </a:lnTo>
-                  <a:lnTo>
-                    <a:pt x="3860066" y="3041128"/>
-                  </a:lnTo>
-                  <a:lnTo>
-                    <a:pt x="3936699" y="3052267"/>
-                  </a:lnTo>
-                  <a:lnTo>
-                    <a:pt x="4013331" y="3063203"/>
-                  </a:lnTo>
-                  <a:lnTo>
-                    <a:pt x="4089964" y="3073939"/>
-                  </a:lnTo>
-                  <a:lnTo>
-                    <a:pt x="4166596" y="3084480"/>
-                  </a:lnTo>
-                  <a:lnTo>
-                    <a:pt x="4243229" y="3094829"/>
-                  </a:lnTo>
-                  <a:lnTo>
-                    <a:pt x="4319861" y="3104989"/>
-                  </a:lnTo>
-                  <a:lnTo>
-                    <a:pt x="4396494" y="3114965"/>
-                  </a:lnTo>
-                  <a:lnTo>
-                    <a:pt x="4473126" y="3124758"/>
-                  </a:lnTo>
-                  <a:lnTo>
-                    <a:pt x="4549759" y="3134373"/>
-                  </a:lnTo>
-                  <a:lnTo>
-                    <a:pt x="4626391" y="3143814"/>
-                  </a:lnTo>
-                  <a:lnTo>
-                    <a:pt x="4703024" y="3153082"/>
-                  </a:lnTo>
-                  <a:lnTo>
-                    <a:pt x="4779657" y="3162181"/>
-                  </a:lnTo>
-                  <a:lnTo>
-                    <a:pt x="4856289" y="3171115"/>
-                  </a:lnTo>
-                  <a:lnTo>
-                    <a:pt x="4932922" y="3179886"/>
-                  </a:lnTo>
-                  <a:lnTo>
-                    <a:pt x="5009554" y="3188497"/>
-                  </a:lnTo>
-                  <a:lnTo>
-                    <a:pt x="5086187" y="3196951"/>
-                  </a:lnTo>
-                  <a:lnTo>
-                    <a:pt x="5162819" y="3205251"/>
-                  </a:lnTo>
-                  <a:lnTo>
-                    <a:pt x="5239452" y="3213400"/>
-                  </a:lnTo>
-                  <a:lnTo>
-                    <a:pt x="5316084" y="3221401"/>
-                  </a:lnTo>
-                  <a:lnTo>
-                    <a:pt x="5392717" y="3229256"/>
-                  </a:lnTo>
-                  <a:lnTo>
-                    <a:pt x="5469349" y="3236968"/>
-                  </a:lnTo>
-                  <a:lnTo>
-                    <a:pt x="5545982" y="3244539"/>
-                  </a:lnTo>
-                  <a:lnTo>
-                    <a:pt x="5622615" y="3251973"/>
-                  </a:lnTo>
-                  <a:lnTo>
-                    <a:pt x="5699247" y="3259271"/>
-                  </a:lnTo>
-                  <a:lnTo>
-                    <a:pt x="5775880" y="3266436"/>
-                  </a:lnTo>
-                  <a:lnTo>
-                    <a:pt x="5852512" y="3273470"/>
-                  </a:lnTo>
-                  <a:lnTo>
-                    <a:pt x="5929145" y="3280377"/>
-                  </a:lnTo>
-                  <a:lnTo>
-                    <a:pt x="6005777" y="3287158"/>
-                  </a:lnTo>
-                  <a:lnTo>
-                    <a:pt x="6082410" y="3293815"/>
-                  </a:lnTo>
-                  <a:lnTo>
-                    <a:pt x="6159042" y="3300351"/>
-                  </a:lnTo>
-                  <a:lnTo>
-                    <a:pt x="6235675" y="3306768"/>
-                  </a:lnTo>
-                  <a:lnTo>
-                    <a:pt x="6312308" y="3313068"/>
-                  </a:lnTo>
-                  <a:lnTo>
-                    <a:pt x="6388940" y="3319253"/>
+                    <a:pt x="28439" y="59775"/>
+                  </a:lnTo>
+                  <a:lnTo>
+                    <a:pt x="105071" y="213611"/>
+                  </a:lnTo>
+                  <a:lnTo>
+                    <a:pt x="181704" y="360536"/>
+                  </a:lnTo>
+                  <a:lnTo>
+                    <a:pt x="258336" y="500859"/>
+                  </a:lnTo>
+                  <a:lnTo>
+                    <a:pt x="334969" y="634878"/>
+                  </a:lnTo>
+                  <a:lnTo>
+                    <a:pt x="411601" y="762875"/>
+                  </a:lnTo>
+                  <a:lnTo>
+                    <a:pt x="488234" y="885122"/>
+                  </a:lnTo>
+                  <a:lnTo>
+                    <a:pt x="564866" y="1001876"/>
+                  </a:lnTo>
+                  <a:lnTo>
+                    <a:pt x="641499" y="1113384"/>
+                  </a:lnTo>
+                  <a:lnTo>
+                    <a:pt x="718131" y="1219883"/>
+                  </a:lnTo>
+                  <a:lnTo>
+                    <a:pt x="794764" y="1321596"/>
+                  </a:lnTo>
+                  <a:lnTo>
+                    <a:pt x="871397" y="1418740"/>
+                  </a:lnTo>
+                  <a:lnTo>
+                    <a:pt x="948029" y="1511519"/>
+                  </a:lnTo>
+                  <a:lnTo>
+                    <a:pt x="1024662" y="1600130"/>
+                  </a:lnTo>
+                  <a:lnTo>
+                    <a:pt x="1101294" y="1684759"/>
+                  </a:lnTo>
+                  <a:lnTo>
+                    <a:pt x="1177927" y="1765586"/>
+                  </a:lnTo>
+                  <a:lnTo>
+                    <a:pt x="1254559" y="1842782"/>
+                  </a:lnTo>
+                  <a:lnTo>
+                    <a:pt x="1331192" y="1916509"/>
+                  </a:lnTo>
+                  <a:lnTo>
+                    <a:pt x="1407824" y="1986924"/>
+                  </a:lnTo>
+                  <a:lnTo>
+                    <a:pt x="1484457" y="2054175"/>
+                  </a:lnTo>
+                  <a:lnTo>
+                    <a:pt x="1561090" y="2118404"/>
+                  </a:lnTo>
+                  <a:lnTo>
+                    <a:pt x="1637722" y="2179748"/>
+                  </a:lnTo>
+                  <a:lnTo>
+                    <a:pt x="1714355" y="2238335"/>
+                  </a:lnTo>
+                  <a:lnTo>
+                    <a:pt x="1790987" y="2294291"/>
+                  </a:lnTo>
+                  <a:lnTo>
+                    <a:pt x="1867620" y="2347732"/>
+                  </a:lnTo>
+                  <a:lnTo>
+                    <a:pt x="1944252" y="2398772"/>
+                  </a:lnTo>
+                  <a:lnTo>
+                    <a:pt x="2020885" y="2447519"/>
+                  </a:lnTo>
+                  <a:lnTo>
+                    <a:pt x="2097517" y="2494076"/>
+                  </a:lnTo>
+                  <a:lnTo>
+                    <a:pt x="2174150" y="2538541"/>
+                  </a:lnTo>
+                  <a:lnTo>
+                    <a:pt x="2250782" y="2581008"/>
+                  </a:lnTo>
+                  <a:lnTo>
+                    <a:pt x="2327415" y="2621568"/>
+                  </a:lnTo>
+                  <a:lnTo>
+                    <a:pt x="2404048" y="2656696"/>
+                  </a:lnTo>
+                  <a:lnTo>
+                    <a:pt x="2480680" y="2671761"/>
+                  </a:lnTo>
+                  <a:lnTo>
+                    <a:pt x="2557313" y="2686551"/>
+                  </a:lnTo>
+                  <a:lnTo>
+                    <a:pt x="2633945" y="2701071"/>
+                  </a:lnTo>
+                  <a:lnTo>
+                    <a:pt x="2710578" y="2715327"/>
+                  </a:lnTo>
+                  <a:lnTo>
+                    <a:pt x="2787210" y="2729324"/>
+                  </a:lnTo>
+                  <a:lnTo>
+                    <a:pt x="2863843" y="2743065"/>
+                  </a:lnTo>
+                  <a:lnTo>
+                    <a:pt x="2940475" y="2756557"/>
+                  </a:lnTo>
+                  <a:lnTo>
+                    <a:pt x="3017108" y="2769802"/>
+                  </a:lnTo>
+                  <a:lnTo>
+                    <a:pt x="3093740" y="2782806"/>
+                  </a:lnTo>
+                  <a:lnTo>
+                    <a:pt x="3170373" y="2795574"/>
+                  </a:lnTo>
+                  <a:lnTo>
+                    <a:pt x="3247006" y="2808109"/>
+                  </a:lnTo>
+                  <a:lnTo>
+                    <a:pt x="3323638" y="2820415"/>
+                  </a:lnTo>
+                  <a:lnTo>
+                    <a:pt x="3400271" y="2832497"/>
+                  </a:lnTo>
+                  <a:lnTo>
+                    <a:pt x="3476903" y="2844360"/>
+                  </a:lnTo>
+                  <a:lnTo>
+                    <a:pt x="3553536" y="2856006"/>
+                  </a:lnTo>
+                  <a:lnTo>
+                    <a:pt x="3630168" y="2867440"/>
+                  </a:lnTo>
+                  <a:lnTo>
+                    <a:pt x="3706801" y="2878666"/>
+                  </a:lnTo>
+                  <a:lnTo>
+                    <a:pt x="3783433" y="2889687"/>
+                  </a:lnTo>
+                  <a:lnTo>
+                    <a:pt x="3860066" y="2900508"/>
+                  </a:lnTo>
+                  <a:lnTo>
+                    <a:pt x="3936699" y="2911131"/>
+                  </a:lnTo>
+                  <a:lnTo>
+                    <a:pt x="4013331" y="2921561"/>
+                  </a:lnTo>
+                  <a:lnTo>
+                    <a:pt x="4089964" y="2931801"/>
+                  </a:lnTo>
+                  <a:lnTo>
+                    <a:pt x="4166596" y="2941855"/>
+                  </a:lnTo>
+                  <a:lnTo>
+                    <a:pt x="4243229" y="2951725"/>
+                  </a:lnTo>
+                  <a:lnTo>
+                    <a:pt x="4319861" y="2961416"/>
+                  </a:lnTo>
+                  <a:lnTo>
+                    <a:pt x="4396494" y="2970930"/>
+                  </a:lnTo>
+                  <a:lnTo>
+                    <a:pt x="4473126" y="2980271"/>
+                  </a:lnTo>
+                  <a:lnTo>
+                    <a:pt x="4549759" y="2989441"/>
+                  </a:lnTo>
+                  <a:lnTo>
+                    <a:pt x="4626391" y="2998445"/>
+                  </a:lnTo>
+                  <a:lnTo>
+                    <a:pt x="4703024" y="3007284"/>
+                  </a:lnTo>
+                  <a:lnTo>
+                    <a:pt x="4779657" y="3015963"/>
+                  </a:lnTo>
+                  <a:lnTo>
+                    <a:pt x="4856289" y="3024483"/>
+                  </a:lnTo>
+                  <a:lnTo>
+                    <a:pt x="4932922" y="3032849"/>
+                  </a:lnTo>
+                  <a:lnTo>
+                    <a:pt x="5009554" y="3041062"/>
+                  </a:lnTo>
+                  <a:lnTo>
+                    <a:pt x="5086187" y="3049125"/>
+                  </a:lnTo>
+                  <a:lnTo>
+                    <a:pt x="5162819" y="3057042"/>
+                  </a:lnTo>
+                  <a:lnTo>
+                    <a:pt x="5239452" y="3064814"/>
+                  </a:lnTo>
+                  <a:lnTo>
+                    <a:pt x="5316084" y="3072445"/>
+                  </a:lnTo>
+                  <a:lnTo>
+                    <a:pt x="5392717" y="3079936"/>
+                  </a:lnTo>
+                  <a:lnTo>
+                    <a:pt x="5469349" y="3087291"/>
+                  </a:lnTo>
+                  <a:lnTo>
+                    <a:pt x="5545982" y="3094513"/>
+                  </a:lnTo>
+                  <a:lnTo>
+                    <a:pt x="5622615" y="3101603"/>
+                  </a:lnTo>
+                  <a:lnTo>
+                    <a:pt x="5699247" y="3108563"/>
+                  </a:lnTo>
+                  <a:lnTo>
+                    <a:pt x="5775880" y="3115397"/>
+                  </a:lnTo>
+                  <a:lnTo>
+                    <a:pt x="5852512" y="3122106"/>
+                  </a:lnTo>
+                  <a:lnTo>
+                    <a:pt x="5929145" y="3128693"/>
+                  </a:lnTo>
+                  <a:lnTo>
+                    <a:pt x="6005777" y="3135161"/>
+                  </a:lnTo>
+                  <a:lnTo>
+                    <a:pt x="6082410" y="3141510"/>
+                  </a:lnTo>
+                  <a:lnTo>
+                    <a:pt x="6159042" y="3147744"/>
+                  </a:lnTo>
+                  <a:lnTo>
+                    <a:pt x="6235675" y="3153864"/>
+                  </a:lnTo>
+                  <a:lnTo>
+                    <a:pt x="6312308" y="3159873"/>
+                  </a:lnTo>
+                  <a:lnTo>
+                    <a:pt x="6388940" y="3165772"/>
                   </a:lnTo>
                 </a:path>
               </a:pathLst>
@@ -3862,303 +3862,303 @@
           </p:nvSpPr>
           <p:spPr>
             <a:xfrm>
-              <a:off x="817517" y="3580032"/>
-              <a:ext cx="7403783" cy="1890099"/>
+              <a:off x="817517" y="3679128"/>
+              <a:ext cx="7403783" cy="1802701"/>
             </a:xfrm>
             <a:custGeom>
               <a:avLst/>
               <a:pathLst>
-                <a:path w="7403783" h="1890099">
+                <a:path w="7403783" h="1802701">
                   <a:moveTo>
-                    <a:pt x="7403783" y="1890099"/>
+                    <a:pt x="7403783" y="1802701"/>
                   </a:moveTo>
                   <a:lnTo>
-                    <a:pt x="7327150" y="1886379"/>
-                  </a:lnTo>
-                  <a:lnTo>
-                    <a:pt x="7250518" y="1882484"/>
-                  </a:lnTo>
-                  <a:lnTo>
-                    <a:pt x="7173885" y="1878406"/>
-                  </a:lnTo>
-                  <a:lnTo>
-                    <a:pt x="7097253" y="1874136"/>
-                  </a:lnTo>
-                  <a:lnTo>
-                    <a:pt x="7020620" y="1869665"/>
-                  </a:lnTo>
-                  <a:lnTo>
-                    <a:pt x="6943987" y="1864984"/>
-                  </a:lnTo>
-                  <a:lnTo>
-                    <a:pt x="6867355" y="1860082"/>
-                  </a:lnTo>
-                  <a:lnTo>
-                    <a:pt x="6790722" y="1854950"/>
-                  </a:lnTo>
-                  <a:lnTo>
-                    <a:pt x="6714090" y="1849577"/>
-                  </a:lnTo>
-                  <a:lnTo>
-                    <a:pt x="6637457" y="1843951"/>
-                  </a:lnTo>
-                  <a:lnTo>
-                    <a:pt x="6560825" y="1838060"/>
-                  </a:lnTo>
-                  <a:lnTo>
-                    <a:pt x="6484192" y="1831892"/>
-                  </a:lnTo>
-                  <a:lnTo>
-                    <a:pt x="6407560" y="1825434"/>
-                  </a:lnTo>
-                  <a:lnTo>
-                    <a:pt x="6330927" y="1818672"/>
-                  </a:lnTo>
-                  <a:lnTo>
-                    <a:pt x="6254294" y="1811591"/>
-                  </a:lnTo>
-                  <a:lnTo>
-                    <a:pt x="6177662" y="1804178"/>
-                  </a:lnTo>
-                  <a:lnTo>
-                    <a:pt x="6101029" y="1796416"/>
-                  </a:lnTo>
-                  <a:lnTo>
-                    <a:pt x="6024397" y="1788289"/>
-                  </a:lnTo>
-                  <a:lnTo>
-                    <a:pt x="5947764" y="1779780"/>
-                  </a:lnTo>
-                  <a:lnTo>
-                    <a:pt x="5871132" y="1770870"/>
-                  </a:lnTo>
-                  <a:lnTo>
-                    <a:pt x="5794499" y="1761542"/>
-                  </a:lnTo>
-                  <a:lnTo>
-                    <a:pt x="5717867" y="1751774"/>
-                  </a:lnTo>
-                  <a:lnTo>
-                    <a:pt x="5641234" y="1741547"/>
-                  </a:lnTo>
-                  <a:lnTo>
-                    <a:pt x="5564602" y="1730839"/>
-                  </a:lnTo>
-                  <a:lnTo>
-                    <a:pt x="5487969" y="1719627"/>
-                  </a:lnTo>
-                  <a:lnTo>
-                    <a:pt x="5411336" y="1707887"/>
-                  </a:lnTo>
-                  <a:lnTo>
-                    <a:pt x="5334704" y="1695596"/>
-                  </a:lnTo>
-                  <a:lnTo>
-                    <a:pt x="5258071" y="1682726"/>
-                  </a:lnTo>
-                  <a:lnTo>
-                    <a:pt x="5181439" y="1669250"/>
-                  </a:lnTo>
-                  <a:lnTo>
-                    <a:pt x="5104806" y="1655141"/>
-                  </a:lnTo>
-                  <a:lnTo>
-                    <a:pt x="5028174" y="1640368"/>
-                  </a:lnTo>
-                  <a:lnTo>
-                    <a:pt x="4951541" y="1624900"/>
-                  </a:lnTo>
-                  <a:lnTo>
-                    <a:pt x="4874909" y="1608704"/>
-                  </a:lnTo>
-                  <a:lnTo>
-                    <a:pt x="4798276" y="1591747"/>
-                  </a:lnTo>
-                  <a:lnTo>
-                    <a:pt x="4721644" y="1573992"/>
-                  </a:lnTo>
-                  <a:lnTo>
-                    <a:pt x="4645011" y="1555401"/>
-                  </a:lnTo>
-                  <a:lnTo>
-                    <a:pt x="4568378" y="1535936"/>
-                  </a:lnTo>
-                  <a:lnTo>
-                    <a:pt x="4491746" y="1515555"/>
-                  </a:lnTo>
-                  <a:lnTo>
-                    <a:pt x="4415113" y="1494216"/>
-                  </a:lnTo>
-                  <a:lnTo>
-                    <a:pt x="4338481" y="1471872"/>
-                  </a:lnTo>
-                  <a:lnTo>
-                    <a:pt x="4261848" y="1448478"/>
-                  </a:lnTo>
-                  <a:lnTo>
-                    <a:pt x="4185216" y="1423983"/>
-                  </a:lnTo>
-                  <a:lnTo>
-                    <a:pt x="4108583" y="1398336"/>
-                  </a:lnTo>
-                  <a:lnTo>
-                    <a:pt x="4031951" y="1371482"/>
-                  </a:lnTo>
-                  <a:lnTo>
-                    <a:pt x="3955318" y="1343365"/>
-                  </a:lnTo>
-                  <a:lnTo>
-                    <a:pt x="3878685" y="1313925"/>
-                  </a:lnTo>
-                  <a:lnTo>
-                    <a:pt x="3802053" y="1283100"/>
-                  </a:lnTo>
-                  <a:lnTo>
-                    <a:pt x="3725420" y="1250825"/>
-                  </a:lnTo>
-                  <a:lnTo>
-                    <a:pt x="3648788" y="1217032"/>
-                  </a:lnTo>
-                  <a:lnTo>
-                    <a:pt x="3572155" y="1181649"/>
-                  </a:lnTo>
-                  <a:lnTo>
-                    <a:pt x="3495523" y="1144602"/>
-                  </a:lnTo>
-                  <a:lnTo>
-                    <a:pt x="3418890" y="1105811"/>
-                  </a:lnTo>
-                  <a:lnTo>
-                    <a:pt x="3342258" y="1085940"/>
-                  </a:lnTo>
-                  <a:lnTo>
-                    <a:pt x="3265625" y="1069554"/>
-                  </a:lnTo>
-                  <a:lnTo>
-                    <a:pt x="3188993" y="1052863"/>
-                  </a:lnTo>
-                  <a:lnTo>
-                    <a:pt x="3112360" y="1035864"/>
-                  </a:lnTo>
-                  <a:lnTo>
-                    <a:pt x="3035727" y="1018548"/>
-                  </a:lnTo>
-                  <a:lnTo>
-                    <a:pt x="2959095" y="1000912"/>
-                  </a:lnTo>
-                  <a:lnTo>
-                    <a:pt x="2882462" y="982948"/>
-                  </a:lnTo>
-                  <a:lnTo>
-                    <a:pt x="2805830" y="964651"/>
-                  </a:lnTo>
-                  <a:lnTo>
-                    <a:pt x="2729197" y="946014"/>
-                  </a:lnTo>
-                  <a:lnTo>
-                    <a:pt x="2652565" y="927032"/>
-                  </a:lnTo>
-                  <a:lnTo>
-                    <a:pt x="2575932" y="907698"/>
-                  </a:lnTo>
-                  <a:lnTo>
-                    <a:pt x="2499300" y="888004"/>
-                  </a:lnTo>
-                  <a:lnTo>
-                    <a:pt x="2422667" y="867946"/>
-                  </a:lnTo>
-                  <a:lnTo>
-                    <a:pt x="2346034" y="847515"/>
-                  </a:lnTo>
-                  <a:lnTo>
-                    <a:pt x="2269402" y="826706"/>
-                  </a:lnTo>
-                  <a:lnTo>
-                    <a:pt x="2192769" y="805510"/>
-                  </a:lnTo>
-                  <a:lnTo>
-                    <a:pt x="2116137" y="783921"/>
-                  </a:lnTo>
-                  <a:lnTo>
-                    <a:pt x="2039504" y="761931"/>
-                  </a:lnTo>
-                  <a:lnTo>
-                    <a:pt x="1962872" y="739534"/>
-                  </a:lnTo>
-                  <a:lnTo>
-                    <a:pt x="1886239" y="716721"/>
-                  </a:lnTo>
-                  <a:lnTo>
-                    <a:pt x="1809607" y="693485"/>
-                  </a:lnTo>
-                  <a:lnTo>
-                    <a:pt x="1732974" y="669817"/>
-                  </a:lnTo>
-                  <a:lnTo>
-                    <a:pt x="1656342" y="645711"/>
-                  </a:lnTo>
-                  <a:lnTo>
-                    <a:pt x="1579709" y="621157"/>
-                  </a:lnTo>
-                  <a:lnTo>
-                    <a:pt x="1503076" y="596148"/>
-                  </a:lnTo>
-                  <a:lnTo>
-                    <a:pt x="1426444" y="570675"/>
-                  </a:lnTo>
-                  <a:lnTo>
-                    <a:pt x="1349811" y="544729"/>
-                  </a:lnTo>
-                  <a:lnTo>
-                    <a:pt x="1273179" y="518302"/>
-                  </a:lnTo>
-                  <a:lnTo>
-                    <a:pt x="1196546" y="491385"/>
-                  </a:lnTo>
-                  <a:lnTo>
-                    <a:pt x="1119914" y="463968"/>
-                  </a:lnTo>
-                  <a:lnTo>
-                    <a:pt x="1043281" y="436042"/>
-                  </a:lnTo>
-                  <a:lnTo>
-                    <a:pt x="966649" y="407599"/>
-                  </a:lnTo>
-                  <a:lnTo>
-                    <a:pt x="890016" y="378628"/>
-                  </a:lnTo>
-                  <a:lnTo>
-                    <a:pt x="813384" y="349119"/>
-                  </a:lnTo>
-                  <a:lnTo>
-                    <a:pt x="736751" y="319063"/>
-                  </a:lnTo>
-                  <a:lnTo>
-                    <a:pt x="660118" y="288449"/>
-                  </a:lnTo>
-                  <a:lnTo>
-                    <a:pt x="583486" y="257267"/>
-                  </a:lnTo>
-                  <a:lnTo>
-                    <a:pt x="506853" y="225507"/>
-                  </a:lnTo>
-                  <a:lnTo>
-                    <a:pt x="430221" y="193157"/>
-                  </a:lnTo>
-                  <a:lnTo>
-                    <a:pt x="353588" y="160207"/>
-                  </a:lnTo>
-                  <a:lnTo>
-                    <a:pt x="276956" y="126646"/>
-                  </a:lnTo>
-                  <a:lnTo>
-                    <a:pt x="200323" y="92463"/>
-                  </a:lnTo>
-                  <a:lnTo>
-                    <a:pt x="123691" y="57645"/>
-                  </a:lnTo>
-                  <a:lnTo>
-                    <a:pt x="47058" y="22181"/>
+                    <a:pt x="7327150" y="1799153"/>
+                  </a:lnTo>
+                  <a:lnTo>
+                    <a:pt x="7250518" y="1795439"/>
+                  </a:lnTo>
+                  <a:lnTo>
+                    <a:pt x="7173885" y="1791549"/>
+                  </a:lnTo>
+                  <a:lnTo>
+                    <a:pt x="7097253" y="1787476"/>
+                  </a:lnTo>
+                  <a:lnTo>
+                    <a:pt x="7020620" y="1783212"/>
+                  </a:lnTo>
+                  <a:lnTo>
+                    <a:pt x="6943987" y="1778748"/>
+                  </a:lnTo>
+                  <a:lnTo>
+                    <a:pt x="6867355" y="1774073"/>
+                  </a:lnTo>
+                  <a:lnTo>
+                    <a:pt x="6790722" y="1769178"/>
+                  </a:lnTo>
+                  <a:lnTo>
+                    <a:pt x="6714090" y="1764053"/>
+                  </a:lnTo>
+                  <a:lnTo>
+                    <a:pt x="6637457" y="1758687"/>
+                  </a:lnTo>
+                  <a:lnTo>
+                    <a:pt x="6560825" y="1753068"/>
+                  </a:lnTo>
+                  <a:lnTo>
+                    <a:pt x="6484192" y="1747186"/>
+                  </a:lnTo>
+                  <a:lnTo>
+                    <a:pt x="6407560" y="1741026"/>
+                  </a:lnTo>
+                  <a:lnTo>
+                    <a:pt x="6330927" y="1734577"/>
+                  </a:lnTo>
+                  <a:lnTo>
+                    <a:pt x="6254294" y="1727824"/>
+                  </a:lnTo>
+                  <a:lnTo>
+                    <a:pt x="6177662" y="1720754"/>
+                  </a:lnTo>
+                  <a:lnTo>
+                    <a:pt x="6101029" y="1713351"/>
+                  </a:lnTo>
+                  <a:lnTo>
+                    <a:pt x="6024397" y="1705600"/>
+                  </a:lnTo>
+                  <a:lnTo>
+                    <a:pt x="5947764" y="1697484"/>
+                  </a:lnTo>
+                  <a:lnTo>
+                    <a:pt x="5871132" y="1688986"/>
+                  </a:lnTo>
+                  <a:lnTo>
+                    <a:pt x="5794499" y="1680089"/>
+                  </a:lnTo>
+                  <a:lnTo>
+                    <a:pt x="5717867" y="1670773"/>
+                  </a:lnTo>
+                  <a:lnTo>
+                    <a:pt x="5641234" y="1661018"/>
+                  </a:lnTo>
+                  <a:lnTo>
+                    <a:pt x="5564602" y="1650805"/>
+                  </a:lnTo>
+                  <a:lnTo>
+                    <a:pt x="5487969" y="1640112"/>
+                  </a:lnTo>
+                  <a:lnTo>
+                    <a:pt x="5411336" y="1628915"/>
+                  </a:lnTo>
+                  <a:lnTo>
+                    <a:pt x="5334704" y="1617192"/>
+                  </a:lnTo>
+                  <a:lnTo>
+                    <a:pt x="5258071" y="1604917"/>
+                  </a:lnTo>
+                  <a:lnTo>
+                    <a:pt x="5181439" y="1592065"/>
+                  </a:lnTo>
+                  <a:lnTo>
+                    <a:pt x="5104806" y="1578608"/>
+                  </a:lnTo>
+                  <a:lnTo>
+                    <a:pt x="5028174" y="1564518"/>
+                  </a:lnTo>
+                  <a:lnTo>
+                    <a:pt x="4951541" y="1549765"/>
+                  </a:lnTo>
+                  <a:lnTo>
+                    <a:pt x="4874909" y="1534318"/>
+                  </a:lnTo>
+                  <a:lnTo>
+                    <a:pt x="4798276" y="1518145"/>
+                  </a:lnTo>
+                  <a:lnTo>
+                    <a:pt x="4721644" y="1501211"/>
+                  </a:lnTo>
+                  <a:lnTo>
+                    <a:pt x="4645011" y="1483480"/>
+                  </a:lnTo>
+                  <a:lnTo>
+                    <a:pt x="4568378" y="1464915"/>
+                  </a:lnTo>
+                  <a:lnTo>
+                    <a:pt x="4491746" y="1445477"/>
+                  </a:lnTo>
+                  <a:lnTo>
+                    <a:pt x="4415113" y="1425124"/>
+                  </a:lnTo>
+                  <a:lnTo>
+                    <a:pt x="4338481" y="1403814"/>
+                  </a:lnTo>
+                  <a:lnTo>
+                    <a:pt x="4261848" y="1381501"/>
+                  </a:lnTo>
+                  <a:lnTo>
+                    <a:pt x="4185216" y="1358138"/>
+                  </a:lnTo>
+                  <a:lnTo>
+                    <a:pt x="4108583" y="1333677"/>
+                  </a:lnTo>
+                  <a:lnTo>
+                    <a:pt x="4031951" y="1308065"/>
+                  </a:lnTo>
+                  <a:lnTo>
+                    <a:pt x="3955318" y="1281248"/>
+                  </a:lnTo>
+                  <a:lnTo>
+                    <a:pt x="3878685" y="1253169"/>
+                  </a:lnTo>
+                  <a:lnTo>
+                    <a:pt x="3802053" y="1223770"/>
+                  </a:lnTo>
+                  <a:lnTo>
+                    <a:pt x="3725420" y="1192987"/>
+                  </a:lnTo>
+                  <a:lnTo>
+                    <a:pt x="3648788" y="1160757"/>
+                  </a:lnTo>
+                  <a:lnTo>
+                    <a:pt x="3572155" y="1127010"/>
+                  </a:lnTo>
+                  <a:lnTo>
+                    <a:pt x="3495523" y="1091676"/>
+                  </a:lnTo>
+                  <a:lnTo>
+                    <a:pt x="3418890" y="1054679"/>
+                  </a:lnTo>
+                  <a:lnTo>
+                    <a:pt x="3342258" y="1035727"/>
+                  </a:lnTo>
+                  <a:lnTo>
+                    <a:pt x="3265625" y="1020098"/>
+                  </a:lnTo>
+                  <a:lnTo>
+                    <a:pt x="3188993" y="1004179"/>
+                  </a:lnTo>
+                  <a:lnTo>
+                    <a:pt x="3112360" y="987966"/>
+                  </a:lnTo>
+                  <a:lnTo>
+                    <a:pt x="3035727" y="971451"/>
+                  </a:lnTo>
+                  <a:lnTo>
+                    <a:pt x="2959095" y="954630"/>
+                  </a:lnTo>
+                  <a:lnTo>
+                    <a:pt x="2882462" y="937497"/>
+                  </a:lnTo>
+                  <a:lnTo>
+                    <a:pt x="2805830" y="920046"/>
+                  </a:lnTo>
+                  <a:lnTo>
+                    <a:pt x="2729197" y="902271"/>
+                  </a:lnTo>
+                  <a:lnTo>
+                    <a:pt x="2652565" y="884166"/>
+                  </a:lnTo>
+                  <a:lnTo>
+                    <a:pt x="2575932" y="865726"/>
+                  </a:lnTo>
+                  <a:lnTo>
+                    <a:pt x="2499300" y="846943"/>
+                  </a:lnTo>
+                  <a:lnTo>
+                    <a:pt x="2422667" y="827812"/>
+                  </a:lnTo>
+                  <a:lnTo>
+                    <a:pt x="2346034" y="808327"/>
+                  </a:lnTo>
+                  <a:lnTo>
+                    <a:pt x="2269402" y="788479"/>
+                  </a:lnTo>
+                  <a:lnTo>
+                    <a:pt x="2192769" y="768263"/>
+                  </a:lnTo>
+                  <a:lnTo>
+                    <a:pt x="2116137" y="747673"/>
+                  </a:lnTo>
+                  <a:lnTo>
+                    <a:pt x="2039504" y="726700"/>
+                  </a:lnTo>
+                  <a:lnTo>
+                    <a:pt x="1962872" y="705338"/>
+                  </a:lnTo>
+                  <a:lnTo>
+                    <a:pt x="1886239" y="683580"/>
+                  </a:lnTo>
+                  <a:lnTo>
+                    <a:pt x="1809607" y="661418"/>
+                  </a:lnTo>
+                  <a:lnTo>
+                    <a:pt x="1732974" y="638845"/>
+                  </a:lnTo>
+                  <a:lnTo>
+                    <a:pt x="1656342" y="615854"/>
+                  </a:lnTo>
+                  <a:lnTo>
+                    <a:pt x="1579709" y="592435"/>
+                  </a:lnTo>
+                  <a:lnTo>
+                    <a:pt x="1503076" y="568582"/>
+                  </a:lnTo>
+                  <a:lnTo>
+                    <a:pt x="1426444" y="544287"/>
+                  </a:lnTo>
+                  <a:lnTo>
+                    <a:pt x="1349811" y="519541"/>
+                  </a:lnTo>
+                  <a:lnTo>
+                    <a:pt x="1273179" y="494336"/>
+                  </a:lnTo>
+                  <a:lnTo>
+                    <a:pt x="1196546" y="468663"/>
+                  </a:lnTo>
+                  <a:lnTo>
+                    <a:pt x="1119914" y="442514"/>
+                  </a:lnTo>
+                  <a:lnTo>
+                    <a:pt x="1043281" y="415880"/>
+                  </a:lnTo>
+                  <a:lnTo>
+                    <a:pt x="966649" y="388752"/>
+                  </a:lnTo>
+                  <a:lnTo>
+                    <a:pt x="890016" y="361120"/>
+                  </a:lnTo>
+                  <a:lnTo>
+                    <a:pt x="813384" y="332976"/>
+                  </a:lnTo>
+                  <a:lnTo>
+                    <a:pt x="736751" y="304309"/>
+                  </a:lnTo>
+                  <a:lnTo>
+                    <a:pt x="660118" y="275111"/>
+                  </a:lnTo>
+                  <a:lnTo>
+                    <a:pt x="583486" y="245371"/>
+                  </a:lnTo>
+                  <a:lnTo>
+                    <a:pt x="506853" y="215079"/>
+                  </a:lnTo>
+                  <a:lnTo>
+                    <a:pt x="430221" y="184226"/>
+                  </a:lnTo>
+                  <a:lnTo>
+                    <a:pt x="353588" y="152799"/>
+                  </a:lnTo>
+                  <a:lnTo>
+                    <a:pt x="276956" y="120790"/>
+                  </a:lnTo>
+                  <a:lnTo>
+                    <a:pt x="200323" y="88187"/>
+                  </a:lnTo>
+                  <a:lnTo>
+                    <a:pt x="123691" y="54979"/>
+                  </a:lnTo>
+                  <a:lnTo>
+                    <a:pt x="47058" y="21155"/>
                   </a:lnTo>
                   <a:lnTo>
                     <a:pt x="0" y="0"/>
@@ -4181,306 +4181,306 @@
           </p:nvSpPr>
           <p:spPr>
             <a:xfrm>
-              <a:off x="817517" y="1913150"/>
-              <a:ext cx="7403783" cy="3473690"/>
+              <a:off x="817517" y="2089322"/>
+              <a:ext cx="7403783" cy="3313067"/>
             </a:xfrm>
             <a:custGeom>
               <a:avLst/>
               <a:pathLst>
-                <a:path w="7403783" h="3473690">
+                <a:path w="7403783" h="3313067">
                   <a:moveTo>
                     <a:pt x="0" y="0"/>
                   </a:moveTo>
                   <a:lnTo>
-                    <a:pt x="47058" y="71575"/>
-                  </a:lnTo>
-                  <a:lnTo>
-                    <a:pt x="123691" y="184440"/>
-                  </a:lnTo>
-                  <a:lnTo>
-                    <a:pt x="200323" y="293733"/>
-                  </a:lnTo>
-                  <a:lnTo>
-                    <a:pt x="276956" y="399564"/>
-                  </a:lnTo>
-                  <a:lnTo>
-                    <a:pt x="353588" y="502044"/>
-                  </a:lnTo>
-                  <a:lnTo>
-                    <a:pt x="430221" y="601280"/>
-                  </a:lnTo>
-                  <a:lnTo>
-                    <a:pt x="506853" y="697373"/>
-                  </a:lnTo>
-                  <a:lnTo>
-                    <a:pt x="583486" y="790424"/>
-                  </a:lnTo>
-                  <a:lnTo>
-                    <a:pt x="660118" y="880528"/>
-                  </a:lnTo>
-                  <a:lnTo>
-                    <a:pt x="736751" y="967779"/>
-                  </a:lnTo>
-                  <a:lnTo>
-                    <a:pt x="813384" y="1052268"/>
-                  </a:lnTo>
-                  <a:lnTo>
-                    <a:pt x="890016" y="1134081"/>
-                  </a:lnTo>
-                  <a:lnTo>
-                    <a:pt x="966649" y="1213304"/>
-                  </a:lnTo>
-                  <a:lnTo>
-                    <a:pt x="1043281" y="1290018"/>
-                  </a:lnTo>
-                  <a:lnTo>
-                    <a:pt x="1119914" y="1364303"/>
-                  </a:lnTo>
-                  <a:lnTo>
-                    <a:pt x="1196546" y="1436236"/>
-                  </a:lnTo>
-                  <a:lnTo>
-                    <a:pt x="1273179" y="1505891"/>
-                  </a:lnTo>
-                  <a:lnTo>
-                    <a:pt x="1349811" y="1573341"/>
-                  </a:lnTo>
-                  <a:lnTo>
-                    <a:pt x="1426444" y="1638655"/>
-                  </a:lnTo>
-                  <a:lnTo>
-                    <a:pt x="1503076" y="1701900"/>
-                  </a:lnTo>
-                  <a:lnTo>
-                    <a:pt x="1579709" y="1763144"/>
-                  </a:lnTo>
-                  <a:lnTo>
-                    <a:pt x="1656342" y="1822448"/>
-                  </a:lnTo>
-                  <a:lnTo>
-                    <a:pt x="1732974" y="1879874"/>
-                  </a:lnTo>
-                  <a:lnTo>
-                    <a:pt x="1809607" y="1935482"/>
-                  </a:lnTo>
-                  <a:lnTo>
-                    <a:pt x="1886239" y="1989329"/>
-                  </a:lnTo>
-                  <a:lnTo>
-                    <a:pt x="1962872" y="2041471"/>
-                  </a:lnTo>
-                  <a:lnTo>
-                    <a:pt x="2039504" y="2091962"/>
-                  </a:lnTo>
-                  <a:lnTo>
-                    <a:pt x="2116137" y="2140854"/>
-                  </a:lnTo>
-                  <a:lnTo>
-                    <a:pt x="2192769" y="2188198"/>
-                  </a:lnTo>
-                  <a:lnTo>
-                    <a:pt x="2269402" y="2234043"/>
-                  </a:lnTo>
-                  <a:lnTo>
-                    <a:pt x="2346034" y="2278437"/>
-                  </a:lnTo>
-                  <a:lnTo>
-                    <a:pt x="2422667" y="2321424"/>
-                  </a:lnTo>
-                  <a:lnTo>
-                    <a:pt x="2499300" y="2363051"/>
-                  </a:lnTo>
-                  <a:lnTo>
-                    <a:pt x="2575932" y="2403359"/>
-                  </a:lnTo>
-                  <a:lnTo>
-                    <a:pt x="2652565" y="2442392"/>
-                  </a:lnTo>
-                  <a:lnTo>
-                    <a:pt x="2729197" y="2480188"/>
-                  </a:lnTo>
-                  <a:lnTo>
-                    <a:pt x="2805830" y="2516787"/>
-                  </a:lnTo>
-                  <a:lnTo>
-                    <a:pt x="2882462" y="2552228"/>
-                  </a:lnTo>
-                  <a:lnTo>
-                    <a:pt x="2959095" y="2586546"/>
-                  </a:lnTo>
-                  <a:lnTo>
-                    <a:pt x="3035727" y="2619778"/>
-                  </a:lnTo>
-                  <a:lnTo>
-                    <a:pt x="3112360" y="2651958"/>
-                  </a:lnTo>
-                  <a:lnTo>
-                    <a:pt x="3188993" y="2683118"/>
-                  </a:lnTo>
-                  <a:lnTo>
-                    <a:pt x="3265625" y="2713292"/>
-                  </a:lnTo>
-                  <a:lnTo>
-                    <a:pt x="3342258" y="2742511"/>
-                  </a:lnTo>
-                  <a:lnTo>
-                    <a:pt x="3418890" y="2770804"/>
-                  </a:lnTo>
-                  <a:lnTo>
-                    <a:pt x="3495523" y="2798201"/>
-                  </a:lnTo>
-                  <a:lnTo>
-                    <a:pt x="3572155" y="2824731"/>
-                  </a:lnTo>
-                  <a:lnTo>
-                    <a:pt x="3648788" y="2850421"/>
-                  </a:lnTo>
-                  <a:lnTo>
-                    <a:pt x="3725420" y="2875297"/>
-                  </a:lnTo>
-                  <a:lnTo>
-                    <a:pt x="3802053" y="2899386"/>
-                  </a:lnTo>
-                  <a:lnTo>
-                    <a:pt x="3878685" y="2922712"/>
-                  </a:lnTo>
-                  <a:lnTo>
-                    <a:pt x="3955318" y="2945299"/>
-                  </a:lnTo>
-                  <a:lnTo>
-                    <a:pt x="4031951" y="2967172"/>
-                  </a:lnTo>
-                  <a:lnTo>
-                    <a:pt x="4108583" y="2988351"/>
-                  </a:lnTo>
-                  <a:lnTo>
-                    <a:pt x="4185216" y="3008860"/>
-                  </a:lnTo>
-                  <a:lnTo>
-                    <a:pt x="4261848" y="3028720"/>
-                  </a:lnTo>
-                  <a:lnTo>
-                    <a:pt x="4338481" y="3047950"/>
-                  </a:lnTo>
-                  <a:lnTo>
-                    <a:pt x="4415113" y="3066572"/>
-                  </a:lnTo>
-                  <a:lnTo>
-                    <a:pt x="4491746" y="3084604"/>
-                  </a:lnTo>
-                  <a:lnTo>
-                    <a:pt x="4568378" y="3102066"/>
-                  </a:lnTo>
-                  <a:lnTo>
-                    <a:pt x="4645011" y="3118974"/>
-                  </a:lnTo>
-                  <a:lnTo>
-                    <a:pt x="4721644" y="3135347"/>
-                  </a:lnTo>
-                  <a:lnTo>
-                    <a:pt x="4798276" y="3151201"/>
-                  </a:lnTo>
-                  <a:lnTo>
-                    <a:pt x="4874909" y="3166554"/>
-                  </a:lnTo>
-                  <a:lnTo>
-                    <a:pt x="4951541" y="3181420"/>
-                  </a:lnTo>
-                  <a:lnTo>
-                    <a:pt x="5028174" y="3195816"/>
-                  </a:lnTo>
-                  <a:lnTo>
-                    <a:pt x="5104806" y="3209756"/>
-                  </a:lnTo>
-                  <a:lnTo>
-                    <a:pt x="5181439" y="3223254"/>
-                  </a:lnTo>
-                  <a:lnTo>
-                    <a:pt x="5258071" y="3236325"/>
-                  </a:lnTo>
-                  <a:lnTo>
-                    <a:pt x="5334704" y="3248982"/>
-                  </a:lnTo>
-                  <a:lnTo>
-                    <a:pt x="5411336" y="3261239"/>
-                  </a:lnTo>
-                  <a:lnTo>
-                    <a:pt x="5487969" y="3273107"/>
-                  </a:lnTo>
-                  <a:lnTo>
-                    <a:pt x="5564602" y="3284599"/>
-                  </a:lnTo>
-                  <a:lnTo>
-                    <a:pt x="5641234" y="3295728"/>
-                  </a:lnTo>
-                  <a:lnTo>
-                    <a:pt x="5717867" y="3306504"/>
-                  </a:lnTo>
-                  <a:lnTo>
-                    <a:pt x="5794499" y="3316939"/>
-                  </a:lnTo>
-                  <a:lnTo>
-                    <a:pt x="5871132" y="3327044"/>
-                  </a:lnTo>
-                  <a:lnTo>
-                    <a:pt x="5947764" y="3336828"/>
-                  </a:lnTo>
-                  <a:lnTo>
-                    <a:pt x="6024397" y="3346303"/>
-                  </a:lnTo>
-                  <a:lnTo>
-                    <a:pt x="6101029" y="3355478"/>
-                  </a:lnTo>
-                  <a:lnTo>
-                    <a:pt x="6177662" y="3364362"/>
-                  </a:lnTo>
-                  <a:lnTo>
-                    <a:pt x="6254294" y="3372965"/>
-                  </a:lnTo>
-                  <a:lnTo>
-                    <a:pt x="6330927" y="3381295"/>
-                  </a:lnTo>
-                  <a:lnTo>
-                    <a:pt x="6407560" y="3389362"/>
-                  </a:lnTo>
-                  <a:lnTo>
-                    <a:pt x="6484192" y="3397174"/>
-                  </a:lnTo>
-                  <a:lnTo>
-                    <a:pt x="6560825" y="3404738"/>
-                  </a:lnTo>
-                  <a:lnTo>
-                    <a:pt x="6637457" y="3412062"/>
-                  </a:lnTo>
-                  <a:lnTo>
-                    <a:pt x="6714090" y="3419155"/>
-                  </a:lnTo>
-                  <a:lnTo>
-                    <a:pt x="6790722" y="3426023"/>
-                  </a:lnTo>
-                  <a:lnTo>
-                    <a:pt x="6867355" y="3432673"/>
-                  </a:lnTo>
-                  <a:lnTo>
-                    <a:pt x="6943987" y="3439113"/>
-                  </a:lnTo>
-                  <a:lnTo>
-                    <a:pt x="7020620" y="3445349"/>
-                  </a:lnTo>
-                  <a:lnTo>
-                    <a:pt x="7097253" y="3451388"/>
-                  </a:lnTo>
-                  <a:lnTo>
-                    <a:pt x="7173885" y="3457235"/>
-                  </a:lnTo>
-                  <a:lnTo>
-                    <a:pt x="7250518" y="3462897"/>
-                  </a:lnTo>
-                  <a:lnTo>
-                    <a:pt x="7327150" y="3468380"/>
-                  </a:lnTo>
-                  <a:lnTo>
-                    <a:pt x="7403783" y="3473690"/>
+                    <a:pt x="47058" y="68265"/>
+                  </a:lnTo>
+                  <a:lnTo>
+                    <a:pt x="123691" y="175912"/>
+                  </a:lnTo>
+                  <a:lnTo>
+                    <a:pt x="200323" y="280150"/>
+                  </a:lnTo>
+                  <a:lnTo>
+                    <a:pt x="276956" y="381088"/>
+                  </a:lnTo>
+                  <a:lnTo>
+                    <a:pt x="353588" y="478830"/>
+                  </a:lnTo>
+                  <a:lnTo>
+                    <a:pt x="430221" y="573477"/>
+                  </a:lnTo>
+                  <a:lnTo>
+                    <a:pt x="506853" y="665127"/>
+                  </a:lnTo>
+                  <a:lnTo>
+                    <a:pt x="583486" y="753875"/>
+                  </a:lnTo>
+                  <a:lnTo>
+                    <a:pt x="660118" y="839813"/>
+                  </a:lnTo>
+                  <a:lnTo>
+                    <a:pt x="736751" y="923029"/>
+                  </a:lnTo>
+                  <a:lnTo>
+                    <a:pt x="813384" y="1003611"/>
+                  </a:lnTo>
+                  <a:lnTo>
+                    <a:pt x="890016" y="1081641"/>
+                  </a:lnTo>
+                  <a:lnTo>
+                    <a:pt x="966649" y="1157201"/>
+                  </a:lnTo>
+                  <a:lnTo>
+                    <a:pt x="1043281" y="1230368"/>
+                  </a:lnTo>
+                  <a:lnTo>
+                    <a:pt x="1119914" y="1301218"/>
+                  </a:lnTo>
+                  <a:lnTo>
+                    <a:pt x="1196546" y="1369825"/>
+                  </a:lnTo>
+                  <a:lnTo>
+                    <a:pt x="1273179" y="1436259"/>
+                  </a:lnTo>
+                  <a:lnTo>
+                    <a:pt x="1349811" y="1500590"/>
+                  </a:lnTo>
+                  <a:lnTo>
+                    <a:pt x="1426444" y="1562884"/>
+                  </a:lnTo>
+                  <a:lnTo>
+                    <a:pt x="1503076" y="1623205"/>
+                  </a:lnTo>
+                  <a:lnTo>
+                    <a:pt x="1579709" y="1681616"/>
+                  </a:lnTo>
+                  <a:lnTo>
+                    <a:pt x="1656342" y="1738178"/>
+                  </a:lnTo>
+                  <a:lnTo>
+                    <a:pt x="1732974" y="1792949"/>
+                  </a:lnTo>
+                  <a:lnTo>
+                    <a:pt x="1809607" y="1845986"/>
+                  </a:lnTo>
+                  <a:lnTo>
+                    <a:pt x="1886239" y="1897343"/>
+                  </a:lnTo>
+                  <a:lnTo>
+                    <a:pt x="1962872" y="1947074"/>
+                  </a:lnTo>
+                  <a:lnTo>
+                    <a:pt x="2039504" y="1995230"/>
+                  </a:lnTo>
+                  <a:lnTo>
+                    <a:pt x="2116137" y="2041862"/>
+                  </a:lnTo>
+                  <a:lnTo>
+                    <a:pt x="2192769" y="2087017"/>
+                  </a:lnTo>
+                  <a:lnTo>
+                    <a:pt x="2269402" y="2130742"/>
+                  </a:lnTo>
+                  <a:lnTo>
+                    <a:pt x="2346034" y="2173083"/>
+                  </a:lnTo>
+                  <a:lnTo>
+                    <a:pt x="2422667" y="2214083"/>
+                  </a:lnTo>
+                  <a:lnTo>
+                    <a:pt x="2499300" y="2253784"/>
+                  </a:lnTo>
+                  <a:lnTo>
+                    <a:pt x="2575932" y="2292229"/>
+                  </a:lnTo>
+                  <a:lnTo>
+                    <a:pt x="2652565" y="2329456"/>
+                  </a:lnTo>
+                  <a:lnTo>
+                    <a:pt x="2729197" y="2365505"/>
+                  </a:lnTo>
+                  <a:lnTo>
+                    <a:pt x="2805830" y="2400412"/>
+                  </a:lnTo>
+                  <a:lnTo>
+                    <a:pt x="2882462" y="2434214"/>
+                  </a:lnTo>
+                  <a:lnTo>
+                    <a:pt x="2959095" y="2466945"/>
+                  </a:lnTo>
+                  <a:lnTo>
+                    <a:pt x="3035727" y="2498641"/>
+                  </a:lnTo>
+                  <a:lnTo>
+                    <a:pt x="3112360" y="2529332"/>
+                  </a:lnTo>
+                  <a:lnTo>
+                    <a:pt x="3188993" y="2559052"/>
+                  </a:lnTo>
+                  <a:lnTo>
+                    <a:pt x="3265625" y="2587830"/>
+                  </a:lnTo>
+                  <a:lnTo>
+                    <a:pt x="3342258" y="2615698"/>
+                  </a:lnTo>
+                  <a:lnTo>
+                    <a:pt x="3418890" y="2642683"/>
+                  </a:lnTo>
+                  <a:lnTo>
+                    <a:pt x="3495523" y="2668813"/>
+                  </a:lnTo>
+                  <a:lnTo>
+                    <a:pt x="3572155" y="2694117"/>
+                  </a:lnTo>
+                  <a:lnTo>
+                    <a:pt x="3648788" y="2718619"/>
+                  </a:lnTo>
+                  <a:lnTo>
+                    <a:pt x="3725420" y="2742345"/>
+                  </a:lnTo>
+                  <a:lnTo>
+                    <a:pt x="3802053" y="2765319"/>
+                  </a:lnTo>
+                  <a:lnTo>
+                    <a:pt x="3878685" y="2787567"/>
+                  </a:lnTo>
+                  <a:lnTo>
+                    <a:pt x="3955318" y="2809110"/>
+                  </a:lnTo>
+                  <a:lnTo>
+                    <a:pt x="4031951" y="2829971"/>
+                  </a:lnTo>
+                  <a:lnTo>
+                    <a:pt x="4108583" y="2850171"/>
+                  </a:lnTo>
+                  <a:lnTo>
+                    <a:pt x="4185216" y="2869732"/>
+                  </a:lnTo>
+                  <a:lnTo>
+                    <a:pt x="4261848" y="2888673"/>
+                  </a:lnTo>
+                  <a:lnTo>
+                    <a:pt x="4338481" y="2907014"/>
+                  </a:lnTo>
+                  <a:lnTo>
+                    <a:pt x="4415113" y="2924775"/>
+                  </a:lnTo>
+                  <a:lnTo>
+                    <a:pt x="4491746" y="2941973"/>
+                  </a:lnTo>
+                  <a:lnTo>
+                    <a:pt x="4568378" y="2958627"/>
+                  </a:lnTo>
+                  <a:lnTo>
+                    <a:pt x="4645011" y="2974754"/>
+                  </a:lnTo>
+                  <a:lnTo>
+                    <a:pt x="4721644" y="2990370"/>
+                  </a:lnTo>
+                  <a:lnTo>
+                    <a:pt x="4798276" y="3005491"/>
+                  </a:lnTo>
+                  <a:lnTo>
+                    <a:pt x="4874909" y="3020134"/>
+                  </a:lnTo>
+                  <a:lnTo>
+                    <a:pt x="4951541" y="3034313"/>
+                  </a:lnTo>
+                  <a:lnTo>
+                    <a:pt x="5028174" y="3048043"/>
+                  </a:lnTo>
+                  <a:lnTo>
+                    <a:pt x="5104806" y="3061338"/>
+                  </a:lnTo>
+                  <a:lnTo>
+                    <a:pt x="5181439" y="3074212"/>
+                  </a:lnTo>
+                  <a:lnTo>
+                    <a:pt x="5258071" y="3086679"/>
+                  </a:lnTo>
+                  <a:lnTo>
+                    <a:pt x="5334704" y="3098750"/>
+                  </a:lnTo>
+                  <a:lnTo>
+                    <a:pt x="5411336" y="3110440"/>
+                  </a:lnTo>
+                  <a:lnTo>
+                    <a:pt x="5487969" y="3121760"/>
+                  </a:lnTo>
+                  <a:lnTo>
+                    <a:pt x="5564602" y="3132721"/>
+                  </a:lnTo>
+                  <a:lnTo>
+                    <a:pt x="5641234" y="3143335"/>
+                  </a:lnTo>
+                  <a:lnTo>
+                    <a:pt x="5717867" y="3153612"/>
+                  </a:lnTo>
+                  <a:lnTo>
+                    <a:pt x="5794499" y="3163565"/>
+                  </a:lnTo>
+                  <a:lnTo>
+                    <a:pt x="5871132" y="3173202"/>
+                  </a:lnTo>
+                  <a:lnTo>
+                    <a:pt x="5947764" y="3182534"/>
+                  </a:lnTo>
+                  <a:lnTo>
+                    <a:pt x="6024397" y="3191571"/>
+                  </a:lnTo>
+                  <a:lnTo>
+                    <a:pt x="6101029" y="3200322"/>
+                  </a:lnTo>
+                  <a:lnTo>
+                    <a:pt x="6177662" y="3208795"/>
+                  </a:lnTo>
+                  <a:lnTo>
+                    <a:pt x="6254294" y="3217000"/>
+                  </a:lnTo>
+                  <a:lnTo>
+                    <a:pt x="6330927" y="3224946"/>
+                  </a:lnTo>
+                  <a:lnTo>
+                    <a:pt x="6407560" y="3232639"/>
+                  </a:lnTo>
+                  <a:lnTo>
+                    <a:pt x="6484192" y="3240090"/>
+                  </a:lnTo>
+                  <a:lnTo>
+                    <a:pt x="6560825" y="3247304"/>
+                  </a:lnTo>
+                  <a:lnTo>
+                    <a:pt x="6637457" y="3254290"/>
+                  </a:lnTo>
+                  <a:lnTo>
+                    <a:pt x="6714090" y="3261054"/>
+                  </a:lnTo>
+                  <a:lnTo>
+                    <a:pt x="6790722" y="3267605"/>
+                  </a:lnTo>
+                  <a:lnTo>
+                    <a:pt x="6867355" y="3273948"/>
+                  </a:lnTo>
+                  <a:lnTo>
+                    <a:pt x="6943987" y="3280090"/>
+                  </a:lnTo>
+                  <a:lnTo>
+                    <a:pt x="7020620" y="3286037"/>
+                  </a:lnTo>
+                  <a:lnTo>
+                    <a:pt x="7097253" y="3291797"/>
+                  </a:lnTo>
+                  <a:lnTo>
+                    <a:pt x="7173885" y="3297374"/>
+                  </a:lnTo>
+                  <a:lnTo>
+                    <a:pt x="7250518" y="3302774"/>
+                  </a:lnTo>
+                  <a:lnTo>
+                    <a:pt x="7327150" y="3308004"/>
+                  </a:lnTo>
+                  <a:lnTo>
+                    <a:pt x="7403783" y="3313067"/>
                   </a:lnTo>
                 </a:path>
               </a:pathLst>
@@ -4509,7 +4509,7 @@
           </p:nvSpPr>
           <p:spPr>
             <a:xfrm>
-              <a:off x="817517" y="4679530"/>
+              <a:off x="817517" y="4727786"/>
               <a:ext cx="7799693" cy="0"/>
             </a:xfrm>
             <a:custGeom>
@@ -4552,15 +4552,15 @@
           </p:nvSpPr>
           <p:spPr>
             <a:xfrm>
-              <a:off x="4224261" y="1896563"/>
-              <a:ext cx="0" cy="3826579"/>
+              <a:off x="4224261" y="2073503"/>
+              <a:ext cx="0" cy="3649639"/>
             </a:xfrm>
             <a:custGeom>
               <a:avLst/>
               <a:pathLst>
-                <a:path w="0" h="3826579">
+                <a:path w="0" h="3649639">
                   <a:moveTo>
-                    <a:pt x="0" y="3826579"/>
+                    <a:pt x="0" y="3649639"/>
                   </a:moveTo>
                   <a:lnTo>
                     <a:pt x="0" y="0"/>
@@ -4595,7 +4595,7 @@
           </p:nvSpPr>
           <p:spPr>
             <a:xfrm>
-              <a:off x="692708" y="5509156"/>
+              <a:off x="692708" y="5517199"/>
               <a:ext cx="62179" cy="80101"/>
             </a:xfrm>
             <a:prstGeom prst="rect">
@@ -4641,7 +4641,7 @@
           </p:nvSpPr>
           <p:spPr>
             <a:xfrm>
-              <a:off x="692708" y="4639479"/>
+              <a:off x="692708" y="4687735"/>
               <a:ext cx="62179" cy="80101"/>
             </a:xfrm>
             <a:prstGeom prst="rect">
@@ -4687,7 +4687,7 @@
           </p:nvSpPr>
           <p:spPr>
             <a:xfrm>
-              <a:off x="692708" y="3769802"/>
+              <a:off x="692708" y="3858272"/>
               <a:ext cx="62179" cy="80101"/>
             </a:xfrm>
             <a:prstGeom prst="rect">
@@ -4733,7 +4733,7 @@
           </p:nvSpPr>
           <p:spPr>
             <a:xfrm>
-              <a:off x="692708" y="2900125"/>
+              <a:off x="692708" y="3028808"/>
               <a:ext cx="62179" cy="80101"/>
             </a:xfrm>
             <a:prstGeom prst="rect">
@@ -4779,7 +4779,7 @@
           </p:nvSpPr>
           <p:spPr>
             <a:xfrm>
-              <a:off x="692708" y="2030448"/>
+              <a:off x="692708" y="2199345"/>
               <a:ext cx="62179" cy="80101"/>
             </a:xfrm>
             <a:prstGeom prst="rect">
@@ -5055,7 +5055,7 @@
           </p:nvSpPr>
           <p:spPr>
             <a:xfrm rot="-5400000">
-              <a:off x="68446" y="3759743"/>
+              <a:off x="68446" y="3848213"/>
               <a:ext cx="1016904" cy="100218"/>
             </a:xfrm>
             <a:prstGeom prst="rect">
@@ -5096,6 +5096,52 @@
         <p:sp>
           <p:nvSpPr>
             <p:cNvPr id="38" name="tx38"/>
+            <p:cNvSpPr/>
+            <p:nvPr/>
+          </p:nvSpPr>
+          <p:spPr>
+            <a:xfrm>
+              <a:off x="817517" y="1896563"/>
+              <a:ext cx="5626211" cy="82021"/>
+            </a:xfrm>
+            <a:prstGeom prst="rect">
+              <a:avLst/>
+            </a:prstGeom>
+            <a:noFill/>
+          </p:spPr>
+          <p:txBody>
+            <a:bodyPr lIns="0" rIns="0" tIns="0" bIns="0" anchorCtr="1" anchor="ctr" wrap="none"/>
+            <a:lstStyle/>
+            <a:p>
+              <a:pPr algn="l" marL="0" marR="0" indent="0">
+                <a:lnSpc>
+                  <a:spcPts val="900"/>
+                </a:lnSpc>
+                <a:spcBef>
+                  <a:spcPts val="0"/>
+                </a:spcBef>
+                <a:spcAft>
+                  <a:spcPts val="0"/>
+                </a:spcAft>
+              </a:pPr>
+              <a:r>
+                <a:rPr sz="900">
+                  <a:solidFill>
+                    <a:srgbClr val="404040">
+                      <a:alpha val="100000"/>
+                    </a:srgbClr>
+                  </a:solidFill>
+                  <a:latin typeface="Helvetica"/>
+                  <a:cs typeface="Helvetica"/>
+                </a:rPr>
+                <a:t>subHR per 0.1 ratio decline: 1.45 (1.24-1.70)  |  per IQR decline (Δ = 0.30): 3.04 (1.89-4.91)  |  IQR: [0.85, 1.15]</a:t>
+              </a:r>
+            </a:p>
+          </p:txBody>
+        </p:sp>
+        <p:sp>
+          <p:nvSpPr>
+            <p:cNvPr id="39" name="tx39"/>
             <p:cNvSpPr/>
             <p:nvPr/>
           </p:nvSpPr>

--- a/docs/pptx/carbo/jx-carbo-linsubhr-ratio-sideeffect.pptx
+++ b/docs/pptx/carbo/jx-carbo-linsubhr-ratio-sideeffect.pptx
@@ -5102,7 +5102,7 @@
           <p:spPr>
             <a:xfrm>
               <a:off x="817517" y="1896563"/>
-              <a:ext cx="5626211" cy="82021"/>
+              <a:ext cx="6236116" cy="82021"/>
             </a:xfrm>
             <a:prstGeom prst="rect">
               <a:avLst/>
@@ -5134,7 +5134,7 @@
                   <a:latin typeface="Helvetica"/>
                   <a:cs typeface="Helvetica"/>
                 </a:rPr>
-                <a:t>subHR per 0.1 ratio decline: 1.45 (1.24-1.70)  |  per IQR decline (Δ = 0.30): 3.04 (1.89-4.91)  |  IQR: [0.85, 1.15]</a:t>
+                <a:t>subHR per 0.1 ratio decline: 1.45 (1.24-1.70), p = &lt;0.001  |  per IQR decline (Δ = 0.30): 3.04 (1.89-4.91)  |  IQR: [0.85, 1.15]</a:t>
               </a:r>
             </a:p>
           </p:txBody>

--- a/docs/pptx/carbo/jx-carbo-linsubhr-ratio-sideeffect.pptx
+++ b/docs/pptx/carbo/jx-carbo-linsubhr-ratio-sideeffect.pptx
@@ -5102,7 +5102,7 @@
           <p:spPr>
             <a:xfrm>
               <a:off x="817517" y="1896563"/>
-              <a:ext cx="6236116" cy="82021"/>
+              <a:ext cx="6899879" cy="82021"/>
             </a:xfrm>
             <a:prstGeom prst="rect">
               <a:avLst/>
@@ -5134,7 +5134,7 @@
                   <a:latin typeface="Helvetica"/>
                   <a:cs typeface="Helvetica"/>
                 </a:rPr>
-                <a:t>subHR per 0.1 ratio decline: 1.45 (1.24-1.70), p = &lt;0.001  |  per IQR decline (Δ = 0.30): 3.04 (1.89-4.91)  |  IQR: [0.85, 1.15]</a:t>
+                <a:t>subHR per 0.1 ratio decline: 1.45 (1.24-1.70), p_Bonf = &lt;0.001 (n = 6)  |  per IQR decline (Δ = 0.30): 3.04 (1.89-4.91)  |  IQR: [0.85, 1.15]</a:t>
               </a:r>
             </a:p>
           </p:txBody>

--- a/docs/pptx/carbo/jx-carbo-linsubhr-ratio-sideeffect.pptx
+++ b/docs/pptx/carbo/jx-carbo-linsubhr-ratio-sideeffect.pptx
@@ -2443,7 +2443,7 @@
           </p:nvSpPr>
           <p:spPr>
             <a:xfrm>
-              <a:off x="1615213" y="2073503"/>
+              <a:off x="1467192" y="2073503"/>
               <a:ext cx="0" cy="3649639"/>
             </a:xfrm>
             <a:custGeom>
@@ -2486,7 +2486,7 @@
           </p:nvSpPr>
           <p:spPr>
             <a:xfrm>
-              <a:off x="3387871" y="2073503"/>
+              <a:off x="3538150" y="2073503"/>
               <a:ext cx="0" cy="3649639"/>
             </a:xfrm>
             <a:custGeom>
@@ -2529,7 +2529,7 @@
           </p:nvSpPr>
           <p:spPr>
             <a:xfrm>
-              <a:off x="5160528" y="2073503"/>
+              <a:off x="5609107" y="2073503"/>
               <a:ext cx="0" cy="3649639"/>
             </a:xfrm>
             <a:custGeom>
@@ -2572,7 +2572,7 @@
           </p:nvSpPr>
           <p:spPr>
             <a:xfrm>
-              <a:off x="6933186" y="2073503"/>
+              <a:off x="7680065" y="2073503"/>
               <a:ext cx="0" cy="3649639"/>
             </a:xfrm>
             <a:custGeom>
@@ -2830,7 +2830,7 @@
           </p:nvSpPr>
           <p:spPr>
             <a:xfrm>
-              <a:off x="2501542" y="2073503"/>
+              <a:off x="2502671" y="2073503"/>
               <a:ext cx="0" cy="3649639"/>
             </a:xfrm>
             <a:custGeom>
@@ -2873,7 +2873,7 @@
           </p:nvSpPr>
           <p:spPr>
             <a:xfrm>
-              <a:off x="4274200" y="2073503"/>
+              <a:off x="4573628" y="2073503"/>
               <a:ext cx="0" cy="3649639"/>
             </a:xfrm>
             <a:custGeom>
@@ -2916,7 +2916,7 @@
           </p:nvSpPr>
           <p:spPr>
             <a:xfrm>
-              <a:off x="6046857" y="2073503"/>
+              <a:off x="6644586" y="2073503"/>
               <a:ext cx="0" cy="3649639"/>
             </a:xfrm>
             <a:custGeom>
@@ -2953,610 +2953,573 @@
         </p:sp>
         <p:sp>
           <p:nvSpPr>
-            <p:cNvPr id="20" name="pl20"/>
+            <p:cNvPr id="20" name="pg20"/>
             <p:cNvSpPr/>
             <p:nvPr/>
           </p:nvSpPr>
           <p:spPr>
             <a:xfrm>
-              <a:off x="7819515" y="2073503"/>
-              <a:ext cx="0" cy="3649639"/>
+              <a:off x="1172049" y="2073503"/>
+              <a:ext cx="7090630" cy="3408327"/>
             </a:xfrm>
             <a:custGeom>
               <a:avLst/>
               <a:pathLst>
-                <a:path w="0" h="3649639">
+                <a:path w="7090630" h="3408327">
                   <a:moveTo>
-                    <a:pt x="0" y="3649639"/>
+                    <a:pt x="1119380" y="0"/>
                   </a:moveTo>
                   <a:lnTo>
-                    <a:pt x="0" y="0"/>
-                  </a:lnTo>
-                  <a:lnTo>
-                    <a:pt x="0" y="0"/>
-                  </a:lnTo>
-                </a:path>
-              </a:pathLst>
-            </a:custGeom>
-            <a:ln w="13550" cap="flat">
-              <a:solidFill>
-                <a:srgbClr val="EBEBEB">
-                  <a:alpha val="100000"/>
-                </a:srgbClr>
-              </a:solidFill>
-              <a:prstDash val="solid"/>
-              <a:round/>
-            </a:ln>
-          </p:spPr>
-          <p:txBody>
-            <a:bodyPr/>
-            <a:lstStyle/>
-            <a:p/>
-          </p:txBody>
-        </p:sp>
-        <p:sp>
-          <p:nvSpPr>
-            <p:cNvPr id="21" name="pg21"/>
-            <p:cNvSpPr/>
-            <p:nvPr/>
-          </p:nvSpPr>
-          <p:spPr>
-            <a:xfrm>
-              <a:off x="817517" y="2073503"/>
-              <a:ext cx="7403783" cy="3408327"/>
-            </a:xfrm>
-            <a:custGeom>
-              <a:avLst/>
-              <a:pathLst>
-                <a:path w="7403783" h="3408327">
-                  <a:moveTo>
-                    <a:pt x="1014842" y="0"/>
-                  </a:moveTo>
-                  <a:lnTo>
-                    <a:pt x="1043281" y="59775"/>
-                  </a:lnTo>
-                  <a:lnTo>
-                    <a:pt x="1119914" y="213611"/>
-                  </a:lnTo>
-                  <a:lnTo>
-                    <a:pt x="1196546" y="360536"/>
-                  </a:lnTo>
-                  <a:lnTo>
-                    <a:pt x="1273179" y="500859"/>
-                  </a:lnTo>
-                  <a:lnTo>
-                    <a:pt x="1349811" y="634878"/>
-                  </a:lnTo>
-                  <a:lnTo>
-                    <a:pt x="1426444" y="762875"/>
-                  </a:lnTo>
-                  <a:lnTo>
-                    <a:pt x="1503076" y="885122"/>
-                  </a:lnTo>
-                  <a:lnTo>
-                    <a:pt x="1579709" y="1001876"/>
-                  </a:lnTo>
-                  <a:lnTo>
-                    <a:pt x="1656342" y="1113384"/>
-                  </a:lnTo>
-                  <a:lnTo>
-                    <a:pt x="1732974" y="1219883"/>
-                  </a:lnTo>
-                  <a:lnTo>
-                    <a:pt x="1809607" y="1321596"/>
-                  </a:lnTo>
-                  <a:lnTo>
-                    <a:pt x="1886239" y="1418740"/>
-                  </a:lnTo>
-                  <a:lnTo>
-                    <a:pt x="1962872" y="1511519"/>
-                  </a:lnTo>
-                  <a:lnTo>
-                    <a:pt x="2039504" y="1600130"/>
-                  </a:lnTo>
-                  <a:lnTo>
-                    <a:pt x="2116137" y="1684759"/>
-                  </a:lnTo>
-                  <a:lnTo>
-                    <a:pt x="2192769" y="1765586"/>
-                  </a:lnTo>
-                  <a:lnTo>
-                    <a:pt x="2269402" y="1842782"/>
-                  </a:lnTo>
-                  <a:lnTo>
-                    <a:pt x="2346034" y="1916509"/>
-                  </a:lnTo>
-                  <a:lnTo>
-                    <a:pt x="2422667" y="1986924"/>
-                  </a:lnTo>
-                  <a:lnTo>
-                    <a:pt x="2499300" y="2054175"/>
-                  </a:lnTo>
-                  <a:lnTo>
-                    <a:pt x="2575932" y="2118404"/>
-                  </a:lnTo>
-                  <a:lnTo>
-                    <a:pt x="2652565" y="2179748"/>
-                  </a:lnTo>
-                  <a:lnTo>
-                    <a:pt x="2729197" y="2238335"/>
-                  </a:lnTo>
-                  <a:lnTo>
-                    <a:pt x="2805830" y="2294291"/>
-                  </a:lnTo>
-                  <a:lnTo>
-                    <a:pt x="2882462" y="2347732"/>
-                  </a:lnTo>
-                  <a:lnTo>
-                    <a:pt x="2959095" y="2398772"/>
-                  </a:lnTo>
-                  <a:lnTo>
-                    <a:pt x="3035727" y="2447519"/>
-                  </a:lnTo>
-                  <a:lnTo>
-                    <a:pt x="3112360" y="2494076"/>
-                  </a:lnTo>
-                  <a:lnTo>
-                    <a:pt x="3188993" y="2538541"/>
-                  </a:lnTo>
-                  <a:lnTo>
-                    <a:pt x="3265625" y="2581008"/>
-                  </a:lnTo>
-                  <a:lnTo>
-                    <a:pt x="3342258" y="2621568"/>
-                  </a:lnTo>
-                  <a:lnTo>
-                    <a:pt x="3418890" y="2656696"/>
-                  </a:lnTo>
-                  <a:lnTo>
-                    <a:pt x="3495523" y="2671761"/>
-                  </a:lnTo>
-                  <a:lnTo>
-                    <a:pt x="3572155" y="2686551"/>
-                  </a:lnTo>
-                  <a:lnTo>
-                    <a:pt x="3648788" y="2701071"/>
-                  </a:lnTo>
-                  <a:lnTo>
-                    <a:pt x="3725420" y="2715327"/>
-                  </a:lnTo>
-                  <a:lnTo>
-                    <a:pt x="3802053" y="2729324"/>
-                  </a:lnTo>
-                  <a:lnTo>
-                    <a:pt x="3878685" y="2743065"/>
-                  </a:lnTo>
-                  <a:lnTo>
-                    <a:pt x="3955318" y="2756557"/>
-                  </a:lnTo>
-                  <a:lnTo>
-                    <a:pt x="4031951" y="2769802"/>
-                  </a:lnTo>
-                  <a:lnTo>
-                    <a:pt x="4108583" y="2782806"/>
-                  </a:lnTo>
-                  <a:lnTo>
-                    <a:pt x="4185216" y="2795574"/>
-                  </a:lnTo>
-                  <a:lnTo>
-                    <a:pt x="4261848" y="2808109"/>
-                  </a:lnTo>
-                  <a:lnTo>
-                    <a:pt x="4338481" y="2820415"/>
-                  </a:lnTo>
-                  <a:lnTo>
-                    <a:pt x="4415113" y="2832497"/>
-                  </a:lnTo>
-                  <a:lnTo>
-                    <a:pt x="4491746" y="2844360"/>
-                  </a:lnTo>
-                  <a:lnTo>
-                    <a:pt x="4568378" y="2856006"/>
-                  </a:lnTo>
-                  <a:lnTo>
-                    <a:pt x="4645011" y="2867440"/>
-                  </a:lnTo>
-                  <a:lnTo>
-                    <a:pt x="4721644" y="2878666"/>
-                  </a:lnTo>
-                  <a:lnTo>
-                    <a:pt x="4798276" y="2889687"/>
-                  </a:lnTo>
-                  <a:lnTo>
-                    <a:pt x="4874909" y="2900508"/>
-                  </a:lnTo>
-                  <a:lnTo>
-                    <a:pt x="4951541" y="2911131"/>
-                  </a:lnTo>
-                  <a:lnTo>
-                    <a:pt x="5028174" y="2921561"/>
-                  </a:lnTo>
-                  <a:lnTo>
-                    <a:pt x="5104806" y="2931801"/>
-                  </a:lnTo>
-                  <a:lnTo>
-                    <a:pt x="5181439" y="2941855"/>
-                  </a:lnTo>
-                  <a:lnTo>
-                    <a:pt x="5258071" y="2951725"/>
-                  </a:lnTo>
-                  <a:lnTo>
-                    <a:pt x="5334704" y="2961416"/>
-                  </a:lnTo>
-                  <a:lnTo>
-                    <a:pt x="5411336" y="2970930"/>
-                  </a:lnTo>
-                  <a:lnTo>
-                    <a:pt x="5487969" y="2980271"/>
-                  </a:lnTo>
-                  <a:lnTo>
-                    <a:pt x="5564602" y="2989441"/>
-                  </a:lnTo>
-                  <a:lnTo>
-                    <a:pt x="5641234" y="2998445"/>
-                  </a:lnTo>
-                  <a:lnTo>
-                    <a:pt x="5717867" y="3007284"/>
-                  </a:lnTo>
-                  <a:lnTo>
-                    <a:pt x="5794499" y="3015963"/>
-                  </a:lnTo>
-                  <a:lnTo>
-                    <a:pt x="5871132" y="3024483"/>
-                  </a:lnTo>
-                  <a:lnTo>
-                    <a:pt x="5947764" y="3032849"/>
-                  </a:lnTo>
-                  <a:lnTo>
-                    <a:pt x="6024397" y="3041062"/>
-                  </a:lnTo>
-                  <a:lnTo>
-                    <a:pt x="6101029" y="3049125"/>
-                  </a:lnTo>
-                  <a:lnTo>
-                    <a:pt x="6177662" y="3057042"/>
-                  </a:lnTo>
-                  <a:lnTo>
-                    <a:pt x="6254294" y="3064814"/>
-                  </a:lnTo>
-                  <a:lnTo>
-                    <a:pt x="6330927" y="3072445"/>
-                  </a:lnTo>
-                  <a:lnTo>
-                    <a:pt x="6407560" y="3079936"/>
-                  </a:lnTo>
-                  <a:lnTo>
-                    <a:pt x="6484192" y="3087291"/>
-                  </a:lnTo>
-                  <a:lnTo>
-                    <a:pt x="6560825" y="3094513"/>
-                  </a:lnTo>
-                  <a:lnTo>
-                    <a:pt x="6637457" y="3101603"/>
-                  </a:lnTo>
-                  <a:lnTo>
-                    <a:pt x="6714090" y="3108563"/>
-                  </a:lnTo>
-                  <a:lnTo>
-                    <a:pt x="6790722" y="3115397"/>
-                  </a:lnTo>
-                  <a:lnTo>
-                    <a:pt x="6867355" y="3122106"/>
-                  </a:lnTo>
-                  <a:lnTo>
-                    <a:pt x="6943987" y="3128693"/>
-                  </a:lnTo>
-                  <a:lnTo>
-                    <a:pt x="7020620" y="3135161"/>
-                  </a:lnTo>
-                  <a:lnTo>
-                    <a:pt x="7097253" y="3141510"/>
-                  </a:lnTo>
-                  <a:lnTo>
-                    <a:pt x="7173885" y="3147744"/>
-                  </a:lnTo>
-                  <a:lnTo>
-                    <a:pt x="7250518" y="3153864"/>
-                  </a:lnTo>
-                  <a:lnTo>
-                    <a:pt x="7327150" y="3159873"/>
-                  </a:lnTo>
-                  <a:lnTo>
-                    <a:pt x="7403783" y="3165772"/>
-                  </a:lnTo>
-                  <a:lnTo>
-                    <a:pt x="7403783" y="3408327"/>
-                  </a:lnTo>
-                  <a:lnTo>
-                    <a:pt x="7327150" y="3404779"/>
-                  </a:lnTo>
-                  <a:lnTo>
-                    <a:pt x="7250518" y="3401064"/>
-                  </a:lnTo>
-                  <a:lnTo>
-                    <a:pt x="7173885" y="3397175"/>
-                  </a:lnTo>
-                  <a:lnTo>
-                    <a:pt x="7097253" y="3393102"/>
-                  </a:lnTo>
-                  <a:lnTo>
-                    <a:pt x="7020620" y="3388838"/>
-                  </a:lnTo>
-                  <a:lnTo>
-                    <a:pt x="6943987" y="3384373"/>
-                  </a:lnTo>
-                  <a:lnTo>
-                    <a:pt x="6867355" y="3379698"/>
-                  </a:lnTo>
-                  <a:lnTo>
-                    <a:pt x="6790722" y="3374804"/>
-                  </a:lnTo>
-                  <a:lnTo>
-                    <a:pt x="6714090" y="3369679"/>
-                  </a:lnTo>
-                  <a:lnTo>
-                    <a:pt x="6637457" y="3364313"/>
-                  </a:lnTo>
-                  <a:lnTo>
-                    <a:pt x="6560825" y="3358694"/>
-                  </a:lnTo>
-                  <a:lnTo>
-                    <a:pt x="6484192" y="3352811"/>
-                  </a:lnTo>
-                  <a:lnTo>
-                    <a:pt x="6407560" y="3346652"/>
-                  </a:lnTo>
-                  <a:lnTo>
-                    <a:pt x="6330927" y="3340203"/>
-                  </a:lnTo>
-                  <a:lnTo>
-                    <a:pt x="6254294" y="3333450"/>
-                  </a:lnTo>
-                  <a:lnTo>
-                    <a:pt x="6177662" y="3326380"/>
-                  </a:lnTo>
-                  <a:lnTo>
-                    <a:pt x="6101029" y="3318977"/>
-                  </a:lnTo>
-                  <a:lnTo>
-                    <a:pt x="6024397" y="3311225"/>
-                  </a:lnTo>
-                  <a:lnTo>
-                    <a:pt x="5947764" y="3303109"/>
-                  </a:lnTo>
-                  <a:lnTo>
-                    <a:pt x="5871132" y="3294612"/>
-                  </a:lnTo>
-                  <a:lnTo>
-                    <a:pt x="5794499" y="3285714"/>
-                  </a:lnTo>
-                  <a:lnTo>
-                    <a:pt x="5717867" y="3276398"/>
-                  </a:lnTo>
-                  <a:lnTo>
-                    <a:pt x="5641234" y="3266644"/>
-                  </a:lnTo>
-                  <a:lnTo>
-                    <a:pt x="5564602" y="3256431"/>
-                  </a:lnTo>
-                  <a:lnTo>
-                    <a:pt x="5487969" y="3245737"/>
-                  </a:lnTo>
-                  <a:lnTo>
-                    <a:pt x="5411336" y="3234541"/>
-                  </a:lnTo>
-                  <a:lnTo>
-                    <a:pt x="5334704" y="3222818"/>
-                  </a:lnTo>
-                  <a:lnTo>
-                    <a:pt x="5258071" y="3210543"/>
-                  </a:lnTo>
-                  <a:lnTo>
-                    <a:pt x="5181439" y="3197690"/>
-                  </a:lnTo>
-                  <a:lnTo>
-                    <a:pt x="5104806" y="3184234"/>
-                  </a:lnTo>
-                  <a:lnTo>
-                    <a:pt x="5028174" y="3170144"/>
-                  </a:lnTo>
-                  <a:lnTo>
-                    <a:pt x="4951541" y="3155391"/>
-                  </a:lnTo>
-                  <a:lnTo>
-                    <a:pt x="4874909" y="3139944"/>
-                  </a:lnTo>
-                  <a:lnTo>
-                    <a:pt x="4798276" y="3123771"/>
-                  </a:lnTo>
-                  <a:lnTo>
-                    <a:pt x="4721644" y="3106837"/>
-                  </a:lnTo>
-                  <a:lnTo>
-                    <a:pt x="4645011" y="3089106"/>
-                  </a:lnTo>
-                  <a:lnTo>
-                    <a:pt x="4568378" y="3070541"/>
-                  </a:lnTo>
-                  <a:lnTo>
-                    <a:pt x="4491746" y="3051102"/>
-                  </a:lnTo>
-                  <a:lnTo>
-                    <a:pt x="4415113" y="3030749"/>
-                  </a:lnTo>
-                  <a:lnTo>
-                    <a:pt x="4338481" y="3009439"/>
-                  </a:lnTo>
-                  <a:lnTo>
-                    <a:pt x="4261848" y="2987127"/>
-                  </a:lnTo>
-                  <a:lnTo>
-                    <a:pt x="4185216" y="2963764"/>
-                  </a:lnTo>
-                  <a:lnTo>
-                    <a:pt x="4108583" y="2939303"/>
-                  </a:lnTo>
-                  <a:lnTo>
-                    <a:pt x="4031951" y="2913691"/>
-                  </a:lnTo>
-                  <a:lnTo>
-                    <a:pt x="3955318" y="2886874"/>
-                  </a:lnTo>
-                  <a:lnTo>
-                    <a:pt x="3878685" y="2858795"/>
-                  </a:lnTo>
-                  <a:lnTo>
-                    <a:pt x="3802053" y="2829396"/>
-                  </a:lnTo>
-                  <a:lnTo>
-                    <a:pt x="3725420" y="2798613"/>
-                  </a:lnTo>
-                  <a:lnTo>
-                    <a:pt x="3648788" y="2766382"/>
-                  </a:lnTo>
-                  <a:lnTo>
-                    <a:pt x="3572155" y="2732636"/>
-                  </a:lnTo>
-                  <a:lnTo>
-                    <a:pt x="3495523" y="2697301"/>
-                  </a:lnTo>
-                  <a:lnTo>
-                    <a:pt x="3418890" y="2660305"/>
-                  </a:lnTo>
-                  <a:lnTo>
-                    <a:pt x="3342258" y="2641352"/>
-                  </a:lnTo>
-                  <a:lnTo>
-                    <a:pt x="3265625" y="2625724"/>
-                  </a:lnTo>
-                  <a:lnTo>
-                    <a:pt x="3188993" y="2609805"/>
-                  </a:lnTo>
-                  <a:lnTo>
-                    <a:pt x="3112360" y="2593591"/>
-                  </a:lnTo>
-                  <a:lnTo>
-                    <a:pt x="3035727" y="2577077"/>
-                  </a:lnTo>
-                  <a:lnTo>
-                    <a:pt x="2959095" y="2560256"/>
-                  </a:lnTo>
-                  <a:lnTo>
-                    <a:pt x="2882462" y="2543122"/>
-                  </a:lnTo>
-                  <a:lnTo>
-                    <a:pt x="2805830" y="2525671"/>
-                  </a:lnTo>
-                  <a:lnTo>
-                    <a:pt x="2729197" y="2507897"/>
-                  </a:lnTo>
-                  <a:lnTo>
-                    <a:pt x="2652565" y="2489792"/>
-                  </a:lnTo>
-                  <a:lnTo>
-                    <a:pt x="2575932" y="2471352"/>
-                  </a:lnTo>
-                  <a:lnTo>
-                    <a:pt x="2499300" y="2452569"/>
-                  </a:lnTo>
-                  <a:lnTo>
-                    <a:pt x="2422667" y="2433438"/>
-                  </a:lnTo>
-                  <a:lnTo>
-                    <a:pt x="2346034" y="2413952"/>
-                  </a:lnTo>
-                  <a:lnTo>
-                    <a:pt x="2269402" y="2394105"/>
-                  </a:lnTo>
-                  <a:lnTo>
-                    <a:pt x="2192769" y="2373889"/>
-                  </a:lnTo>
-                  <a:lnTo>
-                    <a:pt x="2116137" y="2353298"/>
-                  </a:lnTo>
-                  <a:lnTo>
-                    <a:pt x="2039504" y="2332326"/>
-                  </a:lnTo>
-                  <a:lnTo>
-                    <a:pt x="1962872" y="2310964"/>
-                  </a:lnTo>
-                  <a:lnTo>
-                    <a:pt x="1886239" y="2289206"/>
-                  </a:lnTo>
-                  <a:lnTo>
-                    <a:pt x="1809607" y="2267044"/>
-                  </a:lnTo>
-                  <a:lnTo>
-                    <a:pt x="1732974" y="2244471"/>
-                  </a:lnTo>
-                  <a:lnTo>
-                    <a:pt x="1656342" y="2221479"/>
-                  </a:lnTo>
-                  <a:lnTo>
-                    <a:pt x="1579709" y="2198061"/>
-                  </a:lnTo>
-                  <a:lnTo>
-                    <a:pt x="1503076" y="2174208"/>
-                  </a:lnTo>
-                  <a:lnTo>
-                    <a:pt x="1426444" y="2149913"/>
-                  </a:lnTo>
-                  <a:lnTo>
-                    <a:pt x="1349811" y="2125167"/>
-                  </a:lnTo>
-                  <a:lnTo>
-                    <a:pt x="1273179" y="2099962"/>
-                  </a:lnTo>
-                  <a:lnTo>
-                    <a:pt x="1196546" y="2074289"/>
-                  </a:lnTo>
-                  <a:lnTo>
-                    <a:pt x="1119914" y="2048140"/>
-                  </a:lnTo>
-                  <a:lnTo>
-                    <a:pt x="1043281" y="2021506"/>
-                  </a:lnTo>
-                  <a:lnTo>
-                    <a:pt x="966649" y="1994377"/>
-                  </a:lnTo>
-                  <a:lnTo>
-                    <a:pt x="890016" y="1966746"/>
-                  </a:lnTo>
-                  <a:lnTo>
-                    <a:pt x="813384" y="1938601"/>
-                  </a:lnTo>
-                  <a:lnTo>
-                    <a:pt x="736751" y="1909935"/>
-                  </a:lnTo>
-                  <a:lnTo>
-                    <a:pt x="660118" y="1880737"/>
-                  </a:lnTo>
-                  <a:lnTo>
-                    <a:pt x="583486" y="1850997"/>
-                  </a:lnTo>
-                  <a:lnTo>
-                    <a:pt x="506853" y="1820705"/>
-                  </a:lnTo>
-                  <a:lnTo>
-                    <a:pt x="430221" y="1789851"/>
-                  </a:lnTo>
-                  <a:lnTo>
-                    <a:pt x="353588" y="1758425"/>
-                  </a:lnTo>
-                  <a:lnTo>
-                    <a:pt x="276956" y="1726416"/>
-                  </a:lnTo>
-                  <a:lnTo>
-                    <a:pt x="200323" y="1693813"/>
-                  </a:lnTo>
-                  <a:lnTo>
-                    <a:pt x="123691" y="1660605"/>
-                  </a:lnTo>
-                  <a:lnTo>
-                    <a:pt x="47058" y="1626781"/>
-                  </a:lnTo>
-                  <a:lnTo>
-                    <a:pt x="0" y="1605625"/>
+                    <a:pt x="1145960" y="59775"/>
+                  </a:lnTo>
+                  <a:lnTo>
+                    <a:pt x="1217582" y="213611"/>
+                  </a:lnTo>
+                  <a:lnTo>
+                    <a:pt x="1289205" y="360536"/>
+                  </a:lnTo>
+                  <a:lnTo>
+                    <a:pt x="1360827" y="500859"/>
+                  </a:lnTo>
+                  <a:lnTo>
+                    <a:pt x="1432450" y="634878"/>
+                  </a:lnTo>
+                  <a:lnTo>
+                    <a:pt x="1504073" y="762875"/>
+                  </a:lnTo>
+                  <a:lnTo>
+                    <a:pt x="1575695" y="885122"/>
+                  </a:lnTo>
+                  <a:lnTo>
+                    <a:pt x="1647318" y="1001876"/>
+                  </a:lnTo>
+                  <a:lnTo>
+                    <a:pt x="1718940" y="1113384"/>
+                  </a:lnTo>
+                  <a:lnTo>
+                    <a:pt x="1790563" y="1219883"/>
+                  </a:lnTo>
+                  <a:lnTo>
+                    <a:pt x="1862185" y="1321596"/>
+                  </a:lnTo>
+                  <a:lnTo>
+                    <a:pt x="1933808" y="1418740"/>
+                  </a:lnTo>
+                  <a:lnTo>
+                    <a:pt x="2005430" y="1511519"/>
+                  </a:lnTo>
+                  <a:lnTo>
+                    <a:pt x="2077053" y="1600130"/>
+                  </a:lnTo>
+                  <a:lnTo>
+                    <a:pt x="2148675" y="1684759"/>
+                  </a:lnTo>
+                  <a:lnTo>
+                    <a:pt x="2220298" y="1765586"/>
+                  </a:lnTo>
+                  <a:lnTo>
+                    <a:pt x="2291920" y="1842782"/>
+                  </a:lnTo>
+                  <a:lnTo>
+                    <a:pt x="2363543" y="1916509"/>
+                  </a:lnTo>
+                  <a:lnTo>
+                    <a:pt x="2435165" y="1986924"/>
+                  </a:lnTo>
+                  <a:lnTo>
+                    <a:pt x="2506788" y="2054175"/>
+                  </a:lnTo>
+                  <a:lnTo>
+                    <a:pt x="2578410" y="2118404"/>
+                  </a:lnTo>
+                  <a:lnTo>
+                    <a:pt x="2650033" y="2179748"/>
+                  </a:lnTo>
+                  <a:lnTo>
+                    <a:pt x="2721655" y="2238335"/>
+                  </a:lnTo>
+                  <a:lnTo>
+                    <a:pt x="2793278" y="2294291"/>
+                  </a:lnTo>
+                  <a:lnTo>
+                    <a:pt x="2864901" y="2347732"/>
+                  </a:lnTo>
+                  <a:lnTo>
+                    <a:pt x="2936523" y="2398772"/>
+                  </a:lnTo>
+                  <a:lnTo>
+                    <a:pt x="3008146" y="2447519"/>
+                  </a:lnTo>
+                  <a:lnTo>
+                    <a:pt x="3079768" y="2494076"/>
+                  </a:lnTo>
+                  <a:lnTo>
+                    <a:pt x="3151391" y="2538541"/>
+                  </a:lnTo>
+                  <a:lnTo>
+                    <a:pt x="3223013" y="2581008"/>
+                  </a:lnTo>
+                  <a:lnTo>
+                    <a:pt x="3294636" y="2621568"/>
+                  </a:lnTo>
+                  <a:lnTo>
+                    <a:pt x="3366258" y="2656696"/>
+                  </a:lnTo>
+                  <a:lnTo>
+                    <a:pt x="3437881" y="2671761"/>
+                  </a:lnTo>
+                  <a:lnTo>
+                    <a:pt x="3509503" y="2686551"/>
+                  </a:lnTo>
+                  <a:lnTo>
+                    <a:pt x="3581126" y="2701071"/>
+                  </a:lnTo>
+                  <a:lnTo>
+                    <a:pt x="3652748" y="2715327"/>
+                  </a:lnTo>
+                  <a:lnTo>
+                    <a:pt x="3724371" y="2729324"/>
+                  </a:lnTo>
+                  <a:lnTo>
+                    <a:pt x="3795993" y="2743065"/>
+                  </a:lnTo>
+                  <a:lnTo>
+                    <a:pt x="3867616" y="2756557"/>
+                  </a:lnTo>
+                  <a:lnTo>
+                    <a:pt x="3939238" y="2769802"/>
+                  </a:lnTo>
+                  <a:lnTo>
+                    <a:pt x="4010861" y="2782806"/>
+                  </a:lnTo>
+                  <a:lnTo>
+                    <a:pt x="4082483" y="2795574"/>
+                  </a:lnTo>
+                  <a:lnTo>
+                    <a:pt x="4154106" y="2808109"/>
+                  </a:lnTo>
+                  <a:lnTo>
+                    <a:pt x="4225729" y="2820415"/>
+                  </a:lnTo>
+                  <a:lnTo>
+                    <a:pt x="4297351" y="2832497"/>
+                  </a:lnTo>
+                  <a:lnTo>
+                    <a:pt x="4368974" y="2844360"/>
+                  </a:lnTo>
+                  <a:lnTo>
+                    <a:pt x="4440596" y="2856006"/>
+                  </a:lnTo>
+                  <a:lnTo>
+                    <a:pt x="4512219" y="2867440"/>
+                  </a:lnTo>
+                  <a:lnTo>
+                    <a:pt x="4583841" y="2878666"/>
+                  </a:lnTo>
+                  <a:lnTo>
+                    <a:pt x="4655464" y="2889687"/>
+                  </a:lnTo>
+                  <a:lnTo>
+                    <a:pt x="4727086" y="2900508"/>
+                  </a:lnTo>
+                  <a:lnTo>
+                    <a:pt x="4798709" y="2911131"/>
+                  </a:lnTo>
+                  <a:lnTo>
+                    <a:pt x="4870331" y="2921561"/>
+                  </a:lnTo>
+                  <a:lnTo>
+                    <a:pt x="4941954" y="2931801"/>
+                  </a:lnTo>
+                  <a:lnTo>
+                    <a:pt x="5013576" y="2941855"/>
+                  </a:lnTo>
+                  <a:lnTo>
+                    <a:pt x="5085199" y="2951725"/>
+                  </a:lnTo>
+                  <a:lnTo>
+                    <a:pt x="5156821" y="2961416"/>
+                  </a:lnTo>
+                  <a:lnTo>
+                    <a:pt x="5228444" y="2970930"/>
+                  </a:lnTo>
+                  <a:lnTo>
+                    <a:pt x="5300066" y="2980271"/>
+                  </a:lnTo>
+                  <a:lnTo>
+                    <a:pt x="5371689" y="2989441"/>
+                  </a:lnTo>
+                  <a:lnTo>
+                    <a:pt x="5443311" y="2998445"/>
+                  </a:lnTo>
+                  <a:lnTo>
+                    <a:pt x="5514934" y="3007284"/>
+                  </a:lnTo>
+                  <a:lnTo>
+                    <a:pt x="5586557" y="3015963"/>
+                  </a:lnTo>
+                  <a:lnTo>
+                    <a:pt x="5658179" y="3024483"/>
+                  </a:lnTo>
+                  <a:lnTo>
+                    <a:pt x="5729802" y="3032849"/>
+                  </a:lnTo>
+                  <a:lnTo>
+                    <a:pt x="5801424" y="3041062"/>
+                  </a:lnTo>
+                  <a:lnTo>
+                    <a:pt x="5873047" y="3049125"/>
+                  </a:lnTo>
+                  <a:lnTo>
+                    <a:pt x="5944669" y="3057042"/>
+                  </a:lnTo>
+                  <a:lnTo>
+                    <a:pt x="6016292" y="3064814"/>
+                  </a:lnTo>
+                  <a:lnTo>
+                    <a:pt x="6087914" y="3072445"/>
+                  </a:lnTo>
+                  <a:lnTo>
+                    <a:pt x="6159537" y="3079936"/>
+                  </a:lnTo>
+                  <a:lnTo>
+                    <a:pt x="6231159" y="3087291"/>
+                  </a:lnTo>
+                  <a:lnTo>
+                    <a:pt x="6302782" y="3094513"/>
+                  </a:lnTo>
+                  <a:lnTo>
+                    <a:pt x="6374404" y="3101603"/>
+                  </a:lnTo>
+                  <a:lnTo>
+                    <a:pt x="6446027" y="3108563"/>
+                  </a:lnTo>
+                  <a:lnTo>
+                    <a:pt x="6517649" y="3115397"/>
+                  </a:lnTo>
+                  <a:lnTo>
+                    <a:pt x="6589272" y="3122106"/>
+                  </a:lnTo>
+                  <a:lnTo>
+                    <a:pt x="6660894" y="3128693"/>
+                  </a:lnTo>
+                  <a:lnTo>
+                    <a:pt x="6732517" y="3135161"/>
+                  </a:lnTo>
+                  <a:lnTo>
+                    <a:pt x="6804139" y="3141510"/>
+                  </a:lnTo>
+                  <a:lnTo>
+                    <a:pt x="6875762" y="3147744"/>
+                  </a:lnTo>
+                  <a:lnTo>
+                    <a:pt x="6947385" y="3153864"/>
+                  </a:lnTo>
+                  <a:lnTo>
+                    <a:pt x="7019007" y="3159873"/>
+                  </a:lnTo>
+                  <a:lnTo>
+                    <a:pt x="7090630" y="3165772"/>
+                  </a:lnTo>
+                  <a:lnTo>
+                    <a:pt x="7090630" y="3408327"/>
+                  </a:lnTo>
+                  <a:lnTo>
+                    <a:pt x="7019007" y="3404779"/>
+                  </a:lnTo>
+                  <a:lnTo>
+                    <a:pt x="6947385" y="3401064"/>
+                  </a:lnTo>
+                  <a:lnTo>
+                    <a:pt x="6875762" y="3397175"/>
+                  </a:lnTo>
+                  <a:lnTo>
+                    <a:pt x="6804139" y="3393102"/>
+                  </a:lnTo>
+                  <a:lnTo>
+                    <a:pt x="6732517" y="3388838"/>
+                  </a:lnTo>
+                  <a:lnTo>
+                    <a:pt x="6660894" y="3384373"/>
+                  </a:lnTo>
+                  <a:lnTo>
+                    <a:pt x="6589272" y="3379698"/>
+                  </a:lnTo>
+                  <a:lnTo>
+                    <a:pt x="6517649" y="3374804"/>
+                  </a:lnTo>
+                  <a:lnTo>
+                    <a:pt x="6446027" y="3369679"/>
+                  </a:lnTo>
+                  <a:lnTo>
+                    <a:pt x="6374404" y="3364313"/>
+                  </a:lnTo>
+                  <a:lnTo>
+                    <a:pt x="6302782" y="3358694"/>
+                  </a:lnTo>
+                  <a:lnTo>
+                    <a:pt x="6231159" y="3352811"/>
+                  </a:lnTo>
+                  <a:lnTo>
+                    <a:pt x="6159537" y="3346652"/>
+                  </a:lnTo>
+                  <a:lnTo>
+                    <a:pt x="6087914" y="3340203"/>
+                  </a:lnTo>
+                  <a:lnTo>
+                    <a:pt x="6016292" y="3333450"/>
+                  </a:lnTo>
+                  <a:lnTo>
+                    <a:pt x="5944669" y="3326380"/>
+                  </a:lnTo>
+                  <a:lnTo>
+                    <a:pt x="5873047" y="3318977"/>
+                  </a:lnTo>
+                  <a:lnTo>
+                    <a:pt x="5801424" y="3311225"/>
+                  </a:lnTo>
+                  <a:lnTo>
+                    <a:pt x="5729802" y="3303109"/>
+                  </a:lnTo>
+                  <a:lnTo>
+                    <a:pt x="5658179" y="3294612"/>
+                  </a:lnTo>
+                  <a:lnTo>
+                    <a:pt x="5586557" y="3285714"/>
+                  </a:lnTo>
+                  <a:lnTo>
+                    <a:pt x="5514934" y="3276398"/>
+                  </a:lnTo>
+                  <a:lnTo>
+                    <a:pt x="5443311" y="3266644"/>
+                  </a:lnTo>
+                  <a:lnTo>
+                    <a:pt x="5371689" y="3256431"/>
+                  </a:lnTo>
+                  <a:lnTo>
+                    <a:pt x="5300066" y="3245737"/>
+                  </a:lnTo>
+                  <a:lnTo>
+                    <a:pt x="5228444" y="3234541"/>
+                  </a:lnTo>
+                  <a:lnTo>
+                    <a:pt x="5156821" y="3222818"/>
+                  </a:lnTo>
+                  <a:lnTo>
+                    <a:pt x="5085199" y="3210543"/>
+                  </a:lnTo>
+                  <a:lnTo>
+                    <a:pt x="5013576" y="3197690"/>
+                  </a:lnTo>
+                  <a:lnTo>
+                    <a:pt x="4941954" y="3184234"/>
+                  </a:lnTo>
+                  <a:lnTo>
+                    <a:pt x="4870331" y="3170144"/>
+                  </a:lnTo>
+                  <a:lnTo>
+                    <a:pt x="4798709" y="3155391"/>
+                  </a:lnTo>
+                  <a:lnTo>
+                    <a:pt x="4727086" y="3139944"/>
+                  </a:lnTo>
+                  <a:lnTo>
+                    <a:pt x="4655464" y="3123771"/>
+                  </a:lnTo>
+                  <a:lnTo>
+                    <a:pt x="4583841" y="3106837"/>
+                  </a:lnTo>
+                  <a:lnTo>
+                    <a:pt x="4512219" y="3089106"/>
+                  </a:lnTo>
+                  <a:lnTo>
+                    <a:pt x="4440596" y="3070541"/>
+                  </a:lnTo>
+                  <a:lnTo>
+                    <a:pt x="4368974" y="3051102"/>
+                  </a:lnTo>
+                  <a:lnTo>
+                    <a:pt x="4297351" y="3030749"/>
+                  </a:lnTo>
+                  <a:lnTo>
+                    <a:pt x="4225729" y="3009439"/>
+                  </a:lnTo>
+                  <a:lnTo>
+                    <a:pt x="4154106" y="2987127"/>
+                  </a:lnTo>
+                  <a:lnTo>
+                    <a:pt x="4082483" y="2963764"/>
+                  </a:lnTo>
+                  <a:lnTo>
+                    <a:pt x="4010861" y="2939303"/>
+                  </a:lnTo>
+                  <a:lnTo>
+                    <a:pt x="3939238" y="2913691"/>
+                  </a:lnTo>
+                  <a:lnTo>
+                    <a:pt x="3867616" y="2886874"/>
+                  </a:lnTo>
+                  <a:lnTo>
+                    <a:pt x="3795993" y="2858795"/>
+                  </a:lnTo>
+                  <a:lnTo>
+                    <a:pt x="3724371" y="2829396"/>
+                  </a:lnTo>
+                  <a:lnTo>
+                    <a:pt x="3652748" y="2798613"/>
+                  </a:lnTo>
+                  <a:lnTo>
+                    <a:pt x="3581126" y="2766382"/>
+                  </a:lnTo>
+                  <a:lnTo>
+                    <a:pt x="3509503" y="2732636"/>
+                  </a:lnTo>
+                  <a:lnTo>
+                    <a:pt x="3437881" y="2697301"/>
+                  </a:lnTo>
+                  <a:lnTo>
+                    <a:pt x="3366258" y="2660305"/>
+                  </a:lnTo>
+                  <a:lnTo>
+                    <a:pt x="3294636" y="2641352"/>
+                  </a:lnTo>
+                  <a:lnTo>
+                    <a:pt x="3223013" y="2625724"/>
+                  </a:lnTo>
+                  <a:lnTo>
+                    <a:pt x="3151391" y="2609805"/>
+                  </a:lnTo>
+                  <a:lnTo>
+                    <a:pt x="3079768" y="2593591"/>
+                  </a:lnTo>
+                  <a:lnTo>
+                    <a:pt x="3008146" y="2577077"/>
+                  </a:lnTo>
+                  <a:lnTo>
+                    <a:pt x="2936523" y="2560256"/>
+                  </a:lnTo>
+                  <a:lnTo>
+                    <a:pt x="2864901" y="2543122"/>
+                  </a:lnTo>
+                  <a:lnTo>
+                    <a:pt x="2793278" y="2525671"/>
+                  </a:lnTo>
+                  <a:lnTo>
+                    <a:pt x="2721655" y="2507897"/>
+                  </a:lnTo>
+                  <a:lnTo>
+                    <a:pt x="2650033" y="2489792"/>
+                  </a:lnTo>
+                  <a:lnTo>
+                    <a:pt x="2578410" y="2471352"/>
+                  </a:lnTo>
+                  <a:lnTo>
+                    <a:pt x="2506788" y="2452569"/>
+                  </a:lnTo>
+                  <a:lnTo>
+                    <a:pt x="2435165" y="2433438"/>
+                  </a:lnTo>
+                  <a:lnTo>
+                    <a:pt x="2363543" y="2413952"/>
+                  </a:lnTo>
+                  <a:lnTo>
+                    <a:pt x="2291920" y="2394105"/>
+                  </a:lnTo>
+                  <a:lnTo>
+                    <a:pt x="2220298" y="2373889"/>
+                  </a:lnTo>
+                  <a:lnTo>
+                    <a:pt x="2148675" y="2353298"/>
+                  </a:lnTo>
+                  <a:lnTo>
+                    <a:pt x="2077053" y="2332326"/>
+                  </a:lnTo>
+                  <a:lnTo>
+                    <a:pt x="2005430" y="2310964"/>
+                  </a:lnTo>
+                  <a:lnTo>
+                    <a:pt x="1933808" y="2289206"/>
+                  </a:lnTo>
+                  <a:lnTo>
+                    <a:pt x="1862185" y="2267044"/>
+                  </a:lnTo>
+                  <a:lnTo>
+                    <a:pt x="1790563" y="2244471"/>
+                  </a:lnTo>
+                  <a:lnTo>
+                    <a:pt x="1718940" y="2221479"/>
+                  </a:lnTo>
+                  <a:lnTo>
+                    <a:pt x="1647318" y="2198061"/>
+                  </a:lnTo>
+                  <a:lnTo>
+                    <a:pt x="1575695" y="2174208"/>
+                  </a:lnTo>
+                  <a:lnTo>
+                    <a:pt x="1504073" y="2149913"/>
+                  </a:lnTo>
+                  <a:lnTo>
+                    <a:pt x="1432450" y="2125167"/>
+                  </a:lnTo>
+                  <a:lnTo>
+                    <a:pt x="1360827" y="2099962"/>
+                  </a:lnTo>
+                  <a:lnTo>
+                    <a:pt x="1289205" y="2074289"/>
+                  </a:lnTo>
+                  <a:lnTo>
+                    <a:pt x="1217582" y="2048140"/>
+                  </a:lnTo>
+                  <a:lnTo>
+                    <a:pt x="1145960" y="2021506"/>
+                  </a:lnTo>
+                  <a:lnTo>
+                    <a:pt x="1074337" y="1994377"/>
+                  </a:lnTo>
+                  <a:lnTo>
+                    <a:pt x="1002715" y="1966746"/>
+                  </a:lnTo>
+                  <a:lnTo>
+                    <a:pt x="931092" y="1938601"/>
+                  </a:lnTo>
+                  <a:lnTo>
+                    <a:pt x="859470" y="1909935"/>
+                  </a:lnTo>
+                  <a:lnTo>
+                    <a:pt x="787847" y="1880737"/>
+                  </a:lnTo>
+                  <a:lnTo>
+                    <a:pt x="716225" y="1850997"/>
+                  </a:lnTo>
+                  <a:lnTo>
+                    <a:pt x="644602" y="1820705"/>
+                  </a:lnTo>
+                  <a:lnTo>
+                    <a:pt x="572980" y="1789851"/>
+                  </a:lnTo>
+                  <a:lnTo>
+                    <a:pt x="501357" y="1758425"/>
+                  </a:lnTo>
+                  <a:lnTo>
+                    <a:pt x="429735" y="1726416"/>
+                  </a:lnTo>
+                  <a:lnTo>
+                    <a:pt x="358112" y="1693813"/>
+                  </a:lnTo>
+                  <a:lnTo>
+                    <a:pt x="286490" y="1660605"/>
+                  </a:lnTo>
+                  <a:lnTo>
+                    <a:pt x="214867" y="1626781"/>
+                  </a:lnTo>
+                  <a:lnTo>
+                    <a:pt x="143245" y="1592330"/>
+                  </a:lnTo>
+                  <a:lnTo>
+                    <a:pt x="71622" y="1557239"/>
+                  </a:lnTo>
+                  <a:lnTo>
+                    <a:pt x="0" y="1521497"/>
                   </a:lnTo>
                   <a:close/>
                 </a:path>
@@ -3576,273 +3539,598 @@
         </p:sp>
         <p:sp>
           <p:nvSpPr>
+            <p:cNvPr id="21" name="pl21"/>
+            <p:cNvSpPr/>
+            <p:nvPr/>
+          </p:nvSpPr>
+          <p:spPr>
+            <a:xfrm>
+              <a:off x="2291430" y="2073503"/>
+              <a:ext cx="5971249" cy="3165772"/>
+            </a:xfrm>
+            <a:custGeom>
+              <a:avLst/>
+              <a:pathLst>
+                <a:path w="5971249" h="3165772">
+                  <a:moveTo>
+                    <a:pt x="0" y="0"/>
+                  </a:moveTo>
+                  <a:lnTo>
+                    <a:pt x="26579" y="59775"/>
+                  </a:lnTo>
+                  <a:lnTo>
+                    <a:pt x="98202" y="213611"/>
+                  </a:lnTo>
+                  <a:lnTo>
+                    <a:pt x="169824" y="360536"/>
+                  </a:lnTo>
+                  <a:lnTo>
+                    <a:pt x="241447" y="500859"/>
+                  </a:lnTo>
+                  <a:lnTo>
+                    <a:pt x="313069" y="634878"/>
+                  </a:lnTo>
+                  <a:lnTo>
+                    <a:pt x="384692" y="762875"/>
+                  </a:lnTo>
+                  <a:lnTo>
+                    <a:pt x="456314" y="885122"/>
+                  </a:lnTo>
+                  <a:lnTo>
+                    <a:pt x="527937" y="1001876"/>
+                  </a:lnTo>
+                  <a:lnTo>
+                    <a:pt x="599559" y="1113384"/>
+                  </a:lnTo>
+                  <a:lnTo>
+                    <a:pt x="671182" y="1219883"/>
+                  </a:lnTo>
+                  <a:lnTo>
+                    <a:pt x="742805" y="1321596"/>
+                  </a:lnTo>
+                  <a:lnTo>
+                    <a:pt x="814427" y="1418740"/>
+                  </a:lnTo>
+                  <a:lnTo>
+                    <a:pt x="886050" y="1511519"/>
+                  </a:lnTo>
+                  <a:lnTo>
+                    <a:pt x="957672" y="1600130"/>
+                  </a:lnTo>
+                  <a:lnTo>
+                    <a:pt x="1029295" y="1684759"/>
+                  </a:lnTo>
+                  <a:lnTo>
+                    <a:pt x="1100917" y="1765586"/>
+                  </a:lnTo>
+                  <a:lnTo>
+                    <a:pt x="1172540" y="1842782"/>
+                  </a:lnTo>
+                  <a:lnTo>
+                    <a:pt x="1244162" y="1916509"/>
+                  </a:lnTo>
+                  <a:lnTo>
+                    <a:pt x="1315785" y="1986924"/>
+                  </a:lnTo>
+                  <a:lnTo>
+                    <a:pt x="1387407" y="2054175"/>
+                  </a:lnTo>
+                  <a:lnTo>
+                    <a:pt x="1459030" y="2118404"/>
+                  </a:lnTo>
+                  <a:lnTo>
+                    <a:pt x="1530652" y="2179748"/>
+                  </a:lnTo>
+                  <a:lnTo>
+                    <a:pt x="1602275" y="2238335"/>
+                  </a:lnTo>
+                  <a:lnTo>
+                    <a:pt x="1673897" y="2294291"/>
+                  </a:lnTo>
+                  <a:lnTo>
+                    <a:pt x="1745520" y="2347732"/>
+                  </a:lnTo>
+                  <a:lnTo>
+                    <a:pt x="1817142" y="2398772"/>
+                  </a:lnTo>
+                  <a:lnTo>
+                    <a:pt x="1888765" y="2447519"/>
+                  </a:lnTo>
+                  <a:lnTo>
+                    <a:pt x="1960387" y="2494076"/>
+                  </a:lnTo>
+                  <a:lnTo>
+                    <a:pt x="2032010" y="2538541"/>
+                  </a:lnTo>
+                  <a:lnTo>
+                    <a:pt x="2103633" y="2581008"/>
+                  </a:lnTo>
+                  <a:lnTo>
+                    <a:pt x="2175255" y="2621568"/>
+                  </a:lnTo>
+                  <a:lnTo>
+                    <a:pt x="2246878" y="2656696"/>
+                  </a:lnTo>
+                  <a:lnTo>
+                    <a:pt x="2318500" y="2671761"/>
+                  </a:lnTo>
+                  <a:lnTo>
+                    <a:pt x="2390123" y="2686551"/>
+                  </a:lnTo>
+                  <a:lnTo>
+                    <a:pt x="2461745" y="2701071"/>
+                  </a:lnTo>
+                  <a:lnTo>
+                    <a:pt x="2533368" y="2715327"/>
+                  </a:lnTo>
+                  <a:lnTo>
+                    <a:pt x="2604990" y="2729324"/>
+                  </a:lnTo>
+                  <a:lnTo>
+                    <a:pt x="2676613" y="2743065"/>
+                  </a:lnTo>
+                  <a:lnTo>
+                    <a:pt x="2748235" y="2756557"/>
+                  </a:lnTo>
+                  <a:lnTo>
+                    <a:pt x="2819858" y="2769802"/>
+                  </a:lnTo>
+                  <a:lnTo>
+                    <a:pt x="2891480" y="2782806"/>
+                  </a:lnTo>
+                  <a:lnTo>
+                    <a:pt x="2963103" y="2795574"/>
+                  </a:lnTo>
+                  <a:lnTo>
+                    <a:pt x="3034725" y="2808109"/>
+                  </a:lnTo>
+                  <a:lnTo>
+                    <a:pt x="3106348" y="2820415"/>
+                  </a:lnTo>
+                  <a:lnTo>
+                    <a:pt x="3177970" y="2832497"/>
+                  </a:lnTo>
+                  <a:lnTo>
+                    <a:pt x="3249593" y="2844360"/>
+                  </a:lnTo>
+                  <a:lnTo>
+                    <a:pt x="3321215" y="2856006"/>
+                  </a:lnTo>
+                  <a:lnTo>
+                    <a:pt x="3392838" y="2867440"/>
+                  </a:lnTo>
+                  <a:lnTo>
+                    <a:pt x="3464461" y="2878666"/>
+                  </a:lnTo>
+                  <a:lnTo>
+                    <a:pt x="3536083" y="2889687"/>
+                  </a:lnTo>
+                  <a:lnTo>
+                    <a:pt x="3607706" y="2900508"/>
+                  </a:lnTo>
+                  <a:lnTo>
+                    <a:pt x="3679328" y="2911131"/>
+                  </a:lnTo>
+                  <a:lnTo>
+                    <a:pt x="3750951" y="2921561"/>
+                  </a:lnTo>
+                  <a:lnTo>
+                    <a:pt x="3822573" y="2931801"/>
+                  </a:lnTo>
+                  <a:lnTo>
+                    <a:pt x="3894196" y="2941855"/>
+                  </a:lnTo>
+                  <a:lnTo>
+                    <a:pt x="3965818" y="2951725"/>
+                  </a:lnTo>
+                  <a:lnTo>
+                    <a:pt x="4037441" y="2961416"/>
+                  </a:lnTo>
+                  <a:lnTo>
+                    <a:pt x="4109063" y="2970930"/>
+                  </a:lnTo>
+                  <a:lnTo>
+                    <a:pt x="4180686" y="2980271"/>
+                  </a:lnTo>
+                  <a:lnTo>
+                    <a:pt x="4252308" y="2989441"/>
+                  </a:lnTo>
+                  <a:lnTo>
+                    <a:pt x="4323931" y="2998445"/>
+                  </a:lnTo>
+                  <a:lnTo>
+                    <a:pt x="4395553" y="3007284"/>
+                  </a:lnTo>
+                  <a:lnTo>
+                    <a:pt x="4467176" y="3015963"/>
+                  </a:lnTo>
+                  <a:lnTo>
+                    <a:pt x="4538798" y="3024483"/>
+                  </a:lnTo>
+                  <a:lnTo>
+                    <a:pt x="4610421" y="3032849"/>
+                  </a:lnTo>
+                  <a:lnTo>
+                    <a:pt x="4682043" y="3041062"/>
+                  </a:lnTo>
+                  <a:lnTo>
+                    <a:pt x="4753666" y="3049125"/>
+                  </a:lnTo>
+                  <a:lnTo>
+                    <a:pt x="4825289" y="3057042"/>
+                  </a:lnTo>
+                  <a:lnTo>
+                    <a:pt x="4896911" y="3064814"/>
+                  </a:lnTo>
+                  <a:lnTo>
+                    <a:pt x="4968534" y="3072445"/>
+                  </a:lnTo>
+                  <a:lnTo>
+                    <a:pt x="5040156" y="3079936"/>
+                  </a:lnTo>
+                  <a:lnTo>
+                    <a:pt x="5111779" y="3087291"/>
+                  </a:lnTo>
+                  <a:lnTo>
+                    <a:pt x="5183401" y="3094513"/>
+                  </a:lnTo>
+                  <a:lnTo>
+                    <a:pt x="5255024" y="3101603"/>
+                  </a:lnTo>
+                  <a:lnTo>
+                    <a:pt x="5326646" y="3108563"/>
+                  </a:lnTo>
+                  <a:lnTo>
+                    <a:pt x="5398269" y="3115397"/>
+                  </a:lnTo>
+                  <a:lnTo>
+                    <a:pt x="5469891" y="3122106"/>
+                  </a:lnTo>
+                  <a:lnTo>
+                    <a:pt x="5541514" y="3128693"/>
+                  </a:lnTo>
+                  <a:lnTo>
+                    <a:pt x="5613136" y="3135161"/>
+                  </a:lnTo>
+                  <a:lnTo>
+                    <a:pt x="5684759" y="3141510"/>
+                  </a:lnTo>
+                  <a:lnTo>
+                    <a:pt x="5756381" y="3147744"/>
+                  </a:lnTo>
+                  <a:lnTo>
+                    <a:pt x="5828004" y="3153864"/>
+                  </a:lnTo>
+                  <a:lnTo>
+                    <a:pt x="5899626" y="3159873"/>
+                  </a:lnTo>
+                  <a:lnTo>
+                    <a:pt x="5971249" y="3165772"/>
+                  </a:lnTo>
+                </a:path>
+              </a:pathLst>
+            </a:custGeom>
+          </p:spPr>
+          <p:txBody>
+            <a:bodyPr/>
+            <a:lstStyle/>
+            <a:p/>
+          </p:txBody>
+        </p:sp>
+        <p:sp>
+          <p:nvSpPr>
             <p:cNvPr id="22" name="pl22"/>
             <p:cNvSpPr/>
             <p:nvPr/>
           </p:nvSpPr>
           <p:spPr>
             <a:xfrm>
-              <a:off x="1832360" y="2073503"/>
-              <a:ext cx="6388940" cy="3165772"/>
+              <a:off x="1172049" y="3595000"/>
+              <a:ext cx="7090630" cy="1886829"/>
             </a:xfrm>
             <a:custGeom>
               <a:avLst/>
               <a:pathLst>
-                <a:path w="6388940" h="3165772">
+                <a:path w="7090630" h="1886829">
                   <a:moveTo>
+                    <a:pt x="7090630" y="1886829"/>
+                  </a:moveTo>
+                  <a:lnTo>
+                    <a:pt x="7019007" y="1883281"/>
+                  </a:lnTo>
+                  <a:lnTo>
+                    <a:pt x="6947385" y="1879566"/>
+                  </a:lnTo>
+                  <a:lnTo>
+                    <a:pt x="6875762" y="1875677"/>
+                  </a:lnTo>
+                  <a:lnTo>
+                    <a:pt x="6804139" y="1871604"/>
+                  </a:lnTo>
+                  <a:lnTo>
+                    <a:pt x="6732517" y="1867340"/>
+                  </a:lnTo>
+                  <a:lnTo>
+                    <a:pt x="6660894" y="1862875"/>
+                  </a:lnTo>
+                  <a:lnTo>
+                    <a:pt x="6589272" y="1858201"/>
+                  </a:lnTo>
+                  <a:lnTo>
+                    <a:pt x="6517649" y="1853306"/>
+                  </a:lnTo>
+                  <a:lnTo>
+                    <a:pt x="6446027" y="1848181"/>
+                  </a:lnTo>
+                  <a:lnTo>
+                    <a:pt x="6374404" y="1842815"/>
+                  </a:lnTo>
+                  <a:lnTo>
+                    <a:pt x="6302782" y="1837196"/>
+                  </a:lnTo>
+                  <a:lnTo>
+                    <a:pt x="6231159" y="1831314"/>
+                  </a:lnTo>
+                  <a:lnTo>
+                    <a:pt x="6159537" y="1825154"/>
+                  </a:lnTo>
+                  <a:lnTo>
+                    <a:pt x="6087914" y="1818705"/>
+                  </a:lnTo>
+                  <a:lnTo>
+                    <a:pt x="6016292" y="1811952"/>
+                  </a:lnTo>
+                  <a:lnTo>
+                    <a:pt x="5944669" y="1804882"/>
+                  </a:lnTo>
+                  <a:lnTo>
+                    <a:pt x="5873047" y="1797479"/>
+                  </a:lnTo>
+                  <a:lnTo>
+                    <a:pt x="5801424" y="1789727"/>
+                  </a:lnTo>
+                  <a:lnTo>
+                    <a:pt x="5729802" y="1781612"/>
+                  </a:lnTo>
+                  <a:lnTo>
+                    <a:pt x="5658179" y="1773114"/>
+                  </a:lnTo>
+                  <a:lnTo>
+                    <a:pt x="5586557" y="1764216"/>
+                  </a:lnTo>
+                  <a:lnTo>
+                    <a:pt x="5514934" y="1754900"/>
+                  </a:lnTo>
+                  <a:lnTo>
+                    <a:pt x="5443311" y="1745146"/>
+                  </a:lnTo>
+                  <a:lnTo>
+                    <a:pt x="5371689" y="1734933"/>
+                  </a:lnTo>
+                  <a:lnTo>
+                    <a:pt x="5300066" y="1724240"/>
+                  </a:lnTo>
+                  <a:lnTo>
+                    <a:pt x="5228444" y="1713043"/>
+                  </a:lnTo>
+                  <a:lnTo>
+                    <a:pt x="5156821" y="1701320"/>
+                  </a:lnTo>
+                  <a:lnTo>
+                    <a:pt x="5085199" y="1689045"/>
+                  </a:lnTo>
+                  <a:lnTo>
+                    <a:pt x="5013576" y="1676193"/>
+                  </a:lnTo>
+                  <a:lnTo>
+                    <a:pt x="4941954" y="1662736"/>
+                  </a:lnTo>
+                  <a:lnTo>
+                    <a:pt x="4870331" y="1648646"/>
+                  </a:lnTo>
+                  <a:lnTo>
+                    <a:pt x="4798709" y="1633893"/>
+                  </a:lnTo>
+                  <a:lnTo>
+                    <a:pt x="4727086" y="1618446"/>
+                  </a:lnTo>
+                  <a:lnTo>
+                    <a:pt x="4655464" y="1602273"/>
+                  </a:lnTo>
+                  <a:lnTo>
+                    <a:pt x="4583841" y="1585339"/>
+                  </a:lnTo>
+                  <a:lnTo>
+                    <a:pt x="4512219" y="1567608"/>
+                  </a:lnTo>
+                  <a:lnTo>
+                    <a:pt x="4440596" y="1549043"/>
+                  </a:lnTo>
+                  <a:lnTo>
+                    <a:pt x="4368974" y="1529604"/>
+                  </a:lnTo>
+                  <a:lnTo>
+                    <a:pt x="4297351" y="1509252"/>
+                  </a:lnTo>
+                  <a:lnTo>
+                    <a:pt x="4225729" y="1487941"/>
+                  </a:lnTo>
+                  <a:lnTo>
+                    <a:pt x="4154106" y="1465629"/>
+                  </a:lnTo>
+                  <a:lnTo>
+                    <a:pt x="4082483" y="1442266"/>
+                  </a:lnTo>
+                  <a:lnTo>
+                    <a:pt x="4010861" y="1417805"/>
+                  </a:lnTo>
+                  <a:lnTo>
+                    <a:pt x="3939238" y="1392193"/>
+                  </a:lnTo>
+                  <a:lnTo>
+                    <a:pt x="3867616" y="1365376"/>
+                  </a:lnTo>
+                  <a:lnTo>
+                    <a:pt x="3795993" y="1337297"/>
+                  </a:lnTo>
+                  <a:lnTo>
+                    <a:pt x="3724371" y="1307898"/>
+                  </a:lnTo>
+                  <a:lnTo>
+                    <a:pt x="3652748" y="1277115"/>
+                  </a:lnTo>
+                  <a:lnTo>
+                    <a:pt x="3581126" y="1244885"/>
+                  </a:lnTo>
+                  <a:lnTo>
+                    <a:pt x="3509503" y="1211138"/>
+                  </a:lnTo>
+                  <a:lnTo>
+                    <a:pt x="3437881" y="1175803"/>
+                  </a:lnTo>
+                  <a:lnTo>
+                    <a:pt x="3366258" y="1138807"/>
+                  </a:lnTo>
+                  <a:lnTo>
+                    <a:pt x="3294636" y="1119854"/>
+                  </a:lnTo>
+                  <a:lnTo>
+                    <a:pt x="3223013" y="1104226"/>
+                  </a:lnTo>
+                  <a:lnTo>
+                    <a:pt x="3151391" y="1088307"/>
+                  </a:lnTo>
+                  <a:lnTo>
+                    <a:pt x="3079768" y="1072093"/>
+                  </a:lnTo>
+                  <a:lnTo>
+                    <a:pt x="3008146" y="1055579"/>
+                  </a:lnTo>
+                  <a:lnTo>
+                    <a:pt x="2936523" y="1038758"/>
+                  </a:lnTo>
+                  <a:lnTo>
+                    <a:pt x="2864901" y="1021625"/>
+                  </a:lnTo>
+                  <a:lnTo>
+                    <a:pt x="2793278" y="1004174"/>
+                  </a:lnTo>
+                  <a:lnTo>
+                    <a:pt x="2721655" y="986399"/>
+                  </a:lnTo>
+                  <a:lnTo>
+                    <a:pt x="2650033" y="968294"/>
+                  </a:lnTo>
+                  <a:lnTo>
+                    <a:pt x="2578410" y="949854"/>
+                  </a:lnTo>
+                  <a:lnTo>
+                    <a:pt x="2506788" y="931071"/>
+                  </a:lnTo>
+                  <a:lnTo>
+                    <a:pt x="2435165" y="911940"/>
+                  </a:lnTo>
+                  <a:lnTo>
+                    <a:pt x="2363543" y="892454"/>
+                  </a:lnTo>
+                  <a:lnTo>
+                    <a:pt x="2291920" y="872607"/>
+                  </a:lnTo>
+                  <a:lnTo>
+                    <a:pt x="2220298" y="852391"/>
+                  </a:lnTo>
+                  <a:lnTo>
+                    <a:pt x="2148675" y="831801"/>
+                  </a:lnTo>
+                  <a:lnTo>
+                    <a:pt x="2077053" y="810828"/>
+                  </a:lnTo>
+                  <a:lnTo>
+                    <a:pt x="2005430" y="789466"/>
+                  </a:lnTo>
+                  <a:lnTo>
+                    <a:pt x="1933808" y="767708"/>
+                  </a:lnTo>
+                  <a:lnTo>
+                    <a:pt x="1862185" y="745546"/>
+                  </a:lnTo>
+                  <a:lnTo>
+                    <a:pt x="1790563" y="722973"/>
+                  </a:lnTo>
+                  <a:lnTo>
+                    <a:pt x="1718940" y="699981"/>
+                  </a:lnTo>
+                  <a:lnTo>
+                    <a:pt x="1647318" y="676563"/>
+                  </a:lnTo>
+                  <a:lnTo>
+                    <a:pt x="1575695" y="652710"/>
+                  </a:lnTo>
+                  <a:lnTo>
+                    <a:pt x="1504073" y="628415"/>
+                  </a:lnTo>
+                  <a:lnTo>
+                    <a:pt x="1432450" y="603669"/>
+                  </a:lnTo>
+                  <a:lnTo>
+                    <a:pt x="1360827" y="578464"/>
+                  </a:lnTo>
+                  <a:lnTo>
+                    <a:pt x="1289205" y="552791"/>
+                  </a:lnTo>
+                  <a:lnTo>
+                    <a:pt x="1217582" y="526642"/>
+                  </a:lnTo>
+                  <a:lnTo>
+                    <a:pt x="1145960" y="500008"/>
+                  </a:lnTo>
+                  <a:lnTo>
+                    <a:pt x="1074337" y="472879"/>
+                  </a:lnTo>
+                  <a:lnTo>
+                    <a:pt x="1002715" y="445248"/>
+                  </a:lnTo>
+                  <a:lnTo>
+                    <a:pt x="931092" y="417104"/>
+                  </a:lnTo>
+                  <a:lnTo>
+                    <a:pt x="859470" y="388437"/>
+                  </a:lnTo>
+                  <a:lnTo>
+                    <a:pt x="787847" y="359239"/>
+                  </a:lnTo>
+                  <a:lnTo>
+                    <a:pt x="716225" y="329499"/>
+                  </a:lnTo>
+                  <a:lnTo>
+                    <a:pt x="644602" y="299207"/>
+                  </a:lnTo>
+                  <a:lnTo>
+                    <a:pt x="572980" y="268353"/>
+                  </a:lnTo>
+                  <a:lnTo>
+                    <a:pt x="501357" y="236927"/>
+                  </a:lnTo>
+                  <a:lnTo>
+                    <a:pt x="429735" y="204918"/>
+                  </a:lnTo>
+                  <a:lnTo>
+                    <a:pt x="358112" y="172315"/>
+                  </a:lnTo>
+                  <a:lnTo>
+                    <a:pt x="286490" y="139107"/>
+                  </a:lnTo>
+                  <a:lnTo>
+                    <a:pt x="214867" y="105283"/>
+                  </a:lnTo>
+                  <a:lnTo>
+                    <a:pt x="143245" y="70832"/>
+                  </a:lnTo>
+                  <a:lnTo>
+                    <a:pt x="71622" y="35741"/>
+                  </a:lnTo>
+                  <a:lnTo>
                     <a:pt x="0" y="0"/>
-                  </a:moveTo>
-                  <a:lnTo>
-                    <a:pt x="28439" y="59775"/>
-                  </a:lnTo>
-                  <a:lnTo>
-                    <a:pt x="105071" y="213611"/>
-                  </a:lnTo>
-                  <a:lnTo>
-                    <a:pt x="181704" y="360536"/>
-                  </a:lnTo>
-                  <a:lnTo>
-                    <a:pt x="258336" y="500859"/>
-                  </a:lnTo>
-                  <a:lnTo>
-                    <a:pt x="334969" y="634878"/>
-                  </a:lnTo>
-                  <a:lnTo>
-                    <a:pt x="411601" y="762875"/>
-                  </a:lnTo>
-                  <a:lnTo>
-                    <a:pt x="488234" y="885122"/>
-                  </a:lnTo>
-                  <a:lnTo>
-                    <a:pt x="564866" y="1001876"/>
-                  </a:lnTo>
-                  <a:lnTo>
-                    <a:pt x="641499" y="1113384"/>
-                  </a:lnTo>
-                  <a:lnTo>
-                    <a:pt x="718131" y="1219883"/>
-                  </a:lnTo>
-                  <a:lnTo>
-                    <a:pt x="794764" y="1321596"/>
-                  </a:lnTo>
-                  <a:lnTo>
-                    <a:pt x="871397" y="1418740"/>
-                  </a:lnTo>
-                  <a:lnTo>
-                    <a:pt x="948029" y="1511519"/>
-                  </a:lnTo>
-                  <a:lnTo>
-                    <a:pt x="1024662" y="1600130"/>
-                  </a:lnTo>
-                  <a:lnTo>
-                    <a:pt x="1101294" y="1684759"/>
-                  </a:lnTo>
-                  <a:lnTo>
-                    <a:pt x="1177927" y="1765586"/>
-                  </a:lnTo>
-                  <a:lnTo>
-                    <a:pt x="1254559" y="1842782"/>
-                  </a:lnTo>
-                  <a:lnTo>
-                    <a:pt x="1331192" y="1916509"/>
-                  </a:lnTo>
-                  <a:lnTo>
-                    <a:pt x="1407824" y="1986924"/>
-                  </a:lnTo>
-                  <a:lnTo>
-                    <a:pt x="1484457" y="2054175"/>
-                  </a:lnTo>
-                  <a:lnTo>
-                    <a:pt x="1561090" y="2118404"/>
-                  </a:lnTo>
-                  <a:lnTo>
-                    <a:pt x="1637722" y="2179748"/>
-                  </a:lnTo>
-                  <a:lnTo>
-                    <a:pt x="1714355" y="2238335"/>
-                  </a:lnTo>
-                  <a:lnTo>
-                    <a:pt x="1790987" y="2294291"/>
-                  </a:lnTo>
-                  <a:lnTo>
-                    <a:pt x="1867620" y="2347732"/>
-                  </a:lnTo>
-                  <a:lnTo>
-                    <a:pt x="1944252" y="2398772"/>
-                  </a:lnTo>
-                  <a:lnTo>
-                    <a:pt x="2020885" y="2447519"/>
-                  </a:lnTo>
-                  <a:lnTo>
-                    <a:pt x="2097517" y="2494076"/>
-                  </a:lnTo>
-                  <a:lnTo>
-                    <a:pt x="2174150" y="2538541"/>
-                  </a:lnTo>
-                  <a:lnTo>
-                    <a:pt x="2250782" y="2581008"/>
-                  </a:lnTo>
-                  <a:lnTo>
-                    <a:pt x="2327415" y="2621568"/>
-                  </a:lnTo>
-                  <a:lnTo>
-                    <a:pt x="2404048" y="2656696"/>
-                  </a:lnTo>
-                  <a:lnTo>
-                    <a:pt x="2480680" y="2671761"/>
-                  </a:lnTo>
-                  <a:lnTo>
-                    <a:pt x="2557313" y="2686551"/>
-                  </a:lnTo>
-                  <a:lnTo>
-                    <a:pt x="2633945" y="2701071"/>
-                  </a:lnTo>
-                  <a:lnTo>
-                    <a:pt x="2710578" y="2715327"/>
-                  </a:lnTo>
-                  <a:lnTo>
-                    <a:pt x="2787210" y="2729324"/>
-                  </a:lnTo>
-                  <a:lnTo>
-                    <a:pt x="2863843" y="2743065"/>
-                  </a:lnTo>
-                  <a:lnTo>
-                    <a:pt x="2940475" y="2756557"/>
-                  </a:lnTo>
-                  <a:lnTo>
-                    <a:pt x="3017108" y="2769802"/>
-                  </a:lnTo>
-                  <a:lnTo>
-                    <a:pt x="3093740" y="2782806"/>
-                  </a:lnTo>
-                  <a:lnTo>
-                    <a:pt x="3170373" y="2795574"/>
-                  </a:lnTo>
-                  <a:lnTo>
-                    <a:pt x="3247006" y="2808109"/>
-                  </a:lnTo>
-                  <a:lnTo>
-                    <a:pt x="3323638" y="2820415"/>
-                  </a:lnTo>
-                  <a:lnTo>
-                    <a:pt x="3400271" y="2832497"/>
-                  </a:lnTo>
-                  <a:lnTo>
-                    <a:pt x="3476903" y="2844360"/>
-                  </a:lnTo>
-                  <a:lnTo>
-                    <a:pt x="3553536" y="2856006"/>
-                  </a:lnTo>
-                  <a:lnTo>
-                    <a:pt x="3630168" y="2867440"/>
-                  </a:lnTo>
-                  <a:lnTo>
-                    <a:pt x="3706801" y="2878666"/>
-                  </a:lnTo>
-                  <a:lnTo>
-                    <a:pt x="3783433" y="2889687"/>
-                  </a:lnTo>
-                  <a:lnTo>
-                    <a:pt x="3860066" y="2900508"/>
-                  </a:lnTo>
-                  <a:lnTo>
-                    <a:pt x="3936699" y="2911131"/>
-                  </a:lnTo>
-                  <a:lnTo>
-                    <a:pt x="4013331" y="2921561"/>
-                  </a:lnTo>
-                  <a:lnTo>
-                    <a:pt x="4089964" y="2931801"/>
-                  </a:lnTo>
-                  <a:lnTo>
-                    <a:pt x="4166596" y="2941855"/>
-                  </a:lnTo>
-                  <a:lnTo>
-                    <a:pt x="4243229" y="2951725"/>
-                  </a:lnTo>
-                  <a:lnTo>
-                    <a:pt x="4319861" y="2961416"/>
-                  </a:lnTo>
-                  <a:lnTo>
-                    <a:pt x="4396494" y="2970930"/>
-                  </a:lnTo>
-                  <a:lnTo>
-                    <a:pt x="4473126" y="2980271"/>
-                  </a:lnTo>
-                  <a:lnTo>
-                    <a:pt x="4549759" y="2989441"/>
-                  </a:lnTo>
-                  <a:lnTo>
-                    <a:pt x="4626391" y="2998445"/>
-                  </a:lnTo>
-                  <a:lnTo>
-                    <a:pt x="4703024" y="3007284"/>
-                  </a:lnTo>
-                  <a:lnTo>
-                    <a:pt x="4779657" y="3015963"/>
-                  </a:lnTo>
-                  <a:lnTo>
-                    <a:pt x="4856289" y="3024483"/>
-                  </a:lnTo>
-                  <a:lnTo>
-                    <a:pt x="4932922" y="3032849"/>
-                  </a:lnTo>
-                  <a:lnTo>
-                    <a:pt x="5009554" y="3041062"/>
-                  </a:lnTo>
-                  <a:lnTo>
-                    <a:pt x="5086187" y="3049125"/>
-                  </a:lnTo>
-                  <a:lnTo>
-                    <a:pt x="5162819" y="3057042"/>
-                  </a:lnTo>
-                  <a:lnTo>
-                    <a:pt x="5239452" y="3064814"/>
-                  </a:lnTo>
-                  <a:lnTo>
-                    <a:pt x="5316084" y="3072445"/>
-                  </a:lnTo>
-                  <a:lnTo>
-                    <a:pt x="5392717" y="3079936"/>
-                  </a:lnTo>
-                  <a:lnTo>
-                    <a:pt x="5469349" y="3087291"/>
-                  </a:lnTo>
-                  <a:lnTo>
-                    <a:pt x="5545982" y="3094513"/>
-                  </a:lnTo>
-                  <a:lnTo>
-                    <a:pt x="5622615" y="3101603"/>
-                  </a:lnTo>
-                  <a:lnTo>
-                    <a:pt x="5699247" y="3108563"/>
-                  </a:lnTo>
-                  <a:lnTo>
-                    <a:pt x="5775880" y="3115397"/>
-                  </a:lnTo>
-                  <a:lnTo>
-                    <a:pt x="5852512" y="3122106"/>
-                  </a:lnTo>
-                  <a:lnTo>
-                    <a:pt x="5929145" y="3128693"/>
-                  </a:lnTo>
-                  <a:lnTo>
-                    <a:pt x="6005777" y="3135161"/>
-                  </a:lnTo>
-                  <a:lnTo>
-                    <a:pt x="6082410" y="3141510"/>
-                  </a:lnTo>
-                  <a:lnTo>
-                    <a:pt x="6159042" y="3147744"/>
-                  </a:lnTo>
-                  <a:lnTo>
-                    <a:pt x="6235675" y="3153864"/>
-                  </a:lnTo>
-                  <a:lnTo>
-                    <a:pt x="6312308" y="3159873"/>
-                  </a:lnTo>
-                  <a:lnTo>
-                    <a:pt x="6388940" y="3165772"/>
                   </a:lnTo>
                 </a:path>
               </a:pathLst>
@@ -3862,625 +4150,306 @@
           </p:nvSpPr>
           <p:spPr>
             <a:xfrm>
-              <a:off x="817517" y="3679128"/>
-              <a:ext cx="7403783" cy="1802701"/>
+              <a:off x="1332742" y="2073503"/>
+              <a:ext cx="6929936" cy="3328887"/>
             </a:xfrm>
             <a:custGeom>
               <a:avLst/>
               <a:pathLst>
-                <a:path w="7403783" h="1802701">
-                  <a:moveTo>
-                    <a:pt x="7403783" y="1802701"/>
-                  </a:moveTo>
-                  <a:lnTo>
-                    <a:pt x="7327150" y="1799153"/>
-                  </a:lnTo>
-                  <a:lnTo>
-                    <a:pt x="7250518" y="1795439"/>
-                  </a:lnTo>
-                  <a:lnTo>
-                    <a:pt x="7173885" y="1791549"/>
-                  </a:lnTo>
-                  <a:lnTo>
-                    <a:pt x="7097253" y="1787476"/>
-                  </a:lnTo>
-                  <a:lnTo>
-                    <a:pt x="7020620" y="1783212"/>
-                  </a:lnTo>
-                  <a:lnTo>
-                    <a:pt x="6943987" y="1778748"/>
-                  </a:lnTo>
-                  <a:lnTo>
-                    <a:pt x="6867355" y="1774073"/>
-                  </a:lnTo>
-                  <a:lnTo>
-                    <a:pt x="6790722" y="1769178"/>
-                  </a:lnTo>
-                  <a:lnTo>
-                    <a:pt x="6714090" y="1764053"/>
-                  </a:lnTo>
-                  <a:lnTo>
-                    <a:pt x="6637457" y="1758687"/>
-                  </a:lnTo>
-                  <a:lnTo>
-                    <a:pt x="6560825" y="1753068"/>
-                  </a:lnTo>
-                  <a:lnTo>
-                    <a:pt x="6484192" y="1747186"/>
-                  </a:lnTo>
-                  <a:lnTo>
-                    <a:pt x="6407560" y="1741026"/>
-                  </a:lnTo>
-                  <a:lnTo>
-                    <a:pt x="6330927" y="1734577"/>
-                  </a:lnTo>
-                  <a:lnTo>
-                    <a:pt x="6254294" y="1727824"/>
-                  </a:lnTo>
-                  <a:lnTo>
-                    <a:pt x="6177662" y="1720754"/>
-                  </a:lnTo>
-                  <a:lnTo>
-                    <a:pt x="6101029" y="1713351"/>
-                  </a:lnTo>
-                  <a:lnTo>
-                    <a:pt x="6024397" y="1705600"/>
-                  </a:lnTo>
-                  <a:lnTo>
-                    <a:pt x="5947764" y="1697484"/>
-                  </a:lnTo>
-                  <a:lnTo>
-                    <a:pt x="5871132" y="1688986"/>
-                  </a:lnTo>
-                  <a:lnTo>
-                    <a:pt x="5794499" y="1680089"/>
-                  </a:lnTo>
-                  <a:lnTo>
-                    <a:pt x="5717867" y="1670773"/>
-                  </a:lnTo>
-                  <a:lnTo>
-                    <a:pt x="5641234" y="1661018"/>
-                  </a:lnTo>
-                  <a:lnTo>
-                    <a:pt x="5564602" y="1650805"/>
-                  </a:lnTo>
-                  <a:lnTo>
-                    <a:pt x="5487969" y="1640112"/>
-                  </a:lnTo>
-                  <a:lnTo>
-                    <a:pt x="5411336" y="1628915"/>
-                  </a:lnTo>
-                  <a:lnTo>
-                    <a:pt x="5334704" y="1617192"/>
-                  </a:lnTo>
-                  <a:lnTo>
-                    <a:pt x="5258071" y="1604917"/>
-                  </a:lnTo>
-                  <a:lnTo>
-                    <a:pt x="5181439" y="1592065"/>
-                  </a:lnTo>
-                  <a:lnTo>
-                    <a:pt x="5104806" y="1578608"/>
-                  </a:lnTo>
-                  <a:lnTo>
-                    <a:pt x="5028174" y="1564518"/>
-                  </a:lnTo>
-                  <a:lnTo>
-                    <a:pt x="4951541" y="1549765"/>
-                  </a:lnTo>
-                  <a:lnTo>
-                    <a:pt x="4874909" y="1534318"/>
-                  </a:lnTo>
-                  <a:lnTo>
-                    <a:pt x="4798276" y="1518145"/>
-                  </a:lnTo>
-                  <a:lnTo>
-                    <a:pt x="4721644" y="1501211"/>
-                  </a:lnTo>
-                  <a:lnTo>
-                    <a:pt x="4645011" y="1483480"/>
-                  </a:lnTo>
-                  <a:lnTo>
-                    <a:pt x="4568378" y="1464915"/>
-                  </a:lnTo>
-                  <a:lnTo>
-                    <a:pt x="4491746" y="1445477"/>
-                  </a:lnTo>
-                  <a:lnTo>
-                    <a:pt x="4415113" y="1425124"/>
-                  </a:lnTo>
-                  <a:lnTo>
-                    <a:pt x="4338481" y="1403814"/>
-                  </a:lnTo>
-                  <a:lnTo>
-                    <a:pt x="4261848" y="1381501"/>
-                  </a:lnTo>
-                  <a:lnTo>
-                    <a:pt x="4185216" y="1358138"/>
-                  </a:lnTo>
-                  <a:lnTo>
-                    <a:pt x="4108583" y="1333677"/>
-                  </a:lnTo>
-                  <a:lnTo>
-                    <a:pt x="4031951" y="1308065"/>
-                  </a:lnTo>
-                  <a:lnTo>
-                    <a:pt x="3955318" y="1281248"/>
-                  </a:lnTo>
-                  <a:lnTo>
-                    <a:pt x="3878685" y="1253169"/>
-                  </a:lnTo>
-                  <a:lnTo>
-                    <a:pt x="3802053" y="1223770"/>
-                  </a:lnTo>
-                  <a:lnTo>
-                    <a:pt x="3725420" y="1192987"/>
-                  </a:lnTo>
-                  <a:lnTo>
-                    <a:pt x="3648788" y="1160757"/>
-                  </a:lnTo>
-                  <a:lnTo>
-                    <a:pt x="3572155" y="1127010"/>
-                  </a:lnTo>
-                  <a:lnTo>
-                    <a:pt x="3495523" y="1091676"/>
-                  </a:lnTo>
-                  <a:lnTo>
-                    <a:pt x="3418890" y="1054679"/>
-                  </a:lnTo>
-                  <a:lnTo>
-                    <a:pt x="3342258" y="1035727"/>
-                  </a:lnTo>
-                  <a:lnTo>
-                    <a:pt x="3265625" y="1020098"/>
-                  </a:lnTo>
-                  <a:lnTo>
-                    <a:pt x="3188993" y="1004179"/>
-                  </a:lnTo>
-                  <a:lnTo>
-                    <a:pt x="3112360" y="987966"/>
-                  </a:lnTo>
-                  <a:lnTo>
-                    <a:pt x="3035727" y="971451"/>
-                  </a:lnTo>
-                  <a:lnTo>
-                    <a:pt x="2959095" y="954630"/>
-                  </a:lnTo>
-                  <a:lnTo>
-                    <a:pt x="2882462" y="937497"/>
-                  </a:lnTo>
-                  <a:lnTo>
-                    <a:pt x="2805830" y="920046"/>
-                  </a:lnTo>
-                  <a:lnTo>
-                    <a:pt x="2729197" y="902271"/>
-                  </a:lnTo>
-                  <a:lnTo>
-                    <a:pt x="2652565" y="884166"/>
-                  </a:lnTo>
-                  <a:lnTo>
-                    <a:pt x="2575932" y="865726"/>
-                  </a:lnTo>
-                  <a:lnTo>
-                    <a:pt x="2499300" y="846943"/>
-                  </a:lnTo>
-                  <a:lnTo>
-                    <a:pt x="2422667" y="827812"/>
-                  </a:lnTo>
-                  <a:lnTo>
-                    <a:pt x="2346034" y="808327"/>
-                  </a:lnTo>
-                  <a:lnTo>
-                    <a:pt x="2269402" y="788479"/>
-                  </a:lnTo>
-                  <a:lnTo>
-                    <a:pt x="2192769" y="768263"/>
-                  </a:lnTo>
-                  <a:lnTo>
-                    <a:pt x="2116137" y="747673"/>
-                  </a:lnTo>
-                  <a:lnTo>
-                    <a:pt x="2039504" y="726700"/>
-                  </a:lnTo>
-                  <a:lnTo>
-                    <a:pt x="1962872" y="705338"/>
-                  </a:lnTo>
-                  <a:lnTo>
-                    <a:pt x="1886239" y="683580"/>
-                  </a:lnTo>
-                  <a:lnTo>
-                    <a:pt x="1809607" y="661418"/>
-                  </a:lnTo>
-                  <a:lnTo>
-                    <a:pt x="1732974" y="638845"/>
-                  </a:lnTo>
-                  <a:lnTo>
-                    <a:pt x="1656342" y="615854"/>
-                  </a:lnTo>
-                  <a:lnTo>
-                    <a:pt x="1579709" y="592435"/>
-                  </a:lnTo>
-                  <a:lnTo>
-                    <a:pt x="1503076" y="568582"/>
-                  </a:lnTo>
-                  <a:lnTo>
-                    <a:pt x="1426444" y="544287"/>
-                  </a:lnTo>
-                  <a:lnTo>
-                    <a:pt x="1349811" y="519541"/>
-                  </a:lnTo>
-                  <a:lnTo>
-                    <a:pt x="1273179" y="494336"/>
-                  </a:lnTo>
-                  <a:lnTo>
-                    <a:pt x="1196546" y="468663"/>
-                  </a:lnTo>
-                  <a:lnTo>
-                    <a:pt x="1119914" y="442514"/>
-                  </a:lnTo>
-                  <a:lnTo>
-                    <a:pt x="1043281" y="415880"/>
-                  </a:lnTo>
-                  <a:lnTo>
-                    <a:pt x="966649" y="388752"/>
-                  </a:lnTo>
-                  <a:lnTo>
-                    <a:pt x="890016" y="361120"/>
-                  </a:lnTo>
-                  <a:lnTo>
-                    <a:pt x="813384" y="332976"/>
-                  </a:lnTo>
-                  <a:lnTo>
-                    <a:pt x="736751" y="304309"/>
-                  </a:lnTo>
-                  <a:lnTo>
-                    <a:pt x="660118" y="275111"/>
-                  </a:lnTo>
-                  <a:lnTo>
-                    <a:pt x="583486" y="245371"/>
-                  </a:lnTo>
-                  <a:lnTo>
-                    <a:pt x="506853" y="215079"/>
-                  </a:lnTo>
-                  <a:lnTo>
-                    <a:pt x="430221" y="184226"/>
-                  </a:lnTo>
-                  <a:lnTo>
-                    <a:pt x="353588" y="152799"/>
-                  </a:lnTo>
-                  <a:lnTo>
-                    <a:pt x="276956" y="120790"/>
-                  </a:lnTo>
-                  <a:lnTo>
-                    <a:pt x="200323" y="88187"/>
-                  </a:lnTo>
-                  <a:lnTo>
-                    <a:pt x="123691" y="54979"/>
-                  </a:lnTo>
-                  <a:lnTo>
-                    <a:pt x="47058" y="21155"/>
-                  </a:lnTo>
-                  <a:lnTo>
-                    <a:pt x="0" y="0"/>
-                  </a:lnTo>
-                </a:path>
-              </a:pathLst>
-            </a:custGeom>
-          </p:spPr>
-          <p:txBody>
-            <a:bodyPr/>
-            <a:lstStyle/>
-            <a:p/>
-          </p:txBody>
-        </p:sp>
-        <p:sp>
-          <p:nvSpPr>
-            <p:cNvPr id="24" name="pl24"/>
-            <p:cNvSpPr/>
-            <p:nvPr/>
-          </p:nvSpPr>
-          <p:spPr>
-            <a:xfrm>
-              <a:off x="817517" y="2089322"/>
-              <a:ext cx="7403783" cy="3313067"/>
-            </a:xfrm>
-            <a:custGeom>
-              <a:avLst/>
-              <a:pathLst>
-                <a:path w="7403783" h="3313067">
+                <a:path w="6929936" h="3328887">
                   <a:moveTo>
                     <a:pt x="0" y="0"/>
                   </a:moveTo>
                   <a:lnTo>
-                    <a:pt x="47058" y="68265"/>
-                  </a:lnTo>
-                  <a:lnTo>
-                    <a:pt x="123691" y="175912"/>
-                  </a:lnTo>
-                  <a:lnTo>
-                    <a:pt x="200323" y="280150"/>
-                  </a:lnTo>
-                  <a:lnTo>
-                    <a:pt x="276956" y="381088"/>
-                  </a:lnTo>
-                  <a:lnTo>
-                    <a:pt x="353588" y="478830"/>
-                  </a:lnTo>
-                  <a:lnTo>
-                    <a:pt x="430221" y="573477"/>
-                  </a:lnTo>
-                  <a:lnTo>
-                    <a:pt x="506853" y="665127"/>
-                  </a:lnTo>
-                  <a:lnTo>
-                    <a:pt x="583486" y="753875"/>
-                  </a:lnTo>
-                  <a:lnTo>
-                    <a:pt x="660118" y="839813"/>
-                  </a:lnTo>
-                  <a:lnTo>
-                    <a:pt x="736751" y="923029"/>
-                  </a:lnTo>
-                  <a:lnTo>
-                    <a:pt x="813384" y="1003611"/>
-                  </a:lnTo>
-                  <a:lnTo>
-                    <a:pt x="890016" y="1081641"/>
-                  </a:lnTo>
-                  <a:lnTo>
-                    <a:pt x="966649" y="1157201"/>
-                  </a:lnTo>
-                  <a:lnTo>
-                    <a:pt x="1043281" y="1230368"/>
-                  </a:lnTo>
-                  <a:lnTo>
-                    <a:pt x="1119914" y="1301218"/>
-                  </a:lnTo>
-                  <a:lnTo>
-                    <a:pt x="1196546" y="1369825"/>
-                  </a:lnTo>
-                  <a:lnTo>
-                    <a:pt x="1273179" y="1436259"/>
-                  </a:lnTo>
-                  <a:lnTo>
-                    <a:pt x="1349811" y="1500590"/>
-                  </a:lnTo>
-                  <a:lnTo>
-                    <a:pt x="1426444" y="1562884"/>
-                  </a:lnTo>
-                  <a:lnTo>
-                    <a:pt x="1503076" y="1623205"/>
-                  </a:lnTo>
-                  <a:lnTo>
-                    <a:pt x="1579709" y="1681616"/>
-                  </a:lnTo>
-                  <a:lnTo>
-                    <a:pt x="1656342" y="1738178"/>
-                  </a:lnTo>
-                  <a:lnTo>
-                    <a:pt x="1732974" y="1792949"/>
-                  </a:lnTo>
-                  <a:lnTo>
-                    <a:pt x="1809607" y="1845986"/>
-                  </a:lnTo>
-                  <a:lnTo>
-                    <a:pt x="1886239" y="1897343"/>
-                  </a:lnTo>
-                  <a:lnTo>
-                    <a:pt x="1962872" y="1947074"/>
-                  </a:lnTo>
-                  <a:lnTo>
-                    <a:pt x="2039504" y="1995230"/>
-                  </a:lnTo>
-                  <a:lnTo>
-                    <a:pt x="2116137" y="2041862"/>
-                  </a:lnTo>
-                  <a:lnTo>
-                    <a:pt x="2192769" y="2087017"/>
-                  </a:lnTo>
-                  <a:lnTo>
-                    <a:pt x="2269402" y="2130742"/>
-                  </a:lnTo>
-                  <a:lnTo>
-                    <a:pt x="2346034" y="2173083"/>
-                  </a:lnTo>
-                  <a:lnTo>
-                    <a:pt x="2422667" y="2214083"/>
-                  </a:lnTo>
-                  <a:lnTo>
-                    <a:pt x="2499300" y="2253784"/>
-                  </a:lnTo>
-                  <a:lnTo>
-                    <a:pt x="2575932" y="2292229"/>
-                  </a:lnTo>
-                  <a:lnTo>
-                    <a:pt x="2652565" y="2329456"/>
-                  </a:lnTo>
-                  <a:lnTo>
-                    <a:pt x="2729197" y="2365505"/>
-                  </a:lnTo>
-                  <a:lnTo>
-                    <a:pt x="2805830" y="2400412"/>
-                  </a:lnTo>
-                  <a:lnTo>
-                    <a:pt x="2882462" y="2434214"/>
-                  </a:lnTo>
-                  <a:lnTo>
-                    <a:pt x="2959095" y="2466945"/>
-                  </a:lnTo>
-                  <a:lnTo>
-                    <a:pt x="3035727" y="2498641"/>
-                  </a:lnTo>
-                  <a:lnTo>
-                    <a:pt x="3112360" y="2529332"/>
-                  </a:lnTo>
-                  <a:lnTo>
-                    <a:pt x="3188993" y="2559052"/>
-                  </a:lnTo>
-                  <a:lnTo>
-                    <a:pt x="3265625" y="2587830"/>
-                  </a:lnTo>
-                  <a:lnTo>
-                    <a:pt x="3342258" y="2615698"/>
-                  </a:lnTo>
-                  <a:lnTo>
-                    <a:pt x="3418890" y="2642683"/>
-                  </a:lnTo>
-                  <a:lnTo>
-                    <a:pt x="3495523" y="2668813"/>
-                  </a:lnTo>
-                  <a:lnTo>
-                    <a:pt x="3572155" y="2694117"/>
-                  </a:lnTo>
-                  <a:lnTo>
-                    <a:pt x="3648788" y="2718619"/>
-                  </a:lnTo>
-                  <a:lnTo>
-                    <a:pt x="3725420" y="2742345"/>
-                  </a:lnTo>
-                  <a:lnTo>
-                    <a:pt x="3802053" y="2765319"/>
-                  </a:lnTo>
-                  <a:lnTo>
-                    <a:pt x="3878685" y="2787567"/>
-                  </a:lnTo>
-                  <a:lnTo>
-                    <a:pt x="3955318" y="2809110"/>
-                  </a:lnTo>
-                  <a:lnTo>
-                    <a:pt x="4031951" y="2829971"/>
-                  </a:lnTo>
-                  <a:lnTo>
-                    <a:pt x="4108583" y="2850171"/>
-                  </a:lnTo>
-                  <a:lnTo>
-                    <a:pt x="4185216" y="2869732"/>
-                  </a:lnTo>
-                  <a:lnTo>
-                    <a:pt x="4261848" y="2888673"/>
-                  </a:lnTo>
-                  <a:lnTo>
-                    <a:pt x="4338481" y="2907014"/>
-                  </a:lnTo>
-                  <a:lnTo>
-                    <a:pt x="4415113" y="2924775"/>
-                  </a:lnTo>
-                  <a:lnTo>
-                    <a:pt x="4491746" y="2941973"/>
-                  </a:lnTo>
-                  <a:lnTo>
-                    <a:pt x="4568378" y="2958627"/>
-                  </a:lnTo>
-                  <a:lnTo>
-                    <a:pt x="4645011" y="2974754"/>
-                  </a:lnTo>
-                  <a:lnTo>
-                    <a:pt x="4721644" y="2990370"/>
-                  </a:lnTo>
-                  <a:lnTo>
-                    <a:pt x="4798276" y="3005491"/>
-                  </a:lnTo>
-                  <a:lnTo>
-                    <a:pt x="4874909" y="3020134"/>
-                  </a:lnTo>
-                  <a:lnTo>
-                    <a:pt x="4951541" y="3034313"/>
-                  </a:lnTo>
-                  <a:lnTo>
-                    <a:pt x="5028174" y="3048043"/>
-                  </a:lnTo>
-                  <a:lnTo>
-                    <a:pt x="5104806" y="3061338"/>
-                  </a:lnTo>
-                  <a:lnTo>
-                    <a:pt x="5181439" y="3074212"/>
-                  </a:lnTo>
-                  <a:lnTo>
-                    <a:pt x="5258071" y="3086679"/>
-                  </a:lnTo>
-                  <a:lnTo>
-                    <a:pt x="5334704" y="3098750"/>
-                  </a:lnTo>
-                  <a:lnTo>
-                    <a:pt x="5411336" y="3110440"/>
-                  </a:lnTo>
-                  <a:lnTo>
-                    <a:pt x="5487969" y="3121760"/>
-                  </a:lnTo>
-                  <a:lnTo>
-                    <a:pt x="5564602" y="3132721"/>
-                  </a:lnTo>
-                  <a:lnTo>
-                    <a:pt x="5641234" y="3143335"/>
-                  </a:lnTo>
-                  <a:lnTo>
-                    <a:pt x="5717867" y="3153612"/>
-                  </a:lnTo>
-                  <a:lnTo>
-                    <a:pt x="5794499" y="3163565"/>
-                  </a:lnTo>
-                  <a:lnTo>
-                    <a:pt x="5871132" y="3173202"/>
-                  </a:lnTo>
-                  <a:lnTo>
-                    <a:pt x="5947764" y="3182534"/>
-                  </a:lnTo>
-                  <a:lnTo>
-                    <a:pt x="6024397" y="3191571"/>
-                  </a:lnTo>
-                  <a:lnTo>
-                    <a:pt x="6101029" y="3200322"/>
-                  </a:lnTo>
-                  <a:lnTo>
-                    <a:pt x="6177662" y="3208795"/>
-                  </a:lnTo>
-                  <a:lnTo>
-                    <a:pt x="6254294" y="3217000"/>
-                  </a:lnTo>
-                  <a:lnTo>
-                    <a:pt x="6330927" y="3224946"/>
-                  </a:lnTo>
-                  <a:lnTo>
-                    <a:pt x="6407560" y="3232639"/>
-                  </a:lnTo>
-                  <a:lnTo>
-                    <a:pt x="6484192" y="3240090"/>
-                  </a:lnTo>
-                  <a:lnTo>
-                    <a:pt x="6560825" y="3247304"/>
-                  </a:lnTo>
-                  <a:lnTo>
-                    <a:pt x="6637457" y="3254290"/>
-                  </a:lnTo>
-                  <a:lnTo>
-                    <a:pt x="6714090" y="3261054"/>
-                  </a:lnTo>
-                  <a:lnTo>
-                    <a:pt x="6790722" y="3267605"/>
-                  </a:lnTo>
-                  <a:lnTo>
-                    <a:pt x="6867355" y="3273948"/>
-                  </a:lnTo>
-                  <a:lnTo>
-                    <a:pt x="6943987" y="3280090"/>
-                  </a:lnTo>
-                  <a:lnTo>
-                    <a:pt x="7020620" y="3286037"/>
-                  </a:lnTo>
-                  <a:lnTo>
-                    <a:pt x="7097253" y="3291797"/>
-                  </a:lnTo>
-                  <a:lnTo>
-                    <a:pt x="7173885" y="3297374"/>
-                  </a:lnTo>
-                  <a:lnTo>
-                    <a:pt x="7250518" y="3302774"/>
-                  </a:lnTo>
-                  <a:lnTo>
-                    <a:pt x="7327150" y="3308004"/>
-                  </a:lnTo>
-                  <a:lnTo>
-                    <a:pt x="7403783" y="3313067"/>
+                    <a:pt x="54174" y="84085"/>
+                  </a:lnTo>
+                  <a:lnTo>
+                    <a:pt x="125796" y="191732"/>
+                  </a:lnTo>
+                  <a:lnTo>
+                    <a:pt x="197419" y="295970"/>
+                  </a:lnTo>
+                  <a:lnTo>
+                    <a:pt x="269041" y="396908"/>
+                  </a:lnTo>
+                  <a:lnTo>
+                    <a:pt x="340664" y="494650"/>
+                  </a:lnTo>
+                  <a:lnTo>
+                    <a:pt x="412286" y="589297"/>
+                  </a:lnTo>
+                  <a:lnTo>
+                    <a:pt x="483909" y="680947"/>
+                  </a:lnTo>
+                  <a:lnTo>
+                    <a:pt x="555531" y="769695"/>
+                  </a:lnTo>
+                  <a:lnTo>
+                    <a:pt x="627154" y="855632"/>
+                  </a:lnTo>
+                  <a:lnTo>
+                    <a:pt x="698776" y="938849"/>
+                  </a:lnTo>
+                  <a:lnTo>
+                    <a:pt x="770399" y="1019431"/>
+                  </a:lnTo>
+                  <a:lnTo>
+                    <a:pt x="842021" y="1097461"/>
+                  </a:lnTo>
+                  <a:lnTo>
+                    <a:pt x="913644" y="1173020"/>
+                  </a:lnTo>
+                  <a:lnTo>
+                    <a:pt x="985267" y="1246187"/>
+                  </a:lnTo>
+                  <a:lnTo>
+                    <a:pt x="1056889" y="1317038"/>
+                  </a:lnTo>
+                  <a:lnTo>
+                    <a:pt x="1128512" y="1385644"/>
+                  </a:lnTo>
+                  <a:lnTo>
+                    <a:pt x="1200134" y="1452079"/>
+                  </a:lnTo>
+                  <a:lnTo>
+                    <a:pt x="1271757" y="1516410"/>
+                  </a:lnTo>
+                  <a:lnTo>
+                    <a:pt x="1343379" y="1578703"/>
+                  </a:lnTo>
+                  <a:lnTo>
+                    <a:pt x="1415002" y="1639025"/>
+                  </a:lnTo>
+                  <a:lnTo>
+                    <a:pt x="1486624" y="1697436"/>
+                  </a:lnTo>
+                  <a:lnTo>
+                    <a:pt x="1558247" y="1753998"/>
+                  </a:lnTo>
+                  <a:lnTo>
+                    <a:pt x="1629869" y="1808769"/>
+                  </a:lnTo>
+                  <a:lnTo>
+                    <a:pt x="1701492" y="1861805"/>
+                  </a:lnTo>
+                  <a:lnTo>
+                    <a:pt x="1773114" y="1913162"/>
+                  </a:lnTo>
+                  <a:lnTo>
+                    <a:pt x="1844737" y="1962893"/>
+                  </a:lnTo>
+                  <a:lnTo>
+                    <a:pt x="1916359" y="2011050"/>
+                  </a:lnTo>
+                  <a:lnTo>
+                    <a:pt x="1987982" y="2057681"/>
+                  </a:lnTo>
+                  <a:lnTo>
+                    <a:pt x="2059604" y="2102836"/>
+                  </a:lnTo>
+                  <a:lnTo>
+                    <a:pt x="2131227" y="2146562"/>
+                  </a:lnTo>
+                  <a:lnTo>
+                    <a:pt x="2202849" y="2188902"/>
+                  </a:lnTo>
+                  <a:lnTo>
+                    <a:pt x="2274472" y="2229902"/>
+                  </a:lnTo>
+                  <a:lnTo>
+                    <a:pt x="2346095" y="2269604"/>
+                  </a:lnTo>
+                  <a:lnTo>
+                    <a:pt x="2417717" y="2308049"/>
+                  </a:lnTo>
+                  <a:lnTo>
+                    <a:pt x="2489340" y="2345276"/>
+                  </a:lnTo>
+                  <a:lnTo>
+                    <a:pt x="2560962" y="2381325"/>
+                  </a:lnTo>
+                  <a:lnTo>
+                    <a:pt x="2632585" y="2416232"/>
+                  </a:lnTo>
+                  <a:lnTo>
+                    <a:pt x="2704207" y="2450034"/>
+                  </a:lnTo>
+                  <a:lnTo>
+                    <a:pt x="2775830" y="2482765"/>
+                  </a:lnTo>
+                  <a:lnTo>
+                    <a:pt x="2847452" y="2514460"/>
+                  </a:lnTo>
+                  <a:lnTo>
+                    <a:pt x="2919075" y="2545152"/>
+                  </a:lnTo>
+                  <a:lnTo>
+                    <a:pt x="2990697" y="2574871"/>
+                  </a:lnTo>
+                  <a:lnTo>
+                    <a:pt x="3062320" y="2603650"/>
+                  </a:lnTo>
+                  <a:lnTo>
+                    <a:pt x="3133942" y="2631517"/>
+                  </a:lnTo>
+                  <a:lnTo>
+                    <a:pt x="3205565" y="2658502"/>
+                  </a:lnTo>
+                  <a:lnTo>
+                    <a:pt x="3277187" y="2684633"/>
+                  </a:lnTo>
+                  <a:lnTo>
+                    <a:pt x="3348810" y="2709936"/>
+                  </a:lnTo>
+                  <a:lnTo>
+                    <a:pt x="3420432" y="2734438"/>
+                  </a:lnTo>
+                  <a:lnTo>
+                    <a:pt x="3492055" y="2758164"/>
+                  </a:lnTo>
+                  <a:lnTo>
+                    <a:pt x="3563677" y="2781139"/>
+                  </a:lnTo>
+                  <a:lnTo>
+                    <a:pt x="3635300" y="2803386"/>
+                  </a:lnTo>
+                  <a:lnTo>
+                    <a:pt x="3706923" y="2824929"/>
+                  </a:lnTo>
+                  <a:lnTo>
+                    <a:pt x="3778545" y="2845790"/>
+                  </a:lnTo>
+                  <a:lnTo>
+                    <a:pt x="3850168" y="2865991"/>
+                  </a:lnTo>
+                  <a:lnTo>
+                    <a:pt x="3921790" y="2885551"/>
+                  </a:lnTo>
+                  <a:lnTo>
+                    <a:pt x="3993413" y="2904492"/>
+                  </a:lnTo>
+                  <a:lnTo>
+                    <a:pt x="4065035" y="2922834"/>
+                  </a:lnTo>
+                  <a:lnTo>
+                    <a:pt x="4136658" y="2940595"/>
+                  </a:lnTo>
+                  <a:lnTo>
+                    <a:pt x="4208280" y="2957793"/>
+                  </a:lnTo>
+                  <a:lnTo>
+                    <a:pt x="4279903" y="2974447"/>
+                  </a:lnTo>
+                  <a:lnTo>
+                    <a:pt x="4351525" y="2990573"/>
+                  </a:lnTo>
+                  <a:lnTo>
+                    <a:pt x="4423148" y="3006189"/>
+                  </a:lnTo>
+                  <a:lnTo>
+                    <a:pt x="4494770" y="3021311"/>
+                  </a:lnTo>
+                  <a:lnTo>
+                    <a:pt x="4566393" y="3035953"/>
+                  </a:lnTo>
+                  <a:lnTo>
+                    <a:pt x="4638015" y="3050132"/>
+                  </a:lnTo>
+                  <a:lnTo>
+                    <a:pt x="4709638" y="3063862"/>
+                  </a:lnTo>
+                  <a:lnTo>
+                    <a:pt x="4781260" y="3077157"/>
+                  </a:lnTo>
+                  <a:lnTo>
+                    <a:pt x="4852883" y="3090032"/>
+                  </a:lnTo>
+                  <a:lnTo>
+                    <a:pt x="4924505" y="3102498"/>
+                  </a:lnTo>
+                  <a:lnTo>
+                    <a:pt x="4996128" y="3114570"/>
+                  </a:lnTo>
+                  <a:lnTo>
+                    <a:pt x="5067751" y="3126260"/>
+                  </a:lnTo>
+                  <a:lnTo>
+                    <a:pt x="5139373" y="3137579"/>
+                  </a:lnTo>
+                  <a:lnTo>
+                    <a:pt x="5210996" y="3148540"/>
+                  </a:lnTo>
+                  <a:lnTo>
+                    <a:pt x="5282618" y="3159154"/>
+                  </a:lnTo>
+                  <a:lnTo>
+                    <a:pt x="5354241" y="3169432"/>
+                  </a:lnTo>
+                  <a:lnTo>
+                    <a:pt x="5425863" y="3179385"/>
+                  </a:lnTo>
+                  <a:lnTo>
+                    <a:pt x="5497486" y="3189022"/>
+                  </a:lnTo>
+                  <a:lnTo>
+                    <a:pt x="5569108" y="3198354"/>
+                  </a:lnTo>
+                  <a:lnTo>
+                    <a:pt x="5640731" y="3207391"/>
+                  </a:lnTo>
+                  <a:lnTo>
+                    <a:pt x="5712353" y="3216141"/>
+                  </a:lnTo>
+                  <a:lnTo>
+                    <a:pt x="5783976" y="3224615"/>
+                  </a:lnTo>
+                  <a:lnTo>
+                    <a:pt x="5855598" y="3232820"/>
+                  </a:lnTo>
+                  <a:lnTo>
+                    <a:pt x="5927221" y="3240765"/>
+                  </a:lnTo>
+                  <a:lnTo>
+                    <a:pt x="5998843" y="3248459"/>
+                  </a:lnTo>
+                  <a:lnTo>
+                    <a:pt x="6070466" y="3255909"/>
+                  </a:lnTo>
+                  <a:lnTo>
+                    <a:pt x="6142088" y="3263123"/>
+                  </a:lnTo>
+                  <a:lnTo>
+                    <a:pt x="6213711" y="3270109"/>
+                  </a:lnTo>
+                  <a:lnTo>
+                    <a:pt x="6285333" y="3276874"/>
+                  </a:lnTo>
+                  <a:lnTo>
+                    <a:pt x="6356956" y="3283424"/>
+                  </a:lnTo>
+                  <a:lnTo>
+                    <a:pt x="6428579" y="3289767"/>
+                  </a:lnTo>
+                  <a:lnTo>
+                    <a:pt x="6500201" y="3295909"/>
+                  </a:lnTo>
+                  <a:lnTo>
+                    <a:pt x="6571824" y="3301857"/>
+                  </a:lnTo>
+                  <a:lnTo>
+                    <a:pt x="6643446" y="3307616"/>
+                  </a:lnTo>
+                  <a:lnTo>
+                    <a:pt x="6715069" y="3313193"/>
+                  </a:lnTo>
+                  <a:lnTo>
+                    <a:pt x="6786691" y="3318594"/>
+                  </a:lnTo>
+                  <a:lnTo>
+                    <a:pt x="6858314" y="3323823"/>
+                  </a:lnTo>
+                  <a:lnTo>
+                    <a:pt x="6929936" y="3328887"/>
                   </a:lnTo>
                 </a:path>
               </a:pathLst>
@@ -4503,7 +4472,7 @@
         </p:sp>
         <p:sp>
           <p:nvSpPr>
-            <p:cNvPr id="25" name="pl25"/>
+            <p:cNvPr id="24" name="pl24"/>
             <p:cNvSpPr/>
             <p:nvPr/>
           </p:nvSpPr>
@@ -4546,13 +4515,13 @@
         </p:sp>
         <p:sp>
           <p:nvSpPr>
-            <p:cNvPr id="26" name="pl26"/>
+            <p:cNvPr id="25" name="pl25"/>
             <p:cNvSpPr/>
             <p:nvPr/>
           </p:nvSpPr>
           <p:spPr>
             <a:xfrm>
-              <a:off x="4224261" y="2073503"/>
+              <a:off x="4526955" y="2073503"/>
               <a:ext cx="0" cy="3649639"/>
             </a:xfrm>
             <a:custGeom>
@@ -4589,7 +4558,7 @@
         </p:sp>
         <p:sp>
           <p:nvSpPr>
-            <p:cNvPr id="27" name="tx27"/>
+            <p:cNvPr id="26" name="tx26"/>
             <p:cNvSpPr/>
             <p:nvPr/>
           </p:nvSpPr>
@@ -4635,7 +4604,7 @@
         </p:sp>
         <p:sp>
           <p:nvSpPr>
-            <p:cNvPr id="28" name="tx28"/>
+            <p:cNvPr id="27" name="tx27"/>
             <p:cNvSpPr/>
             <p:nvPr/>
           </p:nvSpPr>
@@ -4681,7 +4650,7 @@
         </p:sp>
         <p:sp>
           <p:nvSpPr>
-            <p:cNvPr id="29" name="tx29"/>
+            <p:cNvPr id="28" name="tx28"/>
             <p:cNvSpPr/>
             <p:nvPr/>
           </p:nvSpPr>
@@ -4727,7 +4696,7 @@
         </p:sp>
         <p:sp>
           <p:nvSpPr>
-            <p:cNvPr id="30" name="tx30"/>
+            <p:cNvPr id="29" name="tx29"/>
             <p:cNvSpPr/>
             <p:nvPr/>
           </p:nvSpPr>
@@ -4773,7 +4742,7 @@
         </p:sp>
         <p:sp>
           <p:nvSpPr>
-            <p:cNvPr id="31" name="tx31"/>
+            <p:cNvPr id="30" name="tx30"/>
             <p:cNvSpPr/>
             <p:nvPr/>
           </p:nvSpPr>
@@ -4819,14 +4788,14 @@
         </p:sp>
         <p:sp>
           <p:nvSpPr>
-            <p:cNvPr id="32" name="tx32"/>
+            <p:cNvPr id="31" name="tx31"/>
             <p:cNvSpPr/>
             <p:nvPr/>
           </p:nvSpPr>
           <p:spPr>
             <a:xfrm>
-              <a:off x="2423864" y="5785772"/>
-              <a:ext cx="155356" cy="80101"/>
+              <a:off x="2421884" y="5785772"/>
+              <a:ext cx="161574" cy="80101"/>
             </a:xfrm>
             <a:prstGeom prst="rect">
               <a:avLst/>
@@ -4858,21 +4827,21 @@
                   <a:latin typeface="Helvetica"/>
                   <a:cs typeface="Helvetica"/>
                 </a:rPr>
-                <a:t>0.8</a:t>
+                <a:t>-25</a:t>
               </a:r>
             </a:p>
           </p:txBody>
         </p:sp>
         <p:sp>
           <p:nvSpPr>
-            <p:cNvPr id="33" name="tx33"/>
+            <p:cNvPr id="32" name="tx32"/>
             <p:cNvSpPr/>
             <p:nvPr/>
           </p:nvSpPr>
           <p:spPr>
             <a:xfrm>
-              <a:off x="4196521" y="5785772"/>
-              <a:ext cx="155356" cy="80101"/>
+              <a:off x="4542539" y="5785772"/>
+              <a:ext cx="62179" cy="80101"/>
             </a:xfrm>
             <a:prstGeom prst="rect">
               <a:avLst/>
@@ -4904,21 +4873,21 @@
                   <a:latin typeface="Helvetica"/>
                   <a:cs typeface="Helvetica"/>
                 </a:rPr>
-                <a:t>1.0</a:t>
+                <a:t>0</a:t>
               </a:r>
             </a:p>
           </p:txBody>
         </p:sp>
         <p:sp>
           <p:nvSpPr>
-            <p:cNvPr id="34" name="tx34"/>
+            <p:cNvPr id="33" name="tx33"/>
             <p:cNvSpPr/>
             <p:nvPr/>
           </p:nvSpPr>
           <p:spPr>
             <a:xfrm>
-              <a:off x="5969179" y="5785772"/>
-              <a:ext cx="155356" cy="80101"/>
+              <a:off x="6582407" y="5785772"/>
+              <a:ext cx="124358" cy="80101"/>
             </a:xfrm>
             <a:prstGeom prst="rect">
               <a:avLst/>
@@ -4950,67 +4919,21 @@
                   <a:latin typeface="Helvetica"/>
                   <a:cs typeface="Helvetica"/>
                 </a:rPr>
-                <a:t>1.2</a:t>
+                <a:t>25</a:t>
               </a:r>
             </a:p>
           </p:txBody>
         </p:sp>
         <p:sp>
           <p:nvSpPr>
-            <p:cNvPr id="35" name="tx35"/>
+            <p:cNvPr id="34" name="tx34"/>
             <p:cNvSpPr/>
             <p:nvPr/>
           </p:nvSpPr>
           <p:spPr>
             <a:xfrm>
-              <a:off x="7741836" y="5785772"/>
-              <a:ext cx="155356" cy="80101"/>
-            </a:xfrm>
-            <a:prstGeom prst="rect">
-              <a:avLst/>
-            </a:prstGeom>
-            <a:noFill/>
-          </p:spPr>
-          <p:txBody>
-            <a:bodyPr lIns="0" rIns="0" tIns="0" bIns="0" anchorCtr="1" anchor="ctr" wrap="none"/>
-            <a:lstStyle/>
-            <a:p>
-              <a:pPr algn="l" marL="0" marR="0" indent="0">
-                <a:lnSpc>
-                  <a:spcPts val="880"/>
-                </a:lnSpc>
-                <a:spcBef>
-                  <a:spcPts val="0"/>
-                </a:spcBef>
-                <a:spcAft>
-                  <a:spcPts val="0"/>
-                </a:spcAft>
-              </a:pPr>
-              <a:r>
-                <a:rPr sz="880">
-                  <a:solidFill>
-                    <a:srgbClr val="4D4D4D">
-                      <a:alpha val="100000"/>
-                    </a:srgbClr>
-                  </a:solidFill>
-                  <a:latin typeface="Helvetica"/>
-                  <a:cs typeface="Helvetica"/>
-                </a:rPr>
-                <a:t>1.4</a:t>
-              </a:r>
-            </a:p>
-          </p:txBody>
-        </p:sp>
-        <p:sp>
-          <p:nvSpPr>
-            <p:cNvPr id="36" name="tx36"/>
-            <p:cNvSpPr/>
-            <p:nvPr/>
-          </p:nvSpPr>
-          <p:spPr>
-            <a:xfrm>
-              <a:off x="3879271" y="5925448"/>
-              <a:ext cx="1676186" cy="100218"/>
+              <a:off x="2928340" y="5925448"/>
+              <a:ext cx="3578047" cy="100218"/>
             </a:xfrm>
             <a:prstGeom prst="rect">
               <a:avLst/>
@@ -5042,14 +4965,14 @@
                   <a:latin typeface="Helvetica"/>
                   <a:cs typeface="Helvetica"/>
                 </a:rPr>
-                <a:t>CKD-EPI Cr-Cys / CG ratio</a:t>
+                <a:t>eGFR difference (%): 100 × (CKD-EPI Cr-Cys − CG) / CG</a:t>
               </a:r>
             </a:p>
           </p:txBody>
         </p:sp>
         <p:sp>
           <p:nvSpPr>
-            <p:cNvPr id="37" name="tx37"/>
+            <p:cNvPr id="35" name="tx35"/>
             <p:cNvSpPr/>
             <p:nvPr/>
           </p:nvSpPr>
@@ -5095,14 +5018,14 @@
         </p:sp>
         <p:sp>
           <p:nvSpPr>
-            <p:cNvPr id="38" name="tx38"/>
+            <p:cNvPr id="36" name="tx36"/>
             <p:cNvSpPr/>
             <p:nvPr/>
           </p:nvSpPr>
           <p:spPr>
             <a:xfrm>
               <a:off x="817517" y="1896563"/>
-              <a:ext cx="6899879" cy="82021"/>
+              <a:ext cx="7052127" cy="82021"/>
             </a:xfrm>
             <a:prstGeom prst="rect">
               <a:avLst/>
@@ -5134,14 +5057,14 @@
                   <a:latin typeface="Helvetica"/>
                   <a:cs typeface="Helvetica"/>
                 </a:rPr>
-                <a:t>subHR per 0.1 ratio decline: 1.45 (1.24-1.70), p_Bonf = &lt;0.001 (n = 6)  |  per IQR decline (Δ = 0.30): 3.04 (1.89-4.91)  |  IQR: [0.85, 1.15]</a:t>
+                <a:t>subHR per 10 % decline: 1.45 (1.24-1.70), p_Bonf = &lt;0.001 (n = 6)  |  per IQR decline (Δ = 29.9 %): 3.04 (1.89-4.91)  |  IQR: [-15.0, 14.9] %</a:t>
               </a:r>
             </a:p>
           </p:txBody>
         </p:sp>
         <p:sp>
           <p:nvSpPr>
-            <p:cNvPr id="39" name="tx39"/>
+            <p:cNvPr id="37" name="tx37"/>
             <p:cNvSpPr/>
             <p:nvPr/>
           </p:nvSpPr>

--- a/docs/pptx/carbo/jx-carbo-linsubhr-ratio-sideeffect.pptx
+++ b/docs/pptx/carbo/jx-carbo-linsubhr-ratio-sideeffect.pptx
@@ -2265,34 +2265,26 @@
         </p:sp>
         <p:sp>
           <p:nvSpPr>
-            <p:cNvPr id="4" name="pl4"/>
+            <p:cNvPr id="4" name="rc4"/>
             <p:cNvSpPr/>
             <p:nvPr/>
           </p:nvSpPr>
           <p:spPr>
             <a:xfrm>
-              <a:off x="817517" y="5142518"/>
-              <a:ext cx="7799693" cy="0"/>
+              <a:off x="457200" y="1600200"/>
+              <a:ext cx="8229600" cy="4525962"/>
             </a:xfrm>
-            <a:custGeom>
+            <a:prstGeom prst="rect">
               <a:avLst/>
-              <a:pathLst>
-                <a:path w="7799693" h="0">
-                  <a:moveTo>
-                    <a:pt x="0" y="0"/>
-                  </a:moveTo>
-                  <a:lnTo>
-                    <a:pt x="7799693" y="0"/>
-                  </a:lnTo>
-                  <a:lnTo>
-                    <a:pt x="7799693" y="0"/>
-                  </a:lnTo>
-                </a:path>
-              </a:pathLst>
-            </a:custGeom>
-            <a:ln w="6775" cap="flat">
+            </a:prstGeom>
+            <a:solidFill>
+              <a:srgbClr val="FFFFFF">
+                <a:alpha val="100000"/>
+              </a:srgbClr>
+            </a:solidFill>
+            <a:ln w="13550" cap="rnd">
               <a:solidFill>
-                <a:srgbClr val="EBEBEB">
+                <a:srgbClr val="FFFFFF">
                   <a:alpha val="100000"/>
                 </a:srgbClr>
               </a:solidFill>
@@ -2314,21 +2306,21 @@
           </p:nvSpPr>
           <p:spPr>
             <a:xfrm>
-              <a:off x="817517" y="4313054"/>
-              <a:ext cx="7799693" cy="0"/>
+              <a:off x="887106" y="3250627"/>
+              <a:ext cx="7660515" cy="0"/>
             </a:xfrm>
             <a:custGeom>
               <a:avLst/>
               <a:pathLst>
-                <a:path w="7799693" h="0">
+                <a:path w="7660515" h="0">
                   <a:moveTo>
                     <a:pt x="0" y="0"/>
                   </a:moveTo>
                   <a:lnTo>
-                    <a:pt x="7799693" y="0"/>
-                  </a:lnTo>
-                  <a:lnTo>
-                    <a:pt x="7799693" y="0"/>
+                    <a:pt x="7660515" y="0"/>
+                  </a:lnTo>
+                  <a:lnTo>
+                    <a:pt x="7660515" y="0"/>
                   </a:lnTo>
                 </a:path>
               </a:pathLst>
@@ -2357,21 +2349,21 @@
           </p:nvSpPr>
           <p:spPr>
             <a:xfrm>
-              <a:off x="817517" y="3483591"/>
-              <a:ext cx="7799693" cy="0"/>
+              <a:off x="887106" y="2951293"/>
+              <a:ext cx="7660515" cy="0"/>
             </a:xfrm>
             <a:custGeom>
               <a:avLst/>
               <a:pathLst>
-                <a:path w="7799693" h="0">
+                <a:path w="7660515" h="0">
                   <a:moveTo>
                     <a:pt x="0" y="0"/>
                   </a:moveTo>
                   <a:lnTo>
-                    <a:pt x="7799693" y="0"/>
-                  </a:lnTo>
-                  <a:lnTo>
-                    <a:pt x="7799693" y="0"/>
+                    <a:pt x="7660515" y="0"/>
+                  </a:lnTo>
+                  <a:lnTo>
+                    <a:pt x="7660515" y="0"/>
                   </a:lnTo>
                 </a:path>
               </a:pathLst>
@@ -2400,21 +2392,21 @@
           </p:nvSpPr>
           <p:spPr>
             <a:xfrm>
-              <a:off x="817517" y="2654127"/>
-              <a:ext cx="7799693" cy="0"/>
+              <a:off x="887106" y="2651959"/>
+              <a:ext cx="7660515" cy="0"/>
             </a:xfrm>
             <a:custGeom>
               <a:avLst/>
               <a:pathLst>
-                <a:path w="7799693" h="0">
+                <a:path w="7660515" h="0">
                   <a:moveTo>
                     <a:pt x="0" y="0"/>
                   </a:moveTo>
                   <a:lnTo>
-                    <a:pt x="7799693" y="0"/>
-                  </a:lnTo>
-                  <a:lnTo>
-                    <a:pt x="7799693" y="0"/>
+                    <a:pt x="7660515" y="0"/>
+                  </a:lnTo>
+                  <a:lnTo>
+                    <a:pt x="7660515" y="0"/>
                   </a:lnTo>
                 </a:path>
               </a:pathLst>
@@ -2443,21 +2435,21 @@
           </p:nvSpPr>
           <p:spPr>
             <a:xfrm>
-              <a:off x="1467192" y="2073503"/>
-              <a:ext cx="0" cy="3649639"/>
+              <a:off x="887106" y="2352625"/>
+              <a:ext cx="7660515" cy="0"/>
             </a:xfrm>
             <a:custGeom>
               <a:avLst/>
               <a:pathLst>
-                <a:path w="0" h="3649639">
+                <a:path w="7660515" h="0">
                   <a:moveTo>
-                    <a:pt x="0" y="3649639"/>
+                    <a:pt x="0" y="0"/>
                   </a:moveTo>
                   <a:lnTo>
-                    <a:pt x="0" y="0"/>
-                  </a:lnTo>
-                  <a:lnTo>
-                    <a:pt x="0" y="0"/>
+                    <a:pt x="7660515" y="0"/>
+                  </a:lnTo>
+                  <a:lnTo>
+                    <a:pt x="7660515" y="0"/>
                   </a:lnTo>
                 </a:path>
               </a:pathLst>
@@ -2486,15 +2478,15 @@
           </p:nvSpPr>
           <p:spPr>
             <a:xfrm>
-              <a:off x="3538150" y="2073503"/>
-              <a:ext cx="0" cy="3649639"/>
+              <a:off x="1525188" y="2143092"/>
+              <a:ext cx="0" cy="1317069"/>
             </a:xfrm>
             <a:custGeom>
               <a:avLst/>
               <a:pathLst>
-                <a:path w="0" h="3649639">
+                <a:path w="0" h="1317069">
                   <a:moveTo>
-                    <a:pt x="0" y="3649639"/>
+                    <a:pt x="0" y="1317069"/>
                   </a:moveTo>
                   <a:lnTo>
                     <a:pt x="0" y="0"/>
@@ -2529,15 +2521,15 @@
           </p:nvSpPr>
           <p:spPr>
             <a:xfrm>
-              <a:off x="5609107" y="2073503"/>
-              <a:ext cx="0" cy="3649639"/>
+              <a:off x="3559192" y="2143092"/>
+              <a:ext cx="0" cy="1317069"/>
             </a:xfrm>
             <a:custGeom>
               <a:avLst/>
               <a:pathLst>
-                <a:path w="0" h="3649639">
+                <a:path w="0" h="1317069">
                   <a:moveTo>
-                    <a:pt x="0" y="3649639"/>
+                    <a:pt x="0" y="1317069"/>
                   </a:moveTo>
                   <a:lnTo>
                     <a:pt x="0" y="0"/>
@@ -2572,15 +2564,15 @@
           </p:nvSpPr>
           <p:spPr>
             <a:xfrm>
-              <a:off x="7680065" y="2073503"/>
-              <a:ext cx="0" cy="3649639"/>
+              <a:off x="5593195" y="2143092"/>
+              <a:ext cx="0" cy="1317069"/>
             </a:xfrm>
             <a:custGeom>
               <a:avLst/>
               <a:pathLst>
-                <a:path w="0" h="3649639">
+                <a:path w="0" h="1317069">
                   <a:moveTo>
-                    <a:pt x="0" y="3649639"/>
+                    <a:pt x="0" y="1317069"/>
                   </a:moveTo>
                   <a:lnTo>
                     <a:pt x="0" y="0"/>
@@ -2615,26 +2607,26 @@
           </p:nvSpPr>
           <p:spPr>
             <a:xfrm>
-              <a:off x="817517" y="5557249"/>
-              <a:ext cx="7799693" cy="0"/>
+              <a:off x="7627198" y="2143092"/>
+              <a:ext cx="0" cy="1317069"/>
             </a:xfrm>
             <a:custGeom>
               <a:avLst/>
               <a:pathLst>
-                <a:path w="7799693" h="0">
+                <a:path w="0" h="1317069">
                   <a:moveTo>
+                    <a:pt x="0" y="1317069"/>
+                  </a:moveTo>
+                  <a:lnTo>
                     <a:pt x="0" y="0"/>
-                  </a:moveTo>
-                  <a:lnTo>
-                    <a:pt x="7799693" y="0"/>
-                  </a:lnTo>
-                  <a:lnTo>
-                    <a:pt x="7799693" y="0"/>
+                  </a:lnTo>
+                  <a:lnTo>
+                    <a:pt x="0" y="0"/>
                   </a:lnTo>
                 </a:path>
               </a:pathLst>
             </a:custGeom>
-            <a:ln w="13550" cap="flat">
+            <a:ln w="6775" cap="flat">
               <a:solidFill>
                 <a:srgbClr val="EBEBEB">
                   <a:alpha val="100000"/>
@@ -2658,21 +2650,21 @@
           </p:nvSpPr>
           <p:spPr>
             <a:xfrm>
-              <a:off x="817517" y="4727786"/>
-              <a:ext cx="7799693" cy="0"/>
+              <a:off x="887106" y="3400294"/>
+              <a:ext cx="7660515" cy="0"/>
             </a:xfrm>
             <a:custGeom>
               <a:avLst/>
               <a:pathLst>
-                <a:path w="7799693" h="0">
+                <a:path w="7660515" h="0">
                   <a:moveTo>
                     <a:pt x="0" y="0"/>
                   </a:moveTo>
                   <a:lnTo>
-                    <a:pt x="7799693" y="0"/>
-                  </a:lnTo>
-                  <a:lnTo>
-                    <a:pt x="7799693" y="0"/>
+                    <a:pt x="7660515" y="0"/>
+                  </a:lnTo>
+                  <a:lnTo>
+                    <a:pt x="7660515" y="0"/>
                   </a:lnTo>
                 </a:path>
               </a:pathLst>
@@ -2701,21 +2693,21 @@
           </p:nvSpPr>
           <p:spPr>
             <a:xfrm>
-              <a:off x="817517" y="3898322"/>
-              <a:ext cx="7799693" cy="0"/>
+              <a:off x="887106" y="3100960"/>
+              <a:ext cx="7660515" cy="0"/>
             </a:xfrm>
             <a:custGeom>
               <a:avLst/>
               <a:pathLst>
-                <a:path w="7799693" h="0">
+                <a:path w="7660515" h="0">
                   <a:moveTo>
                     <a:pt x="0" y="0"/>
                   </a:moveTo>
                   <a:lnTo>
-                    <a:pt x="7799693" y="0"/>
-                  </a:lnTo>
-                  <a:lnTo>
-                    <a:pt x="7799693" y="0"/>
+                    <a:pt x="7660515" y="0"/>
+                  </a:lnTo>
+                  <a:lnTo>
+                    <a:pt x="7660515" y="0"/>
                   </a:lnTo>
                 </a:path>
               </a:pathLst>
@@ -2744,21 +2736,21 @@
           </p:nvSpPr>
           <p:spPr>
             <a:xfrm>
-              <a:off x="817517" y="3068859"/>
-              <a:ext cx="7799693" cy="0"/>
+              <a:off x="887106" y="2801626"/>
+              <a:ext cx="7660515" cy="0"/>
             </a:xfrm>
             <a:custGeom>
               <a:avLst/>
               <a:pathLst>
-                <a:path w="7799693" h="0">
+                <a:path w="7660515" h="0">
                   <a:moveTo>
                     <a:pt x="0" y="0"/>
                   </a:moveTo>
                   <a:lnTo>
-                    <a:pt x="7799693" y="0"/>
-                  </a:lnTo>
-                  <a:lnTo>
-                    <a:pt x="7799693" y="0"/>
+                    <a:pt x="7660515" y="0"/>
+                  </a:lnTo>
+                  <a:lnTo>
+                    <a:pt x="7660515" y="0"/>
                   </a:lnTo>
                 </a:path>
               </a:pathLst>
@@ -2787,21 +2779,21 @@
           </p:nvSpPr>
           <p:spPr>
             <a:xfrm>
-              <a:off x="817517" y="2239395"/>
-              <a:ext cx="7799693" cy="0"/>
+              <a:off x="887106" y="2502292"/>
+              <a:ext cx="7660515" cy="0"/>
             </a:xfrm>
             <a:custGeom>
               <a:avLst/>
               <a:pathLst>
-                <a:path w="7799693" h="0">
+                <a:path w="7660515" h="0">
                   <a:moveTo>
                     <a:pt x="0" y="0"/>
                   </a:moveTo>
                   <a:lnTo>
-                    <a:pt x="7799693" y="0"/>
-                  </a:lnTo>
-                  <a:lnTo>
-                    <a:pt x="7799693" y="0"/>
+                    <a:pt x="7660515" y="0"/>
+                  </a:lnTo>
+                  <a:lnTo>
+                    <a:pt x="7660515" y="0"/>
                   </a:lnTo>
                 </a:path>
               </a:pathLst>
@@ -2830,21 +2822,21 @@
           </p:nvSpPr>
           <p:spPr>
             <a:xfrm>
-              <a:off x="2502671" y="2073503"/>
-              <a:ext cx="0" cy="3649639"/>
+              <a:off x="887106" y="2202958"/>
+              <a:ext cx="7660515" cy="0"/>
             </a:xfrm>
             <a:custGeom>
               <a:avLst/>
               <a:pathLst>
-                <a:path w="0" h="3649639">
+                <a:path w="7660515" h="0">
                   <a:moveTo>
-                    <a:pt x="0" y="3649639"/>
+                    <a:pt x="0" y="0"/>
                   </a:moveTo>
                   <a:lnTo>
-                    <a:pt x="0" y="0"/>
-                  </a:lnTo>
-                  <a:lnTo>
-                    <a:pt x="0" y="0"/>
+                    <a:pt x="7660515" y="0"/>
+                  </a:lnTo>
+                  <a:lnTo>
+                    <a:pt x="7660515" y="0"/>
                   </a:lnTo>
                 </a:path>
               </a:pathLst>
@@ -2873,15 +2865,15 @@
           </p:nvSpPr>
           <p:spPr>
             <a:xfrm>
-              <a:off x="4573628" y="2073503"/>
-              <a:ext cx="0" cy="3649639"/>
+              <a:off x="2542190" y="2143092"/>
+              <a:ext cx="0" cy="1317069"/>
             </a:xfrm>
             <a:custGeom>
               <a:avLst/>
               <a:pathLst>
-                <a:path w="0" h="3649639">
+                <a:path w="0" h="1317069">
                   <a:moveTo>
-                    <a:pt x="0" y="3649639"/>
+                    <a:pt x="0" y="1317069"/>
                   </a:moveTo>
                   <a:lnTo>
                     <a:pt x="0" y="0"/>
@@ -2916,15 +2908,15 @@
           </p:nvSpPr>
           <p:spPr>
             <a:xfrm>
-              <a:off x="6644586" y="2073503"/>
-              <a:ext cx="0" cy="3649639"/>
+              <a:off x="4576193" y="2143092"/>
+              <a:ext cx="0" cy="1317069"/>
             </a:xfrm>
             <a:custGeom>
               <a:avLst/>
               <a:pathLst>
-                <a:path w="0" h="3649639">
+                <a:path w="0" h="1317069">
                   <a:moveTo>
-                    <a:pt x="0" y="3649639"/>
+                    <a:pt x="0" y="1317069"/>
                   </a:moveTo>
                   <a:lnTo>
                     <a:pt x="0" y="0"/>
@@ -2953,573 +2945,616 @@
         </p:sp>
         <p:sp>
           <p:nvSpPr>
-            <p:cNvPr id="20" name="pg20"/>
+            <p:cNvPr id="20" name="pl20"/>
             <p:cNvSpPr/>
             <p:nvPr/>
           </p:nvSpPr>
           <p:spPr>
             <a:xfrm>
-              <a:off x="1172049" y="2073503"/>
-              <a:ext cx="7090630" cy="3408327"/>
+              <a:off x="6610197" y="2143092"/>
+              <a:ext cx="0" cy="1317069"/>
             </a:xfrm>
             <a:custGeom>
               <a:avLst/>
               <a:pathLst>
-                <a:path w="7090630" h="3408327">
+                <a:path w="0" h="1317069">
                   <a:moveTo>
-                    <a:pt x="1119380" y="0"/>
+                    <a:pt x="0" y="1317069"/>
                   </a:moveTo>
                   <a:lnTo>
-                    <a:pt x="1145960" y="59775"/>
-                  </a:lnTo>
-                  <a:lnTo>
-                    <a:pt x="1217582" y="213611"/>
-                  </a:lnTo>
-                  <a:lnTo>
-                    <a:pt x="1289205" y="360536"/>
-                  </a:lnTo>
-                  <a:lnTo>
-                    <a:pt x="1360827" y="500859"/>
-                  </a:lnTo>
-                  <a:lnTo>
-                    <a:pt x="1432450" y="634878"/>
-                  </a:lnTo>
-                  <a:lnTo>
-                    <a:pt x="1504073" y="762875"/>
-                  </a:lnTo>
-                  <a:lnTo>
-                    <a:pt x="1575695" y="885122"/>
-                  </a:lnTo>
-                  <a:lnTo>
-                    <a:pt x="1647318" y="1001876"/>
-                  </a:lnTo>
-                  <a:lnTo>
-                    <a:pt x="1718940" y="1113384"/>
-                  </a:lnTo>
-                  <a:lnTo>
-                    <a:pt x="1790563" y="1219883"/>
-                  </a:lnTo>
-                  <a:lnTo>
-                    <a:pt x="1862185" y="1321596"/>
-                  </a:lnTo>
-                  <a:lnTo>
-                    <a:pt x="1933808" y="1418740"/>
-                  </a:lnTo>
-                  <a:lnTo>
-                    <a:pt x="2005430" y="1511519"/>
-                  </a:lnTo>
-                  <a:lnTo>
-                    <a:pt x="2077053" y="1600130"/>
-                  </a:lnTo>
-                  <a:lnTo>
-                    <a:pt x="2148675" y="1684759"/>
-                  </a:lnTo>
-                  <a:lnTo>
-                    <a:pt x="2220298" y="1765586"/>
-                  </a:lnTo>
-                  <a:lnTo>
-                    <a:pt x="2291920" y="1842782"/>
-                  </a:lnTo>
-                  <a:lnTo>
-                    <a:pt x="2363543" y="1916509"/>
-                  </a:lnTo>
-                  <a:lnTo>
-                    <a:pt x="2435165" y="1986924"/>
-                  </a:lnTo>
-                  <a:lnTo>
-                    <a:pt x="2506788" y="2054175"/>
-                  </a:lnTo>
-                  <a:lnTo>
-                    <a:pt x="2578410" y="2118404"/>
-                  </a:lnTo>
-                  <a:lnTo>
-                    <a:pt x="2650033" y="2179748"/>
-                  </a:lnTo>
-                  <a:lnTo>
-                    <a:pt x="2721655" y="2238335"/>
-                  </a:lnTo>
-                  <a:lnTo>
-                    <a:pt x="2793278" y="2294291"/>
-                  </a:lnTo>
-                  <a:lnTo>
-                    <a:pt x="2864901" y="2347732"/>
-                  </a:lnTo>
-                  <a:lnTo>
-                    <a:pt x="2936523" y="2398772"/>
-                  </a:lnTo>
-                  <a:lnTo>
-                    <a:pt x="3008146" y="2447519"/>
-                  </a:lnTo>
-                  <a:lnTo>
-                    <a:pt x="3079768" y="2494076"/>
-                  </a:lnTo>
-                  <a:lnTo>
-                    <a:pt x="3151391" y="2538541"/>
-                  </a:lnTo>
-                  <a:lnTo>
-                    <a:pt x="3223013" y="2581008"/>
-                  </a:lnTo>
-                  <a:lnTo>
-                    <a:pt x="3294636" y="2621568"/>
-                  </a:lnTo>
-                  <a:lnTo>
-                    <a:pt x="3366258" y="2656696"/>
-                  </a:lnTo>
-                  <a:lnTo>
-                    <a:pt x="3437881" y="2671761"/>
-                  </a:lnTo>
-                  <a:lnTo>
-                    <a:pt x="3509503" y="2686551"/>
-                  </a:lnTo>
-                  <a:lnTo>
-                    <a:pt x="3581126" y="2701071"/>
-                  </a:lnTo>
-                  <a:lnTo>
-                    <a:pt x="3652748" y="2715327"/>
-                  </a:lnTo>
-                  <a:lnTo>
-                    <a:pt x="3724371" y="2729324"/>
-                  </a:lnTo>
-                  <a:lnTo>
-                    <a:pt x="3795993" y="2743065"/>
-                  </a:lnTo>
-                  <a:lnTo>
-                    <a:pt x="3867616" y="2756557"/>
-                  </a:lnTo>
-                  <a:lnTo>
-                    <a:pt x="3939238" y="2769802"/>
-                  </a:lnTo>
-                  <a:lnTo>
-                    <a:pt x="4010861" y="2782806"/>
-                  </a:lnTo>
-                  <a:lnTo>
-                    <a:pt x="4082483" y="2795574"/>
-                  </a:lnTo>
-                  <a:lnTo>
-                    <a:pt x="4154106" y="2808109"/>
-                  </a:lnTo>
-                  <a:lnTo>
-                    <a:pt x="4225729" y="2820415"/>
-                  </a:lnTo>
-                  <a:lnTo>
-                    <a:pt x="4297351" y="2832497"/>
-                  </a:lnTo>
-                  <a:lnTo>
-                    <a:pt x="4368974" y="2844360"/>
-                  </a:lnTo>
-                  <a:lnTo>
-                    <a:pt x="4440596" y="2856006"/>
-                  </a:lnTo>
-                  <a:lnTo>
-                    <a:pt x="4512219" y="2867440"/>
-                  </a:lnTo>
-                  <a:lnTo>
-                    <a:pt x="4583841" y="2878666"/>
-                  </a:lnTo>
-                  <a:lnTo>
-                    <a:pt x="4655464" y="2889687"/>
-                  </a:lnTo>
-                  <a:lnTo>
-                    <a:pt x="4727086" y="2900508"/>
-                  </a:lnTo>
-                  <a:lnTo>
-                    <a:pt x="4798709" y="2911131"/>
-                  </a:lnTo>
-                  <a:lnTo>
-                    <a:pt x="4870331" y="2921561"/>
-                  </a:lnTo>
-                  <a:lnTo>
-                    <a:pt x="4941954" y="2931801"/>
-                  </a:lnTo>
-                  <a:lnTo>
-                    <a:pt x="5013576" y="2941855"/>
-                  </a:lnTo>
-                  <a:lnTo>
-                    <a:pt x="5085199" y="2951725"/>
-                  </a:lnTo>
-                  <a:lnTo>
-                    <a:pt x="5156821" y="2961416"/>
-                  </a:lnTo>
-                  <a:lnTo>
-                    <a:pt x="5228444" y="2970930"/>
-                  </a:lnTo>
-                  <a:lnTo>
-                    <a:pt x="5300066" y="2980271"/>
-                  </a:lnTo>
-                  <a:lnTo>
-                    <a:pt x="5371689" y="2989441"/>
-                  </a:lnTo>
-                  <a:lnTo>
-                    <a:pt x="5443311" y="2998445"/>
-                  </a:lnTo>
-                  <a:lnTo>
-                    <a:pt x="5514934" y="3007284"/>
-                  </a:lnTo>
-                  <a:lnTo>
-                    <a:pt x="5586557" y="3015963"/>
-                  </a:lnTo>
-                  <a:lnTo>
-                    <a:pt x="5658179" y="3024483"/>
-                  </a:lnTo>
-                  <a:lnTo>
-                    <a:pt x="5729802" y="3032849"/>
-                  </a:lnTo>
-                  <a:lnTo>
-                    <a:pt x="5801424" y="3041062"/>
-                  </a:lnTo>
-                  <a:lnTo>
-                    <a:pt x="5873047" y="3049125"/>
-                  </a:lnTo>
-                  <a:lnTo>
-                    <a:pt x="5944669" y="3057042"/>
-                  </a:lnTo>
-                  <a:lnTo>
-                    <a:pt x="6016292" y="3064814"/>
-                  </a:lnTo>
-                  <a:lnTo>
-                    <a:pt x="6087914" y="3072445"/>
-                  </a:lnTo>
-                  <a:lnTo>
-                    <a:pt x="6159537" y="3079936"/>
-                  </a:lnTo>
-                  <a:lnTo>
-                    <a:pt x="6231159" y="3087291"/>
-                  </a:lnTo>
-                  <a:lnTo>
-                    <a:pt x="6302782" y="3094513"/>
-                  </a:lnTo>
-                  <a:lnTo>
-                    <a:pt x="6374404" y="3101603"/>
-                  </a:lnTo>
-                  <a:lnTo>
-                    <a:pt x="6446027" y="3108563"/>
-                  </a:lnTo>
-                  <a:lnTo>
-                    <a:pt x="6517649" y="3115397"/>
-                  </a:lnTo>
-                  <a:lnTo>
-                    <a:pt x="6589272" y="3122106"/>
-                  </a:lnTo>
-                  <a:lnTo>
-                    <a:pt x="6660894" y="3128693"/>
-                  </a:lnTo>
-                  <a:lnTo>
-                    <a:pt x="6732517" y="3135161"/>
-                  </a:lnTo>
-                  <a:lnTo>
-                    <a:pt x="6804139" y="3141510"/>
-                  </a:lnTo>
-                  <a:lnTo>
-                    <a:pt x="6875762" y="3147744"/>
-                  </a:lnTo>
-                  <a:lnTo>
-                    <a:pt x="6947385" y="3153864"/>
-                  </a:lnTo>
-                  <a:lnTo>
-                    <a:pt x="7019007" y="3159873"/>
-                  </a:lnTo>
-                  <a:lnTo>
-                    <a:pt x="7090630" y="3165772"/>
-                  </a:lnTo>
-                  <a:lnTo>
-                    <a:pt x="7090630" y="3408327"/>
-                  </a:lnTo>
-                  <a:lnTo>
-                    <a:pt x="7019007" y="3404779"/>
-                  </a:lnTo>
-                  <a:lnTo>
-                    <a:pt x="6947385" y="3401064"/>
-                  </a:lnTo>
-                  <a:lnTo>
-                    <a:pt x="6875762" y="3397175"/>
-                  </a:lnTo>
-                  <a:lnTo>
-                    <a:pt x="6804139" y="3393102"/>
-                  </a:lnTo>
-                  <a:lnTo>
-                    <a:pt x="6732517" y="3388838"/>
-                  </a:lnTo>
-                  <a:lnTo>
-                    <a:pt x="6660894" y="3384373"/>
-                  </a:lnTo>
-                  <a:lnTo>
-                    <a:pt x="6589272" y="3379698"/>
-                  </a:lnTo>
-                  <a:lnTo>
-                    <a:pt x="6517649" y="3374804"/>
-                  </a:lnTo>
-                  <a:lnTo>
-                    <a:pt x="6446027" y="3369679"/>
-                  </a:lnTo>
-                  <a:lnTo>
-                    <a:pt x="6374404" y="3364313"/>
-                  </a:lnTo>
-                  <a:lnTo>
-                    <a:pt x="6302782" y="3358694"/>
-                  </a:lnTo>
-                  <a:lnTo>
-                    <a:pt x="6231159" y="3352811"/>
-                  </a:lnTo>
-                  <a:lnTo>
-                    <a:pt x="6159537" y="3346652"/>
-                  </a:lnTo>
-                  <a:lnTo>
-                    <a:pt x="6087914" y="3340203"/>
-                  </a:lnTo>
-                  <a:lnTo>
-                    <a:pt x="6016292" y="3333450"/>
-                  </a:lnTo>
-                  <a:lnTo>
-                    <a:pt x="5944669" y="3326380"/>
-                  </a:lnTo>
-                  <a:lnTo>
-                    <a:pt x="5873047" y="3318977"/>
-                  </a:lnTo>
-                  <a:lnTo>
-                    <a:pt x="5801424" y="3311225"/>
-                  </a:lnTo>
-                  <a:lnTo>
-                    <a:pt x="5729802" y="3303109"/>
-                  </a:lnTo>
-                  <a:lnTo>
-                    <a:pt x="5658179" y="3294612"/>
-                  </a:lnTo>
-                  <a:lnTo>
-                    <a:pt x="5586557" y="3285714"/>
-                  </a:lnTo>
-                  <a:lnTo>
-                    <a:pt x="5514934" y="3276398"/>
-                  </a:lnTo>
-                  <a:lnTo>
-                    <a:pt x="5443311" y="3266644"/>
-                  </a:lnTo>
-                  <a:lnTo>
-                    <a:pt x="5371689" y="3256431"/>
-                  </a:lnTo>
-                  <a:lnTo>
-                    <a:pt x="5300066" y="3245737"/>
-                  </a:lnTo>
-                  <a:lnTo>
-                    <a:pt x="5228444" y="3234541"/>
-                  </a:lnTo>
-                  <a:lnTo>
-                    <a:pt x="5156821" y="3222818"/>
-                  </a:lnTo>
-                  <a:lnTo>
-                    <a:pt x="5085199" y="3210543"/>
-                  </a:lnTo>
-                  <a:lnTo>
-                    <a:pt x="5013576" y="3197690"/>
-                  </a:lnTo>
-                  <a:lnTo>
-                    <a:pt x="4941954" y="3184234"/>
-                  </a:lnTo>
-                  <a:lnTo>
-                    <a:pt x="4870331" y="3170144"/>
-                  </a:lnTo>
-                  <a:lnTo>
-                    <a:pt x="4798709" y="3155391"/>
-                  </a:lnTo>
-                  <a:lnTo>
-                    <a:pt x="4727086" y="3139944"/>
-                  </a:lnTo>
-                  <a:lnTo>
-                    <a:pt x="4655464" y="3123771"/>
-                  </a:lnTo>
-                  <a:lnTo>
-                    <a:pt x="4583841" y="3106837"/>
-                  </a:lnTo>
-                  <a:lnTo>
-                    <a:pt x="4512219" y="3089106"/>
-                  </a:lnTo>
-                  <a:lnTo>
-                    <a:pt x="4440596" y="3070541"/>
-                  </a:lnTo>
-                  <a:lnTo>
-                    <a:pt x="4368974" y="3051102"/>
-                  </a:lnTo>
-                  <a:lnTo>
-                    <a:pt x="4297351" y="3030749"/>
-                  </a:lnTo>
-                  <a:lnTo>
-                    <a:pt x="4225729" y="3009439"/>
-                  </a:lnTo>
-                  <a:lnTo>
-                    <a:pt x="4154106" y="2987127"/>
-                  </a:lnTo>
-                  <a:lnTo>
-                    <a:pt x="4082483" y="2963764"/>
-                  </a:lnTo>
-                  <a:lnTo>
-                    <a:pt x="4010861" y="2939303"/>
-                  </a:lnTo>
-                  <a:lnTo>
-                    <a:pt x="3939238" y="2913691"/>
-                  </a:lnTo>
-                  <a:lnTo>
-                    <a:pt x="3867616" y="2886874"/>
-                  </a:lnTo>
-                  <a:lnTo>
-                    <a:pt x="3795993" y="2858795"/>
-                  </a:lnTo>
-                  <a:lnTo>
-                    <a:pt x="3724371" y="2829396"/>
-                  </a:lnTo>
-                  <a:lnTo>
-                    <a:pt x="3652748" y="2798613"/>
-                  </a:lnTo>
-                  <a:lnTo>
-                    <a:pt x="3581126" y="2766382"/>
-                  </a:lnTo>
-                  <a:lnTo>
-                    <a:pt x="3509503" y="2732636"/>
-                  </a:lnTo>
-                  <a:lnTo>
-                    <a:pt x="3437881" y="2697301"/>
-                  </a:lnTo>
-                  <a:lnTo>
-                    <a:pt x="3366258" y="2660305"/>
-                  </a:lnTo>
-                  <a:lnTo>
-                    <a:pt x="3294636" y="2641352"/>
-                  </a:lnTo>
-                  <a:lnTo>
-                    <a:pt x="3223013" y="2625724"/>
-                  </a:lnTo>
-                  <a:lnTo>
-                    <a:pt x="3151391" y="2609805"/>
-                  </a:lnTo>
-                  <a:lnTo>
-                    <a:pt x="3079768" y="2593591"/>
-                  </a:lnTo>
-                  <a:lnTo>
-                    <a:pt x="3008146" y="2577077"/>
-                  </a:lnTo>
-                  <a:lnTo>
-                    <a:pt x="2936523" y="2560256"/>
-                  </a:lnTo>
-                  <a:lnTo>
-                    <a:pt x="2864901" y="2543122"/>
-                  </a:lnTo>
-                  <a:lnTo>
-                    <a:pt x="2793278" y="2525671"/>
-                  </a:lnTo>
-                  <a:lnTo>
-                    <a:pt x="2721655" y="2507897"/>
-                  </a:lnTo>
-                  <a:lnTo>
-                    <a:pt x="2650033" y="2489792"/>
-                  </a:lnTo>
-                  <a:lnTo>
-                    <a:pt x="2578410" y="2471352"/>
-                  </a:lnTo>
-                  <a:lnTo>
-                    <a:pt x="2506788" y="2452569"/>
-                  </a:lnTo>
-                  <a:lnTo>
-                    <a:pt x="2435165" y="2433438"/>
-                  </a:lnTo>
-                  <a:lnTo>
-                    <a:pt x="2363543" y="2413952"/>
-                  </a:lnTo>
-                  <a:lnTo>
-                    <a:pt x="2291920" y="2394105"/>
-                  </a:lnTo>
-                  <a:lnTo>
-                    <a:pt x="2220298" y="2373889"/>
-                  </a:lnTo>
-                  <a:lnTo>
-                    <a:pt x="2148675" y="2353298"/>
-                  </a:lnTo>
-                  <a:lnTo>
-                    <a:pt x="2077053" y="2332326"/>
-                  </a:lnTo>
-                  <a:lnTo>
-                    <a:pt x="2005430" y="2310964"/>
-                  </a:lnTo>
-                  <a:lnTo>
-                    <a:pt x="1933808" y="2289206"/>
-                  </a:lnTo>
-                  <a:lnTo>
-                    <a:pt x="1862185" y="2267044"/>
-                  </a:lnTo>
-                  <a:lnTo>
-                    <a:pt x="1790563" y="2244471"/>
-                  </a:lnTo>
-                  <a:lnTo>
-                    <a:pt x="1718940" y="2221479"/>
-                  </a:lnTo>
-                  <a:lnTo>
-                    <a:pt x="1647318" y="2198061"/>
-                  </a:lnTo>
-                  <a:lnTo>
-                    <a:pt x="1575695" y="2174208"/>
-                  </a:lnTo>
-                  <a:lnTo>
-                    <a:pt x="1504073" y="2149913"/>
-                  </a:lnTo>
-                  <a:lnTo>
-                    <a:pt x="1432450" y="2125167"/>
-                  </a:lnTo>
-                  <a:lnTo>
-                    <a:pt x="1360827" y="2099962"/>
-                  </a:lnTo>
-                  <a:lnTo>
-                    <a:pt x="1289205" y="2074289"/>
-                  </a:lnTo>
-                  <a:lnTo>
-                    <a:pt x="1217582" y="2048140"/>
-                  </a:lnTo>
-                  <a:lnTo>
-                    <a:pt x="1145960" y="2021506"/>
-                  </a:lnTo>
-                  <a:lnTo>
-                    <a:pt x="1074337" y="1994377"/>
-                  </a:lnTo>
-                  <a:lnTo>
-                    <a:pt x="1002715" y="1966746"/>
-                  </a:lnTo>
-                  <a:lnTo>
-                    <a:pt x="931092" y="1938601"/>
-                  </a:lnTo>
-                  <a:lnTo>
-                    <a:pt x="859470" y="1909935"/>
-                  </a:lnTo>
-                  <a:lnTo>
-                    <a:pt x="787847" y="1880737"/>
-                  </a:lnTo>
-                  <a:lnTo>
-                    <a:pt x="716225" y="1850997"/>
-                  </a:lnTo>
-                  <a:lnTo>
-                    <a:pt x="644602" y="1820705"/>
-                  </a:lnTo>
-                  <a:lnTo>
-                    <a:pt x="572980" y="1789851"/>
-                  </a:lnTo>
-                  <a:lnTo>
-                    <a:pt x="501357" y="1758425"/>
-                  </a:lnTo>
-                  <a:lnTo>
-                    <a:pt x="429735" y="1726416"/>
-                  </a:lnTo>
-                  <a:lnTo>
-                    <a:pt x="358112" y="1693813"/>
-                  </a:lnTo>
-                  <a:lnTo>
-                    <a:pt x="286490" y="1660605"/>
-                  </a:lnTo>
-                  <a:lnTo>
-                    <a:pt x="214867" y="1626781"/>
-                  </a:lnTo>
-                  <a:lnTo>
-                    <a:pt x="143245" y="1592330"/>
-                  </a:lnTo>
-                  <a:lnTo>
-                    <a:pt x="71622" y="1557239"/>
-                  </a:lnTo>
-                  <a:lnTo>
-                    <a:pt x="0" y="1521497"/>
+                    <a:pt x="0" y="0"/>
+                  </a:lnTo>
+                  <a:lnTo>
+                    <a:pt x="0" y="0"/>
+                  </a:lnTo>
+                </a:path>
+              </a:pathLst>
+            </a:custGeom>
+            <a:ln w="13550" cap="flat">
+              <a:solidFill>
+                <a:srgbClr val="EBEBEB">
+                  <a:alpha val="100000"/>
+                </a:srgbClr>
+              </a:solidFill>
+              <a:prstDash val="solid"/>
+              <a:round/>
+            </a:ln>
+          </p:spPr>
+          <p:txBody>
+            <a:bodyPr/>
+            <a:lstStyle/>
+            <a:p/>
+          </p:txBody>
+        </p:sp>
+        <p:sp>
+          <p:nvSpPr>
+            <p:cNvPr id="21" name="pg21"/>
+            <p:cNvSpPr/>
+            <p:nvPr/>
+          </p:nvSpPr>
+          <p:spPr>
+            <a:xfrm>
+              <a:off x="1235312" y="2143092"/>
+              <a:ext cx="6964104" cy="1229985"/>
+            </a:xfrm>
+            <a:custGeom>
+              <a:avLst/>
+              <a:pathLst>
+                <a:path w="6964104" h="1229985">
+                  <a:moveTo>
+                    <a:pt x="1099406" y="0"/>
+                  </a:moveTo>
+                  <a:lnTo>
+                    <a:pt x="1125511" y="21571"/>
+                  </a:lnTo>
+                  <a:lnTo>
+                    <a:pt x="1195856" y="77087"/>
+                  </a:lnTo>
+                  <a:lnTo>
+                    <a:pt x="1266200" y="130109"/>
+                  </a:lnTo>
+                  <a:lnTo>
+                    <a:pt x="1336545" y="180748"/>
+                  </a:lnTo>
+                  <a:lnTo>
+                    <a:pt x="1406889" y="229112"/>
+                  </a:lnTo>
+                  <a:lnTo>
+                    <a:pt x="1477234" y="275303"/>
+                  </a:lnTo>
+                  <a:lnTo>
+                    <a:pt x="1547578" y="319419"/>
+                  </a:lnTo>
+                  <a:lnTo>
+                    <a:pt x="1617923" y="361553"/>
+                  </a:lnTo>
+                  <a:lnTo>
+                    <a:pt x="1688267" y="401794"/>
+                  </a:lnTo>
+                  <a:lnTo>
+                    <a:pt x="1758612" y="440227"/>
+                  </a:lnTo>
+                  <a:lnTo>
+                    <a:pt x="1828956" y="476933"/>
+                  </a:lnTo>
+                  <a:lnTo>
+                    <a:pt x="1899301" y="511990"/>
+                  </a:lnTo>
+                  <a:lnTo>
+                    <a:pt x="1969645" y="545471"/>
+                  </a:lnTo>
+                  <a:lnTo>
+                    <a:pt x="2039990" y="577449"/>
+                  </a:lnTo>
+                  <a:lnTo>
+                    <a:pt x="2110334" y="607990"/>
+                  </a:lnTo>
+                  <a:lnTo>
+                    <a:pt x="2180679" y="637158"/>
+                  </a:lnTo>
+                  <a:lnTo>
+                    <a:pt x="2251023" y="665016"/>
+                  </a:lnTo>
+                  <a:lnTo>
+                    <a:pt x="2321368" y="691623"/>
+                  </a:lnTo>
+                  <a:lnTo>
+                    <a:pt x="2391712" y="717034"/>
+                  </a:lnTo>
+                  <a:lnTo>
+                    <a:pt x="2462057" y="741303"/>
+                  </a:lnTo>
+                  <a:lnTo>
+                    <a:pt x="2532401" y="764482"/>
+                  </a:lnTo>
+                  <a:lnTo>
+                    <a:pt x="2602746" y="786619"/>
+                  </a:lnTo>
+                  <a:lnTo>
+                    <a:pt x="2673090" y="807762"/>
+                  </a:lnTo>
+                  <a:lnTo>
+                    <a:pt x="2743435" y="827955"/>
+                  </a:lnTo>
+                  <a:lnTo>
+                    <a:pt x="2813779" y="847241"/>
+                  </a:lnTo>
+                  <a:lnTo>
+                    <a:pt x="2884124" y="865660"/>
+                  </a:lnTo>
+                  <a:lnTo>
+                    <a:pt x="2954468" y="883252"/>
+                  </a:lnTo>
+                  <a:lnTo>
+                    <a:pt x="3024813" y="900053"/>
+                  </a:lnTo>
+                  <a:lnTo>
+                    <a:pt x="3095157" y="916099"/>
+                  </a:lnTo>
+                  <a:lnTo>
+                    <a:pt x="3165502" y="931425"/>
+                  </a:lnTo>
+                  <a:lnTo>
+                    <a:pt x="3235846" y="946062"/>
+                  </a:lnTo>
+                  <a:lnTo>
+                    <a:pt x="3306191" y="958739"/>
+                  </a:lnTo>
+                  <a:lnTo>
+                    <a:pt x="3376535" y="964175"/>
+                  </a:lnTo>
+                  <a:lnTo>
+                    <a:pt x="3446880" y="969513"/>
+                  </a:lnTo>
+                  <a:lnTo>
+                    <a:pt x="3517224" y="974753"/>
+                  </a:lnTo>
+                  <a:lnTo>
+                    <a:pt x="3587569" y="979897"/>
+                  </a:lnTo>
+                  <a:lnTo>
+                    <a:pt x="3657913" y="984948"/>
+                  </a:lnTo>
+                  <a:lnTo>
+                    <a:pt x="3728257" y="989907"/>
+                  </a:lnTo>
+                  <a:lnTo>
+                    <a:pt x="3798602" y="994776"/>
+                  </a:lnTo>
+                  <a:lnTo>
+                    <a:pt x="3868946" y="999556"/>
+                  </a:lnTo>
+                  <a:lnTo>
+                    <a:pt x="3939291" y="1004249"/>
+                  </a:lnTo>
+                  <a:lnTo>
+                    <a:pt x="4009635" y="1008857"/>
+                  </a:lnTo>
+                  <a:lnTo>
+                    <a:pt x="4079980" y="1013380"/>
+                  </a:lnTo>
+                  <a:lnTo>
+                    <a:pt x="4150324" y="1017821"/>
+                  </a:lnTo>
+                  <a:lnTo>
+                    <a:pt x="4220669" y="1022181"/>
+                  </a:lnTo>
+                  <a:lnTo>
+                    <a:pt x="4291013" y="1026462"/>
+                  </a:lnTo>
+                  <a:lnTo>
+                    <a:pt x="4361358" y="1030665"/>
+                  </a:lnTo>
+                  <a:lnTo>
+                    <a:pt x="4431702" y="1034791"/>
+                  </a:lnTo>
+                  <a:lnTo>
+                    <a:pt x="4502047" y="1038842"/>
+                  </a:lnTo>
+                  <a:lnTo>
+                    <a:pt x="4572391" y="1042820"/>
+                  </a:lnTo>
+                  <a:lnTo>
+                    <a:pt x="4642736" y="1046725"/>
+                  </a:lnTo>
+                  <a:lnTo>
+                    <a:pt x="4713080" y="1050558"/>
+                  </a:lnTo>
+                  <a:lnTo>
+                    <a:pt x="4783425" y="1054322"/>
+                  </a:lnTo>
+                  <a:lnTo>
+                    <a:pt x="4853769" y="1058018"/>
+                  </a:lnTo>
+                  <a:lnTo>
+                    <a:pt x="4924114" y="1061646"/>
+                  </a:lnTo>
+                  <a:lnTo>
+                    <a:pt x="4994458" y="1065208"/>
+                  </a:lnTo>
+                  <a:lnTo>
+                    <a:pt x="5064803" y="1068705"/>
+                  </a:lnTo>
+                  <a:lnTo>
+                    <a:pt x="5135147" y="1072138"/>
+                  </a:lnTo>
+                  <a:lnTo>
+                    <a:pt x="5205492" y="1075509"/>
+                  </a:lnTo>
+                  <a:lnTo>
+                    <a:pt x="5275836" y="1078819"/>
+                  </a:lnTo>
+                  <a:lnTo>
+                    <a:pt x="5346181" y="1082068"/>
+                  </a:lnTo>
+                  <a:lnTo>
+                    <a:pt x="5416525" y="1085258"/>
+                  </a:lnTo>
+                  <a:lnTo>
+                    <a:pt x="5486870" y="1088390"/>
+                  </a:lnTo>
+                  <a:lnTo>
+                    <a:pt x="5557214" y="1091465"/>
+                  </a:lnTo>
+                  <a:lnTo>
+                    <a:pt x="5627559" y="1094483"/>
+                  </a:lnTo>
+                  <a:lnTo>
+                    <a:pt x="5697903" y="1097447"/>
+                  </a:lnTo>
+                  <a:lnTo>
+                    <a:pt x="5768248" y="1100357"/>
+                  </a:lnTo>
+                  <a:lnTo>
+                    <a:pt x="5838592" y="1103214"/>
+                  </a:lnTo>
+                  <a:lnTo>
+                    <a:pt x="5908937" y="1106019"/>
+                  </a:lnTo>
+                  <a:lnTo>
+                    <a:pt x="5979281" y="1108773"/>
+                  </a:lnTo>
+                  <a:lnTo>
+                    <a:pt x="6049626" y="1111476"/>
+                  </a:lnTo>
+                  <a:lnTo>
+                    <a:pt x="6119970" y="1114131"/>
+                  </a:lnTo>
+                  <a:lnTo>
+                    <a:pt x="6190315" y="1116737"/>
+                  </a:lnTo>
+                  <a:lnTo>
+                    <a:pt x="6260659" y="1119295"/>
+                  </a:lnTo>
+                  <a:lnTo>
+                    <a:pt x="6331004" y="1121807"/>
+                  </a:lnTo>
+                  <a:lnTo>
+                    <a:pt x="6401348" y="1124273"/>
+                  </a:lnTo>
+                  <a:lnTo>
+                    <a:pt x="6471693" y="1126694"/>
+                  </a:lnTo>
+                  <a:lnTo>
+                    <a:pt x="6542037" y="1129072"/>
+                  </a:lnTo>
+                  <a:lnTo>
+                    <a:pt x="6612382" y="1131405"/>
+                  </a:lnTo>
+                  <a:lnTo>
+                    <a:pt x="6682726" y="1133697"/>
+                  </a:lnTo>
+                  <a:lnTo>
+                    <a:pt x="6753071" y="1135946"/>
+                  </a:lnTo>
+                  <a:lnTo>
+                    <a:pt x="6823415" y="1138155"/>
+                  </a:lnTo>
+                  <a:lnTo>
+                    <a:pt x="6893760" y="1140323"/>
+                  </a:lnTo>
+                  <a:lnTo>
+                    <a:pt x="6964104" y="1142452"/>
+                  </a:lnTo>
+                  <a:lnTo>
+                    <a:pt x="6964104" y="1229985"/>
+                  </a:lnTo>
+                  <a:lnTo>
+                    <a:pt x="6893760" y="1228704"/>
+                  </a:lnTo>
+                  <a:lnTo>
+                    <a:pt x="6823415" y="1227364"/>
+                  </a:lnTo>
+                  <a:lnTo>
+                    <a:pt x="6753071" y="1225960"/>
+                  </a:lnTo>
+                  <a:lnTo>
+                    <a:pt x="6682726" y="1224490"/>
+                  </a:lnTo>
+                  <a:lnTo>
+                    <a:pt x="6612382" y="1222952"/>
+                  </a:lnTo>
+                  <a:lnTo>
+                    <a:pt x="6542037" y="1221340"/>
+                  </a:lnTo>
+                  <a:lnTo>
+                    <a:pt x="6471693" y="1219653"/>
+                  </a:lnTo>
+                  <a:lnTo>
+                    <a:pt x="6401348" y="1217887"/>
+                  </a:lnTo>
+                  <a:lnTo>
+                    <a:pt x="6331004" y="1216037"/>
+                  </a:lnTo>
+                  <a:lnTo>
+                    <a:pt x="6260659" y="1214101"/>
+                  </a:lnTo>
+                  <a:lnTo>
+                    <a:pt x="6190315" y="1212073"/>
+                  </a:lnTo>
+                  <a:lnTo>
+                    <a:pt x="6119970" y="1209950"/>
+                  </a:lnTo>
+                  <a:lnTo>
+                    <a:pt x="6049626" y="1207728"/>
+                  </a:lnTo>
+                  <a:lnTo>
+                    <a:pt x="5979281" y="1205400"/>
+                  </a:lnTo>
+                  <a:lnTo>
+                    <a:pt x="5908937" y="1202963"/>
+                  </a:lnTo>
+                  <a:lnTo>
+                    <a:pt x="5838592" y="1200412"/>
+                  </a:lnTo>
+                  <a:lnTo>
+                    <a:pt x="5768248" y="1197740"/>
+                  </a:lnTo>
+                  <a:lnTo>
+                    <a:pt x="5697903" y="1194943"/>
+                  </a:lnTo>
+                  <a:lnTo>
+                    <a:pt x="5627559" y="1192014"/>
+                  </a:lnTo>
+                  <a:lnTo>
+                    <a:pt x="5557214" y="1188948"/>
+                  </a:lnTo>
+                  <a:lnTo>
+                    <a:pt x="5486870" y="1185737"/>
+                  </a:lnTo>
+                  <a:lnTo>
+                    <a:pt x="5416525" y="1182375"/>
+                  </a:lnTo>
+                  <a:lnTo>
+                    <a:pt x="5346181" y="1178855"/>
+                  </a:lnTo>
+                  <a:lnTo>
+                    <a:pt x="5275836" y="1175169"/>
+                  </a:lnTo>
+                  <a:lnTo>
+                    <a:pt x="5205492" y="1171310"/>
+                  </a:lnTo>
+                  <a:lnTo>
+                    <a:pt x="5135147" y="1167269"/>
+                  </a:lnTo>
+                  <a:lnTo>
+                    <a:pt x="5064803" y="1163039"/>
+                  </a:lnTo>
+                  <a:lnTo>
+                    <a:pt x="4994458" y="1158609"/>
+                  </a:lnTo>
+                  <a:lnTo>
+                    <a:pt x="4924114" y="1153971"/>
+                  </a:lnTo>
+                  <a:lnTo>
+                    <a:pt x="4853769" y="1149115"/>
+                  </a:lnTo>
+                  <a:lnTo>
+                    <a:pt x="4783425" y="1144030"/>
+                  </a:lnTo>
+                  <a:lnTo>
+                    <a:pt x="4713080" y="1138706"/>
+                  </a:lnTo>
+                  <a:lnTo>
+                    <a:pt x="4642736" y="1133132"/>
+                  </a:lnTo>
+                  <a:lnTo>
+                    <a:pt x="4572391" y="1127295"/>
+                  </a:lnTo>
+                  <a:lnTo>
+                    <a:pt x="4502047" y="1121184"/>
+                  </a:lnTo>
+                  <a:lnTo>
+                    <a:pt x="4431702" y="1114785"/>
+                  </a:lnTo>
+                  <a:lnTo>
+                    <a:pt x="4361358" y="1108086"/>
+                  </a:lnTo>
+                  <a:lnTo>
+                    <a:pt x="4291013" y="1101071"/>
+                  </a:lnTo>
+                  <a:lnTo>
+                    <a:pt x="4220669" y="1093726"/>
+                  </a:lnTo>
+                  <a:lnTo>
+                    <a:pt x="4150324" y="1086036"/>
+                  </a:lnTo>
+                  <a:lnTo>
+                    <a:pt x="4079980" y="1077983"/>
+                  </a:lnTo>
+                  <a:lnTo>
+                    <a:pt x="4009635" y="1069552"/>
+                  </a:lnTo>
+                  <a:lnTo>
+                    <a:pt x="3939291" y="1060725"/>
+                  </a:lnTo>
+                  <a:lnTo>
+                    <a:pt x="3868946" y="1051482"/>
+                  </a:lnTo>
+                  <a:lnTo>
+                    <a:pt x="3798602" y="1041804"/>
+                  </a:lnTo>
+                  <a:lnTo>
+                    <a:pt x="3728257" y="1031672"/>
+                  </a:lnTo>
+                  <a:lnTo>
+                    <a:pt x="3657913" y="1021062"/>
+                  </a:lnTo>
+                  <a:lnTo>
+                    <a:pt x="3587569" y="1009953"/>
+                  </a:lnTo>
+                  <a:lnTo>
+                    <a:pt x="3517224" y="998322"/>
+                  </a:lnTo>
+                  <a:lnTo>
+                    <a:pt x="3446880" y="986144"/>
+                  </a:lnTo>
+                  <a:lnTo>
+                    <a:pt x="3376535" y="973392"/>
+                  </a:lnTo>
+                  <a:lnTo>
+                    <a:pt x="3306191" y="960041"/>
+                  </a:lnTo>
+                  <a:lnTo>
+                    <a:pt x="3235846" y="953202"/>
+                  </a:lnTo>
+                  <a:lnTo>
+                    <a:pt x="3165502" y="947562"/>
+                  </a:lnTo>
+                  <a:lnTo>
+                    <a:pt x="3095157" y="941817"/>
+                  </a:lnTo>
+                  <a:lnTo>
+                    <a:pt x="3024813" y="935966"/>
+                  </a:lnTo>
+                  <a:lnTo>
+                    <a:pt x="2954468" y="930006"/>
+                  </a:lnTo>
+                  <a:lnTo>
+                    <a:pt x="2884124" y="923936"/>
+                  </a:lnTo>
+                  <a:lnTo>
+                    <a:pt x="2813779" y="917753"/>
+                  </a:lnTo>
+                  <a:lnTo>
+                    <a:pt x="2743435" y="911455"/>
+                  </a:lnTo>
+                  <a:lnTo>
+                    <a:pt x="2673090" y="905041"/>
+                  </a:lnTo>
+                  <a:lnTo>
+                    <a:pt x="2602746" y="898507"/>
+                  </a:lnTo>
+                  <a:lnTo>
+                    <a:pt x="2532401" y="891852"/>
+                  </a:lnTo>
+                  <a:lnTo>
+                    <a:pt x="2462057" y="885074"/>
+                  </a:lnTo>
+                  <a:lnTo>
+                    <a:pt x="2391712" y="878170"/>
+                  </a:lnTo>
+                  <a:lnTo>
+                    <a:pt x="2321368" y="871138"/>
+                  </a:lnTo>
+                  <a:lnTo>
+                    <a:pt x="2251023" y="863976"/>
+                  </a:lnTo>
+                  <a:lnTo>
+                    <a:pt x="2180679" y="856680"/>
+                  </a:lnTo>
+                  <a:lnTo>
+                    <a:pt x="2110334" y="849250"/>
+                  </a:lnTo>
+                  <a:lnTo>
+                    <a:pt x="2039990" y="841681"/>
+                  </a:lnTo>
+                  <a:lnTo>
+                    <a:pt x="1969645" y="833972"/>
+                  </a:lnTo>
+                  <a:lnTo>
+                    <a:pt x="1899301" y="826120"/>
+                  </a:lnTo>
+                  <a:lnTo>
+                    <a:pt x="1828956" y="818123"/>
+                  </a:lnTo>
+                  <a:lnTo>
+                    <a:pt x="1758612" y="809976"/>
+                  </a:lnTo>
+                  <a:lnTo>
+                    <a:pt x="1688267" y="801679"/>
+                  </a:lnTo>
+                  <a:lnTo>
+                    <a:pt x="1617923" y="793228"/>
+                  </a:lnTo>
+                  <a:lnTo>
+                    <a:pt x="1547578" y="784620"/>
+                  </a:lnTo>
+                  <a:lnTo>
+                    <a:pt x="1477234" y="775853"/>
+                  </a:lnTo>
+                  <a:lnTo>
+                    <a:pt x="1406889" y="766922"/>
+                  </a:lnTo>
+                  <a:lnTo>
+                    <a:pt x="1336545" y="757826"/>
+                  </a:lnTo>
+                  <a:lnTo>
+                    <a:pt x="1266200" y="748562"/>
+                  </a:lnTo>
+                  <a:lnTo>
+                    <a:pt x="1195856" y="739125"/>
+                  </a:lnTo>
+                  <a:lnTo>
+                    <a:pt x="1125511" y="729514"/>
+                  </a:lnTo>
+                  <a:lnTo>
+                    <a:pt x="1055167" y="719724"/>
+                  </a:lnTo>
+                  <a:lnTo>
+                    <a:pt x="984822" y="709752"/>
+                  </a:lnTo>
+                  <a:lnTo>
+                    <a:pt x="914478" y="699595"/>
+                  </a:lnTo>
+                  <a:lnTo>
+                    <a:pt x="844133" y="689250"/>
+                  </a:lnTo>
+                  <a:lnTo>
+                    <a:pt x="773789" y="678713"/>
+                  </a:lnTo>
+                  <a:lnTo>
+                    <a:pt x="703444" y="667981"/>
+                  </a:lnTo>
+                  <a:lnTo>
+                    <a:pt x="633100" y="657049"/>
+                  </a:lnTo>
+                  <a:lnTo>
+                    <a:pt x="562755" y="645915"/>
+                  </a:lnTo>
+                  <a:lnTo>
+                    <a:pt x="492411" y="634574"/>
+                  </a:lnTo>
+                  <a:lnTo>
+                    <a:pt x="422066" y="623023"/>
+                  </a:lnTo>
+                  <a:lnTo>
+                    <a:pt x="351722" y="611257"/>
+                  </a:lnTo>
+                  <a:lnTo>
+                    <a:pt x="281377" y="599273"/>
+                  </a:lnTo>
+                  <a:lnTo>
+                    <a:pt x="211033" y="587067"/>
+                  </a:lnTo>
+                  <a:lnTo>
+                    <a:pt x="140688" y="574634"/>
+                  </a:lnTo>
+                  <a:lnTo>
+                    <a:pt x="70344" y="561971"/>
+                  </a:lnTo>
+                  <a:lnTo>
+                    <a:pt x="0" y="549072"/>
                   </a:lnTo>
                   <a:close/>
                 </a:path>
@@ -3539,598 +3574,273 @@
         </p:sp>
         <p:sp>
           <p:nvSpPr>
-            <p:cNvPr id="21" name="pl21"/>
-            <p:cNvSpPr/>
-            <p:nvPr/>
-          </p:nvSpPr>
-          <p:spPr>
-            <a:xfrm>
-              <a:off x="2291430" y="2073503"/>
-              <a:ext cx="5971249" cy="3165772"/>
-            </a:xfrm>
-            <a:custGeom>
-              <a:avLst/>
-              <a:pathLst>
-                <a:path w="5971249" h="3165772">
-                  <a:moveTo>
-                    <a:pt x="0" y="0"/>
-                  </a:moveTo>
-                  <a:lnTo>
-                    <a:pt x="26579" y="59775"/>
-                  </a:lnTo>
-                  <a:lnTo>
-                    <a:pt x="98202" y="213611"/>
-                  </a:lnTo>
-                  <a:lnTo>
-                    <a:pt x="169824" y="360536"/>
-                  </a:lnTo>
-                  <a:lnTo>
-                    <a:pt x="241447" y="500859"/>
-                  </a:lnTo>
-                  <a:lnTo>
-                    <a:pt x="313069" y="634878"/>
-                  </a:lnTo>
-                  <a:lnTo>
-                    <a:pt x="384692" y="762875"/>
-                  </a:lnTo>
-                  <a:lnTo>
-                    <a:pt x="456314" y="885122"/>
-                  </a:lnTo>
-                  <a:lnTo>
-                    <a:pt x="527937" y="1001876"/>
-                  </a:lnTo>
-                  <a:lnTo>
-                    <a:pt x="599559" y="1113384"/>
-                  </a:lnTo>
-                  <a:lnTo>
-                    <a:pt x="671182" y="1219883"/>
-                  </a:lnTo>
-                  <a:lnTo>
-                    <a:pt x="742805" y="1321596"/>
-                  </a:lnTo>
-                  <a:lnTo>
-                    <a:pt x="814427" y="1418740"/>
-                  </a:lnTo>
-                  <a:lnTo>
-                    <a:pt x="886050" y="1511519"/>
-                  </a:lnTo>
-                  <a:lnTo>
-                    <a:pt x="957672" y="1600130"/>
-                  </a:lnTo>
-                  <a:lnTo>
-                    <a:pt x="1029295" y="1684759"/>
-                  </a:lnTo>
-                  <a:lnTo>
-                    <a:pt x="1100917" y="1765586"/>
-                  </a:lnTo>
-                  <a:lnTo>
-                    <a:pt x="1172540" y="1842782"/>
-                  </a:lnTo>
-                  <a:lnTo>
-                    <a:pt x="1244162" y="1916509"/>
-                  </a:lnTo>
-                  <a:lnTo>
-                    <a:pt x="1315785" y="1986924"/>
-                  </a:lnTo>
-                  <a:lnTo>
-                    <a:pt x="1387407" y="2054175"/>
-                  </a:lnTo>
-                  <a:lnTo>
-                    <a:pt x="1459030" y="2118404"/>
-                  </a:lnTo>
-                  <a:lnTo>
-                    <a:pt x="1530652" y="2179748"/>
-                  </a:lnTo>
-                  <a:lnTo>
-                    <a:pt x="1602275" y="2238335"/>
-                  </a:lnTo>
-                  <a:lnTo>
-                    <a:pt x="1673897" y="2294291"/>
-                  </a:lnTo>
-                  <a:lnTo>
-                    <a:pt x="1745520" y="2347732"/>
-                  </a:lnTo>
-                  <a:lnTo>
-                    <a:pt x="1817142" y="2398772"/>
-                  </a:lnTo>
-                  <a:lnTo>
-                    <a:pt x="1888765" y="2447519"/>
-                  </a:lnTo>
-                  <a:lnTo>
-                    <a:pt x="1960387" y="2494076"/>
-                  </a:lnTo>
-                  <a:lnTo>
-                    <a:pt x="2032010" y="2538541"/>
-                  </a:lnTo>
-                  <a:lnTo>
-                    <a:pt x="2103633" y="2581008"/>
-                  </a:lnTo>
-                  <a:lnTo>
-                    <a:pt x="2175255" y="2621568"/>
-                  </a:lnTo>
-                  <a:lnTo>
-                    <a:pt x="2246878" y="2656696"/>
-                  </a:lnTo>
-                  <a:lnTo>
-                    <a:pt x="2318500" y="2671761"/>
-                  </a:lnTo>
-                  <a:lnTo>
-                    <a:pt x="2390123" y="2686551"/>
-                  </a:lnTo>
-                  <a:lnTo>
-                    <a:pt x="2461745" y="2701071"/>
-                  </a:lnTo>
-                  <a:lnTo>
-                    <a:pt x="2533368" y="2715327"/>
-                  </a:lnTo>
-                  <a:lnTo>
-                    <a:pt x="2604990" y="2729324"/>
-                  </a:lnTo>
-                  <a:lnTo>
-                    <a:pt x="2676613" y="2743065"/>
-                  </a:lnTo>
-                  <a:lnTo>
-                    <a:pt x="2748235" y="2756557"/>
-                  </a:lnTo>
-                  <a:lnTo>
-                    <a:pt x="2819858" y="2769802"/>
-                  </a:lnTo>
-                  <a:lnTo>
-                    <a:pt x="2891480" y="2782806"/>
-                  </a:lnTo>
-                  <a:lnTo>
-                    <a:pt x="2963103" y="2795574"/>
-                  </a:lnTo>
-                  <a:lnTo>
-                    <a:pt x="3034725" y="2808109"/>
-                  </a:lnTo>
-                  <a:lnTo>
-                    <a:pt x="3106348" y="2820415"/>
-                  </a:lnTo>
-                  <a:lnTo>
-                    <a:pt x="3177970" y="2832497"/>
-                  </a:lnTo>
-                  <a:lnTo>
-                    <a:pt x="3249593" y="2844360"/>
-                  </a:lnTo>
-                  <a:lnTo>
-                    <a:pt x="3321215" y="2856006"/>
-                  </a:lnTo>
-                  <a:lnTo>
-                    <a:pt x="3392838" y="2867440"/>
-                  </a:lnTo>
-                  <a:lnTo>
-                    <a:pt x="3464461" y="2878666"/>
-                  </a:lnTo>
-                  <a:lnTo>
-                    <a:pt x="3536083" y="2889687"/>
-                  </a:lnTo>
-                  <a:lnTo>
-                    <a:pt x="3607706" y="2900508"/>
-                  </a:lnTo>
-                  <a:lnTo>
-                    <a:pt x="3679328" y="2911131"/>
-                  </a:lnTo>
-                  <a:lnTo>
-                    <a:pt x="3750951" y="2921561"/>
-                  </a:lnTo>
-                  <a:lnTo>
-                    <a:pt x="3822573" y="2931801"/>
-                  </a:lnTo>
-                  <a:lnTo>
-                    <a:pt x="3894196" y="2941855"/>
-                  </a:lnTo>
-                  <a:lnTo>
-                    <a:pt x="3965818" y="2951725"/>
-                  </a:lnTo>
-                  <a:lnTo>
-                    <a:pt x="4037441" y="2961416"/>
-                  </a:lnTo>
-                  <a:lnTo>
-                    <a:pt x="4109063" y="2970930"/>
-                  </a:lnTo>
-                  <a:lnTo>
-                    <a:pt x="4180686" y="2980271"/>
-                  </a:lnTo>
-                  <a:lnTo>
-                    <a:pt x="4252308" y="2989441"/>
-                  </a:lnTo>
-                  <a:lnTo>
-                    <a:pt x="4323931" y="2998445"/>
-                  </a:lnTo>
-                  <a:lnTo>
-                    <a:pt x="4395553" y="3007284"/>
-                  </a:lnTo>
-                  <a:lnTo>
-                    <a:pt x="4467176" y="3015963"/>
-                  </a:lnTo>
-                  <a:lnTo>
-                    <a:pt x="4538798" y="3024483"/>
-                  </a:lnTo>
-                  <a:lnTo>
-                    <a:pt x="4610421" y="3032849"/>
-                  </a:lnTo>
-                  <a:lnTo>
-                    <a:pt x="4682043" y="3041062"/>
-                  </a:lnTo>
-                  <a:lnTo>
-                    <a:pt x="4753666" y="3049125"/>
-                  </a:lnTo>
-                  <a:lnTo>
-                    <a:pt x="4825289" y="3057042"/>
-                  </a:lnTo>
-                  <a:lnTo>
-                    <a:pt x="4896911" y="3064814"/>
-                  </a:lnTo>
-                  <a:lnTo>
-                    <a:pt x="4968534" y="3072445"/>
-                  </a:lnTo>
-                  <a:lnTo>
-                    <a:pt x="5040156" y="3079936"/>
-                  </a:lnTo>
-                  <a:lnTo>
-                    <a:pt x="5111779" y="3087291"/>
-                  </a:lnTo>
-                  <a:lnTo>
-                    <a:pt x="5183401" y="3094513"/>
-                  </a:lnTo>
-                  <a:lnTo>
-                    <a:pt x="5255024" y="3101603"/>
-                  </a:lnTo>
-                  <a:lnTo>
-                    <a:pt x="5326646" y="3108563"/>
-                  </a:lnTo>
-                  <a:lnTo>
-                    <a:pt x="5398269" y="3115397"/>
-                  </a:lnTo>
-                  <a:lnTo>
-                    <a:pt x="5469891" y="3122106"/>
-                  </a:lnTo>
-                  <a:lnTo>
-                    <a:pt x="5541514" y="3128693"/>
-                  </a:lnTo>
-                  <a:lnTo>
-                    <a:pt x="5613136" y="3135161"/>
-                  </a:lnTo>
-                  <a:lnTo>
-                    <a:pt x="5684759" y="3141510"/>
-                  </a:lnTo>
-                  <a:lnTo>
-                    <a:pt x="5756381" y="3147744"/>
-                  </a:lnTo>
-                  <a:lnTo>
-                    <a:pt x="5828004" y="3153864"/>
-                  </a:lnTo>
-                  <a:lnTo>
-                    <a:pt x="5899626" y="3159873"/>
-                  </a:lnTo>
-                  <a:lnTo>
-                    <a:pt x="5971249" y="3165772"/>
-                  </a:lnTo>
-                </a:path>
-              </a:pathLst>
-            </a:custGeom>
-          </p:spPr>
-          <p:txBody>
-            <a:bodyPr/>
-            <a:lstStyle/>
-            <a:p/>
-          </p:txBody>
-        </p:sp>
-        <p:sp>
-          <p:nvSpPr>
             <p:cNvPr id="22" name="pl22"/>
             <p:cNvSpPr/>
             <p:nvPr/>
           </p:nvSpPr>
           <p:spPr>
             <a:xfrm>
-              <a:off x="1172049" y="3595000"/>
-              <a:ext cx="7090630" cy="1886829"/>
+              <a:off x="2334718" y="2143092"/>
+              <a:ext cx="5864698" cy="1142452"/>
             </a:xfrm>
             <a:custGeom>
               <a:avLst/>
               <a:pathLst>
-                <a:path w="7090630" h="1886829">
+                <a:path w="5864698" h="1142452">
                   <a:moveTo>
-                    <a:pt x="7090630" y="1886829"/>
+                    <a:pt x="0" y="0"/>
                   </a:moveTo>
                   <a:lnTo>
-                    <a:pt x="7019007" y="1883281"/>
-                  </a:lnTo>
-                  <a:lnTo>
-                    <a:pt x="6947385" y="1879566"/>
-                  </a:lnTo>
-                  <a:lnTo>
-                    <a:pt x="6875762" y="1875677"/>
-                  </a:lnTo>
-                  <a:lnTo>
-                    <a:pt x="6804139" y="1871604"/>
-                  </a:lnTo>
-                  <a:lnTo>
-                    <a:pt x="6732517" y="1867340"/>
-                  </a:lnTo>
-                  <a:lnTo>
-                    <a:pt x="6660894" y="1862875"/>
-                  </a:lnTo>
-                  <a:lnTo>
-                    <a:pt x="6589272" y="1858201"/>
-                  </a:lnTo>
-                  <a:lnTo>
-                    <a:pt x="6517649" y="1853306"/>
-                  </a:lnTo>
-                  <a:lnTo>
-                    <a:pt x="6446027" y="1848181"/>
-                  </a:lnTo>
-                  <a:lnTo>
-                    <a:pt x="6374404" y="1842815"/>
-                  </a:lnTo>
-                  <a:lnTo>
-                    <a:pt x="6302782" y="1837196"/>
-                  </a:lnTo>
-                  <a:lnTo>
-                    <a:pt x="6231159" y="1831314"/>
-                  </a:lnTo>
-                  <a:lnTo>
-                    <a:pt x="6159537" y="1825154"/>
-                  </a:lnTo>
-                  <a:lnTo>
-                    <a:pt x="6087914" y="1818705"/>
-                  </a:lnTo>
-                  <a:lnTo>
-                    <a:pt x="6016292" y="1811952"/>
-                  </a:lnTo>
-                  <a:lnTo>
-                    <a:pt x="5944669" y="1804882"/>
-                  </a:lnTo>
-                  <a:lnTo>
-                    <a:pt x="5873047" y="1797479"/>
-                  </a:lnTo>
-                  <a:lnTo>
-                    <a:pt x="5801424" y="1789727"/>
-                  </a:lnTo>
-                  <a:lnTo>
-                    <a:pt x="5729802" y="1781612"/>
-                  </a:lnTo>
-                  <a:lnTo>
-                    <a:pt x="5658179" y="1773114"/>
-                  </a:lnTo>
-                  <a:lnTo>
-                    <a:pt x="5586557" y="1764216"/>
-                  </a:lnTo>
-                  <a:lnTo>
-                    <a:pt x="5514934" y="1754900"/>
-                  </a:lnTo>
-                  <a:lnTo>
-                    <a:pt x="5443311" y="1745146"/>
-                  </a:lnTo>
-                  <a:lnTo>
-                    <a:pt x="5371689" y="1734933"/>
-                  </a:lnTo>
-                  <a:lnTo>
-                    <a:pt x="5300066" y="1724240"/>
-                  </a:lnTo>
-                  <a:lnTo>
-                    <a:pt x="5228444" y="1713043"/>
-                  </a:lnTo>
-                  <a:lnTo>
-                    <a:pt x="5156821" y="1701320"/>
-                  </a:lnTo>
-                  <a:lnTo>
-                    <a:pt x="5085199" y="1689045"/>
-                  </a:lnTo>
-                  <a:lnTo>
-                    <a:pt x="5013576" y="1676193"/>
-                  </a:lnTo>
-                  <a:lnTo>
-                    <a:pt x="4941954" y="1662736"/>
-                  </a:lnTo>
-                  <a:lnTo>
-                    <a:pt x="4870331" y="1648646"/>
-                  </a:lnTo>
-                  <a:lnTo>
-                    <a:pt x="4798709" y="1633893"/>
-                  </a:lnTo>
-                  <a:lnTo>
-                    <a:pt x="4727086" y="1618446"/>
-                  </a:lnTo>
-                  <a:lnTo>
-                    <a:pt x="4655464" y="1602273"/>
-                  </a:lnTo>
-                  <a:lnTo>
-                    <a:pt x="4583841" y="1585339"/>
-                  </a:lnTo>
-                  <a:lnTo>
-                    <a:pt x="4512219" y="1567608"/>
-                  </a:lnTo>
-                  <a:lnTo>
-                    <a:pt x="4440596" y="1549043"/>
-                  </a:lnTo>
-                  <a:lnTo>
-                    <a:pt x="4368974" y="1529604"/>
-                  </a:lnTo>
-                  <a:lnTo>
-                    <a:pt x="4297351" y="1509252"/>
-                  </a:lnTo>
-                  <a:lnTo>
-                    <a:pt x="4225729" y="1487941"/>
-                  </a:lnTo>
-                  <a:lnTo>
-                    <a:pt x="4154106" y="1465629"/>
-                  </a:lnTo>
-                  <a:lnTo>
-                    <a:pt x="4082483" y="1442266"/>
-                  </a:lnTo>
-                  <a:lnTo>
-                    <a:pt x="4010861" y="1417805"/>
-                  </a:lnTo>
-                  <a:lnTo>
-                    <a:pt x="3939238" y="1392193"/>
-                  </a:lnTo>
-                  <a:lnTo>
-                    <a:pt x="3867616" y="1365376"/>
-                  </a:lnTo>
-                  <a:lnTo>
-                    <a:pt x="3795993" y="1337297"/>
-                  </a:lnTo>
-                  <a:lnTo>
-                    <a:pt x="3724371" y="1307898"/>
-                  </a:lnTo>
-                  <a:lnTo>
-                    <a:pt x="3652748" y="1277115"/>
-                  </a:lnTo>
-                  <a:lnTo>
-                    <a:pt x="3581126" y="1244885"/>
-                  </a:lnTo>
-                  <a:lnTo>
-                    <a:pt x="3509503" y="1211138"/>
-                  </a:lnTo>
-                  <a:lnTo>
-                    <a:pt x="3437881" y="1175803"/>
-                  </a:lnTo>
-                  <a:lnTo>
-                    <a:pt x="3366258" y="1138807"/>
-                  </a:lnTo>
-                  <a:lnTo>
-                    <a:pt x="3294636" y="1119854"/>
-                  </a:lnTo>
-                  <a:lnTo>
-                    <a:pt x="3223013" y="1104226"/>
-                  </a:lnTo>
-                  <a:lnTo>
-                    <a:pt x="3151391" y="1088307"/>
-                  </a:lnTo>
-                  <a:lnTo>
-                    <a:pt x="3079768" y="1072093"/>
-                  </a:lnTo>
-                  <a:lnTo>
-                    <a:pt x="3008146" y="1055579"/>
-                  </a:lnTo>
-                  <a:lnTo>
-                    <a:pt x="2936523" y="1038758"/>
-                  </a:lnTo>
-                  <a:lnTo>
-                    <a:pt x="2864901" y="1021625"/>
-                  </a:lnTo>
-                  <a:lnTo>
-                    <a:pt x="2793278" y="1004174"/>
-                  </a:lnTo>
-                  <a:lnTo>
-                    <a:pt x="2721655" y="986399"/>
-                  </a:lnTo>
-                  <a:lnTo>
-                    <a:pt x="2650033" y="968294"/>
-                  </a:lnTo>
-                  <a:lnTo>
-                    <a:pt x="2578410" y="949854"/>
-                  </a:lnTo>
-                  <a:lnTo>
-                    <a:pt x="2506788" y="931071"/>
-                  </a:lnTo>
-                  <a:lnTo>
-                    <a:pt x="2435165" y="911940"/>
-                  </a:lnTo>
-                  <a:lnTo>
-                    <a:pt x="2363543" y="892454"/>
-                  </a:lnTo>
-                  <a:lnTo>
-                    <a:pt x="2291920" y="872607"/>
-                  </a:lnTo>
-                  <a:lnTo>
-                    <a:pt x="2220298" y="852391"/>
-                  </a:lnTo>
-                  <a:lnTo>
-                    <a:pt x="2148675" y="831801"/>
-                  </a:lnTo>
-                  <a:lnTo>
-                    <a:pt x="2077053" y="810828"/>
-                  </a:lnTo>
-                  <a:lnTo>
-                    <a:pt x="2005430" y="789466"/>
-                  </a:lnTo>
-                  <a:lnTo>
-                    <a:pt x="1933808" y="767708"/>
-                  </a:lnTo>
-                  <a:lnTo>
-                    <a:pt x="1862185" y="745546"/>
-                  </a:lnTo>
-                  <a:lnTo>
-                    <a:pt x="1790563" y="722973"/>
-                  </a:lnTo>
-                  <a:lnTo>
-                    <a:pt x="1718940" y="699981"/>
-                  </a:lnTo>
-                  <a:lnTo>
-                    <a:pt x="1647318" y="676563"/>
-                  </a:lnTo>
-                  <a:lnTo>
-                    <a:pt x="1575695" y="652710"/>
-                  </a:lnTo>
-                  <a:lnTo>
-                    <a:pt x="1504073" y="628415"/>
-                  </a:lnTo>
-                  <a:lnTo>
-                    <a:pt x="1432450" y="603669"/>
-                  </a:lnTo>
-                  <a:lnTo>
-                    <a:pt x="1360827" y="578464"/>
-                  </a:lnTo>
-                  <a:lnTo>
-                    <a:pt x="1289205" y="552791"/>
-                  </a:lnTo>
-                  <a:lnTo>
-                    <a:pt x="1217582" y="526642"/>
-                  </a:lnTo>
-                  <a:lnTo>
-                    <a:pt x="1145960" y="500008"/>
-                  </a:lnTo>
-                  <a:lnTo>
-                    <a:pt x="1074337" y="472879"/>
-                  </a:lnTo>
-                  <a:lnTo>
-                    <a:pt x="1002715" y="445248"/>
-                  </a:lnTo>
-                  <a:lnTo>
-                    <a:pt x="931092" y="417104"/>
-                  </a:lnTo>
-                  <a:lnTo>
-                    <a:pt x="859470" y="388437"/>
-                  </a:lnTo>
-                  <a:lnTo>
-                    <a:pt x="787847" y="359239"/>
-                  </a:lnTo>
-                  <a:lnTo>
-                    <a:pt x="716225" y="329499"/>
-                  </a:lnTo>
-                  <a:lnTo>
-                    <a:pt x="644602" y="299207"/>
-                  </a:lnTo>
-                  <a:lnTo>
-                    <a:pt x="572980" y="268353"/>
-                  </a:lnTo>
-                  <a:lnTo>
-                    <a:pt x="501357" y="236927"/>
-                  </a:lnTo>
-                  <a:lnTo>
-                    <a:pt x="429735" y="204918"/>
-                  </a:lnTo>
-                  <a:lnTo>
-                    <a:pt x="358112" y="172315"/>
-                  </a:lnTo>
-                  <a:lnTo>
-                    <a:pt x="286490" y="139107"/>
-                  </a:lnTo>
-                  <a:lnTo>
-                    <a:pt x="214867" y="105283"/>
-                  </a:lnTo>
-                  <a:lnTo>
-                    <a:pt x="143245" y="70832"/>
-                  </a:lnTo>
-                  <a:lnTo>
-                    <a:pt x="71622" y="35741"/>
-                  </a:lnTo>
-                  <a:lnTo>
-                    <a:pt x="0" y="0"/>
+                    <a:pt x="26105" y="21571"/>
+                  </a:lnTo>
+                  <a:lnTo>
+                    <a:pt x="96449" y="77087"/>
+                  </a:lnTo>
+                  <a:lnTo>
+                    <a:pt x="166794" y="130109"/>
+                  </a:lnTo>
+                  <a:lnTo>
+                    <a:pt x="237138" y="180748"/>
+                  </a:lnTo>
+                  <a:lnTo>
+                    <a:pt x="307483" y="229112"/>
+                  </a:lnTo>
+                  <a:lnTo>
+                    <a:pt x="377827" y="275303"/>
+                  </a:lnTo>
+                  <a:lnTo>
+                    <a:pt x="448172" y="319419"/>
+                  </a:lnTo>
+                  <a:lnTo>
+                    <a:pt x="518516" y="361553"/>
+                  </a:lnTo>
+                  <a:lnTo>
+                    <a:pt x="588861" y="401794"/>
+                  </a:lnTo>
+                  <a:lnTo>
+                    <a:pt x="659205" y="440227"/>
+                  </a:lnTo>
+                  <a:lnTo>
+                    <a:pt x="729550" y="476933"/>
+                  </a:lnTo>
+                  <a:lnTo>
+                    <a:pt x="799894" y="511990"/>
+                  </a:lnTo>
+                  <a:lnTo>
+                    <a:pt x="870239" y="545471"/>
+                  </a:lnTo>
+                  <a:lnTo>
+                    <a:pt x="940583" y="577449"/>
+                  </a:lnTo>
+                  <a:lnTo>
+                    <a:pt x="1010928" y="607990"/>
+                  </a:lnTo>
+                  <a:lnTo>
+                    <a:pt x="1081272" y="637158"/>
+                  </a:lnTo>
+                  <a:lnTo>
+                    <a:pt x="1151617" y="665016"/>
+                  </a:lnTo>
+                  <a:lnTo>
+                    <a:pt x="1221961" y="691623"/>
+                  </a:lnTo>
+                  <a:lnTo>
+                    <a:pt x="1292306" y="717034"/>
+                  </a:lnTo>
+                  <a:lnTo>
+                    <a:pt x="1362650" y="741303"/>
+                  </a:lnTo>
+                  <a:lnTo>
+                    <a:pt x="1432995" y="764482"/>
+                  </a:lnTo>
+                  <a:lnTo>
+                    <a:pt x="1503339" y="786619"/>
+                  </a:lnTo>
+                  <a:lnTo>
+                    <a:pt x="1573684" y="807762"/>
+                  </a:lnTo>
+                  <a:lnTo>
+                    <a:pt x="1644028" y="827955"/>
+                  </a:lnTo>
+                  <a:lnTo>
+                    <a:pt x="1714373" y="847241"/>
+                  </a:lnTo>
+                  <a:lnTo>
+                    <a:pt x="1784717" y="865660"/>
+                  </a:lnTo>
+                  <a:lnTo>
+                    <a:pt x="1855062" y="883252"/>
+                  </a:lnTo>
+                  <a:lnTo>
+                    <a:pt x="1925406" y="900053"/>
+                  </a:lnTo>
+                  <a:lnTo>
+                    <a:pt x="1995751" y="916099"/>
+                  </a:lnTo>
+                  <a:lnTo>
+                    <a:pt x="2066095" y="931425"/>
+                  </a:lnTo>
+                  <a:lnTo>
+                    <a:pt x="2136440" y="946062"/>
+                  </a:lnTo>
+                  <a:lnTo>
+                    <a:pt x="2206784" y="958739"/>
+                  </a:lnTo>
+                  <a:lnTo>
+                    <a:pt x="2277129" y="964175"/>
+                  </a:lnTo>
+                  <a:lnTo>
+                    <a:pt x="2347473" y="969513"/>
+                  </a:lnTo>
+                  <a:lnTo>
+                    <a:pt x="2417818" y="974753"/>
+                  </a:lnTo>
+                  <a:lnTo>
+                    <a:pt x="2488162" y="979897"/>
+                  </a:lnTo>
+                  <a:lnTo>
+                    <a:pt x="2558507" y="984948"/>
+                  </a:lnTo>
+                  <a:lnTo>
+                    <a:pt x="2628851" y="989907"/>
+                  </a:lnTo>
+                  <a:lnTo>
+                    <a:pt x="2699196" y="994776"/>
+                  </a:lnTo>
+                  <a:lnTo>
+                    <a:pt x="2769540" y="999556"/>
+                  </a:lnTo>
+                  <a:lnTo>
+                    <a:pt x="2839885" y="1004249"/>
+                  </a:lnTo>
+                  <a:lnTo>
+                    <a:pt x="2910229" y="1008857"/>
+                  </a:lnTo>
+                  <a:lnTo>
+                    <a:pt x="2980574" y="1013380"/>
+                  </a:lnTo>
+                  <a:lnTo>
+                    <a:pt x="3050918" y="1017821"/>
+                  </a:lnTo>
+                  <a:lnTo>
+                    <a:pt x="3121263" y="1022181"/>
+                  </a:lnTo>
+                  <a:lnTo>
+                    <a:pt x="3191607" y="1026462"/>
+                  </a:lnTo>
+                  <a:lnTo>
+                    <a:pt x="3261952" y="1030665"/>
+                  </a:lnTo>
+                  <a:lnTo>
+                    <a:pt x="3332296" y="1034791"/>
+                  </a:lnTo>
+                  <a:lnTo>
+                    <a:pt x="3402641" y="1038842"/>
+                  </a:lnTo>
+                  <a:lnTo>
+                    <a:pt x="3472985" y="1042820"/>
+                  </a:lnTo>
+                  <a:lnTo>
+                    <a:pt x="3543329" y="1046725"/>
+                  </a:lnTo>
+                  <a:lnTo>
+                    <a:pt x="3613674" y="1050558"/>
+                  </a:lnTo>
+                  <a:lnTo>
+                    <a:pt x="3684018" y="1054322"/>
+                  </a:lnTo>
+                  <a:lnTo>
+                    <a:pt x="3754363" y="1058018"/>
+                  </a:lnTo>
+                  <a:lnTo>
+                    <a:pt x="3824707" y="1061646"/>
+                  </a:lnTo>
+                  <a:lnTo>
+                    <a:pt x="3895052" y="1065208"/>
+                  </a:lnTo>
+                  <a:lnTo>
+                    <a:pt x="3965396" y="1068705"/>
+                  </a:lnTo>
+                  <a:lnTo>
+                    <a:pt x="4035741" y="1072138"/>
+                  </a:lnTo>
+                  <a:lnTo>
+                    <a:pt x="4106085" y="1075509"/>
+                  </a:lnTo>
+                  <a:lnTo>
+                    <a:pt x="4176430" y="1078819"/>
+                  </a:lnTo>
+                  <a:lnTo>
+                    <a:pt x="4246774" y="1082068"/>
+                  </a:lnTo>
+                  <a:lnTo>
+                    <a:pt x="4317119" y="1085258"/>
+                  </a:lnTo>
+                  <a:lnTo>
+                    <a:pt x="4387463" y="1088390"/>
+                  </a:lnTo>
+                  <a:lnTo>
+                    <a:pt x="4457808" y="1091465"/>
+                  </a:lnTo>
+                  <a:lnTo>
+                    <a:pt x="4528152" y="1094483"/>
+                  </a:lnTo>
+                  <a:lnTo>
+                    <a:pt x="4598497" y="1097447"/>
+                  </a:lnTo>
+                  <a:lnTo>
+                    <a:pt x="4668841" y="1100357"/>
+                  </a:lnTo>
+                  <a:lnTo>
+                    <a:pt x="4739186" y="1103214"/>
+                  </a:lnTo>
+                  <a:lnTo>
+                    <a:pt x="4809530" y="1106019"/>
+                  </a:lnTo>
+                  <a:lnTo>
+                    <a:pt x="4879875" y="1108773"/>
+                  </a:lnTo>
+                  <a:lnTo>
+                    <a:pt x="4950219" y="1111476"/>
+                  </a:lnTo>
+                  <a:lnTo>
+                    <a:pt x="5020564" y="1114131"/>
+                  </a:lnTo>
+                  <a:lnTo>
+                    <a:pt x="5090908" y="1116737"/>
+                  </a:lnTo>
+                  <a:lnTo>
+                    <a:pt x="5161253" y="1119295"/>
+                  </a:lnTo>
+                  <a:lnTo>
+                    <a:pt x="5231597" y="1121807"/>
+                  </a:lnTo>
+                  <a:lnTo>
+                    <a:pt x="5301942" y="1124273"/>
+                  </a:lnTo>
+                  <a:lnTo>
+                    <a:pt x="5372286" y="1126694"/>
+                  </a:lnTo>
+                  <a:lnTo>
+                    <a:pt x="5442631" y="1129072"/>
+                  </a:lnTo>
+                  <a:lnTo>
+                    <a:pt x="5512975" y="1131405"/>
+                  </a:lnTo>
+                  <a:lnTo>
+                    <a:pt x="5583320" y="1133697"/>
+                  </a:lnTo>
+                  <a:lnTo>
+                    <a:pt x="5653664" y="1135946"/>
+                  </a:lnTo>
+                  <a:lnTo>
+                    <a:pt x="5724009" y="1138155"/>
+                  </a:lnTo>
+                  <a:lnTo>
+                    <a:pt x="5794353" y="1140323"/>
+                  </a:lnTo>
+                  <a:lnTo>
+                    <a:pt x="5864698" y="1142452"/>
                   </a:lnTo>
                 </a:path>
               </a:pathLst>
@@ -4150,306 +3860,631 @@
           </p:nvSpPr>
           <p:spPr>
             <a:xfrm>
-              <a:off x="1332742" y="2073503"/>
-              <a:ext cx="6929936" cy="3328887"/>
+              <a:off x="1235312" y="2692164"/>
+              <a:ext cx="6964104" cy="680912"/>
             </a:xfrm>
             <a:custGeom>
               <a:avLst/>
               <a:pathLst>
-                <a:path w="6929936" h="3328887">
+                <a:path w="6964104" h="680912">
+                  <a:moveTo>
+                    <a:pt x="6964104" y="680912"/>
+                  </a:moveTo>
+                  <a:lnTo>
+                    <a:pt x="6893760" y="679632"/>
+                  </a:lnTo>
+                  <a:lnTo>
+                    <a:pt x="6823415" y="678291"/>
+                  </a:lnTo>
+                  <a:lnTo>
+                    <a:pt x="6753071" y="676887"/>
+                  </a:lnTo>
+                  <a:lnTo>
+                    <a:pt x="6682726" y="675418"/>
+                  </a:lnTo>
+                  <a:lnTo>
+                    <a:pt x="6612382" y="673879"/>
+                  </a:lnTo>
+                  <a:lnTo>
+                    <a:pt x="6542037" y="672268"/>
+                  </a:lnTo>
+                  <a:lnTo>
+                    <a:pt x="6471693" y="670581"/>
+                  </a:lnTo>
+                  <a:lnTo>
+                    <a:pt x="6401348" y="668814"/>
+                  </a:lnTo>
+                  <a:lnTo>
+                    <a:pt x="6331004" y="666965"/>
+                  </a:lnTo>
+                  <a:lnTo>
+                    <a:pt x="6260659" y="665028"/>
+                  </a:lnTo>
+                  <a:lnTo>
+                    <a:pt x="6190315" y="663001"/>
+                  </a:lnTo>
+                  <a:lnTo>
+                    <a:pt x="6119970" y="660878"/>
+                  </a:lnTo>
+                  <a:lnTo>
+                    <a:pt x="6049626" y="658655"/>
+                  </a:lnTo>
+                  <a:lnTo>
+                    <a:pt x="5979281" y="656327"/>
+                  </a:lnTo>
+                  <a:lnTo>
+                    <a:pt x="5908937" y="653891"/>
+                  </a:lnTo>
+                  <a:lnTo>
+                    <a:pt x="5838592" y="651339"/>
+                  </a:lnTo>
+                  <a:lnTo>
+                    <a:pt x="5768248" y="648667"/>
+                  </a:lnTo>
+                  <a:lnTo>
+                    <a:pt x="5697903" y="645870"/>
+                  </a:lnTo>
+                  <a:lnTo>
+                    <a:pt x="5627559" y="642941"/>
+                  </a:lnTo>
+                  <a:lnTo>
+                    <a:pt x="5557214" y="639875"/>
+                  </a:lnTo>
+                  <a:lnTo>
+                    <a:pt x="5486870" y="636664"/>
+                  </a:lnTo>
+                  <a:lnTo>
+                    <a:pt x="5416525" y="633302"/>
+                  </a:lnTo>
+                  <a:lnTo>
+                    <a:pt x="5346181" y="629782"/>
+                  </a:lnTo>
+                  <a:lnTo>
+                    <a:pt x="5275836" y="626096"/>
+                  </a:lnTo>
+                  <a:lnTo>
+                    <a:pt x="5205492" y="622237"/>
+                  </a:lnTo>
+                  <a:lnTo>
+                    <a:pt x="5135147" y="618197"/>
+                  </a:lnTo>
+                  <a:lnTo>
+                    <a:pt x="5064803" y="613966"/>
+                  </a:lnTo>
+                  <a:lnTo>
+                    <a:pt x="4994458" y="609536"/>
+                  </a:lnTo>
+                  <a:lnTo>
+                    <a:pt x="4924114" y="604898"/>
+                  </a:lnTo>
+                  <a:lnTo>
+                    <a:pt x="4853769" y="600042"/>
+                  </a:lnTo>
+                  <a:lnTo>
+                    <a:pt x="4783425" y="594957"/>
+                  </a:lnTo>
+                  <a:lnTo>
+                    <a:pt x="4713080" y="589633"/>
+                  </a:lnTo>
+                  <a:lnTo>
+                    <a:pt x="4642736" y="584059"/>
+                  </a:lnTo>
+                  <a:lnTo>
+                    <a:pt x="4572391" y="578222"/>
+                  </a:lnTo>
+                  <a:lnTo>
+                    <a:pt x="4502047" y="572111"/>
+                  </a:lnTo>
+                  <a:lnTo>
+                    <a:pt x="4431702" y="565712"/>
+                  </a:lnTo>
+                  <a:lnTo>
+                    <a:pt x="4361358" y="559013"/>
+                  </a:lnTo>
+                  <a:lnTo>
+                    <a:pt x="4291013" y="551998"/>
+                  </a:lnTo>
+                  <a:lnTo>
+                    <a:pt x="4220669" y="544653"/>
+                  </a:lnTo>
+                  <a:lnTo>
+                    <a:pt x="4150324" y="536963"/>
+                  </a:lnTo>
+                  <a:lnTo>
+                    <a:pt x="4079980" y="528911"/>
+                  </a:lnTo>
+                  <a:lnTo>
+                    <a:pt x="4009635" y="520480"/>
+                  </a:lnTo>
+                  <a:lnTo>
+                    <a:pt x="3939291" y="511652"/>
+                  </a:lnTo>
+                  <a:lnTo>
+                    <a:pt x="3868946" y="502409"/>
+                  </a:lnTo>
+                  <a:lnTo>
+                    <a:pt x="3798602" y="492732"/>
+                  </a:lnTo>
+                  <a:lnTo>
+                    <a:pt x="3728257" y="482599"/>
+                  </a:lnTo>
+                  <a:lnTo>
+                    <a:pt x="3657913" y="471989"/>
+                  </a:lnTo>
+                  <a:lnTo>
+                    <a:pt x="3587569" y="460880"/>
+                  </a:lnTo>
+                  <a:lnTo>
+                    <a:pt x="3517224" y="449249"/>
+                  </a:lnTo>
+                  <a:lnTo>
+                    <a:pt x="3446880" y="437071"/>
+                  </a:lnTo>
+                  <a:lnTo>
+                    <a:pt x="3376535" y="424319"/>
+                  </a:lnTo>
+                  <a:lnTo>
+                    <a:pt x="3306191" y="410968"/>
+                  </a:lnTo>
+                  <a:lnTo>
+                    <a:pt x="3235846" y="404129"/>
+                  </a:lnTo>
+                  <a:lnTo>
+                    <a:pt x="3165502" y="398489"/>
+                  </a:lnTo>
+                  <a:lnTo>
+                    <a:pt x="3095157" y="392744"/>
+                  </a:lnTo>
+                  <a:lnTo>
+                    <a:pt x="3024813" y="386893"/>
+                  </a:lnTo>
+                  <a:lnTo>
+                    <a:pt x="2954468" y="380933"/>
+                  </a:lnTo>
+                  <a:lnTo>
+                    <a:pt x="2884124" y="374863"/>
+                  </a:lnTo>
+                  <a:lnTo>
+                    <a:pt x="2813779" y="368680"/>
+                  </a:lnTo>
+                  <a:lnTo>
+                    <a:pt x="2743435" y="362382"/>
+                  </a:lnTo>
+                  <a:lnTo>
+                    <a:pt x="2673090" y="355968"/>
+                  </a:lnTo>
+                  <a:lnTo>
+                    <a:pt x="2602746" y="349434"/>
+                  </a:lnTo>
+                  <a:lnTo>
+                    <a:pt x="2532401" y="342780"/>
+                  </a:lnTo>
+                  <a:lnTo>
+                    <a:pt x="2462057" y="336001"/>
+                  </a:lnTo>
+                  <a:lnTo>
+                    <a:pt x="2391712" y="329097"/>
+                  </a:lnTo>
+                  <a:lnTo>
+                    <a:pt x="2321368" y="322065"/>
+                  </a:lnTo>
+                  <a:lnTo>
+                    <a:pt x="2251023" y="314903"/>
+                  </a:lnTo>
+                  <a:lnTo>
+                    <a:pt x="2180679" y="307608"/>
+                  </a:lnTo>
+                  <a:lnTo>
+                    <a:pt x="2110334" y="300177"/>
+                  </a:lnTo>
+                  <a:lnTo>
+                    <a:pt x="2039990" y="292608"/>
+                  </a:lnTo>
+                  <a:lnTo>
+                    <a:pt x="1969645" y="284899"/>
+                  </a:lnTo>
+                  <a:lnTo>
+                    <a:pt x="1899301" y="277047"/>
+                  </a:lnTo>
+                  <a:lnTo>
+                    <a:pt x="1828956" y="269050"/>
+                  </a:lnTo>
+                  <a:lnTo>
+                    <a:pt x="1758612" y="260904"/>
+                  </a:lnTo>
+                  <a:lnTo>
+                    <a:pt x="1688267" y="252606"/>
+                  </a:lnTo>
+                  <a:lnTo>
+                    <a:pt x="1617923" y="244155"/>
+                  </a:lnTo>
+                  <a:lnTo>
+                    <a:pt x="1547578" y="235547"/>
+                  </a:lnTo>
+                  <a:lnTo>
+                    <a:pt x="1477234" y="226780"/>
+                  </a:lnTo>
+                  <a:lnTo>
+                    <a:pt x="1406889" y="217850"/>
+                  </a:lnTo>
+                  <a:lnTo>
+                    <a:pt x="1336545" y="208754"/>
+                  </a:lnTo>
+                  <a:lnTo>
+                    <a:pt x="1266200" y="199489"/>
+                  </a:lnTo>
+                  <a:lnTo>
+                    <a:pt x="1195856" y="190052"/>
+                  </a:lnTo>
+                  <a:lnTo>
+                    <a:pt x="1125511" y="180441"/>
+                  </a:lnTo>
+                  <a:lnTo>
+                    <a:pt x="1055167" y="170651"/>
+                  </a:lnTo>
+                  <a:lnTo>
+                    <a:pt x="984822" y="160679"/>
+                  </a:lnTo>
+                  <a:lnTo>
+                    <a:pt x="914478" y="150523"/>
+                  </a:lnTo>
+                  <a:lnTo>
+                    <a:pt x="844133" y="140177"/>
+                  </a:lnTo>
+                  <a:lnTo>
+                    <a:pt x="773789" y="129641"/>
+                  </a:lnTo>
+                  <a:lnTo>
+                    <a:pt x="703444" y="118908"/>
+                  </a:lnTo>
+                  <a:lnTo>
+                    <a:pt x="633100" y="107977"/>
+                  </a:lnTo>
+                  <a:lnTo>
+                    <a:pt x="562755" y="96842"/>
+                  </a:lnTo>
+                  <a:lnTo>
+                    <a:pt x="492411" y="85501"/>
+                  </a:lnTo>
+                  <a:lnTo>
+                    <a:pt x="422066" y="73950"/>
+                  </a:lnTo>
+                  <a:lnTo>
+                    <a:pt x="351722" y="62184"/>
+                  </a:lnTo>
+                  <a:lnTo>
+                    <a:pt x="281377" y="50200"/>
+                  </a:lnTo>
+                  <a:lnTo>
+                    <a:pt x="211033" y="37994"/>
+                  </a:lnTo>
+                  <a:lnTo>
+                    <a:pt x="140688" y="25561"/>
+                  </a:lnTo>
+                  <a:lnTo>
+                    <a:pt x="70344" y="12898"/>
+                  </a:lnTo>
+                  <a:lnTo>
+                    <a:pt x="0" y="0"/>
+                  </a:lnTo>
+                </a:path>
+              </a:pathLst>
+            </a:custGeom>
+          </p:spPr>
+          <p:txBody>
+            <a:bodyPr/>
+            <a:lstStyle/>
+            <a:p/>
+          </p:txBody>
+        </p:sp>
+        <p:sp>
+          <p:nvSpPr>
+            <p:cNvPr id="24" name="pl24"/>
+            <p:cNvSpPr/>
+            <p:nvPr/>
+          </p:nvSpPr>
+          <p:spPr>
+            <a:xfrm>
+              <a:off x="1393138" y="2143092"/>
+              <a:ext cx="6806278" cy="1201317"/>
+            </a:xfrm>
+            <a:custGeom>
+              <a:avLst/>
+              <a:pathLst>
+                <a:path w="6806278" h="1201317">
                   <a:moveTo>
                     <a:pt x="0" y="0"/>
                   </a:moveTo>
                   <a:lnTo>
-                    <a:pt x="54174" y="84085"/>
-                  </a:lnTo>
-                  <a:lnTo>
-                    <a:pt x="125796" y="191732"/>
-                  </a:lnTo>
-                  <a:lnTo>
-                    <a:pt x="197419" y="295970"/>
-                  </a:lnTo>
-                  <a:lnTo>
-                    <a:pt x="269041" y="396908"/>
-                  </a:lnTo>
-                  <a:lnTo>
-                    <a:pt x="340664" y="494650"/>
-                  </a:lnTo>
-                  <a:lnTo>
-                    <a:pt x="412286" y="589297"/>
-                  </a:lnTo>
-                  <a:lnTo>
-                    <a:pt x="483909" y="680947"/>
-                  </a:lnTo>
-                  <a:lnTo>
-                    <a:pt x="555531" y="769695"/>
-                  </a:lnTo>
-                  <a:lnTo>
-                    <a:pt x="627154" y="855632"/>
-                  </a:lnTo>
-                  <a:lnTo>
-                    <a:pt x="698776" y="938849"/>
-                  </a:lnTo>
-                  <a:lnTo>
-                    <a:pt x="770399" y="1019431"/>
-                  </a:lnTo>
-                  <a:lnTo>
-                    <a:pt x="842021" y="1097461"/>
-                  </a:lnTo>
-                  <a:lnTo>
-                    <a:pt x="913644" y="1173020"/>
-                  </a:lnTo>
-                  <a:lnTo>
-                    <a:pt x="985267" y="1246187"/>
-                  </a:lnTo>
-                  <a:lnTo>
-                    <a:pt x="1056889" y="1317038"/>
-                  </a:lnTo>
-                  <a:lnTo>
-                    <a:pt x="1128512" y="1385644"/>
-                  </a:lnTo>
-                  <a:lnTo>
-                    <a:pt x="1200134" y="1452079"/>
-                  </a:lnTo>
-                  <a:lnTo>
-                    <a:pt x="1271757" y="1516410"/>
-                  </a:lnTo>
-                  <a:lnTo>
-                    <a:pt x="1343379" y="1578703"/>
-                  </a:lnTo>
-                  <a:lnTo>
-                    <a:pt x="1415002" y="1639025"/>
-                  </a:lnTo>
-                  <a:lnTo>
-                    <a:pt x="1486624" y="1697436"/>
-                  </a:lnTo>
-                  <a:lnTo>
-                    <a:pt x="1558247" y="1753998"/>
-                  </a:lnTo>
-                  <a:lnTo>
-                    <a:pt x="1629869" y="1808769"/>
-                  </a:lnTo>
-                  <a:lnTo>
-                    <a:pt x="1701492" y="1861805"/>
-                  </a:lnTo>
-                  <a:lnTo>
-                    <a:pt x="1773114" y="1913162"/>
-                  </a:lnTo>
-                  <a:lnTo>
-                    <a:pt x="1844737" y="1962893"/>
-                  </a:lnTo>
-                  <a:lnTo>
-                    <a:pt x="1916359" y="2011050"/>
-                  </a:lnTo>
-                  <a:lnTo>
-                    <a:pt x="1987982" y="2057681"/>
-                  </a:lnTo>
-                  <a:lnTo>
-                    <a:pt x="2059604" y="2102836"/>
-                  </a:lnTo>
-                  <a:lnTo>
-                    <a:pt x="2131227" y="2146562"/>
-                  </a:lnTo>
-                  <a:lnTo>
-                    <a:pt x="2202849" y="2188902"/>
-                  </a:lnTo>
-                  <a:lnTo>
-                    <a:pt x="2274472" y="2229902"/>
-                  </a:lnTo>
-                  <a:lnTo>
-                    <a:pt x="2346095" y="2269604"/>
-                  </a:lnTo>
-                  <a:lnTo>
-                    <a:pt x="2417717" y="2308049"/>
-                  </a:lnTo>
-                  <a:lnTo>
-                    <a:pt x="2489340" y="2345276"/>
-                  </a:lnTo>
-                  <a:lnTo>
-                    <a:pt x="2560962" y="2381325"/>
-                  </a:lnTo>
-                  <a:lnTo>
-                    <a:pt x="2632585" y="2416232"/>
-                  </a:lnTo>
-                  <a:lnTo>
-                    <a:pt x="2704207" y="2450034"/>
-                  </a:lnTo>
-                  <a:lnTo>
-                    <a:pt x="2775830" y="2482765"/>
-                  </a:lnTo>
-                  <a:lnTo>
-                    <a:pt x="2847452" y="2514460"/>
-                  </a:lnTo>
-                  <a:lnTo>
-                    <a:pt x="2919075" y="2545152"/>
-                  </a:lnTo>
-                  <a:lnTo>
-                    <a:pt x="2990697" y="2574871"/>
-                  </a:lnTo>
-                  <a:lnTo>
-                    <a:pt x="3062320" y="2603650"/>
-                  </a:lnTo>
-                  <a:lnTo>
-                    <a:pt x="3133942" y="2631517"/>
-                  </a:lnTo>
-                  <a:lnTo>
-                    <a:pt x="3205565" y="2658502"/>
-                  </a:lnTo>
-                  <a:lnTo>
-                    <a:pt x="3277187" y="2684633"/>
-                  </a:lnTo>
-                  <a:lnTo>
-                    <a:pt x="3348810" y="2709936"/>
-                  </a:lnTo>
-                  <a:lnTo>
-                    <a:pt x="3420432" y="2734438"/>
-                  </a:lnTo>
-                  <a:lnTo>
-                    <a:pt x="3492055" y="2758164"/>
-                  </a:lnTo>
-                  <a:lnTo>
-                    <a:pt x="3563677" y="2781139"/>
-                  </a:lnTo>
-                  <a:lnTo>
-                    <a:pt x="3635300" y="2803386"/>
-                  </a:lnTo>
-                  <a:lnTo>
-                    <a:pt x="3706923" y="2824929"/>
-                  </a:lnTo>
-                  <a:lnTo>
-                    <a:pt x="3778545" y="2845790"/>
-                  </a:lnTo>
-                  <a:lnTo>
-                    <a:pt x="3850168" y="2865991"/>
-                  </a:lnTo>
-                  <a:lnTo>
-                    <a:pt x="3921790" y="2885551"/>
-                  </a:lnTo>
-                  <a:lnTo>
-                    <a:pt x="3993413" y="2904492"/>
-                  </a:lnTo>
-                  <a:lnTo>
-                    <a:pt x="4065035" y="2922834"/>
-                  </a:lnTo>
-                  <a:lnTo>
-                    <a:pt x="4136658" y="2940595"/>
-                  </a:lnTo>
-                  <a:lnTo>
-                    <a:pt x="4208280" y="2957793"/>
-                  </a:lnTo>
-                  <a:lnTo>
-                    <a:pt x="4279903" y="2974447"/>
-                  </a:lnTo>
-                  <a:lnTo>
-                    <a:pt x="4351525" y="2990573"/>
-                  </a:lnTo>
-                  <a:lnTo>
-                    <a:pt x="4423148" y="3006189"/>
-                  </a:lnTo>
-                  <a:lnTo>
-                    <a:pt x="4494770" y="3021311"/>
-                  </a:lnTo>
-                  <a:lnTo>
-                    <a:pt x="4566393" y="3035953"/>
-                  </a:lnTo>
-                  <a:lnTo>
-                    <a:pt x="4638015" y="3050132"/>
-                  </a:lnTo>
-                  <a:lnTo>
-                    <a:pt x="4709638" y="3063862"/>
-                  </a:lnTo>
-                  <a:lnTo>
-                    <a:pt x="4781260" y="3077157"/>
-                  </a:lnTo>
-                  <a:lnTo>
-                    <a:pt x="4852883" y="3090032"/>
-                  </a:lnTo>
-                  <a:lnTo>
-                    <a:pt x="4924505" y="3102498"/>
-                  </a:lnTo>
-                  <a:lnTo>
-                    <a:pt x="4996128" y="3114570"/>
-                  </a:lnTo>
-                  <a:lnTo>
-                    <a:pt x="5067751" y="3126260"/>
-                  </a:lnTo>
-                  <a:lnTo>
-                    <a:pt x="5139373" y="3137579"/>
-                  </a:lnTo>
-                  <a:lnTo>
-                    <a:pt x="5210996" y="3148540"/>
-                  </a:lnTo>
-                  <a:lnTo>
-                    <a:pt x="5282618" y="3159154"/>
-                  </a:lnTo>
-                  <a:lnTo>
-                    <a:pt x="5354241" y="3169432"/>
-                  </a:lnTo>
-                  <a:lnTo>
-                    <a:pt x="5425863" y="3179385"/>
-                  </a:lnTo>
-                  <a:lnTo>
-                    <a:pt x="5497486" y="3189022"/>
-                  </a:lnTo>
-                  <a:lnTo>
-                    <a:pt x="5569108" y="3198354"/>
-                  </a:lnTo>
-                  <a:lnTo>
-                    <a:pt x="5640731" y="3207391"/>
-                  </a:lnTo>
-                  <a:lnTo>
-                    <a:pt x="5712353" y="3216141"/>
-                  </a:lnTo>
-                  <a:lnTo>
-                    <a:pt x="5783976" y="3224615"/>
-                  </a:lnTo>
-                  <a:lnTo>
-                    <a:pt x="5855598" y="3232820"/>
-                  </a:lnTo>
-                  <a:lnTo>
-                    <a:pt x="5927221" y="3240765"/>
-                  </a:lnTo>
-                  <a:lnTo>
-                    <a:pt x="5998843" y="3248459"/>
-                  </a:lnTo>
-                  <a:lnTo>
-                    <a:pt x="6070466" y="3255909"/>
-                  </a:lnTo>
-                  <a:lnTo>
-                    <a:pt x="6142088" y="3263123"/>
-                  </a:lnTo>
-                  <a:lnTo>
-                    <a:pt x="6213711" y="3270109"/>
-                  </a:lnTo>
-                  <a:lnTo>
-                    <a:pt x="6285333" y="3276874"/>
-                  </a:lnTo>
-                  <a:lnTo>
-                    <a:pt x="6356956" y="3283424"/>
-                  </a:lnTo>
-                  <a:lnTo>
-                    <a:pt x="6428579" y="3289767"/>
-                  </a:lnTo>
-                  <a:lnTo>
-                    <a:pt x="6500201" y="3295909"/>
-                  </a:lnTo>
-                  <a:lnTo>
-                    <a:pt x="6571824" y="3301857"/>
-                  </a:lnTo>
-                  <a:lnTo>
-                    <a:pt x="6643446" y="3307616"/>
-                  </a:lnTo>
-                  <a:lnTo>
-                    <a:pt x="6715069" y="3313193"/>
-                  </a:lnTo>
-                  <a:lnTo>
-                    <a:pt x="6786691" y="3318594"/>
-                  </a:lnTo>
-                  <a:lnTo>
-                    <a:pt x="6858314" y="3323823"/>
-                  </a:lnTo>
-                  <a:lnTo>
-                    <a:pt x="6929936" y="3328887"/>
+                    <a:pt x="53207" y="30344"/>
+                  </a:lnTo>
+                  <a:lnTo>
+                    <a:pt x="123552" y="69191"/>
+                  </a:lnTo>
+                  <a:lnTo>
+                    <a:pt x="193896" y="106808"/>
+                  </a:lnTo>
+                  <a:lnTo>
+                    <a:pt x="264240" y="143234"/>
+                  </a:lnTo>
+                  <a:lnTo>
+                    <a:pt x="334585" y="178507"/>
+                  </a:lnTo>
+                  <a:lnTo>
+                    <a:pt x="404929" y="212663"/>
+                  </a:lnTo>
+                  <a:lnTo>
+                    <a:pt x="475274" y="245737"/>
+                  </a:lnTo>
+                  <a:lnTo>
+                    <a:pt x="545618" y="277764"/>
+                  </a:lnTo>
+                  <a:lnTo>
+                    <a:pt x="615963" y="308777"/>
+                  </a:lnTo>
+                  <a:lnTo>
+                    <a:pt x="686307" y="338808"/>
+                  </a:lnTo>
+                  <a:lnTo>
+                    <a:pt x="756652" y="367888"/>
+                  </a:lnTo>
+                  <a:lnTo>
+                    <a:pt x="826996" y="396048"/>
+                  </a:lnTo>
+                  <a:lnTo>
+                    <a:pt x="897341" y="423315"/>
+                  </a:lnTo>
+                  <a:lnTo>
+                    <a:pt x="967685" y="449719"/>
+                  </a:lnTo>
+                  <a:lnTo>
+                    <a:pt x="1038030" y="475288"/>
+                  </a:lnTo>
+                  <a:lnTo>
+                    <a:pt x="1108374" y="500046"/>
+                  </a:lnTo>
+                  <a:lnTo>
+                    <a:pt x="1178719" y="524021"/>
+                  </a:lnTo>
+                  <a:lnTo>
+                    <a:pt x="1249063" y="547236"/>
+                  </a:lnTo>
+                  <a:lnTo>
+                    <a:pt x="1319408" y="569717"/>
+                  </a:lnTo>
+                  <a:lnTo>
+                    <a:pt x="1389752" y="591485"/>
+                  </a:lnTo>
+                  <a:lnTo>
+                    <a:pt x="1460097" y="612564"/>
+                  </a:lnTo>
+                  <a:lnTo>
+                    <a:pt x="1530441" y="632976"/>
+                  </a:lnTo>
+                  <a:lnTo>
+                    <a:pt x="1600786" y="652742"/>
+                  </a:lnTo>
+                  <a:lnTo>
+                    <a:pt x="1671130" y="671881"/>
+                  </a:lnTo>
+                  <a:lnTo>
+                    <a:pt x="1741475" y="690415"/>
+                  </a:lnTo>
+                  <a:lnTo>
+                    <a:pt x="1811819" y="708362"/>
+                  </a:lnTo>
+                  <a:lnTo>
+                    <a:pt x="1882164" y="725740"/>
+                  </a:lnTo>
+                  <a:lnTo>
+                    <a:pt x="1952508" y="742568"/>
+                  </a:lnTo>
+                  <a:lnTo>
+                    <a:pt x="2022853" y="758864"/>
+                  </a:lnTo>
+                  <a:lnTo>
+                    <a:pt x="2093197" y="774643"/>
+                  </a:lnTo>
+                  <a:lnTo>
+                    <a:pt x="2163542" y="789923"/>
+                  </a:lnTo>
+                  <a:lnTo>
+                    <a:pt x="2233886" y="804719"/>
+                  </a:lnTo>
+                  <a:lnTo>
+                    <a:pt x="2304231" y="819046"/>
+                  </a:lnTo>
+                  <a:lnTo>
+                    <a:pt x="2374575" y="832920"/>
+                  </a:lnTo>
+                  <a:lnTo>
+                    <a:pt x="2444920" y="846355"/>
+                  </a:lnTo>
+                  <a:lnTo>
+                    <a:pt x="2515264" y="859364"/>
+                  </a:lnTo>
+                  <a:lnTo>
+                    <a:pt x="2585609" y="871961"/>
+                  </a:lnTo>
+                  <a:lnTo>
+                    <a:pt x="2655953" y="884159"/>
+                  </a:lnTo>
+                  <a:lnTo>
+                    <a:pt x="2726298" y="895971"/>
+                  </a:lnTo>
+                  <a:lnTo>
+                    <a:pt x="2796642" y="907409"/>
+                  </a:lnTo>
+                  <a:lnTo>
+                    <a:pt x="2866987" y="918485"/>
+                  </a:lnTo>
+                  <a:lnTo>
+                    <a:pt x="2937331" y="929210"/>
+                  </a:lnTo>
+                  <a:lnTo>
+                    <a:pt x="3007676" y="939596"/>
+                  </a:lnTo>
+                  <a:lnTo>
+                    <a:pt x="3078020" y="949652"/>
+                  </a:lnTo>
+                  <a:lnTo>
+                    <a:pt x="3148365" y="959391"/>
+                  </a:lnTo>
+                  <a:lnTo>
+                    <a:pt x="3218709" y="968821"/>
+                  </a:lnTo>
+                  <a:lnTo>
+                    <a:pt x="3289054" y="977952"/>
+                  </a:lnTo>
+                  <a:lnTo>
+                    <a:pt x="3359398" y="986794"/>
+                  </a:lnTo>
+                  <a:lnTo>
+                    <a:pt x="3429743" y="995356"/>
+                  </a:lnTo>
+                  <a:lnTo>
+                    <a:pt x="3500087" y="1003647"/>
+                  </a:lnTo>
+                  <a:lnTo>
+                    <a:pt x="3570432" y="1011676"/>
+                  </a:lnTo>
+                  <a:lnTo>
+                    <a:pt x="3640776" y="1019450"/>
+                  </a:lnTo>
+                  <a:lnTo>
+                    <a:pt x="3711121" y="1026978"/>
+                  </a:lnTo>
+                  <a:lnTo>
+                    <a:pt x="3781465" y="1034268"/>
+                  </a:lnTo>
+                  <a:lnTo>
+                    <a:pt x="3851810" y="1041327"/>
+                  </a:lnTo>
+                  <a:lnTo>
+                    <a:pt x="3922154" y="1048163"/>
+                  </a:lnTo>
+                  <a:lnTo>
+                    <a:pt x="3992498" y="1054782"/>
+                  </a:lnTo>
+                  <a:lnTo>
+                    <a:pt x="4062843" y="1061191"/>
+                  </a:lnTo>
+                  <a:lnTo>
+                    <a:pt x="4133187" y="1067398"/>
+                  </a:lnTo>
+                  <a:lnTo>
+                    <a:pt x="4203532" y="1073408"/>
+                  </a:lnTo>
+                  <a:lnTo>
+                    <a:pt x="4273876" y="1079227"/>
+                  </a:lnTo>
+                  <a:lnTo>
+                    <a:pt x="4344221" y="1084863"/>
+                  </a:lnTo>
+                  <a:lnTo>
+                    <a:pt x="4414565" y="1090320"/>
+                  </a:lnTo>
+                  <a:lnTo>
+                    <a:pt x="4484910" y="1095604"/>
+                  </a:lnTo>
+                  <a:lnTo>
+                    <a:pt x="4555254" y="1100721"/>
+                  </a:lnTo>
+                  <a:lnTo>
+                    <a:pt x="4625599" y="1105675"/>
+                  </a:lnTo>
+                  <a:lnTo>
+                    <a:pt x="4695943" y="1110473"/>
+                  </a:lnTo>
+                  <a:lnTo>
+                    <a:pt x="4766288" y="1115119"/>
+                  </a:lnTo>
+                  <a:lnTo>
+                    <a:pt x="4836632" y="1119618"/>
+                  </a:lnTo>
+                  <a:lnTo>
+                    <a:pt x="4906977" y="1123975"/>
+                  </a:lnTo>
+                  <a:lnTo>
+                    <a:pt x="4977321" y="1128193"/>
+                  </a:lnTo>
+                  <a:lnTo>
+                    <a:pt x="5047666" y="1132278"/>
+                  </a:lnTo>
+                  <a:lnTo>
+                    <a:pt x="5118010" y="1136234"/>
+                  </a:lnTo>
+                  <a:lnTo>
+                    <a:pt x="5188355" y="1140064"/>
+                  </a:lnTo>
+                  <a:lnTo>
+                    <a:pt x="5258699" y="1143773"/>
+                  </a:lnTo>
+                  <a:lnTo>
+                    <a:pt x="5329044" y="1147365"/>
+                  </a:lnTo>
+                  <a:lnTo>
+                    <a:pt x="5399388" y="1150843"/>
+                  </a:lnTo>
+                  <a:lnTo>
+                    <a:pt x="5469733" y="1154210"/>
+                  </a:lnTo>
+                  <a:lnTo>
+                    <a:pt x="5540077" y="1157472"/>
+                  </a:lnTo>
+                  <a:lnTo>
+                    <a:pt x="5610422" y="1160629"/>
+                  </a:lnTo>
+                  <a:lnTo>
+                    <a:pt x="5680766" y="1163687"/>
+                  </a:lnTo>
+                  <a:lnTo>
+                    <a:pt x="5751111" y="1166648"/>
+                  </a:lnTo>
+                  <a:lnTo>
+                    <a:pt x="5821455" y="1169516"/>
+                  </a:lnTo>
+                  <a:lnTo>
+                    <a:pt x="5891800" y="1172292"/>
+                  </a:lnTo>
+                  <a:lnTo>
+                    <a:pt x="5962144" y="1174981"/>
+                  </a:lnTo>
+                  <a:lnTo>
+                    <a:pt x="6032489" y="1177584"/>
+                  </a:lnTo>
+                  <a:lnTo>
+                    <a:pt x="6102833" y="1180105"/>
+                  </a:lnTo>
+                  <a:lnTo>
+                    <a:pt x="6173178" y="1182546"/>
+                  </a:lnTo>
+                  <a:lnTo>
+                    <a:pt x="6243522" y="1184910"/>
+                  </a:lnTo>
+                  <a:lnTo>
+                    <a:pt x="6313867" y="1187199"/>
+                  </a:lnTo>
+                  <a:lnTo>
+                    <a:pt x="6384211" y="1189416"/>
+                  </a:lnTo>
+                  <a:lnTo>
+                    <a:pt x="6454556" y="1191562"/>
+                  </a:lnTo>
+                  <a:lnTo>
+                    <a:pt x="6524900" y="1193641"/>
+                  </a:lnTo>
+                  <a:lnTo>
+                    <a:pt x="6595245" y="1195653"/>
+                  </a:lnTo>
+                  <a:lnTo>
+                    <a:pt x="6665589" y="1197602"/>
+                  </a:lnTo>
+                  <a:lnTo>
+                    <a:pt x="6735934" y="1199489"/>
+                  </a:lnTo>
+                  <a:lnTo>
+                    <a:pt x="6806278" y="1201317"/>
                   </a:lnTo>
                 </a:path>
               </a:pathLst>
@@ -4472,27 +4507,27 @@
         </p:sp>
         <p:sp>
           <p:nvSpPr>
-            <p:cNvPr id="24" name="pl24"/>
+            <p:cNvPr id="25" name="pl25"/>
             <p:cNvSpPr/>
             <p:nvPr/>
           </p:nvSpPr>
           <p:spPr>
             <a:xfrm>
-              <a:off x="817517" y="4727786"/>
-              <a:ext cx="7799693" cy="0"/>
+              <a:off x="887106" y="3100960"/>
+              <a:ext cx="7660515" cy="0"/>
             </a:xfrm>
             <a:custGeom>
               <a:avLst/>
               <a:pathLst>
-                <a:path w="7799693" h="0">
+                <a:path w="7660515" h="0">
                   <a:moveTo>
                     <a:pt x="0" y="0"/>
                   </a:moveTo>
                   <a:lnTo>
-                    <a:pt x="7799693" y="0"/>
-                  </a:lnTo>
-                  <a:lnTo>
-                    <a:pt x="7799693" y="0"/>
+                    <a:pt x="7660515" y="0"/>
+                  </a:lnTo>
+                  <a:lnTo>
+                    <a:pt x="7660515" y="0"/>
                   </a:lnTo>
                 </a:path>
               </a:pathLst>
@@ -4515,21 +4550,21 @@
         </p:sp>
         <p:sp>
           <p:nvSpPr>
-            <p:cNvPr id="25" name="pl25"/>
+            <p:cNvPr id="26" name="pl26"/>
             <p:cNvSpPr/>
             <p:nvPr/>
           </p:nvSpPr>
           <p:spPr>
             <a:xfrm>
-              <a:off x="4526955" y="2073503"/>
-              <a:ext cx="0" cy="3649639"/>
+              <a:off x="4530353" y="2143092"/>
+              <a:ext cx="0" cy="1317069"/>
             </a:xfrm>
             <a:custGeom>
               <a:avLst/>
               <a:pathLst>
-                <a:path w="0" h="3649639">
+                <a:path w="0" h="1317069">
                   <a:moveTo>
-                    <a:pt x="0" y="3649639"/>
+                    <a:pt x="0" y="1317069"/>
                   </a:moveTo>
                   <a:lnTo>
                     <a:pt x="0" y="0"/>
@@ -4558,13 +4593,13 @@
         </p:sp>
         <p:sp>
           <p:nvSpPr>
-            <p:cNvPr id="26" name="tx26"/>
+            <p:cNvPr id="27" name="tx27"/>
             <p:cNvSpPr/>
             <p:nvPr/>
           </p:nvSpPr>
           <p:spPr>
             <a:xfrm>
-              <a:off x="692708" y="5517199"/>
+              <a:off x="762297" y="3360243"/>
               <a:ext cx="62179" cy="80101"/>
             </a:xfrm>
             <a:prstGeom prst="rect">
@@ -4604,13 +4639,13 @@
         </p:sp>
         <p:sp>
           <p:nvSpPr>
-            <p:cNvPr id="27" name="tx27"/>
+            <p:cNvPr id="28" name="tx28"/>
             <p:cNvSpPr/>
             <p:nvPr/>
           </p:nvSpPr>
           <p:spPr>
             <a:xfrm>
-              <a:off x="692708" y="4687735"/>
+              <a:off x="762297" y="3060909"/>
               <a:ext cx="62179" cy="80101"/>
             </a:xfrm>
             <a:prstGeom prst="rect">
@@ -4650,13 +4685,13 @@
         </p:sp>
         <p:sp>
           <p:nvSpPr>
-            <p:cNvPr id="28" name="tx28"/>
+            <p:cNvPr id="29" name="tx29"/>
             <p:cNvSpPr/>
             <p:nvPr/>
           </p:nvSpPr>
           <p:spPr>
             <a:xfrm>
-              <a:off x="692708" y="3858272"/>
+              <a:off x="762297" y="2761575"/>
               <a:ext cx="62179" cy="80101"/>
             </a:xfrm>
             <a:prstGeom prst="rect">
@@ -4696,13 +4731,13 @@
         </p:sp>
         <p:sp>
           <p:nvSpPr>
-            <p:cNvPr id="29" name="tx29"/>
+            <p:cNvPr id="30" name="tx30"/>
             <p:cNvSpPr/>
             <p:nvPr/>
           </p:nvSpPr>
           <p:spPr>
             <a:xfrm>
-              <a:off x="692708" y="3028808"/>
+              <a:off x="762297" y="2462242"/>
               <a:ext cx="62179" cy="80101"/>
             </a:xfrm>
             <a:prstGeom prst="rect">
@@ -4742,13 +4777,13 @@
         </p:sp>
         <p:sp>
           <p:nvSpPr>
-            <p:cNvPr id="30" name="tx30"/>
+            <p:cNvPr id="31" name="tx31"/>
             <p:cNvSpPr/>
             <p:nvPr/>
           </p:nvSpPr>
           <p:spPr>
             <a:xfrm>
-              <a:off x="692708" y="2199345"/>
+              <a:off x="762297" y="2162908"/>
               <a:ext cx="62179" cy="80101"/>
             </a:xfrm>
             <a:prstGeom prst="rect">
@@ -4788,13 +4823,13 @@
         </p:sp>
         <p:sp>
           <p:nvSpPr>
-            <p:cNvPr id="31" name="tx31"/>
+            <p:cNvPr id="32" name="tx32"/>
             <p:cNvSpPr/>
             <p:nvPr/>
           </p:nvSpPr>
           <p:spPr>
             <a:xfrm>
-              <a:off x="2421884" y="5785772"/>
+              <a:off x="2461403" y="3522791"/>
               <a:ext cx="161574" cy="80101"/>
             </a:xfrm>
             <a:prstGeom prst="rect">
@@ -4834,13 +4869,13 @@
         </p:sp>
         <p:sp>
           <p:nvSpPr>
-            <p:cNvPr id="32" name="tx32"/>
+            <p:cNvPr id="33" name="tx33"/>
             <p:cNvSpPr/>
             <p:nvPr/>
           </p:nvSpPr>
           <p:spPr>
             <a:xfrm>
-              <a:off x="4542539" y="5785772"/>
+              <a:off x="4545104" y="3522791"/>
               <a:ext cx="62179" cy="80101"/>
             </a:xfrm>
             <a:prstGeom prst="rect">
@@ -4880,13 +4915,13 @@
         </p:sp>
         <p:sp>
           <p:nvSpPr>
-            <p:cNvPr id="33" name="tx33"/>
+            <p:cNvPr id="34" name="tx34"/>
             <p:cNvSpPr/>
             <p:nvPr/>
           </p:nvSpPr>
           <p:spPr>
             <a:xfrm>
-              <a:off x="6582407" y="5785772"/>
+              <a:off x="6548017" y="3522791"/>
               <a:ext cx="124358" cy="80101"/>
             </a:xfrm>
             <a:prstGeom prst="rect">
@@ -4926,13 +4961,13 @@
         </p:sp>
         <p:sp>
           <p:nvSpPr>
-            <p:cNvPr id="34" name="tx34"/>
+            <p:cNvPr id="35" name="tx35"/>
             <p:cNvSpPr/>
             <p:nvPr/>
           </p:nvSpPr>
           <p:spPr>
             <a:xfrm>
-              <a:off x="2928340" y="5925448"/>
+              <a:off x="2928340" y="3662467"/>
               <a:ext cx="3578047" cy="100218"/>
             </a:xfrm>
             <a:prstGeom prst="rect">
@@ -4972,13 +5007,13 @@
         </p:sp>
         <p:sp>
           <p:nvSpPr>
-            <p:cNvPr id="35" name="tx35"/>
+            <p:cNvPr id="36" name="tx36"/>
             <p:cNvSpPr/>
             <p:nvPr/>
           </p:nvSpPr>
           <p:spPr>
             <a:xfrm rot="-5400000">
-              <a:off x="68446" y="3848213"/>
+              <a:off x="138035" y="2751517"/>
               <a:ext cx="1016904" cy="100218"/>
             </a:xfrm>
             <a:prstGeom prst="rect">
@@ -5018,13 +5053,13 @@
         </p:sp>
         <p:sp>
           <p:nvSpPr>
-            <p:cNvPr id="36" name="tx36"/>
+            <p:cNvPr id="37" name="tx37"/>
             <p:cNvSpPr/>
             <p:nvPr/>
           </p:nvSpPr>
           <p:spPr>
             <a:xfrm>
-              <a:off x="817517" y="1896563"/>
+              <a:off x="887106" y="1966152"/>
               <a:ext cx="7052127" cy="82021"/>
             </a:xfrm>
             <a:prstGeom prst="rect">
@@ -5064,13 +5099,3650 @@
         </p:sp>
         <p:sp>
           <p:nvSpPr>
-            <p:cNvPr id="37" name="tx37"/>
+            <p:cNvPr id="38" name="tx38"/>
             <p:cNvSpPr/>
             <p:nvPr/>
           </p:nvSpPr>
           <p:spPr>
             <a:xfrm>
-              <a:off x="817517" y="1669789"/>
+              <a:off x="887106" y="1739378"/>
+              <a:ext cx="3435949" cy="120152"/>
+            </a:xfrm>
+            <a:prstGeom prst="rect">
+              <a:avLst/>
+            </a:prstGeom>
+            <a:noFill/>
+          </p:spPr>
+          <p:txBody>
+            <a:bodyPr lIns="0" rIns="0" tIns="0" bIns="0" anchorCtr="1" anchor="ctr" wrap="none"/>
+            <a:lstStyle/>
+            <a:p>
+              <a:pPr algn="l" marL="0" marR="0" indent="0">
+                <a:lnSpc>
+                  <a:spcPts val="1320"/>
+                </a:lnSpc>
+                <a:spcBef>
+                  <a:spcPts val="0"/>
+                </a:spcBef>
+                <a:spcAft>
+                  <a:spcPts val="0"/>
+                </a:spcAft>
+              </a:pPr>
+              <a:r>
+                <a:rPr sz="1320">
+                  <a:solidFill>
+                    <a:srgbClr val="000000">
+                      <a:alpha val="100000"/>
+                    </a:srgbClr>
+                  </a:solidFill>
+                  <a:latin typeface="Helvetica"/>
+                  <a:cs typeface="Helvetica"/>
+                </a:rPr>
+                <a:t>Platinum-Related Hospitalization (Carboplatin)</a:t>
+              </a:r>
+            </a:p>
+          </p:txBody>
+        </p:sp>
+        <p:sp>
+          <p:nvSpPr>
+            <p:cNvPr id="39" name="pl39"/>
+            <p:cNvSpPr/>
+            <p:nvPr/>
+          </p:nvSpPr>
+          <p:spPr>
+            <a:xfrm>
+              <a:off x="887106" y="5444019"/>
+              <a:ext cx="7660515" cy="0"/>
+            </a:xfrm>
+            <a:custGeom>
+              <a:avLst/>
+              <a:pathLst>
+                <a:path w="7660515" h="0">
+                  <a:moveTo>
+                    <a:pt x="0" y="0"/>
+                  </a:moveTo>
+                  <a:lnTo>
+                    <a:pt x="7660515" y="0"/>
+                  </a:lnTo>
+                  <a:lnTo>
+                    <a:pt x="7660515" y="0"/>
+                  </a:lnTo>
+                </a:path>
+              </a:pathLst>
+            </a:custGeom>
+            <a:ln w="6775" cap="flat">
+              <a:solidFill>
+                <a:srgbClr val="EBEBEB">
+                  <a:alpha val="100000"/>
+                </a:srgbClr>
+              </a:solidFill>
+              <a:prstDash val="solid"/>
+              <a:round/>
+            </a:ln>
+          </p:spPr>
+          <p:txBody>
+            <a:bodyPr/>
+            <a:lstStyle/>
+            <a:p/>
+          </p:txBody>
+        </p:sp>
+        <p:sp>
+          <p:nvSpPr>
+            <p:cNvPr id="40" name="pl40"/>
+            <p:cNvSpPr/>
+            <p:nvPr/>
+          </p:nvSpPr>
+          <p:spPr>
+            <a:xfrm>
+              <a:off x="887106" y="5144686"/>
+              <a:ext cx="7660515" cy="0"/>
+            </a:xfrm>
+            <a:custGeom>
+              <a:avLst/>
+              <a:pathLst>
+                <a:path w="7660515" h="0">
+                  <a:moveTo>
+                    <a:pt x="0" y="0"/>
+                  </a:moveTo>
+                  <a:lnTo>
+                    <a:pt x="7660515" y="0"/>
+                  </a:lnTo>
+                  <a:lnTo>
+                    <a:pt x="7660515" y="0"/>
+                  </a:lnTo>
+                </a:path>
+              </a:pathLst>
+            </a:custGeom>
+            <a:ln w="6775" cap="flat">
+              <a:solidFill>
+                <a:srgbClr val="EBEBEB">
+                  <a:alpha val="100000"/>
+                </a:srgbClr>
+              </a:solidFill>
+              <a:prstDash val="solid"/>
+              <a:round/>
+            </a:ln>
+          </p:spPr>
+          <p:txBody>
+            <a:bodyPr/>
+            <a:lstStyle/>
+            <a:p/>
+          </p:txBody>
+        </p:sp>
+        <p:sp>
+          <p:nvSpPr>
+            <p:cNvPr id="41" name="pl41"/>
+            <p:cNvSpPr/>
+            <p:nvPr/>
+          </p:nvSpPr>
+          <p:spPr>
+            <a:xfrm>
+              <a:off x="887106" y="4845352"/>
+              <a:ext cx="7660515" cy="0"/>
+            </a:xfrm>
+            <a:custGeom>
+              <a:avLst/>
+              <a:pathLst>
+                <a:path w="7660515" h="0">
+                  <a:moveTo>
+                    <a:pt x="0" y="0"/>
+                  </a:moveTo>
+                  <a:lnTo>
+                    <a:pt x="7660515" y="0"/>
+                  </a:lnTo>
+                  <a:lnTo>
+                    <a:pt x="7660515" y="0"/>
+                  </a:lnTo>
+                </a:path>
+              </a:pathLst>
+            </a:custGeom>
+            <a:ln w="6775" cap="flat">
+              <a:solidFill>
+                <a:srgbClr val="EBEBEB">
+                  <a:alpha val="100000"/>
+                </a:srgbClr>
+              </a:solidFill>
+              <a:prstDash val="solid"/>
+              <a:round/>
+            </a:ln>
+          </p:spPr>
+          <p:txBody>
+            <a:bodyPr/>
+            <a:lstStyle/>
+            <a:p/>
+          </p:txBody>
+        </p:sp>
+        <p:sp>
+          <p:nvSpPr>
+            <p:cNvPr id="42" name="pl42"/>
+            <p:cNvSpPr/>
+            <p:nvPr/>
+          </p:nvSpPr>
+          <p:spPr>
+            <a:xfrm>
+              <a:off x="887106" y="4546018"/>
+              <a:ext cx="7660515" cy="0"/>
+            </a:xfrm>
+            <a:custGeom>
+              <a:avLst/>
+              <a:pathLst>
+                <a:path w="7660515" h="0">
+                  <a:moveTo>
+                    <a:pt x="0" y="0"/>
+                  </a:moveTo>
+                  <a:lnTo>
+                    <a:pt x="7660515" y="0"/>
+                  </a:lnTo>
+                  <a:lnTo>
+                    <a:pt x="7660515" y="0"/>
+                  </a:lnTo>
+                </a:path>
+              </a:pathLst>
+            </a:custGeom>
+            <a:ln w="6775" cap="flat">
+              <a:solidFill>
+                <a:srgbClr val="EBEBEB">
+                  <a:alpha val="100000"/>
+                </a:srgbClr>
+              </a:solidFill>
+              <a:prstDash val="solid"/>
+              <a:round/>
+            </a:ln>
+          </p:spPr>
+          <p:txBody>
+            <a:bodyPr/>
+            <a:lstStyle/>
+            <a:p/>
+          </p:txBody>
+        </p:sp>
+        <p:sp>
+          <p:nvSpPr>
+            <p:cNvPr id="43" name="pl43"/>
+            <p:cNvSpPr/>
+            <p:nvPr/>
+          </p:nvSpPr>
+          <p:spPr>
+            <a:xfrm>
+              <a:off x="914987" y="4336484"/>
+              <a:ext cx="0" cy="1317069"/>
+            </a:xfrm>
+            <a:custGeom>
+              <a:avLst/>
+              <a:pathLst>
+                <a:path w="0" h="1317069">
+                  <a:moveTo>
+                    <a:pt x="0" y="1317069"/>
+                  </a:moveTo>
+                  <a:lnTo>
+                    <a:pt x="0" y="0"/>
+                  </a:lnTo>
+                  <a:lnTo>
+                    <a:pt x="0" y="0"/>
+                  </a:lnTo>
+                </a:path>
+              </a:pathLst>
+            </a:custGeom>
+            <a:ln w="6775" cap="flat">
+              <a:solidFill>
+                <a:srgbClr val="EBEBEB">
+                  <a:alpha val="100000"/>
+                </a:srgbClr>
+              </a:solidFill>
+              <a:prstDash val="solid"/>
+              <a:round/>
+            </a:ln>
+          </p:spPr>
+          <p:txBody>
+            <a:bodyPr/>
+            <a:lstStyle/>
+            <a:p/>
+          </p:txBody>
+        </p:sp>
+        <p:sp>
+          <p:nvSpPr>
+            <p:cNvPr id="44" name="pl44"/>
+            <p:cNvSpPr/>
+            <p:nvPr/>
+          </p:nvSpPr>
+          <p:spPr>
+            <a:xfrm>
+              <a:off x="1728588" y="4336484"/>
+              <a:ext cx="0" cy="1317069"/>
+            </a:xfrm>
+            <a:custGeom>
+              <a:avLst/>
+              <a:pathLst>
+                <a:path w="0" h="1317069">
+                  <a:moveTo>
+                    <a:pt x="0" y="1317069"/>
+                  </a:moveTo>
+                  <a:lnTo>
+                    <a:pt x="0" y="0"/>
+                  </a:lnTo>
+                  <a:lnTo>
+                    <a:pt x="0" y="0"/>
+                  </a:lnTo>
+                </a:path>
+              </a:pathLst>
+            </a:custGeom>
+            <a:ln w="6775" cap="flat">
+              <a:solidFill>
+                <a:srgbClr val="EBEBEB">
+                  <a:alpha val="100000"/>
+                </a:srgbClr>
+              </a:solidFill>
+              <a:prstDash val="solid"/>
+              <a:round/>
+            </a:ln>
+          </p:spPr>
+          <p:txBody>
+            <a:bodyPr/>
+            <a:lstStyle/>
+            <a:p/>
+          </p:txBody>
+        </p:sp>
+        <p:sp>
+          <p:nvSpPr>
+            <p:cNvPr id="45" name="pl45"/>
+            <p:cNvSpPr/>
+            <p:nvPr/>
+          </p:nvSpPr>
+          <p:spPr>
+            <a:xfrm>
+              <a:off x="2542190" y="4336484"/>
+              <a:ext cx="0" cy="1317069"/>
+            </a:xfrm>
+            <a:custGeom>
+              <a:avLst/>
+              <a:pathLst>
+                <a:path w="0" h="1317069">
+                  <a:moveTo>
+                    <a:pt x="0" y="1317069"/>
+                  </a:moveTo>
+                  <a:lnTo>
+                    <a:pt x="0" y="0"/>
+                  </a:lnTo>
+                  <a:lnTo>
+                    <a:pt x="0" y="0"/>
+                  </a:lnTo>
+                </a:path>
+              </a:pathLst>
+            </a:custGeom>
+            <a:ln w="6775" cap="flat">
+              <a:solidFill>
+                <a:srgbClr val="EBEBEB">
+                  <a:alpha val="100000"/>
+                </a:srgbClr>
+              </a:solidFill>
+              <a:prstDash val="solid"/>
+              <a:round/>
+            </a:ln>
+          </p:spPr>
+          <p:txBody>
+            <a:bodyPr/>
+            <a:lstStyle/>
+            <a:p/>
+          </p:txBody>
+        </p:sp>
+        <p:sp>
+          <p:nvSpPr>
+            <p:cNvPr id="46" name="pl46"/>
+            <p:cNvSpPr/>
+            <p:nvPr/>
+          </p:nvSpPr>
+          <p:spPr>
+            <a:xfrm>
+              <a:off x="3355791" y="4336484"/>
+              <a:ext cx="0" cy="1317069"/>
+            </a:xfrm>
+            <a:custGeom>
+              <a:avLst/>
+              <a:pathLst>
+                <a:path w="0" h="1317069">
+                  <a:moveTo>
+                    <a:pt x="0" y="1317069"/>
+                  </a:moveTo>
+                  <a:lnTo>
+                    <a:pt x="0" y="0"/>
+                  </a:lnTo>
+                  <a:lnTo>
+                    <a:pt x="0" y="0"/>
+                  </a:lnTo>
+                </a:path>
+              </a:pathLst>
+            </a:custGeom>
+            <a:ln w="6775" cap="flat">
+              <a:solidFill>
+                <a:srgbClr val="EBEBEB">
+                  <a:alpha val="100000"/>
+                </a:srgbClr>
+              </a:solidFill>
+              <a:prstDash val="solid"/>
+              <a:round/>
+            </a:ln>
+          </p:spPr>
+          <p:txBody>
+            <a:bodyPr/>
+            <a:lstStyle/>
+            <a:p/>
+          </p:txBody>
+        </p:sp>
+        <p:sp>
+          <p:nvSpPr>
+            <p:cNvPr id="47" name="pl47"/>
+            <p:cNvSpPr/>
+            <p:nvPr/>
+          </p:nvSpPr>
+          <p:spPr>
+            <a:xfrm>
+              <a:off x="4169393" y="4336484"/>
+              <a:ext cx="0" cy="1317069"/>
+            </a:xfrm>
+            <a:custGeom>
+              <a:avLst/>
+              <a:pathLst>
+                <a:path w="0" h="1317069">
+                  <a:moveTo>
+                    <a:pt x="0" y="1317069"/>
+                  </a:moveTo>
+                  <a:lnTo>
+                    <a:pt x="0" y="0"/>
+                  </a:lnTo>
+                  <a:lnTo>
+                    <a:pt x="0" y="0"/>
+                  </a:lnTo>
+                </a:path>
+              </a:pathLst>
+            </a:custGeom>
+            <a:ln w="6775" cap="flat">
+              <a:solidFill>
+                <a:srgbClr val="EBEBEB">
+                  <a:alpha val="100000"/>
+                </a:srgbClr>
+              </a:solidFill>
+              <a:prstDash val="solid"/>
+              <a:round/>
+            </a:ln>
+          </p:spPr>
+          <p:txBody>
+            <a:bodyPr/>
+            <a:lstStyle/>
+            <a:p/>
+          </p:txBody>
+        </p:sp>
+        <p:sp>
+          <p:nvSpPr>
+            <p:cNvPr id="48" name="pl48"/>
+            <p:cNvSpPr/>
+            <p:nvPr/>
+          </p:nvSpPr>
+          <p:spPr>
+            <a:xfrm>
+              <a:off x="4982994" y="4336484"/>
+              <a:ext cx="0" cy="1317069"/>
+            </a:xfrm>
+            <a:custGeom>
+              <a:avLst/>
+              <a:pathLst>
+                <a:path w="0" h="1317069">
+                  <a:moveTo>
+                    <a:pt x="0" y="1317069"/>
+                  </a:moveTo>
+                  <a:lnTo>
+                    <a:pt x="0" y="0"/>
+                  </a:lnTo>
+                  <a:lnTo>
+                    <a:pt x="0" y="0"/>
+                  </a:lnTo>
+                </a:path>
+              </a:pathLst>
+            </a:custGeom>
+            <a:ln w="6775" cap="flat">
+              <a:solidFill>
+                <a:srgbClr val="EBEBEB">
+                  <a:alpha val="100000"/>
+                </a:srgbClr>
+              </a:solidFill>
+              <a:prstDash val="solid"/>
+              <a:round/>
+            </a:ln>
+          </p:spPr>
+          <p:txBody>
+            <a:bodyPr/>
+            <a:lstStyle/>
+            <a:p/>
+          </p:txBody>
+        </p:sp>
+        <p:sp>
+          <p:nvSpPr>
+            <p:cNvPr id="49" name="pl49"/>
+            <p:cNvSpPr/>
+            <p:nvPr/>
+          </p:nvSpPr>
+          <p:spPr>
+            <a:xfrm>
+              <a:off x="5796595" y="4336484"/>
+              <a:ext cx="0" cy="1317069"/>
+            </a:xfrm>
+            <a:custGeom>
+              <a:avLst/>
+              <a:pathLst>
+                <a:path w="0" h="1317069">
+                  <a:moveTo>
+                    <a:pt x="0" y="1317069"/>
+                  </a:moveTo>
+                  <a:lnTo>
+                    <a:pt x="0" y="0"/>
+                  </a:lnTo>
+                  <a:lnTo>
+                    <a:pt x="0" y="0"/>
+                  </a:lnTo>
+                </a:path>
+              </a:pathLst>
+            </a:custGeom>
+            <a:ln w="6775" cap="flat">
+              <a:solidFill>
+                <a:srgbClr val="EBEBEB">
+                  <a:alpha val="100000"/>
+                </a:srgbClr>
+              </a:solidFill>
+              <a:prstDash val="solid"/>
+              <a:round/>
+            </a:ln>
+          </p:spPr>
+          <p:txBody>
+            <a:bodyPr/>
+            <a:lstStyle/>
+            <a:p/>
+          </p:txBody>
+        </p:sp>
+        <p:sp>
+          <p:nvSpPr>
+            <p:cNvPr id="50" name="pl50"/>
+            <p:cNvSpPr/>
+            <p:nvPr/>
+          </p:nvSpPr>
+          <p:spPr>
+            <a:xfrm>
+              <a:off x="6610197" y="4336484"/>
+              <a:ext cx="0" cy="1317069"/>
+            </a:xfrm>
+            <a:custGeom>
+              <a:avLst/>
+              <a:pathLst>
+                <a:path w="0" h="1317069">
+                  <a:moveTo>
+                    <a:pt x="0" y="1317069"/>
+                  </a:moveTo>
+                  <a:lnTo>
+                    <a:pt x="0" y="0"/>
+                  </a:lnTo>
+                  <a:lnTo>
+                    <a:pt x="0" y="0"/>
+                  </a:lnTo>
+                </a:path>
+              </a:pathLst>
+            </a:custGeom>
+            <a:ln w="6775" cap="flat">
+              <a:solidFill>
+                <a:srgbClr val="EBEBEB">
+                  <a:alpha val="100000"/>
+                </a:srgbClr>
+              </a:solidFill>
+              <a:prstDash val="solid"/>
+              <a:round/>
+            </a:ln>
+          </p:spPr>
+          <p:txBody>
+            <a:bodyPr/>
+            <a:lstStyle/>
+            <a:p/>
+          </p:txBody>
+        </p:sp>
+        <p:sp>
+          <p:nvSpPr>
+            <p:cNvPr id="51" name="pl51"/>
+            <p:cNvSpPr/>
+            <p:nvPr/>
+          </p:nvSpPr>
+          <p:spPr>
+            <a:xfrm>
+              <a:off x="7423798" y="4336484"/>
+              <a:ext cx="0" cy="1317069"/>
+            </a:xfrm>
+            <a:custGeom>
+              <a:avLst/>
+              <a:pathLst>
+                <a:path w="0" h="1317069">
+                  <a:moveTo>
+                    <a:pt x="0" y="1317069"/>
+                  </a:moveTo>
+                  <a:lnTo>
+                    <a:pt x="0" y="0"/>
+                  </a:lnTo>
+                  <a:lnTo>
+                    <a:pt x="0" y="0"/>
+                  </a:lnTo>
+                </a:path>
+              </a:pathLst>
+            </a:custGeom>
+            <a:ln w="6775" cap="flat">
+              <a:solidFill>
+                <a:srgbClr val="EBEBEB">
+                  <a:alpha val="100000"/>
+                </a:srgbClr>
+              </a:solidFill>
+              <a:prstDash val="solid"/>
+              <a:round/>
+            </a:ln>
+          </p:spPr>
+          <p:txBody>
+            <a:bodyPr/>
+            <a:lstStyle/>
+            <a:p/>
+          </p:txBody>
+        </p:sp>
+        <p:sp>
+          <p:nvSpPr>
+            <p:cNvPr id="52" name="pl52"/>
+            <p:cNvSpPr/>
+            <p:nvPr/>
+          </p:nvSpPr>
+          <p:spPr>
+            <a:xfrm>
+              <a:off x="8237399" y="4336484"/>
+              <a:ext cx="0" cy="1317069"/>
+            </a:xfrm>
+            <a:custGeom>
+              <a:avLst/>
+              <a:pathLst>
+                <a:path w="0" h="1317069">
+                  <a:moveTo>
+                    <a:pt x="0" y="1317069"/>
+                  </a:moveTo>
+                  <a:lnTo>
+                    <a:pt x="0" y="0"/>
+                  </a:lnTo>
+                  <a:lnTo>
+                    <a:pt x="0" y="0"/>
+                  </a:lnTo>
+                </a:path>
+              </a:pathLst>
+            </a:custGeom>
+            <a:ln w="6775" cap="flat">
+              <a:solidFill>
+                <a:srgbClr val="EBEBEB">
+                  <a:alpha val="100000"/>
+                </a:srgbClr>
+              </a:solidFill>
+              <a:prstDash val="solid"/>
+              <a:round/>
+            </a:ln>
+          </p:spPr>
+          <p:txBody>
+            <a:bodyPr/>
+            <a:lstStyle/>
+            <a:p/>
+          </p:txBody>
+        </p:sp>
+        <p:sp>
+          <p:nvSpPr>
+            <p:cNvPr id="53" name="pl53"/>
+            <p:cNvSpPr/>
+            <p:nvPr/>
+          </p:nvSpPr>
+          <p:spPr>
+            <a:xfrm>
+              <a:off x="887106" y="5593686"/>
+              <a:ext cx="7660515" cy="0"/>
+            </a:xfrm>
+            <a:custGeom>
+              <a:avLst/>
+              <a:pathLst>
+                <a:path w="7660515" h="0">
+                  <a:moveTo>
+                    <a:pt x="0" y="0"/>
+                  </a:moveTo>
+                  <a:lnTo>
+                    <a:pt x="7660515" y="0"/>
+                  </a:lnTo>
+                  <a:lnTo>
+                    <a:pt x="7660515" y="0"/>
+                  </a:lnTo>
+                </a:path>
+              </a:pathLst>
+            </a:custGeom>
+            <a:ln w="13550" cap="flat">
+              <a:solidFill>
+                <a:srgbClr val="EBEBEB">
+                  <a:alpha val="100000"/>
+                </a:srgbClr>
+              </a:solidFill>
+              <a:prstDash val="solid"/>
+              <a:round/>
+            </a:ln>
+          </p:spPr>
+          <p:txBody>
+            <a:bodyPr/>
+            <a:lstStyle/>
+            <a:p/>
+          </p:txBody>
+        </p:sp>
+        <p:sp>
+          <p:nvSpPr>
+            <p:cNvPr id="54" name="pl54"/>
+            <p:cNvSpPr/>
+            <p:nvPr/>
+          </p:nvSpPr>
+          <p:spPr>
+            <a:xfrm>
+              <a:off x="887106" y="5294352"/>
+              <a:ext cx="7660515" cy="0"/>
+            </a:xfrm>
+            <a:custGeom>
+              <a:avLst/>
+              <a:pathLst>
+                <a:path w="7660515" h="0">
+                  <a:moveTo>
+                    <a:pt x="0" y="0"/>
+                  </a:moveTo>
+                  <a:lnTo>
+                    <a:pt x="7660515" y="0"/>
+                  </a:lnTo>
+                  <a:lnTo>
+                    <a:pt x="7660515" y="0"/>
+                  </a:lnTo>
+                </a:path>
+              </a:pathLst>
+            </a:custGeom>
+            <a:ln w="13550" cap="flat">
+              <a:solidFill>
+                <a:srgbClr val="EBEBEB">
+                  <a:alpha val="100000"/>
+                </a:srgbClr>
+              </a:solidFill>
+              <a:prstDash val="solid"/>
+              <a:round/>
+            </a:ln>
+          </p:spPr>
+          <p:txBody>
+            <a:bodyPr/>
+            <a:lstStyle/>
+            <a:p/>
+          </p:txBody>
+        </p:sp>
+        <p:sp>
+          <p:nvSpPr>
+            <p:cNvPr id="55" name="pl55"/>
+            <p:cNvSpPr/>
+            <p:nvPr/>
+          </p:nvSpPr>
+          <p:spPr>
+            <a:xfrm>
+              <a:off x="887106" y="4995019"/>
+              <a:ext cx="7660515" cy="0"/>
+            </a:xfrm>
+            <a:custGeom>
+              <a:avLst/>
+              <a:pathLst>
+                <a:path w="7660515" h="0">
+                  <a:moveTo>
+                    <a:pt x="0" y="0"/>
+                  </a:moveTo>
+                  <a:lnTo>
+                    <a:pt x="7660515" y="0"/>
+                  </a:lnTo>
+                  <a:lnTo>
+                    <a:pt x="7660515" y="0"/>
+                  </a:lnTo>
+                </a:path>
+              </a:pathLst>
+            </a:custGeom>
+            <a:ln w="13550" cap="flat">
+              <a:solidFill>
+                <a:srgbClr val="EBEBEB">
+                  <a:alpha val="100000"/>
+                </a:srgbClr>
+              </a:solidFill>
+              <a:prstDash val="solid"/>
+              <a:round/>
+            </a:ln>
+          </p:spPr>
+          <p:txBody>
+            <a:bodyPr/>
+            <a:lstStyle/>
+            <a:p/>
+          </p:txBody>
+        </p:sp>
+        <p:sp>
+          <p:nvSpPr>
+            <p:cNvPr id="56" name="pl56"/>
+            <p:cNvSpPr/>
+            <p:nvPr/>
+          </p:nvSpPr>
+          <p:spPr>
+            <a:xfrm>
+              <a:off x="887106" y="4695685"/>
+              <a:ext cx="7660515" cy="0"/>
+            </a:xfrm>
+            <a:custGeom>
+              <a:avLst/>
+              <a:pathLst>
+                <a:path w="7660515" h="0">
+                  <a:moveTo>
+                    <a:pt x="0" y="0"/>
+                  </a:moveTo>
+                  <a:lnTo>
+                    <a:pt x="7660515" y="0"/>
+                  </a:lnTo>
+                  <a:lnTo>
+                    <a:pt x="7660515" y="0"/>
+                  </a:lnTo>
+                </a:path>
+              </a:pathLst>
+            </a:custGeom>
+            <a:ln w="13550" cap="flat">
+              <a:solidFill>
+                <a:srgbClr val="EBEBEB">
+                  <a:alpha val="100000"/>
+                </a:srgbClr>
+              </a:solidFill>
+              <a:prstDash val="solid"/>
+              <a:round/>
+            </a:ln>
+          </p:spPr>
+          <p:txBody>
+            <a:bodyPr/>
+            <a:lstStyle/>
+            <a:p/>
+          </p:txBody>
+        </p:sp>
+        <p:sp>
+          <p:nvSpPr>
+            <p:cNvPr id="57" name="pl57"/>
+            <p:cNvSpPr/>
+            <p:nvPr/>
+          </p:nvSpPr>
+          <p:spPr>
+            <a:xfrm>
+              <a:off x="887106" y="4396351"/>
+              <a:ext cx="7660515" cy="0"/>
+            </a:xfrm>
+            <a:custGeom>
+              <a:avLst/>
+              <a:pathLst>
+                <a:path w="7660515" h="0">
+                  <a:moveTo>
+                    <a:pt x="0" y="0"/>
+                  </a:moveTo>
+                  <a:lnTo>
+                    <a:pt x="7660515" y="0"/>
+                  </a:lnTo>
+                  <a:lnTo>
+                    <a:pt x="7660515" y="0"/>
+                  </a:lnTo>
+                </a:path>
+              </a:pathLst>
+            </a:custGeom>
+            <a:ln w="13550" cap="flat">
+              <a:solidFill>
+                <a:srgbClr val="EBEBEB">
+                  <a:alpha val="100000"/>
+                </a:srgbClr>
+              </a:solidFill>
+              <a:prstDash val="solid"/>
+              <a:round/>
+            </a:ln>
+          </p:spPr>
+          <p:txBody>
+            <a:bodyPr/>
+            <a:lstStyle/>
+            <a:p/>
+          </p:txBody>
+        </p:sp>
+        <p:sp>
+          <p:nvSpPr>
+            <p:cNvPr id="58" name="pl58"/>
+            <p:cNvSpPr/>
+            <p:nvPr/>
+          </p:nvSpPr>
+          <p:spPr>
+            <a:xfrm>
+              <a:off x="1321788" y="4336484"/>
+              <a:ext cx="0" cy="1317069"/>
+            </a:xfrm>
+            <a:custGeom>
+              <a:avLst/>
+              <a:pathLst>
+                <a:path w="0" h="1317069">
+                  <a:moveTo>
+                    <a:pt x="0" y="1317069"/>
+                  </a:moveTo>
+                  <a:lnTo>
+                    <a:pt x="0" y="0"/>
+                  </a:lnTo>
+                  <a:lnTo>
+                    <a:pt x="0" y="0"/>
+                  </a:lnTo>
+                </a:path>
+              </a:pathLst>
+            </a:custGeom>
+            <a:ln w="13550" cap="flat">
+              <a:solidFill>
+                <a:srgbClr val="EBEBEB">
+                  <a:alpha val="100000"/>
+                </a:srgbClr>
+              </a:solidFill>
+              <a:prstDash val="solid"/>
+              <a:round/>
+            </a:ln>
+          </p:spPr>
+          <p:txBody>
+            <a:bodyPr/>
+            <a:lstStyle/>
+            <a:p/>
+          </p:txBody>
+        </p:sp>
+        <p:sp>
+          <p:nvSpPr>
+            <p:cNvPr id="59" name="pl59"/>
+            <p:cNvSpPr/>
+            <p:nvPr/>
+          </p:nvSpPr>
+          <p:spPr>
+            <a:xfrm>
+              <a:off x="2135389" y="4336484"/>
+              <a:ext cx="0" cy="1317069"/>
+            </a:xfrm>
+            <a:custGeom>
+              <a:avLst/>
+              <a:pathLst>
+                <a:path w="0" h="1317069">
+                  <a:moveTo>
+                    <a:pt x="0" y="1317069"/>
+                  </a:moveTo>
+                  <a:lnTo>
+                    <a:pt x="0" y="0"/>
+                  </a:lnTo>
+                  <a:lnTo>
+                    <a:pt x="0" y="0"/>
+                  </a:lnTo>
+                </a:path>
+              </a:pathLst>
+            </a:custGeom>
+            <a:ln w="13550" cap="flat">
+              <a:solidFill>
+                <a:srgbClr val="EBEBEB">
+                  <a:alpha val="100000"/>
+                </a:srgbClr>
+              </a:solidFill>
+              <a:prstDash val="solid"/>
+              <a:round/>
+            </a:ln>
+          </p:spPr>
+          <p:txBody>
+            <a:bodyPr/>
+            <a:lstStyle/>
+            <a:p/>
+          </p:txBody>
+        </p:sp>
+        <p:sp>
+          <p:nvSpPr>
+            <p:cNvPr id="60" name="pl60"/>
+            <p:cNvSpPr/>
+            <p:nvPr/>
+          </p:nvSpPr>
+          <p:spPr>
+            <a:xfrm>
+              <a:off x="2948991" y="4336484"/>
+              <a:ext cx="0" cy="1317069"/>
+            </a:xfrm>
+            <a:custGeom>
+              <a:avLst/>
+              <a:pathLst>
+                <a:path w="0" h="1317069">
+                  <a:moveTo>
+                    <a:pt x="0" y="1317069"/>
+                  </a:moveTo>
+                  <a:lnTo>
+                    <a:pt x="0" y="0"/>
+                  </a:lnTo>
+                  <a:lnTo>
+                    <a:pt x="0" y="0"/>
+                  </a:lnTo>
+                </a:path>
+              </a:pathLst>
+            </a:custGeom>
+            <a:ln w="13550" cap="flat">
+              <a:solidFill>
+                <a:srgbClr val="EBEBEB">
+                  <a:alpha val="100000"/>
+                </a:srgbClr>
+              </a:solidFill>
+              <a:prstDash val="solid"/>
+              <a:round/>
+            </a:ln>
+          </p:spPr>
+          <p:txBody>
+            <a:bodyPr/>
+            <a:lstStyle/>
+            <a:p/>
+          </p:txBody>
+        </p:sp>
+        <p:sp>
+          <p:nvSpPr>
+            <p:cNvPr id="61" name="pl61"/>
+            <p:cNvSpPr/>
+            <p:nvPr/>
+          </p:nvSpPr>
+          <p:spPr>
+            <a:xfrm>
+              <a:off x="3762592" y="4336484"/>
+              <a:ext cx="0" cy="1317069"/>
+            </a:xfrm>
+            <a:custGeom>
+              <a:avLst/>
+              <a:pathLst>
+                <a:path w="0" h="1317069">
+                  <a:moveTo>
+                    <a:pt x="0" y="1317069"/>
+                  </a:moveTo>
+                  <a:lnTo>
+                    <a:pt x="0" y="0"/>
+                  </a:lnTo>
+                  <a:lnTo>
+                    <a:pt x="0" y="0"/>
+                  </a:lnTo>
+                </a:path>
+              </a:pathLst>
+            </a:custGeom>
+            <a:ln w="13550" cap="flat">
+              <a:solidFill>
+                <a:srgbClr val="EBEBEB">
+                  <a:alpha val="100000"/>
+                </a:srgbClr>
+              </a:solidFill>
+              <a:prstDash val="solid"/>
+              <a:round/>
+            </a:ln>
+          </p:spPr>
+          <p:txBody>
+            <a:bodyPr/>
+            <a:lstStyle/>
+            <a:p/>
+          </p:txBody>
+        </p:sp>
+        <p:sp>
+          <p:nvSpPr>
+            <p:cNvPr id="62" name="pl62"/>
+            <p:cNvSpPr/>
+            <p:nvPr/>
+          </p:nvSpPr>
+          <p:spPr>
+            <a:xfrm>
+              <a:off x="4576193" y="4336484"/>
+              <a:ext cx="0" cy="1317069"/>
+            </a:xfrm>
+            <a:custGeom>
+              <a:avLst/>
+              <a:pathLst>
+                <a:path w="0" h="1317069">
+                  <a:moveTo>
+                    <a:pt x="0" y="1317069"/>
+                  </a:moveTo>
+                  <a:lnTo>
+                    <a:pt x="0" y="0"/>
+                  </a:lnTo>
+                  <a:lnTo>
+                    <a:pt x="0" y="0"/>
+                  </a:lnTo>
+                </a:path>
+              </a:pathLst>
+            </a:custGeom>
+            <a:ln w="13550" cap="flat">
+              <a:solidFill>
+                <a:srgbClr val="EBEBEB">
+                  <a:alpha val="100000"/>
+                </a:srgbClr>
+              </a:solidFill>
+              <a:prstDash val="solid"/>
+              <a:round/>
+            </a:ln>
+          </p:spPr>
+          <p:txBody>
+            <a:bodyPr/>
+            <a:lstStyle/>
+            <a:p/>
+          </p:txBody>
+        </p:sp>
+        <p:sp>
+          <p:nvSpPr>
+            <p:cNvPr id="63" name="pl63"/>
+            <p:cNvSpPr/>
+            <p:nvPr/>
+          </p:nvSpPr>
+          <p:spPr>
+            <a:xfrm>
+              <a:off x="5389795" y="4336484"/>
+              <a:ext cx="0" cy="1317069"/>
+            </a:xfrm>
+            <a:custGeom>
+              <a:avLst/>
+              <a:pathLst>
+                <a:path w="0" h="1317069">
+                  <a:moveTo>
+                    <a:pt x="0" y="1317069"/>
+                  </a:moveTo>
+                  <a:lnTo>
+                    <a:pt x="0" y="0"/>
+                  </a:lnTo>
+                  <a:lnTo>
+                    <a:pt x="0" y="0"/>
+                  </a:lnTo>
+                </a:path>
+              </a:pathLst>
+            </a:custGeom>
+            <a:ln w="13550" cap="flat">
+              <a:solidFill>
+                <a:srgbClr val="EBEBEB">
+                  <a:alpha val="100000"/>
+                </a:srgbClr>
+              </a:solidFill>
+              <a:prstDash val="solid"/>
+              <a:round/>
+            </a:ln>
+          </p:spPr>
+          <p:txBody>
+            <a:bodyPr/>
+            <a:lstStyle/>
+            <a:p/>
+          </p:txBody>
+        </p:sp>
+        <p:sp>
+          <p:nvSpPr>
+            <p:cNvPr id="64" name="pl64"/>
+            <p:cNvSpPr/>
+            <p:nvPr/>
+          </p:nvSpPr>
+          <p:spPr>
+            <a:xfrm>
+              <a:off x="6203396" y="4336484"/>
+              <a:ext cx="0" cy="1317069"/>
+            </a:xfrm>
+            <a:custGeom>
+              <a:avLst/>
+              <a:pathLst>
+                <a:path w="0" h="1317069">
+                  <a:moveTo>
+                    <a:pt x="0" y="1317069"/>
+                  </a:moveTo>
+                  <a:lnTo>
+                    <a:pt x="0" y="0"/>
+                  </a:lnTo>
+                  <a:lnTo>
+                    <a:pt x="0" y="0"/>
+                  </a:lnTo>
+                </a:path>
+              </a:pathLst>
+            </a:custGeom>
+            <a:ln w="13550" cap="flat">
+              <a:solidFill>
+                <a:srgbClr val="EBEBEB">
+                  <a:alpha val="100000"/>
+                </a:srgbClr>
+              </a:solidFill>
+              <a:prstDash val="solid"/>
+              <a:round/>
+            </a:ln>
+          </p:spPr>
+          <p:txBody>
+            <a:bodyPr/>
+            <a:lstStyle/>
+            <a:p/>
+          </p:txBody>
+        </p:sp>
+        <p:sp>
+          <p:nvSpPr>
+            <p:cNvPr id="65" name="pl65"/>
+            <p:cNvSpPr/>
+            <p:nvPr/>
+          </p:nvSpPr>
+          <p:spPr>
+            <a:xfrm>
+              <a:off x="7016997" y="4336484"/>
+              <a:ext cx="0" cy="1317069"/>
+            </a:xfrm>
+            <a:custGeom>
+              <a:avLst/>
+              <a:pathLst>
+                <a:path w="0" h="1317069">
+                  <a:moveTo>
+                    <a:pt x="0" y="1317069"/>
+                  </a:moveTo>
+                  <a:lnTo>
+                    <a:pt x="0" y="0"/>
+                  </a:lnTo>
+                  <a:lnTo>
+                    <a:pt x="0" y="0"/>
+                  </a:lnTo>
+                </a:path>
+              </a:pathLst>
+            </a:custGeom>
+            <a:ln w="13550" cap="flat">
+              <a:solidFill>
+                <a:srgbClr val="EBEBEB">
+                  <a:alpha val="100000"/>
+                </a:srgbClr>
+              </a:solidFill>
+              <a:prstDash val="solid"/>
+              <a:round/>
+            </a:ln>
+          </p:spPr>
+          <p:txBody>
+            <a:bodyPr/>
+            <a:lstStyle/>
+            <a:p/>
+          </p:txBody>
+        </p:sp>
+        <p:sp>
+          <p:nvSpPr>
+            <p:cNvPr id="66" name="pl66"/>
+            <p:cNvSpPr/>
+            <p:nvPr/>
+          </p:nvSpPr>
+          <p:spPr>
+            <a:xfrm>
+              <a:off x="7830599" y="4336484"/>
+              <a:ext cx="0" cy="1317069"/>
+            </a:xfrm>
+            <a:custGeom>
+              <a:avLst/>
+              <a:pathLst>
+                <a:path w="0" h="1317069">
+                  <a:moveTo>
+                    <a:pt x="0" y="1317069"/>
+                  </a:moveTo>
+                  <a:lnTo>
+                    <a:pt x="0" y="0"/>
+                  </a:lnTo>
+                  <a:lnTo>
+                    <a:pt x="0" y="0"/>
+                  </a:lnTo>
+                </a:path>
+              </a:pathLst>
+            </a:custGeom>
+            <a:ln w="13550" cap="flat">
+              <a:solidFill>
+                <a:srgbClr val="EBEBEB">
+                  <a:alpha val="100000"/>
+                </a:srgbClr>
+              </a:solidFill>
+              <a:prstDash val="solid"/>
+              <a:round/>
+            </a:ln>
+          </p:spPr>
+          <p:txBody>
+            <a:bodyPr/>
+            <a:lstStyle/>
+            <a:p/>
+          </p:txBody>
+        </p:sp>
+        <p:sp>
+          <p:nvSpPr>
+            <p:cNvPr id="67" name="pg67"/>
+            <p:cNvSpPr/>
+            <p:nvPr/>
+          </p:nvSpPr>
+          <p:spPr>
+            <a:xfrm>
+              <a:off x="1235312" y="4336484"/>
+              <a:ext cx="6964104" cy="1229985"/>
+            </a:xfrm>
+            <a:custGeom>
+              <a:avLst/>
+              <a:pathLst>
+                <a:path w="6964104" h="1229985">
+                  <a:moveTo>
+                    <a:pt x="1099406" y="0"/>
+                  </a:moveTo>
+                  <a:lnTo>
+                    <a:pt x="1125511" y="21571"/>
+                  </a:lnTo>
+                  <a:lnTo>
+                    <a:pt x="1195856" y="77087"/>
+                  </a:lnTo>
+                  <a:lnTo>
+                    <a:pt x="1266200" y="130109"/>
+                  </a:lnTo>
+                  <a:lnTo>
+                    <a:pt x="1336545" y="180748"/>
+                  </a:lnTo>
+                  <a:lnTo>
+                    <a:pt x="1406889" y="229112"/>
+                  </a:lnTo>
+                  <a:lnTo>
+                    <a:pt x="1477234" y="275303"/>
+                  </a:lnTo>
+                  <a:lnTo>
+                    <a:pt x="1547578" y="319419"/>
+                  </a:lnTo>
+                  <a:lnTo>
+                    <a:pt x="1617923" y="361553"/>
+                  </a:lnTo>
+                  <a:lnTo>
+                    <a:pt x="1688267" y="401794"/>
+                  </a:lnTo>
+                  <a:lnTo>
+                    <a:pt x="1758612" y="440227"/>
+                  </a:lnTo>
+                  <a:lnTo>
+                    <a:pt x="1828956" y="476933"/>
+                  </a:lnTo>
+                  <a:lnTo>
+                    <a:pt x="1899301" y="511990"/>
+                  </a:lnTo>
+                  <a:lnTo>
+                    <a:pt x="1969645" y="545471"/>
+                  </a:lnTo>
+                  <a:lnTo>
+                    <a:pt x="2039990" y="577449"/>
+                  </a:lnTo>
+                  <a:lnTo>
+                    <a:pt x="2110334" y="607990"/>
+                  </a:lnTo>
+                  <a:lnTo>
+                    <a:pt x="2180679" y="637158"/>
+                  </a:lnTo>
+                  <a:lnTo>
+                    <a:pt x="2251023" y="665016"/>
+                  </a:lnTo>
+                  <a:lnTo>
+                    <a:pt x="2321368" y="691623"/>
+                  </a:lnTo>
+                  <a:lnTo>
+                    <a:pt x="2391712" y="717034"/>
+                  </a:lnTo>
+                  <a:lnTo>
+                    <a:pt x="2462057" y="741303"/>
+                  </a:lnTo>
+                  <a:lnTo>
+                    <a:pt x="2532401" y="764482"/>
+                  </a:lnTo>
+                  <a:lnTo>
+                    <a:pt x="2602746" y="786619"/>
+                  </a:lnTo>
+                  <a:lnTo>
+                    <a:pt x="2673090" y="807762"/>
+                  </a:lnTo>
+                  <a:lnTo>
+                    <a:pt x="2743435" y="827955"/>
+                  </a:lnTo>
+                  <a:lnTo>
+                    <a:pt x="2813779" y="847241"/>
+                  </a:lnTo>
+                  <a:lnTo>
+                    <a:pt x="2884124" y="865660"/>
+                  </a:lnTo>
+                  <a:lnTo>
+                    <a:pt x="2954468" y="883252"/>
+                  </a:lnTo>
+                  <a:lnTo>
+                    <a:pt x="3024813" y="900053"/>
+                  </a:lnTo>
+                  <a:lnTo>
+                    <a:pt x="3095157" y="916099"/>
+                  </a:lnTo>
+                  <a:lnTo>
+                    <a:pt x="3165502" y="931425"/>
+                  </a:lnTo>
+                  <a:lnTo>
+                    <a:pt x="3235846" y="946062"/>
+                  </a:lnTo>
+                  <a:lnTo>
+                    <a:pt x="3306191" y="958739"/>
+                  </a:lnTo>
+                  <a:lnTo>
+                    <a:pt x="3376535" y="964175"/>
+                  </a:lnTo>
+                  <a:lnTo>
+                    <a:pt x="3446880" y="969513"/>
+                  </a:lnTo>
+                  <a:lnTo>
+                    <a:pt x="3517224" y="974753"/>
+                  </a:lnTo>
+                  <a:lnTo>
+                    <a:pt x="3587569" y="979897"/>
+                  </a:lnTo>
+                  <a:lnTo>
+                    <a:pt x="3657913" y="984948"/>
+                  </a:lnTo>
+                  <a:lnTo>
+                    <a:pt x="3728257" y="989907"/>
+                  </a:lnTo>
+                  <a:lnTo>
+                    <a:pt x="3798602" y="994776"/>
+                  </a:lnTo>
+                  <a:lnTo>
+                    <a:pt x="3868946" y="999556"/>
+                  </a:lnTo>
+                  <a:lnTo>
+                    <a:pt x="3939291" y="1004249"/>
+                  </a:lnTo>
+                  <a:lnTo>
+                    <a:pt x="4009635" y="1008857"/>
+                  </a:lnTo>
+                  <a:lnTo>
+                    <a:pt x="4079980" y="1013380"/>
+                  </a:lnTo>
+                  <a:lnTo>
+                    <a:pt x="4150324" y="1017821"/>
+                  </a:lnTo>
+                  <a:lnTo>
+                    <a:pt x="4220669" y="1022181"/>
+                  </a:lnTo>
+                  <a:lnTo>
+                    <a:pt x="4291013" y="1026462"/>
+                  </a:lnTo>
+                  <a:lnTo>
+                    <a:pt x="4361358" y="1030665"/>
+                  </a:lnTo>
+                  <a:lnTo>
+                    <a:pt x="4431702" y="1034791"/>
+                  </a:lnTo>
+                  <a:lnTo>
+                    <a:pt x="4502047" y="1038842"/>
+                  </a:lnTo>
+                  <a:lnTo>
+                    <a:pt x="4572391" y="1042820"/>
+                  </a:lnTo>
+                  <a:lnTo>
+                    <a:pt x="4642736" y="1046725"/>
+                  </a:lnTo>
+                  <a:lnTo>
+                    <a:pt x="4713080" y="1050558"/>
+                  </a:lnTo>
+                  <a:lnTo>
+                    <a:pt x="4783425" y="1054322"/>
+                  </a:lnTo>
+                  <a:lnTo>
+                    <a:pt x="4853769" y="1058018"/>
+                  </a:lnTo>
+                  <a:lnTo>
+                    <a:pt x="4924114" y="1061646"/>
+                  </a:lnTo>
+                  <a:lnTo>
+                    <a:pt x="4994458" y="1065208"/>
+                  </a:lnTo>
+                  <a:lnTo>
+                    <a:pt x="5064803" y="1068705"/>
+                  </a:lnTo>
+                  <a:lnTo>
+                    <a:pt x="5135147" y="1072138"/>
+                  </a:lnTo>
+                  <a:lnTo>
+                    <a:pt x="5205492" y="1075509"/>
+                  </a:lnTo>
+                  <a:lnTo>
+                    <a:pt x="5275836" y="1078819"/>
+                  </a:lnTo>
+                  <a:lnTo>
+                    <a:pt x="5346181" y="1082068"/>
+                  </a:lnTo>
+                  <a:lnTo>
+                    <a:pt x="5416525" y="1085258"/>
+                  </a:lnTo>
+                  <a:lnTo>
+                    <a:pt x="5486870" y="1088390"/>
+                  </a:lnTo>
+                  <a:lnTo>
+                    <a:pt x="5557214" y="1091465"/>
+                  </a:lnTo>
+                  <a:lnTo>
+                    <a:pt x="5627559" y="1094483"/>
+                  </a:lnTo>
+                  <a:lnTo>
+                    <a:pt x="5697903" y="1097447"/>
+                  </a:lnTo>
+                  <a:lnTo>
+                    <a:pt x="5768248" y="1100357"/>
+                  </a:lnTo>
+                  <a:lnTo>
+                    <a:pt x="5838592" y="1103214"/>
+                  </a:lnTo>
+                  <a:lnTo>
+                    <a:pt x="5908937" y="1106019"/>
+                  </a:lnTo>
+                  <a:lnTo>
+                    <a:pt x="5979281" y="1108773"/>
+                  </a:lnTo>
+                  <a:lnTo>
+                    <a:pt x="6049626" y="1111476"/>
+                  </a:lnTo>
+                  <a:lnTo>
+                    <a:pt x="6119970" y="1114131"/>
+                  </a:lnTo>
+                  <a:lnTo>
+                    <a:pt x="6190315" y="1116737"/>
+                  </a:lnTo>
+                  <a:lnTo>
+                    <a:pt x="6260659" y="1119295"/>
+                  </a:lnTo>
+                  <a:lnTo>
+                    <a:pt x="6331004" y="1121807"/>
+                  </a:lnTo>
+                  <a:lnTo>
+                    <a:pt x="6401348" y="1124273"/>
+                  </a:lnTo>
+                  <a:lnTo>
+                    <a:pt x="6471693" y="1126694"/>
+                  </a:lnTo>
+                  <a:lnTo>
+                    <a:pt x="6542037" y="1129072"/>
+                  </a:lnTo>
+                  <a:lnTo>
+                    <a:pt x="6612382" y="1131405"/>
+                  </a:lnTo>
+                  <a:lnTo>
+                    <a:pt x="6682726" y="1133697"/>
+                  </a:lnTo>
+                  <a:lnTo>
+                    <a:pt x="6753071" y="1135946"/>
+                  </a:lnTo>
+                  <a:lnTo>
+                    <a:pt x="6823415" y="1138155"/>
+                  </a:lnTo>
+                  <a:lnTo>
+                    <a:pt x="6893760" y="1140323"/>
+                  </a:lnTo>
+                  <a:lnTo>
+                    <a:pt x="6964104" y="1142452"/>
+                  </a:lnTo>
+                  <a:lnTo>
+                    <a:pt x="6964104" y="1229985"/>
+                  </a:lnTo>
+                  <a:lnTo>
+                    <a:pt x="6893760" y="1228704"/>
+                  </a:lnTo>
+                  <a:lnTo>
+                    <a:pt x="6823415" y="1227364"/>
+                  </a:lnTo>
+                  <a:lnTo>
+                    <a:pt x="6753071" y="1225960"/>
+                  </a:lnTo>
+                  <a:lnTo>
+                    <a:pt x="6682726" y="1224490"/>
+                  </a:lnTo>
+                  <a:lnTo>
+                    <a:pt x="6612382" y="1222952"/>
+                  </a:lnTo>
+                  <a:lnTo>
+                    <a:pt x="6542037" y="1221340"/>
+                  </a:lnTo>
+                  <a:lnTo>
+                    <a:pt x="6471693" y="1219653"/>
+                  </a:lnTo>
+                  <a:lnTo>
+                    <a:pt x="6401348" y="1217887"/>
+                  </a:lnTo>
+                  <a:lnTo>
+                    <a:pt x="6331004" y="1216037"/>
+                  </a:lnTo>
+                  <a:lnTo>
+                    <a:pt x="6260659" y="1214101"/>
+                  </a:lnTo>
+                  <a:lnTo>
+                    <a:pt x="6190315" y="1212073"/>
+                  </a:lnTo>
+                  <a:lnTo>
+                    <a:pt x="6119970" y="1209950"/>
+                  </a:lnTo>
+                  <a:lnTo>
+                    <a:pt x="6049626" y="1207728"/>
+                  </a:lnTo>
+                  <a:lnTo>
+                    <a:pt x="5979281" y="1205400"/>
+                  </a:lnTo>
+                  <a:lnTo>
+                    <a:pt x="5908937" y="1202963"/>
+                  </a:lnTo>
+                  <a:lnTo>
+                    <a:pt x="5838592" y="1200412"/>
+                  </a:lnTo>
+                  <a:lnTo>
+                    <a:pt x="5768248" y="1197740"/>
+                  </a:lnTo>
+                  <a:lnTo>
+                    <a:pt x="5697903" y="1194943"/>
+                  </a:lnTo>
+                  <a:lnTo>
+                    <a:pt x="5627559" y="1192014"/>
+                  </a:lnTo>
+                  <a:lnTo>
+                    <a:pt x="5557214" y="1188948"/>
+                  </a:lnTo>
+                  <a:lnTo>
+                    <a:pt x="5486870" y="1185737"/>
+                  </a:lnTo>
+                  <a:lnTo>
+                    <a:pt x="5416525" y="1182375"/>
+                  </a:lnTo>
+                  <a:lnTo>
+                    <a:pt x="5346181" y="1178855"/>
+                  </a:lnTo>
+                  <a:lnTo>
+                    <a:pt x="5275836" y="1175169"/>
+                  </a:lnTo>
+                  <a:lnTo>
+                    <a:pt x="5205492" y="1171310"/>
+                  </a:lnTo>
+                  <a:lnTo>
+                    <a:pt x="5135147" y="1167269"/>
+                  </a:lnTo>
+                  <a:lnTo>
+                    <a:pt x="5064803" y="1163039"/>
+                  </a:lnTo>
+                  <a:lnTo>
+                    <a:pt x="4994458" y="1158609"/>
+                  </a:lnTo>
+                  <a:lnTo>
+                    <a:pt x="4924114" y="1153971"/>
+                  </a:lnTo>
+                  <a:lnTo>
+                    <a:pt x="4853769" y="1149115"/>
+                  </a:lnTo>
+                  <a:lnTo>
+                    <a:pt x="4783425" y="1144030"/>
+                  </a:lnTo>
+                  <a:lnTo>
+                    <a:pt x="4713080" y="1138706"/>
+                  </a:lnTo>
+                  <a:lnTo>
+                    <a:pt x="4642736" y="1133132"/>
+                  </a:lnTo>
+                  <a:lnTo>
+                    <a:pt x="4572391" y="1127295"/>
+                  </a:lnTo>
+                  <a:lnTo>
+                    <a:pt x="4502047" y="1121184"/>
+                  </a:lnTo>
+                  <a:lnTo>
+                    <a:pt x="4431702" y="1114785"/>
+                  </a:lnTo>
+                  <a:lnTo>
+                    <a:pt x="4361358" y="1108086"/>
+                  </a:lnTo>
+                  <a:lnTo>
+                    <a:pt x="4291013" y="1101071"/>
+                  </a:lnTo>
+                  <a:lnTo>
+                    <a:pt x="4220669" y="1093726"/>
+                  </a:lnTo>
+                  <a:lnTo>
+                    <a:pt x="4150324" y="1086036"/>
+                  </a:lnTo>
+                  <a:lnTo>
+                    <a:pt x="4079980" y="1077983"/>
+                  </a:lnTo>
+                  <a:lnTo>
+                    <a:pt x="4009635" y="1069552"/>
+                  </a:lnTo>
+                  <a:lnTo>
+                    <a:pt x="3939291" y="1060725"/>
+                  </a:lnTo>
+                  <a:lnTo>
+                    <a:pt x="3868946" y="1051482"/>
+                  </a:lnTo>
+                  <a:lnTo>
+                    <a:pt x="3798602" y="1041804"/>
+                  </a:lnTo>
+                  <a:lnTo>
+                    <a:pt x="3728257" y="1031672"/>
+                  </a:lnTo>
+                  <a:lnTo>
+                    <a:pt x="3657913" y="1021062"/>
+                  </a:lnTo>
+                  <a:lnTo>
+                    <a:pt x="3587569" y="1009953"/>
+                  </a:lnTo>
+                  <a:lnTo>
+                    <a:pt x="3517224" y="998322"/>
+                  </a:lnTo>
+                  <a:lnTo>
+                    <a:pt x="3446880" y="986144"/>
+                  </a:lnTo>
+                  <a:lnTo>
+                    <a:pt x="3376535" y="973392"/>
+                  </a:lnTo>
+                  <a:lnTo>
+                    <a:pt x="3306191" y="960041"/>
+                  </a:lnTo>
+                  <a:lnTo>
+                    <a:pt x="3235846" y="953202"/>
+                  </a:lnTo>
+                  <a:lnTo>
+                    <a:pt x="3165502" y="947562"/>
+                  </a:lnTo>
+                  <a:lnTo>
+                    <a:pt x="3095157" y="941817"/>
+                  </a:lnTo>
+                  <a:lnTo>
+                    <a:pt x="3024813" y="935966"/>
+                  </a:lnTo>
+                  <a:lnTo>
+                    <a:pt x="2954468" y="930006"/>
+                  </a:lnTo>
+                  <a:lnTo>
+                    <a:pt x="2884124" y="923936"/>
+                  </a:lnTo>
+                  <a:lnTo>
+                    <a:pt x="2813779" y="917753"/>
+                  </a:lnTo>
+                  <a:lnTo>
+                    <a:pt x="2743435" y="911455"/>
+                  </a:lnTo>
+                  <a:lnTo>
+                    <a:pt x="2673090" y="905041"/>
+                  </a:lnTo>
+                  <a:lnTo>
+                    <a:pt x="2602746" y="898507"/>
+                  </a:lnTo>
+                  <a:lnTo>
+                    <a:pt x="2532401" y="891852"/>
+                  </a:lnTo>
+                  <a:lnTo>
+                    <a:pt x="2462057" y="885074"/>
+                  </a:lnTo>
+                  <a:lnTo>
+                    <a:pt x="2391712" y="878170"/>
+                  </a:lnTo>
+                  <a:lnTo>
+                    <a:pt x="2321368" y="871138"/>
+                  </a:lnTo>
+                  <a:lnTo>
+                    <a:pt x="2251023" y="863976"/>
+                  </a:lnTo>
+                  <a:lnTo>
+                    <a:pt x="2180679" y="856680"/>
+                  </a:lnTo>
+                  <a:lnTo>
+                    <a:pt x="2110334" y="849250"/>
+                  </a:lnTo>
+                  <a:lnTo>
+                    <a:pt x="2039990" y="841681"/>
+                  </a:lnTo>
+                  <a:lnTo>
+                    <a:pt x="1969645" y="833972"/>
+                  </a:lnTo>
+                  <a:lnTo>
+                    <a:pt x="1899301" y="826120"/>
+                  </a:lnTo>
+                  <a:lnTo>
+                    <a:pt x="1828956" y="818123"/>
+                  </a:lnTo>
+                  <a:lnTo>
+                    <a:pt x="1758612" y="809976"/>
+                  </a:lnTo>
+                  <a:lnTo>
+                    <a:pt x="1688267" y="801679"/>
+                  </a:lnTo>
+                  <a:lnTo>
+                    <a:pt x="1617923" y="793228"/>
+                  </a:lnTo>
+                  <a:lnTo>
+                    <a:pt x="1547578" y="784620"/>
+                  </a:lnTo>
+                  <a:lnTo>
+                    <a:pt x="1477234" y="775853"/>
+                  </a:lnTo>
+                  <a:lnTo>
+                    <a:pt x="1406889" y="766922"/>
+                  </a:lnTo>
+                  <a:lnTo>
+                    <a:pt x="1336545" y="757826"/>
+                  </a:lnTo>
+                  <a:lnTo>
+                    <a:pt x="1266200" y="748562"/>
+                  </a:lnTo>
+                  <a:lnTo>
+                    <a:pt x="1195856" y="739125"/>
+                  </a:lnTo>
+                  <a:lnTo>
+                    <a:pt x="1125511" y="729514"/>
+                  </a:lnTo>
+                  <a:lnTo>
+                    <a:pt x="1055167" y="719724"/>
+                  </a:lnTo>
+                  <a:lnTo>
+                    <a:pt x="984822" y="709752"/>
+                  </a:lnTo>
+                  <a:lnTo>
+                    <a:pt x="914478" y="699595"/>
+                  </a:lnTo>
+                  <a:lnTo>
+                    <a:pt x="844133" y="689250"/>
+                  </a:lnTo>
+                  <a:lnTo>
+                    <a:pt x="773789" y="678713"/>
+                  </a:lnTo>
+                  <a:lnTo>
+                    <a:pt x="703444" y="667981"/>
+                  </a:lnTo>
+                  <a:lnTo>
+                    <a:pt x="633100" y="657049"/>
+                  </a:lnTo>
+                  <a:lnTo>
+                    <a:pt x="562755" y="645915"/>
+                  </a:lnTo>
+                  <a:lnTo>
+                    <a:pt x="492411" y="634574"/>
+                  </a:lnTo>
+                  <a:lnTo>
+                    <a:pt x="422066" y="623023"/>
+                  </a:lnTo>
+                  <a:lnTo>
+                    <a:pt x="351722" y="611257"/>
+                  </a:lnTo>
+                  <a:lnTo>
+                    <a:pt x="281377" y="599273"/>
+                  </a:lnTo>
+                  <a:lnTo>
+                    <a:pt x="211033" y="587067"/>
+                  </a:lnTo>
+                  <a:lnTo>
+                    <a:pt x="140688" y="574634"/>
+                  </a:lnTo>
+                  <a:lnTo>
+                    <a:pt x="70344" y="561971"/>
+                  </a:lnTo>
+                  <a:lnTo>
+                    <a:pt x="0" y="549072"/>
+                  </a:lnTo>
+                  <a:close/>
+                </a:path>
+              </a:pathLst>
+            </a:custGeom>
+            <a:solidFill>
+              <a:srgbClr val="FF8C00">
+                <a:alpha val="20000"/>
+              </a:srgbClr>
+            </a:solidFill>
+          </p:spPr>
+          <p:txBody>
+            <a:bodyPr/>
+            <a:lstStyle/>
+            <a:p/>
+          </p:txBody>
+        </p:sp>
+        <p:sp>
+          <p:nvSpPr>
+            <p:cNvPr id="68" name="pl68"/>
+            <p:cNvSpPr/>
+            <p:nvPr/>
+          </p:nvSpPr>
+          <p:spPr>
+            <a:xfrm>
+              <a:off x="2334718" y="4336484"/>
+              <a:ext cx="5864698" cy="1142452"/>
+            </a:xfrm>
+            <a:custGeom>
+              <a:avLst/>
+              <a:pathLst>
+                <a:path w="5864698" h="1142452">
+                  <a:moveTo>
+                    <a:pt x="0" y="0"/>
+                  </a:moveTo>
+                  <a:lnTo>
+                    <a:pt x="26105" y="21571"/>
+                  </a:lnTo>
+                  <a:lnTo>
+                    <a:pt x="96449" y="77087"/>
+                  </a:lnTo>
+                  <a:lnTo>
+                    <a:pt x="166794" y="130109"/>
+                  </a:lnTo>
+                  <a:lnTo>
+                    <a:pt x="237138" y="180748"/>
+                  </a:lnTo>
+                  <a:lnTo>
+                    <a:pt x="307483" y="229112"/>
+                  </a:lnTo>
+                  <a:lnTo>
+                    <a:pt x="377827" y="275303"/>
+                  </a:lnTo>
+                  <a:lnTo>
+                    <a:pt x="448172" y="319419"/>
+                  </a:lnTo>
+                  <a:lnTo>
+                    <a:pt x="518516" y="361553"/>
+                  </a:lnTo>
+                  <a:lnTo>
+                    <a:pt x="588861" y="401794"/>
+                  </a:lnTo>
+                  <a:lnTo>
+                    <a:pt x="659205" y="440227"/>
+                  </a:lnTo>
+                  <a:lnTo>
+                    <a:pt x="729550" y="476933"/>
+                  </a:lnTo>
+                  <a:lnTo>
+                    <a:pt x="799894" y="511990"/>
+                  </a:lnTo>
+                  <a:lnTo>
+                    <a:pt x="870239" y="545471"/>
+                  </a:lnTo>
+                  <a:lnTo>
+                    <a:pt x="940583" y="577449"/>
+                  </a:lnTo>
+                  <a:lnTo>
+                    <a:pt x="1010928" y="607990"/>
+                  </a:lnTo>
+                  <a:lnTo>
+                    <a:pt x="1081272" y="637158"/>
+                  </a:lnTo>
+                  <a:lnTo>
+                    <a:pt x="1151617" y="665016"/>
+                  </a:lnTo>
+                  <a:lnTo>
+                    <a:pt x="1221961" y="691623"/>
+                  </a:lnTo>
+                  <a:lnTo>
+                    <a:pt x="1292306" y="717034"/>
+                  </a:lnTo>
+                  <a:lnTo>
+                    <a:pt x="1362650" y="741303"/>
+                  </a:lnTo>
+                  <a:lnTo>
+                    <a:pt x="1432995" y="764482"/>
+                  </a:lnTo>
+                  <a:lnTo>
+                    <a:pt x="1503339" y="786619"/>
+                  </a:lnTo>
+                  <a:lnTo>
+                    <a:pt x="1573684" y="807762"/>
+                  </a:lnTo>
+                  <a:lnTo>
+                    <a:pt x="1644028" y="827955"/>
+                  </a:lnTo>
+                  <a:lnTo>
+                    <a:pt x="1714373" y="847241"/>
+                  </a:lnTo>
+                  <a:lnTo>
+                    <a:pt x="1784717" y="865660"/>
+                  </a:lnTo>
+                  <a:lnTo>
+                    <a:pt x="1855062" y="883252"/>
+                  </a:lnTo>
+                  <a:lnTo>
+                    <a:pt x="1925406" y="900053"/>
+                  </a:lnTo>
+                  <a:lnTo>
+                    <a:pt x="1995751" y="916099"/>
+                  </a:lnTo>
+                  <a:lnTo>
+                    <a:pt x="2066095" y="931425"/>
+                  </a:lnTo>
+                  <a:lnTo>
+                    <a:pt x="2136440" y="946062"/>
+                  </a:lnTo>
+                  <a:lnTo>
+                    <a:pt x="2206784" y="958739"/>
+                  </a:lnTo>
+                  <a:lnTo>
+                    <a:pt x="2277129" y="964175"/>
+                  </a:lnTo>
+                  <a:lnTo>
+                    <a:pt x="2347473" y="969513"/>
+                  </a:lnTo>
+                  <a:lnTo>
+                    <a:pt x="2417818" y="974753"/>
+                  </a:lnTo>
+                  <a:lnTo>
+                    <a:pt x="2488162" y="979897"/>
+                  </a:lnTo>
+                  <a:lnTo>
+                    <a:pt x="2558507" y="984948"/>
+                  </a:lnTo>
+                  <a:lnTo>
+                    <a:pt x="2628851" y="989907"/>
+                  </a:lnTo>
+                  <a:lnTo>
+                    <a:pt x="2699196" y="994776"/>
+                  </a:lnTo>
+                  <a:lnTo>
+                    <a:pt x="2769540" y="999556"/>
+                  </a:lnTo>
+                  <a:lnTo>
+                    <a:pt x="2839885" y="1004249"/>
+                  </a:lnTo>
+                  <a:lnTo>
+                    <a:pt x="2910229" y="1008857"/>
+                  </a:lnTo>
+                  <a:lnTo>
+                    <a:pt x="2980574" y="1013380"/>
+                  </a:lnTo>
+                  <a:lnTo>
+                    <a:pt x="3050918" y="1017821"/>
+                  </a:lnTo>
+                  <a:lnTo>
+                    <a:pt x="3121263" y="1022181"/>
+                  </a:lnTo>
+                  <a:lnTo>
+                    <a:pt x="3191607" y="1026462"/>
+                  </a:lnTo>
+                  <a:lnTo>
+                    <a:pt x="3261952" y="1030665"/>
+                  </a:lnTo>
+                  <a:lnTo>
+                    <a:pt x="3332296" y="1034791"/>
+                  </a:lnTo>
+                  <a:lnTo>
+                    <a:pt x="3402641" y="1038842"/>
+                  </a:lnTo>
+                  <a:lnTo>
+                    <a:pt x="3472985" y="1042820"/>
+                  </a:lnTo>
+                  <a:lnTo>
+                    <a:pt x="3543329" y="1046725"/>
+                  </a:lnTo>
+                  <a:lnTo>
+                    <a:pt x="3613674" y="1050558"/>
+                  </a:lnTo>
+                  <a:lnTo>
+                    <a:pt x="3684018" y="1054322"/>
+                  </a:lnTo>
+                  <a:lnTo>
+                    <a:pt x="3754363" y="1058018"/>
+                  </a:lnTo>
+                  <a:lnTo>
+                    <a:pt x="3824707" y="1061646"/>
+                  </a:lnTo>
+                  <a:lnTo>
+                    <a:pt x="3895052" y="1065208"/>
+                  </a:lnTo>
+                  <a:lnTo>
+                    <a:pt x="3965396" y="1068705"/>
+                  </a:lnTo>
+                  <a:lnTo>
+                    <a:pt x="4035741" y="1072138"/>
+                  </a:lnTo>
+                  <a:lnTo>
+                    <a:pt x="4106085" y="1075509"/>
+                  </a:lnTo>
+                  <a:lnTo>
+                    <a:pt x="4176430" y="1078819"/>
+                  </a:lnTo>
+                  <a:lnTo>
+                    <a:pt x="4246774" y="1082068"/>
+                  </a:lnTo>
+                  <a:lnTo>
+                    <a:pt x="4317119" y="1085258"/>
+                  </a:lnTo>
+                  <a:lnTo>
+                    <a:pt x="4387463" y="1088390"/>
+                  </a:lnTo>
+                  <a:lnTo>
+                    <a:pt x="4457808" y="1091465"/>
+                  </a:lnTo>
+                  <a:lnTo>
+                    <a:pt x="4528152" y="1094483"/>
+                  </a:lnTo>
+                  <a:lnTo>
+                    <a:pt x="4598497" y="1097447"/>
+                  </a:lnTo>
+                  <a:lnTo>
+                    <a:pt x="4668841" y="1100357"/>
+                  </a:lnTo>
+                  <a:lnTo>
+                    <a:pt x="4739186" y="1103214"/>
+                  </a:lnTo>
+                  <a:lnTo>
+                    <a:pt x="4809530" y="1106019"/>
+                  </a:lnTo>
+                  <a:lnTo>
+                    <a:pt x="4879875" y="1108773"/>
+                  </a:lnTo>
+                  <a:lnTo>
+                    <a:pt x="4950219" y="1111476"/>
+                  </a:lnTo>
+                  <a:lnTo>
+                    <a:pt x="5020564" y="1114131"/>
+                  </a:lnTo>
+                  <a:lnTo>
+                    <a:pt x="5090908" y="1116737"/>
+                  </a:lnTo>
+                  <a:lnTo>
+                    <a:pt x="5161253" y="1119295"/>
+                  </a:lnTo>
+                  <a:lnTo>
+                    <a:pt x="5231597" y="1121807"/>
+                  </a:lnTo>
+                  <a:lnTo>
+                    <a:pt x="5301942" y="1124273"/>
+                  </a:lnTo>
+                  <a:lnTo>
+                    <a:pt x="5372286" y="1126694"/>
+                  </a:lnTo>
+                  <a:lnTo>
+                    <a:pt x="5442631" y="1129072"/>
+                  </a:lnTo>
+                  <a:lnTo>
+                    <a:pt x="5512975" y="1131405"/>
+                  </a:lnTo>
+                  <a:lnTo>
+                    <a:pt x="5583320" y="1133697"/>
+                  </a:lnTo>
+                  <a:lnTo>
+                    <a:pt x="5653664" y="1135946"/>
+                  </a:lnTo>
+                  <a:lnTo>
+                    <a:pt x="5724009" y="1138155"/>
+                  </a:lnTo>
+                  <a:lnTo>
+                    <a:pt x="5794353" y="1140323"/>
+                  </a:lnTo>
+                  <a:lnTo>
+                    <a:pt x="5864698" y="1142452"/>
+                  </a:lnTo>
+                </a:path>
+              </a:pathLst>
+            </a:custGeom>
+          </p:spPr>
+          <p:txBody>
+            <a:bodyPr/>
+            <a:lstStyle/>
+            <a:p/>
+          </p:txBody>
+        </p:sp>
+        <p:sp>
+          <p:nvSpPr>
+            <p:cNvPr id="69" name="pl69"/>
+            <p:cNvSpPr/>
+            <p:nvPr/>
+          </p:nvSpPr>
+          <p:spPr>
+            <a:xfrm>
+              <a:off x="1235312" y="4885557"/>
+              <a:ext cx="6964104" cy="680912"/>
+            </a:xfrm>
+            <a:custGeom>
+              <a:avLst/>
+              <a:pathLst>
+                <a:path w="6964104" h="680912">
+                  <a:moveTo>
+                    <a:pt x="6964104" y="680912"/>
+                  </a:moveTo>
+                  <a:lnTo>
+                    <a:pt x="6893760" y="679632"/>
+                  </a:lnTo>
+                  <a:lnTo>
+                    <a:pt x="6823415" y="678291"/>
+                  </a:lnTo>
+                  <a:lnTo>
+                    <a:pt x="6753071" y="676887"/>
+                  </a:lnTo>
+                  <a:lnTo>
+                    <a:pt x="6682726" y="675418"/>
+                  </a:lnTo>
+                  <a:lnTo>
+                    <a:pt x="6612382" y="673879"/>
+                  </a:lnTo>
+                  <a:lnTo>
+                    <a:pt x="6542037" y="672268"/>
+                  </a:lnTo>
+                  <a:lnTo>
+                    <a:pt x="6471693" y="670581"/>
+                  </a:lnTo>
+                  <a:lnTo>
+                    <a:pt x="6401348" y="668814"/>
+                  </a:lnTo>
+                  <a:lnTo>
+                    <a:pt x="6331004" y="666965"/>
+                  </a:lnTo>
+                  <a:lnTo>
+                    <a:pt x="6260659" y="665028"/>
+                  </a:lnTo>
+                  <a:lnTo>
+                    <a:pt x="6190315" y="663001"/>
+                  </a:lnTo>
+                  <a:lnTo>
+                    <a:pt x="6119970" y="660878"/>
+                  </a:lnTo>
+                  <a:lnTo>
+                    <a:pt x="6049626" y="658655"/>
+                  </a:lnTo>
+                  <a:lnTo>
+                    <a:pt x="5979281" y="656327"/>
+                  </a:lnTo>
+                  <a:lnTo>
+                    <a:pt x="5908937" y="653891"/>
+                  </a:lnTo>
+                  <a:lnTo>
+                    <a:pt x="5838592" y="651339"/>
+                  </a:lnTo>
+                  <a:lnTo>
+                    <a:pt x="5768248" y="648667"/>
+                  </a:lnTo>
+                  <a:lnTo>
+                    <a:pt x="5697903" y="645870"/>
+                  </a:lnTo>
+                  <a:lnTo>
+                    <a:pt x="5627559" y="642941"/>
+                  </a:lnTo>
+                  <a:lnTo>
+                    <a:pt x="5557214" y="639875"/>
+                  </a:lnTo>
+                  <a:lnTo>
+                    <a:pt x="5486870" y="636664"/>
+                  </a:lnTo>
+                  <a:lnTo>
+                    <a:pt x="5416525" y="633302"/>
+                  </a:lnTo>
+                  <a:lnTo>
+                    <a:pt x="5346181" y="629782"/>
+                  </a:lnTo>
+                  <a:lnTo>
+                    <a:pt x="5275836" y="626096"/>
+                  </a:lnTo>
+                  <a:lnTo>
+                    <a:pt x="5205492" y="622237"/>
+                  </a:lnTo>
+                  <a:lnTo>
+                    <a:pt x="5135147" y="618197"/>
+                  </a:lnTo>
+                  <a:lnTo>
+                    <a:pt x="5064803" y="613966"/>
+                  </a:lnTo>
+                  <a:lnTo>
+                    <a:pt x="4994458" y="609536"/>
+                  </a:lnTo>
+                  <a:lnTo>
+                    <a:pt x="4924114" y="604898"/>
+                  </a:lnTo>
+                  <a:lnTo>
+                    <a:pt x="4853769" y="600042"/>
+                  </a:lnTo>
+                  <a:lnTo>
+                    <a:pt x="4783425" y="594957"/>
+                  </a:lnTo>
+                  <a:lnTo>
+                    <a:pt x="4713080" y="589633"/>
+                  </a:lnTo>
+                  <a:lnTo>
+                    <a:pt x="4642736" y="584059"/>
+                  </a:lnTo>
+                  <a:lnTo>
+                    <a:pt x="4572391" y="578222"/>
+                  </a:lnTo>
+                  <a:lnTo>
+                    <a:pt x="4502047" y="572111"/>
+                  </a:lnTo>
+                  <a:lnTo>
+                    <a:pt x="4431702" y="565712"/>
+                  </a:lnTo>
+                  <a:lnTo>
+                    <a:pt x="4361358" y="559013"/>
+                  </a:lnTo>
+                  <a:lnTo>
+                    <a:pt x="4291013" y="551998"/>
+                  </a:lnTo>
+                  <a:lnTo>
+                    <a:pt x="4220669" y="544653"/>
+                  </a:lnTo>
+                  <a:lnTo>
+                    <a:pt x="4150324" y="536963"/>
+                  </a:lnTo>
+                  <a:lnTo>
+                    <a:pt x="4079980" y="528911"/>
+                  </a:lnTo>
+                  <a:lnTo>
+                    <a:pt x="4009635" y="520480"/>
+                  </a:lnTo>
+                  <a:lnTo>
+                    <a:pt x="3939291" y="511652"/>
+                  </a:lnTo>
+                  <a:lnTo>
+                    <a:pt x="3868946" y="502409"/>
+                  </a:lnTo>
+                  <a:lnTo>
+                    <a:pt x="3798602" y="492732"/>
+                  </a:lnTo>
+                  <a:lnTo>
+                    <a:pt x="3728257" y="482599"/>
+                  </a:lnTo>
+                  <a:lnTo>
+                    <a:pt x="3657913" y="471989"/>
+                  </a:lnTo>
+                  <a:lnTo>
+                    <a:pt x="3587569" y="460880"/>
+                  </a:lnTo>
+                  <a:lnTo>
+                    <a:pt x="3517224" y="449249"/>
+                  </a:lnTo>
+                  <a:lnTo>
+                    <a:pt x="3446880" y="437071"/>
+                  </a:lnTo>
+                  <a:lnTo>
+                    <a:pt x="3376535" y="424319"/>
+                  </a:lnTo>
+                  <a:lnTo>
+                    <a:pt x="3306191" y="410968"/>
+                  </a:lnTo>
+                  <a:lnTo>
+                    <a:pt x="3235846" y="404129"/>
+                  </a:lnTo>
+                  <a:lnTo>
+                    <a:pt x="3165502" y="398489"/>
+                  </a:lnTo>
+                  <a:lnTo>
+                    <a:pt x="3095157" y="392744"/>
+                  </a:lnTo>
+                  <a:lnTo>
+                    <a:pt x="3024813" y="386893"/>
+                  </a:lnTo>
+                  <a:lnTo>
+                    <a:pt x="2954468" y="380933"/>
+                  </a:lnTo>
+                  <a:lnTo>
+                    <a:pt x="2884124" y="374863"/>
+                  </a:lnTo>
+                  <a:lnTo>
+                    <a:pt x="2813779" y="368680"/>
+                  </a:lnTo>
+                  <a:lnTo>
+                    <a:pt x="2743435" y="362382"/>
+                  </a:lnTo>
+                  <a:lnTo>
+                    <a:pt x="2673090" y="355968"/>
+                  </a:lnTo>
+                  <a:lnTo>
+                    <a:pt x="2602746" y="349434"/>
+                  </a:lnTo>
+                  <a:lnTo>
+                    <a:pt x="2532401" y="342780"/>
+                  </a:lnTo>
+                  <a:lnTo>
+                    <a:pt x="2462057" y="336001"/>
+                  </a:lnTo>
+                  <a:lnTo>
+                    <a:pt x="2391712" y="329097"/>
+                  </a:lnTo>
+                  <a:lnTo>
+                    <a:pt x="2321368" y="322065"/>
+                  </a:lnTo>
+                  <a:lnTo>
+                    <a:pt x="2251023" y="314903"/>
+                  </a:lnTo>
+                  <a:lnTo>
+                    <a:pt x="2180679" y="307608"/>
+                  </a:lnTo>
+                  <a:lnTo>
+                    <a:pt x="2110334" y="300177"/>
+                  </a:lnTo>
+                  <a:lnTo>
+                    <a:pt x="2039990" y="292608"/>
+                  </a:lnTo>
+                  <a:lnTo>
+                    <a:pt x="1969645" y="284899"/>
+                  </a:lnTo>
+                  <a:lnTo>
+                    <a:pt x="1899301" y="277047"/>
+                  </a:lnTo>
+                  <a:lnTo>
+                    <a:pt x="1828956" y="269050"/>
+                  </a:lnTo>
+                  <a:lnTo>
+                    <a:pt x="1758612" y="260904"/>
+                  </a:lnTo>
+                  <a:lnTo>
+                    <a:pt x="1688267" y="252606"/>
+                  </a:lnTo>
+                  <a:lnTo>
+                    <a:pt x="1617923" y="244155"/>
+                  </a:lnTo>
+                  <a:lnTo>
+                    <a:pt x="1547578" y="235547"/>
+                  </a:lnTo>
+                  <a:lnTo>
+                    <a:pt x="1477234" y="226780"/>
+                  </a:lnTo>
+                  <a:lnTo>
+                    <a:pt x="1406889" y="217850"/>
+                  </a:lnTo>
+                  <a:lnTo>
+                    <a:pt x="1336545" y="208754"/>
+                  </a:lnTo>
+                  <a:lnTo>
+                    <a:pt x="1266200" y="199489"/>
+                  </a:lnTo>
+                  <a:lnTo>
+                    <a:pt x="1195856" y="190052"/>
+                  </a:lnTo>
+                  <a:lnTo>
+                    <a:pt x="1125511" y="180441"/>
+                  </a:lnTo>
+                  <a:lnTo>
+                    <a:pt x="1055167" y="170651"/>
+                  </a:lnTo>
+                  <a:lnTo>
+                    <a:pt x="984822" y="160679"/>
+                  </a:lnTo>
+                  <a:lnTo>
+                    <a:pt x="914478" y="150523"/>
+                  </a:lnTo>
+                  <a:lnTo>
+                    <a:pt x="844133" y="140177"/>
+                  </a:lnTo>
+                  <a:lnTo>
+                    <a:pt x="773789" y="129641"/>
+                  </a:lnTo>
+                  <a:lnTo>
+                    <a:pt x="703444" y="118908"/>
+                  </a:lnTo>
+                  <a:lnTo>
+                    <a:pt x="633100" y="107977"/>
+                  </a:lnTo>
+                  <a:lnTo>
+                    <a:pt x="562755" y="96842"/>
+                  </a:lnTo>
+                  <a:lnTo>
+                    <a:pt x="492411" y="85501"/>
+                  </a:lnTo>
+                  <a:lnTo>
+                    <a:pt x="422066" y="73950"/>
+                  </a:lnTo>
+                  <a:lnTo>
+                    <a:pt x="351722" y="62184"/>
+                  </a:lnTo>
+                  <a:lnTo>
+                    <a:pt x="281377" y="50200"/>
+                  </a:lnTo>
+                  <a:lnTo>
+                    <a:pt x="211033" y="37994"/>
+                  </a:lnTo>
+                  <a:lnTo>
+                    <a:pt x="140688" y="25561"/>
+                  </a:lnTo>
+                  <a:lnTo>
+                    <a:pt x="70344" y="12898"/>
+                  </a:lnTo>
+                  <a:lnTo>
+                    <a:pt x="0" y="0"/>
+                  </a:lnTo>
+                </a:path>
+              </a:pathLst>
+            </a:custGeom>
+          </p:spPr>
+          <p:txBody>
+            <a:bodyPr/>
+            <a:lstStyle/>
+            <a:p/>
+          </p:txBody>
+        </p:sp>
+        <p:sp>
+          <p:nvSpPr>
+            <p:cNvPr id="70" name="pl70"/>
+            <p:cNvSpPr/>
+            <p:nvPr/>
+          </p:nvSpPr>
+          <p:spPr>
+            <a:xfrm>
+              <a:off x="1393138" y="4336484"/>
+              <a:ext cx="6806278" cy="1201317"/>
+            </a:xfrm>
+            <a:custGeom>
+              <a:avLst/>
+              <a:pathLst>
+                <a:path w="6806278" h="1201317">
+                  <a:moveTo>
+                    <a:pt x="0" y="0"/>
+                  </a:moveTo>
+                  <a:lnTo>
+                    <a:pt x="53207" y="30344"/>
+                  </a:lnTo>
+                  <a:lnTo>
+                    <a:pt x="123552" y="69191"/>
+                  </a:lnTo>
+                  <a:lnTo>
+                    <a:pt x="193896" y="106808"/>
+                  </a:lnTo>
+                  <a:lnTo>
+                    <a:pt x="264240" y="143234"/>
+                  </a:lnTo>
+                  <a:lnTo>
+                    <a:pt x="334585" y="178507"/>
+                  </a:lnTo>
+                  <a:lnTo>
+                    <a:pt x="404929" y="212663"/>
+                  </a:lnTo>
+                  <a:lnTo>
+                    <a:pt x="475274" y="245737"/>
+                  </a:lnTo>
+                  <a:lnTo>
+                    <a:pt x="545618" y="277764"/>
+                  </a:lnTo>
+                  <a:lnTo>
+                    <a:pt x="615963" y="308777"/>
+                  </a:lnTo>
+                  <a:lnTo>
+                    <a:pt x="686307" y="338808"/>
+                  </a:lnTo>
+                  <a:lnTo>
+                    <a:pt x="756652" y="367888"/>
+                  </a:lnTo>
+                  <a:lnTo>
+                    <a:pt x="826996" y="396048"/>
+                  </a:lnTo>
+                  <a:lnTo>
+                    <a:pt x="897341" y="423315"/>
+                  </a:lnTo>
+                  <a:lnTo>
+                    <a:pt x="967685" y="449719"/>
+                  </a:lnTo>
+                  <a:lnTo>
+                    <a:pt x="1038030" y="475288"/>
+                  </a:lnTo>
+                  <a:lnTo>
+                    <a:pt x="1108374" y="500046"/>
+                  </a:lnTo>
+                  <a:lnTo>
+                    <a:pt x="1178719" y="524021"/>
+                  </a:lnTo>
+                  <a:lnTo>
+                    <a:pt x="1249063" y="547236"/>
+                  </a:lnTo>
+                  <a:lnTo>
+                    <a:pt x="1319408" y="569717"/>
+                  </a:lnTo>
+                  <a:lnTo>
+                    <a:pt x="1389752" y="591485"/>
+                  </a:lnTo>
+                  <a:lnTo>
+                    <a:pt x="1460097" y="612564"/>
+                  </a:lnTo>
+                  <a:lnTo>
+                    <a:pt x="1530441" y="632976"/>
+                  </a:lnTo>
+                  <a:lnTo>
+                    <a:pt x="1600786" y="652742"/>
+                  </a:lnTo>
+                  <a:lnTo>
+                    <a:pt x="1671130" y="671881"/>
+                  </a:lnTo>
+                  <a:lnTo>
+                    <a:pt x="1741475" y="690415"/>
+                  </a:lnTo>
+                  <a:lnTo>
+                    <a:pt x="1811819" y="708362"/>
+                  </a:lnTo>
+                  <a:lnTo>
+                    <a:pt x="1882164" y="725740"/>
+                  </a:lnTo>
+                  <a:lnTo>
+                    <a:pt x="1952508" y="742568"/>
+                  </a:lnTo>
+                  <a:lnTo>
+                    <a:pt x="2022853" y="758864"/>
+                  </a:lnTo>
+                  <a:lnTo>
+                    <a:pt x="2093197" y="774643"/>
+                  </a:lnTo>
+                  <a:lnTo>
+                    <a:pt x="2163542" y="789923"/>
+                  </a:lnTo>
+                  <a:lnTo>
+                    <a:pt x="2233886" y="804719"/>
+                  </a:lnTo>
+                  <a:lnTo>
+                    <a:pt x="2304231" y="819046"/>
+                  </a:lnTo>
+                  <a:lnTo>
+                    <a:pt x="2374575" y="832920"/>
+                  </a:lnTo>
+                  <a:lnTo>
+                    <a:pt x="2444920" y="846355"/>
+                  </a:lnTo>
+                  <a:lnTo>
+                    <a:pt x="2515264" y="859364"/>
+                  </a:lnTo>
+                  <a:lnTo>
+                    <a:pt x="2585609" y="871961"/>
+                  </a:lnTo>
+                  <a:lnTo>
+                    <a:pt x="2655953" y="884159"/>
+                  </a:lnTo>
+                  <a:lnTo>
+                    <a:pt x="2726298" y="895971"/>
+                  </a:lnTo>
+                  <a:lnTo>
+                    <a:pt x="2796642" y="907409"/>
+                  </a:lnTo>
+                  <a:lnTo>
+                    <a:pt x="2866987" y="918485"/>
+                  </a:lnTo>
+                  <a:lnTo>
+                    <a:pt x="2937331" y="929210"/>
+                  </a:lnTo>
+                  <a:lnTo>
+                    <a:pt x="3007676" y="939596"/>
+                  </a:lnTo>
+                  <a:lnTo>
+                    <a:pt x="3078020" y="949652"/>
+                  </a:lnTo>
+                  <a:lnTo>
+                    <a:pt x="3148365" y="959391"/>
+                  </a:lnTo>
+                  <a:lnTo>
+                    <a:pt x="3218709" y="968821"/>
+                  </a:lnTo>
+                  <a:lnTo>
+                    <a:pt x="3289054" y="977952"/>
+                  </a:lnTo>
+                  <a:lnTo>
+                    <a:pt x="3359398" y="986794"/>
+                  </a:lnTo>
+                  <a:lnTo>
+                    <a:pt x="3429743" y="995356"/>
+                  </a:lnTo>
+                  <a:lnTo>
+                    <a:pt x="3500087" y="1003647"/>
+                  </a:lnTo>
+                  <a:lnTo>
+                    <a:pt x="3570432" y="1011676"/>
+                  </a:lnTo>
+                  <a:lnTo>
+                    <a:pt x="3640776" y="1019450"/>
+                  </a:lnTo>
+                  <a:lnTo>
+                    <a:pt x="3711121" y="1026978"/>
+                  </a:lnTo>
+                  <a:lnTo>
+                    <a:pt x="3781465" y="1034268"/>
+                  </a:lnTo>
+                  <a:lnTo>
+                    <a:pt x="3851810" y="1041327"/>
+                  </a:lnTo>
+                  <a:lnTo>
+                    <a:pt x="3922154" y="1048163"/>
+                  </a:lnTo>
+                  <a:lnTo>
+                    <a:pt x="3992498" y="1054782"/>
+                  </a:lnTo>
+                  <a:lnTo>
+                    <a:pt x="4062843" y="1061191"/>
+                  </a:lnTo>
+                  <a:lnTo>
+                    <a:pt x="4133187" y="1067398"/>
+                  </a:lnTo>
+                  <a:lnTo>
+                    <a:pt x="4203532" y="1073408"/>
+                  </a:lnTo>
+                  <a:lnTo>
+                    <a:pt x="4273876" y="1079227"/>
+                  </a:lnTo>
+                  <a:lnTo>
+                    <a:pt x="4344221" y="1084863"/>
+                  </a:lnTo>
+                  <a:lnTo>
+                    <a:pt x="4414565" y="1090320"/>
+                  </a:lnTo>
+                  <a:lnTo>
+                    <a:pt x="4484910" y="1095604"/>
+                  </a:lnTo>
+                  <a:lnTo>
+                    <a:pt x="4555254" y="1100721"/>
+                  </a:lnTo>
+                  <a:lnTo>
+                    <a:pt x="4625599" y="1105675"/>
+                  </a:lnTo>
+                  <a:lnTo>
+                    <a:pt x="4695943" y="1110473"/>
+                  </a:lnTo>
+                  <a:lnTo>
+                    <a:pt x="4766288" y="1115119"/>
+                  </a:lnTo>
+                  <a:lnTo>
+                    <a:pt x="4836632" y="1119618"/>
+                  </a:lnTo>
+                  <a:lnTo>
+                    <a:pt x="4906977" y="1123975"/>
+                  </a:lnTo>
+                  <a:lnTo>
+                    <a:pt x="4977321" y="1128193"/>
+                  </a:lnTo>
+                  <a:lnTo>
+                    <a:pt x="5047666" y="1132278"/>
+                  </a:lnTo>
+                  <a:lnTo>
+                    <a:pt x="5118010" y="1136234"/>
+                  </a:lnTo>
+                  <a:lnTo>
+                    <a:pt x="5188355" y="1140064"/>
+                  </a:lnTo>
+                  <a:lnTo>
+                    <a:pt x="5258699" y="1143773"/>
+                  </a:lnTo>
+                  <a:lnTo>
+                    <a:pt x="5329044" y="1147365"/>
+                  </a:lnTo>
+                  <a:lnTo>
+                    <a:pt x="5399388" y="1150843"/>
+                  </a:lnTo>
+                  <a:lnTo>
+                    <a:pt x="5469733" y="1154210"/>
+                  </a:lnTo>
+                  <a:lnTo>
+                    <a:pt x="5540077" y="1157472"/>
+                  </a:lnTo>
+                  <a:lnTo>
+                    <a:pt x="5610422" y="1160629"/>
+                  </a:lnTo>
+                  <a:lnTo>
+                    <a:pt x="5680766" y="1163687"/>
+                  </a:lnTo>
+                  <a:lnTo>
+                    <a:pt x="5751111" y="1166648"/>
+                  </a:lnTo>
+                  <a:lnTo>
+                    <a:pt x="5821455" y="1169516"/>
+                  </a:lnTo>
+                  <a:lnTo>
+                    <a:pt x="5891800" y="1172292"/>
+                  </a:lnTo>
+                  <a:lnTo>
+                    <a:pt x="5962144" y="1174981"/>
+                  </a:lnTo>
+                  <a:lnTo>
+                    <a:pt x="6032489" y="1177584"/>
+                  </a:lnTo>
+                  <a:lnTo>
+                    <a:pt x="6102833" y="1180105"/>
+                  </a:lnTo>
+                  <a:lnTo>
+                    <a:pt x="6173178" y="1182546"/>
+                  </a:lnTo>
+                  <a:lnTo>
+                    <a:pt x="6243522" y="1184910"/>
+                  </a:lnTo>
+                  <a:lnTo>
+                    <a:pt x="6313867" y="1187199"/>
+                  </a:lnTo>
+                  <a:lnTo>
+                    <a:pt x="6384211" y="1189416"/>
+                  </a:lnTo>
+                  <a:lnTo>
+                    <a:pt x="6454556" y="1191562"/>
+                  </a:lnTo>
+                  <a:lnTo>
+                    <a:pt x="6524900" y="1193641"/>
+                  </a:lnTo>
+                  <a:lnTo>
+                    <a:pt x="6595245" y="1195653"/>
+                  </a:lnTo>
+                  <a:lnTo>
+                    <a:pt x="6665589" y="1197602"/>
+                  </a:lnTo>
+                  <a:lnTo>
+                    <a:pt x="6735934" y="1199489"/>
+                  </a:lnTo>
+                  <a:lnTo>
+                    <a:pt x="6806278" y="1201317"/>
+                  </a:lnTo>
+                </a:path>
+              </a:pathLst>
+            </a:custGeom>
+            <a:ln w="27101" cap="flat">
+              <a:solidFill>
+                <a:srgbClr val="FF8C00">
+                  <a:alpha val="100000"/>
+                </a:srgbClr>
+              </a:solidFill>
+              <a:prstDash val="solid"/>
+              <a:round/>
+            </a:ln>
+          </p:spPr>
+          <p:txBody>
+            <a:bodyPr/>
+            <a:lstStyle/>
+            <a:p/>
+          </p:txBody>
+        </p:sp>
+        <p:sp>
+          <p:nvSpPr>
+            <p:cNvPr id="71" name="pl71"/>
+            <p:cNvSpPr/>
+            <p:nvPr/>
+          </p:nvSpPr>
+          <p:spPr>
+            <a:xfrm>
+              <a:off x="887106" y="5294352"/>
+              <a:ext cx="7660515" cy="0"/>
+            </a:xfrm>
+            <a:custGeom>
+              <a:avLst/>
+              <a:pathLst>
+                <a:path w="7660515" h="0">
+                  <a:moveTo>
+                    <a:pt x="0" y="0"/>
+                  </a:moveTo>
+                  <a:lnTo>
+                    <a:pt x="7660515" y="0"/>
+                  </a:lnTo>
+                  <a:lnTo>
+                    <a:pt x="7660515" y="0"/>
+                  </a:lnTo>
+                </a:path>
+              </a:pathLst>
+            </a:custGeom>
+            <a:ln w="13550" cap="flat">
+              <a:solidFill>
+                <a:srgbClr val="7F7F7F">
+                  <a:alpha val="100000"/>
+                </a:srgbClr>
+              </a:solidFill>
+              <a:prstDash val="dash"/>
+              <a:round/>
+            </a:ln>
+          </p:spPr>
+          <p:txBody>
+            <a:bodyPr/>
+            <a:lstStyle/>
+            <a:p/>
+          </p:txBody>
+        </p:sp>
+        <p:sp>
+          <p:nvSpPr>
+            <p:cNvPr id="72" name="pl72"/>
+            <p:cNvSpPr/>
+            <p:nvPr/>
+          </p:nvSpPr>
+          <p:spPr>
+            <a:xfrm>
+              <a:off x="4530353" y="4336484"/>
+              <a:ext cx="0" cy="1317069"/>
+            </a:xfrm>
+            <a:custGeom>
+              <a:avLst/>
+              <a:pathLst>
+                <a:path w="0" h="1317069">
+                  <a:moveTo>
+                    <a:pt x="0" y="1317069"/>
+                  </a:moveTo>
+                  <a:lnTo>
+                    <a:pt x="0" y="0"/>
+                  </a:lnTo>
+                  <a:lnTo>
+                    <a:pt x="0" y="0"/>
+                  </a:lnTo>
+                </a:path>
+              </a:pathLst>
+            </a:custGeom>
+            <a:ln w="13550" cap="flat">
+              <a:solidFill>
+                <a:srgbClr val="666666">
+                  <a:alpha val="100000"/>
+                </a:srgbClr>
+              </a:solidFill>
+              <a:prstDash val="dot"/>
+              <a:round/>
+            </a:ln>
+          </p:spPr>
+          <p:txBody>
+            <a:bodyPr/>
+            <a:lstStyle/>
+            <a:p/>
+          </p:txBody>
+        </p:sp>
+        <p:sp>
+          <p:nvSpPr>
+            <p:cNvPr id="73" name="tx73"/>
+            <p:cNvSpPr/>
+            <p:nvPr/>
+          </p:nvSpPr>
+          <p:spPr>
+            <a:xfrm>
+              <a:off x="762297" y="5553636"/>
+              <a:ext cx="62179" cy="80101"/>
+            </a:xfrm>
+            <a:prstGeom prst="rect">
+              <a:avLst/>
+            </a:prstGeom>
+            <a:noFill/>
+          </p:spPr>
+          <p:txBody>
+            <a:bodyPr lIns="0" rIns="0" tIns="0" bIns="0" anchorCtr="1" anchor="ctr" wrap="none"/>
+            <a:lstStyle/>
+            <a:p>
+              <a:pPr algn="l" marL="0" marR="0" indent="0">
+                <a:lnSpc>
+                  <a:spcPts val="880"/>
+                </a:lnSpc>
+                <a:spcBef>
+                  <a:spcPts val="0"/>
+                </a:spcBef>
+                <a:spcAft>
+                  <a:spcPts val="0"/>
+                </a:spcAft>
+              </a:pPr>
+              <a:r>
+                <a:rPr sz="880">
+                  <a:solidFill>
+                    <a:srgbClr val="4D4D4D">
+                      <a:alpha val="100000"/>
+                    </a:srgbClr>
+                  </a:solidFill>
+                  <a:latin typeface="Helvetica"/>
+                  <a:cs typeface="Helvetica"/>
+                </a:rPr>
+                <a:t>0</a:t>
+              </a:r>
+            </a:p>
+          </p:txBody>
+        </p:sp>
+        <p:sp>
+          <p:nvSpPr>
+            <p:cNvPr id="74" name="tx74"/>
+            <p:cNvSpPr/>
+            <p:nvPr/>
+          </p:nvSpPr>
+          <p:spPr>
+            <a:xfrm>
+              <a:off x="762297" y="5254302"/>
+              <a:ext cx="62179" cy="80101"/>
+            </a:xfrm>
+            <a:prstGeom prst="rect">
+              <a:avLst/>
+            </a:prstGeom>
+            <a:noFill/>
+          </p:spPr>
+          <p:txBody>
+            <a:bodyPr lIns="0" rIns="0" tIns="0" bIns="0" anchorCtr="1" anchor="ctr" wrap="none"/>
+            <a:lstStyle/>
+            <a:p>
+              <a:pPr algn="l" marL="0" marR="0" indent="0">
+                <a:lnSpc>
+                  <a:spcPts val="880"/>
+                </a:lnSpc>
+                <a:spcBef>
+                  <a:spcPts val="0"/>
+                </a:spcBef>
+                <a:spcAft>
+                  <a:spcPts val="0"/>
+                </a:spcAft>
+              </a:pPr>
+              <a:r>
+                <a:rPr sz="880">
+                  <a:solidFill>
+                    <a:srgbClr val="4D4D4D">
+                      <a:alpha val="100000"/>
+                    </a:srgbClr>
+                  </a:solidFill>
+                  <a:latin typeface="Helvetica"/>
+                  <a:cs typeface="Helvetica"/>
+                </a:rPr>
+                <a:t>1</a:t>
+              </a:r>
+            </a:p>
+          </p:txBody>
+        </p:sp>
+        <p:sp>
+          <p:nvSpPr>
+            <p:cNvPr id="75" name="tx75"/>
+            <p:cNvSpPr/>
+            <p:nvPr/>
+          </p:nvSpPr>
+          <p:spPr>
+            <a:xfrm>
+              <a:off x="762297" y="4954968"/>
+              <a:ext cx="62179" cy="80101"/>
+            </a:xfrm>
+            <a:prstGeom prst="rect">
+              <a:avLst/>
+            </a:prstGeom>
+            <a:noFill/>
+          </p:spPr>
+          <p:txBody>
+            <a:bodyPr lIns="0" rIns="0" tIns="0" bIns="0" anchorCtr="1" anchor="ctr" wrap="none"/>
+            <a:lstStyle/>
+            <a:p>
+              <a:pPr algn="l" marL="0" marR="0" indent="0">
+                <a:lnSpc>
+                  <a:spcPts val="880"/>
+                </a:lnSpc>
+                <a:spcBef>
+                  <a:spcPts val="0"/>
+                </a:spcBef>
+                <a:spcAft>
+                  <a:spcPts val="0"/>
+                </a:spcAft>
+              </a:pPr>
+              <a:r>
+                <a:rPr sz="880">
+                  <a:solidFill>
+                    <a:srgbClr val="4D4D4D">
+                      <a:alpha val="100000"/>
+                    </a:srgbClr>
+                  </a:solidFill>
+                  <a:latin typeface="Helvetica"/>
+                  <a:cs typeface="Helvetica"/>
+                </a:rPr>
+                <a:t>2</a:t>
+              </a:r>
+            </a:p>
+          </p:txBody>
+        </p:sp>
+        <p:sp>
+          <p:nvSpPr>
+            <p:cNvPr id="76" name="tx76"/>
+            <p:cNvSpPr/>
+            <p:nvPr/>
+          </p:nvSpPr>
+          <p:spPr>
+            <a:xfrm>
+              <a:off x="762297" y="4655634"/>
+              <a:ext cx="62179" cy="80101"/>
+            </a:xfrm>
+            <a:prstGeom prst="rect">
+              <a:avLst/>
+            </a:prstGeom>
+            <a:noFill/>
+          </p:spPr>
+          <p:txBody>
+            <a:bodyPr lIns="0" rIns="0" tIns="0" bIns="0" anchorCtr="1" anchor="ctr" wrap="none"/>
+            <a:lstStyle/>
+            <a:p>
+              <a:pPr algn="l" marL="0" marR="0" indent="0">
+                <a:lnSpc>
+                  <a:spcPts val="880"/>
+                </a:lnSpc>
+                <a:spcBef>
+                  <a:spcPts val="0"/>
+                </a:spcBef>
+                <a:spcAft>
+                  <a:spcPts val="0"/>
+                </a:spcAft>
+              </a:pPr>
+              <a:r>
+                <a:rPr sz="880">
+                  <a:solidFill>
+                    <a:srgbClr val="4D4D4D">
+                      <a:alpha val="100000"/>
+                    </a:srgbClr>
+                  </a:solidFill>
+                  <a:latin typeface="Helvetica"/>
+                  <a:cs typeface="Helvetica"/>
+                </a:rPr>
+                <a:t>3</a:t>
+              </a:r>
+            </a:p>
+          </p:txBody>
+        </p:sp>
+        <p:sp>
+          <p:nvSpPr>
+            <p:cNvPr id="77" name="tx77"/>
+            <p:cNvSpPr/>
+            <p:nvPr/>
+          </p:nvSpPr>
+          <p:spPr>
+            <a:xfrm>
+              <a:off x="762297" y="4356300"/>
+              <a:ext cx="62179" cy="80101"/>
+            </a:xfrm>
+            <a:prstGeom prst="rect">
+              <a:avLst/>
+            </a:prstGeom>
+            <a:noFill/>
+          </p:spPr>
+          <p:txBody>
+            <a:bodyPr lIns="0" rIns="0" tIns="0" bIns="0" anchorCtr="1" anchor="ctr" wrap="none"/>
+            <a:lstStyle/>
+            <a:p>
+              <a:pPr algn="l" marL="0" marR="0" indent="0">
+                <a:lnSpc>
+                  <a:spcPts val="880"/>
+                </a:lnSpc>
+                <a:spcBef>
+                  <a:spcPts val="0"/>
+                </a:spcBef>
+                <a:spcAft>
+                  <a:spcPts val="0"/>
+                </a:spcAft>
+              </a:pPr>
+              <a:r>
+                <a:rPr sz="880">
+                  <a:solidFill>
+                    <a:srgbClr val="4D4D4D">
+                      <a:alpha val="100000"/>
+                    </a:srgbClr>
+                  </a:solidFill>
+                  <a:latin typeface="Helvetica"/>
+                  <a:cs typeface="Helvetica"/>
+                </a:rPr>
+                <a:t>4</a:t>
+              </a:r>
+            </a:p>
+          </p:txBody>
+        </p:sp>
+        <p:sp>
+          <p:nvSpPr>
+            <p:cNvPr id="78" name="tx78"/>
+            <p:cNvSpPr/>
+            <p:nvPr/>
+          </p:nvSpPr>
+          <p:spPr>
+            <a:xfrm>
+              <a:off x="1241001" y="5716183"/>
+              <a:ext cx="161574" cy="80101"/>
+            </a:xfrm>
+            <a:prstGeom prst="rect">
+              <a:avLst/>
+            </a:prstGeom>
+            <a:noFill/>
+          </p:spPr>
+          <p:txBody>
+            <a:bodyPr lIns="0" rIns="0" tIns="0" bIns="0" anchorCtr="1" anchor="ctr" wrap="none"/>
+            <a:lstStyle/>
+            <a:p>
+              <a:pPr algn="l" marL="0" marR="0" indent="0">
+                <a:lnSpc>
+                  <a:spcPts val="880"/>
+                </a:lnSpc>
+                <a:spcBef>
+                  <a:spcPts val="0"/>
+                </a:spcBef>
+                <a:spcAft>
+                  <a:spcPts val="0"/>
+                </a:spcAft>
+              </a:pPr>
+              <a:r>
+                <a:rPr sz="880">
+                  <a:solidFill>
+                    <a:srgbClr val="4D4D4D">
+                      <a:alpha val="100000"/>
+                    </a:srgbClr>
+                  </a:solidFill>
+                  <a:latin typeface="Helvetica"/>
+                  <a:cs typeface="Helvetica"/>
+                </a:rPr>
+                <a:t>-40</a:t>
+              </a:r>
+            </a:p>
+          </p:txBody>
+        </p:sp>
+        <p:sp>
+          <p:nvSpPr>
+            <p:cNvPr id="79" name="tx79"/>
+            <p:cNvSpPr/>
+            <p:nvPr/>
+          </p:nvSpPr>
+          <p:spPr>
+            <a:xfrm>
+              <a:off x="2054602" y="5716183"/>
+              <a:ext cx="161574" cy="80101"/>
+            </a:xfrm>
+            <a:prstGeom prst="rect">
+              <a:avLst/>
+            </a:prstGeom>
+            <a:noFill/>
+          </p:spPr>
+          <p:txBody>
+            <a:bodyPr lIns="0" rIns="0" tIns="0" bIns="0" anchorCtr="1" anchor="ctr" wrap="none"/>
+            <a:lstStyle/>
+            <a:p>
+              <a:pPr algn="l" marL="0" marR="0" indent="0">
+                <a:lnSpc>
+                  <a:spcPts val="880"/>
+                </a:lnSpc>
+                <a:spcBef>
+                  <a:spcPts val="0"/>
+                </a:spcBef>
+                <a:spcAft>
+                  <a:spcPts val="0"/>
+                </a:spcAft>
+              </a:pPr>
+              <a:r>
+                <a:rPr sz="880">
+                  <a:solidFill>
+                    <a:srgbClr val="4D4D4D">
+                      <a:alpha val="100000"/>
+                    </a:srgbClr>
+                  </a:solidFill>
+                  <a:latin typeface="Helvetica"/>
+                  <a:cs typeface="Helvetica"/>
+                </a:rPr>
+                <a:t>-30</a:t>
+              </a:r>
+            </a:p>
+          </p:txBody>
+        </p:sp>
+        <p:sp>
+          <p:nvSpPr>
+            <p:cNvPr id="80" name="tx80"/>
+            <p:cNvSpPr/>
+            <p:nvPr/>
+          </p:nvSpPr>
+          <p:spPr>
+            <a:xfrm>
+              <a:off x="2868203" y="5716183"/>
+              <a:ext cx="161574" cy="80101"/>
+            </a:xfrm>
+            <a:prstGeom prst="rect">
+              <a:avLst/>
+            </a:prstGeom>
+            <a:noFill/>
+          </p:spPr>
+          <p:txBody>
+            <a:bodyPr lIns="0" rIns="0" tIns="0" bIns="0" anchorCtr="1" anchor="ctr" wrap="none"/>
+            <a:lstStyle/>
+            <a:p>
+              <a:pPr algn="l" marL="0" marR="0" indent="0">
+                <a:lnSpc>
+                  <a:spcPts val="880"/>
+                </a:lnSpc>
+                <a:spcBef>
+                  <a:spcPts val="0"/>
+                </a:spcBef>
+                <a:spcAft>
+                  <a:spcPts val="0"/>
+                </a:spcAft>
+              </a:pPr>
+              <a:r>
+                <a:rPr sz="880">
+                  <a:solidFill>
+                    <a:srgbClr val="4D4D4D">
+                      <a:alpha val="100000"/>
+                    </a:srgbClr>
+                  </a:solidFill>
+                  <a:latin typeface="Helvetica"/>
+                  <a:cs typeface="Helvetica"/>
+                </a:rPr>
+                <a:t>-20</a:t>
+              </a:r>
+            </a:p>
+          </p:txBody>
+        </p:sp>
+        <p:sp>
+          <p:nvSpPr>
+            <p:cNvPr id="81" name="tx81"/>
+            <p:cNvSpPr/>
+            <p:nvPr/>
+          </p:nvSpPr>
+          <p:spPr>
+            <a:xfrm>
+              <a:off x="3681805" y="5716183"/>
+              <a:ext cx="161574" cy="80101"/>
+            </a:xfrm>
+            <a:prstGeom prst="rect">
+              <a:avLst/>
+            </a:prstGeom>
+            <a:noFill/>
+          </p:spPr>
+          <p:txBody>
+            <a:bodyPr lIns="0" rIns="0" tIns="0" bIns="0" anchorCtr="1" anchor="ctr" wrap="none"/>
+            <a:lstStyle/>
+            <a:p>
+              <a:pPr algn="l" marL="0" marR="0" indent="0">
+                <a:lnSpc>
+                  <a:spcPts val="880"/>
+                </a:lnSpc>
+                <a:spcBef>
+                  <a:spcPts val="0"/>
+                </a:spcBef>
+                <a:spcAft>
+                  <a:spcPts val="0"/>
+                </a:spcAft>
+              </a:pPr>
+              <a:r>
+                <a:rPr sz="880">
+                  <a:solidFill>
+                    <a:srgbClr val="4D4D4D">
+                      <a:alpha val="100000"/>
+                    </a:srgbClr>
+                  </a:solidFill>
+                  <a:latin typeface="Helvetica"/>
+                  <a:cs typeface="Helvetica"/>
+                </a:rPr>
+                <a:t>-10</a:t>
+              </a:r>
+            </a:p>
+          </p:txBody>
+        </p:sp>
+        <p:sp>
+          <p:nvSpPr>
+            <p:cNvPr id="82" name="tx82"/>
+            <p:cNvSpPr/>
+            <p:nvPr/>
+          </p:nvSpPr>
+          <p:spPr>
+            <a:xfrm>
+              <a:off x="4545104" y="5716183"/>
+              <a:ext cx="62179" cy="80101"/>
+            </a:xfrm>
+            <a:prstGeom prst="rect">
+              <a:avLst/>
+            </a:prstGeom>
+            <a:noFill/>
+          </p:spPr>
+          <p:txBody>
+            <a:bodyPr lIns="0" rIns="0" tIns="0" bIns="0" anchorCtr="1" anchor="ctr" wrap="none"/>
+            <a:lstStyle/>
+            <a:p>
+              <a:pPr algn="l" marL="0" marR="0" indent="0">
+                <a:lnSpc>
+                  <a:spcPts val="880"/>
+                </a:lnSpc>
+                <a:spcBef>
+                  <a:spcPts val="0"/>
+                </a:spcBef>
+                <a:spcAft>
+                  <a:spcPts val="0"/>
+                </a:spcAft>
+              </a:pPr>
+              <a:r>
+                <a:rPr sz="880">
+                  <a:solidFill>
+                    <a:srgbClr val="4D4D4D">
+                      <a:alpha val="100000"/>
+                    </a:srgbClr>
+                  </a:solidFill>
+                  <a:latin typeface="Helvetica"/>
+                  <a:cs typeface="Helvetica"/>
+                </a:rPr>
+                <a:t>0</a:t>
+              </a:r>
+            </a:p>
+          </p:txBody>
+        </p:sp>
+        <p:sp>
+          <p:nvSpPr>
+            <p:cNvPr id="83" name="tx83"/>
+            <p:cNvSpPr/>
+            <p:nvPr/>
+          </p:nvSpPr>
+          <p:spPr>
+            <a:xfrm>
+              <a:off x="5327615" y="5716183"/>
+              <a:ext cx="124358" cy="80101"/>
+            </a:xfrm>
+            <a:prstGeom prst="rect">
+              <a:avLst/>
+            </a:prstGeom>
+            <a:noFill/>
+          </p:spPr>
+          <p:txBody>
+            <a:bodyPr lIns="0" rIns="0" tIns="0" bIns="0" anchorCtr="1" anchor="ctr" wrap="none"/>
+            <a:lstStyle/>
+            <a:p>
+              <a:pPr algn="l" marL="0" marR="0" indent="0">
+                <a:lnSpc>
+                  <a:spcPts val="880"/>
+                </a:lnSpc>
+                <a:spcBef>
+                  <a:spcPts val="0"/>
+                </a:spcBef>
+                <a:spcAft>
+                  <a:spcPts val="0"/>
+                </a:spcAft>
+              </a:pPr>
+              <a:r>
+                <a:rPr sz="880">
+                  <a:solidFill>
+                    <a:srgbClr val="4D4D4D">
+                      <a:alpha val="100000"/>
+                    </a:srgbClr>
+                  </a:solidFill>
+                  <a:latin typeface="Helvetica"/>
+                  <a:cs typeface="Helvetica"/>
+                </a:rPr>
+                <a:t>10</a:t>
+              </a:r>
+            </a:p>
+          </p:txBody>
+        </p:sp>
+        <p:sp>
+          <p:nvSpPr>
+            <p:cNvPr id="84" name="tx84"/>
+            <p:cNvSpPr/>
+            <p:nvPr/>
+          </p:nvSpPr>
+          <p:spPr>
+            <a:xfrm>
+              <a:off x="6141217" y="5716183"/>
+              <a:ext cx="124358" cy="80101"/>
+            </a:xfrm>
+            <a:prstGeom prst="rect">
+              <a:avLst/>
+            </a:prstGeom>
+            <a:noFill/>
+          </p:spPr>
+          <p:txBody>
+            <a:bodyPr lIns="0" rIns="0" tIns="0" bIns="0" anchorCtr="1" anchor="ctr" wrap="none"/>
+            <a:lstStyle/>
+            <a:p>
+              <a:pPr algn="l" marL="0" marR="0" indent="0">
+                <a:lnSpc>
+                  <a:spcPts val="880"/>
+                </a:lnSpc>
+                <a:spcBef>
+                  <a:spcPts val="0"/>
+                </a:spcBef>
+                <a:spcAft>
+                  <a:spcPts val="0"/>
+                </a:spcAft>
+              </a:pPr>
+              <a:r>
+                <a:rPr sz="880">
+                  <a:solidFill>
+                    <a:srgbClr val="4D4D4D">
+                      <a:alpha val="100000"/>
+                    </a:srgbClr>
+                  </a:solidFill>
+                  <a:latin typeface="Helvetica"/>
+                  <a:cs typeface="Helvetica"/>
+                </a:rPr>
+                <a:t>20</a:t>
+              </a:r>
+            </a:p>
+          </p:txBody>
+        </p:sp>
+        <p:sp>
+          <p:nvSpPr>
+            <p:cNvPr id="85" name="tx85"/>
+            <p:cNvSpPr/>
+            <p:nvPr/>
+          </p:nvSpPr>
+          <p:spPr>
+            <a:xfrm>
+              <a:off x="6954818" y="5716183"/>
+              <a:ext cx="124358" cy="80101"/>
+            </a:xfrm>
+            <a:prstGeom prst="rect">
+              <a:avLst/>
+            </a:prstGeom>
+            <a:noFill/>
+          </p:spPr>
+          <p:txBody>
+            <a:bodyPr lIns="0" rIns="0" tIns="0" bIns="0" anchorCtr="1" anchor="ctr" wrap="none"/>
+            <a:lstStyle/>
+            <a:p>
+              <a:pPr algn="l" marL="0" marR="0" indent="0">
+                <a:lnSpc>
+                  <a:spcPts val="880"/>
+                </a:lnSpc>
+                <a:spcBef>
+                  <a:spcPts val="0"/>
+                </a:spcBef>
+                <a:spcAft>
+                  <a:spcPts val="0"/>
+                </a:spcAft>
+              </a:pPr>
+              <a:r>
+                <a:rPr sz="880">
+                  <a:solidFill>
+                    <a:srgbClr val="4D4D4D">
+                      <a:alpha val="100000"/>
+                    </a:srgbClr>
+                  </a:solidFill>
+                  <a:latin typeface="Helvetica"/>
+                  <a:cs typeface="Helvetica"/>
+                </a:rPr>
+                <a:t>30</a:t>
+              </a:r>
+            </a:p>
+          </p:txBody>
+        </p:sp>
+        <p:sp>
+          <p:nvSpPr>
+            <p:cNvPr id="86" name="tx86"/>
+            <p:cNvSpPr/>
+            <p:nvPr/>
+          </p:nvSpPr>
+          <p:spPr>
+            <a:xfrm>
+              <a:off x="7768419" y="5716183"/>
+              <a:ext cx="124358" cy="80101"/>
+            </a:xfrm>
+            <a:prstGeom prst="rect">
+              <a:avLst/>
+            </a:prstGeom>
+            <a:noFill/>
+          </p:spPr>
+          <p:txBody>
+            <a:bodyPr lIns="0" rIns="0" tIns="0" bIns="0" anchorCtr="1" anchor="ctr" wrap="none"/>
+            <a:lstStyle/>
+            <a:p>
+              <a:pPr algn="l" marL="0" marR="0" indent="0">
+                <a:lnSpc>
+                  <a:spcPts val="880"/>
+                </a:lnSpc>
+                <a:spcBef>
+                  <a:spcPts val="0"/>
+                </a:spcBef>
+                <a:spcAft>
+                  <a:spcPts val="0"/>
+                </a:spcAft>
+              </a:pPr>
+              <a:r>
+                <a:rPr sz="880">
+                  <a:solidFill>
+                    <a:srgbClr val="4D4D4D">
+                      <a:alpha val="100000"/>
+                    </a:srgbClr>
+                  </a:solidFill>
+                  <a:latin typeface="Helvetica"/>
+                  <a:cs typeface="Helvetica"/>
+                </a:rPr>
+                <a:t>40</a:t>
+              </a:r>
+            </a:p>
+          </p:txBody>
+        </p:sp>
+        <p:sp>
+          <p:nvSpPr>
+            <p:cNvPr id="87" name="tx87"/>
+            <p:cNvSpPr/>
+            <p:nvPr/>
+          </p:nvSpPr>
+          <p:spPr>
+            <a:xfrm>
+              <a:off x="2928340" y="5855859"/>
+              <a:ext cx="3578047" cy="100218"/>
+            </a:xfrm>
+            <a:prstGeom prst="rect">
+              <a:avLst/>
+            </a:prstGeom>
+            <a:noFill/>
+          </p:spPr>
+          <p:txBody>
+            <a:bodyPr lIns="0" rIns="0" tIns="0" bIns="0" anchorCtr="1" anchor="ctr" wrap="none"/>
+            <a:lstStyle/>
+            <a:p>
+              <a:pPr algn="l" marL="0" marR="0" indent="0">
+                <a:lnSpc>
+                  <a:spcPts val="1100"/>
+                </a:lnSpc>
+                <a:spcBef>
+                  <a:spcPts val="0"/>
+                </a:spcBef>
+                <a:spcAft>
+                  <a:spcPts val="0"/>
+                </a:spcAft>
+              </a:pPr>
+              <a:r>
+                <a:rPr sz="1100">
+                  <a:solidFill>
+                    <a:srgbClr val="000000">
+                      <a:alpha val="100000"/>
+                    </a:srgbClr>
+                  </a:solidFill>
+                  <a:latin typeface="Helvetica"/>
+                  <a:cs typeface="Helvetica"/>
+                </a:rPr>
+                <a:t>eGFR difference (%): 100 × (CKD-EPI Cr-Cys − CG) / CG</a:t>
+              </a:r>
+            </a:p>
+          </p:txBody>
+        </p:sp>
+        <p:sp>
+          <p:nvSpPr>
+            <p:cNvPr id="88" name="tx88"/>
+            <p:cNvSpPr/>
+            <p:nvPr/>
+          </p:nvSpPr>
+          <p:spPr>
+            <a:xfrm rot="-5400000">
+              <a:off x="138035" y="4944909"/>
+              <a:ext cx="1016904" cy="100218"/>
+            </a:xfrm>
+            <a:prstGeom prst="rect">
+              <a:avLst/>
+            </a:prstGeom>
+            <a:noFill/>
+          </p:spPr>
+          <p:txBody>
+            <a:bodyPr lIns="0" rIns="0" tIns="0" bIns="0" anchorCtr="1" anchor="ctr" wrap="none"/>
+            <a:lstStyle/>
+            <a:p>
+              <a:pPr algn="l" marL="0" marR="0" indent="0">
+                <a:lnSpc>
+                  <a:spcPts val="1100"/>
+                </a:lnSpc>
+                <a:spcBef>
+                  <a:spcPts val="0"/>
+                </a:spcBef>
+                <a:spcAft>
+                  <a:spcPts val="0"/>
+                </a:spcAft>
+              </a:pPr>
+              <a:r>
+                <a:rPr sz="1100">
+                  <a:solidFill>
+                    <a:srgbClr val="000000">
+                      <a:alpha val="100000"/>
+                    </a:srgbClr>
+                  </a:solidFill>
+                  <a:latin typeface="Helvetica"/>
+                  <a:cs typeface="Helvetica"/>
+                </a:rPr>
+                <a:t>subHR (95% CI)</a:t>
+              </a:r>
+            </a:p>
+          </p:txBody>
+        </p:sp>
+        <p:sp>
+          <p:nvSpPr>
+            <p:cNvPr id="89" name="tx89"/>
+            <p:cNvSpPr/>
+            <p:nvPr/>
+          </p:nvSpPr>
+          <p:spPr>
+            <a:xfrm>
+              <a:off x="887106" y="4159544"/>
+              <a:ext cx="7052127" cy="82021"/>
+            </a:xfrm>
+            <a:prstGeom prst="rect">
+              <a:avLst/>
+            </a:prstGeom>
+            <a:noFill/>
+          </p:spPr>
+          <p:txBody>
+            <a:bodyPr lIns="0" rIns="0" tIns="0" bIns="0" anchorCtr="1" anchor="ctr" wrap="none"/>
+            <a:lstStyle/>
+            <a:p>
+              <a:pPr algn="l" marL="0" marR="0" indent="0">
+                <a:lnSpc>
+                  <a:spcPts val="900"/>
+                </a:lnSpc>
+                <a:spcBef>
+                  <a:spcPts val="0"/>
+                </a:spcBef>
+                <a:spcAft>
+                  <a:spcPts val="0"/>
+                </a:spcAft>
+              </a:pPr>
+              <a:r>
+                <a:rPr sz="900">
+                  <a:solidFill>
+                    <a:srgbClr val="404040">
+                      <a:alpha val="100000"/>
+                    </a:srgbClr>
+                  </a:solidFill>
+                  <a:latin typeface="Helvetica"/>
+                  <a:cs typeface="Helvetica"/>
+                </a:rPr>
+                <a:t>subHR per 10 % decline: 1.45 (1.24-1.70), p_Bonf = &lt;0.001 (n = 6)  |  per IQR decline (Δ = 29.9 %): 3.04 (1.89-4.91)  |  IQR: [-15.0, 14.9] %</a:t>
+              </a:r>
+            </a:p>
+          </p:txBody>
+        </p:sp>
+        <p:sp>
+          <p:nvSpPr>
+            <p:cNvPr id="90" name="tx90"/>
+            <p:cNvSpPr/>
+            <p:nvPr/>
+          </p:nvSpPr>
+          <p:spPr>
+            <a:xfrm>
+              <a:off x="887106" y="3932770"/>
               <a:ext cx="3435949" cy="120152"/>
             </a:xfrm>
             <a:prstGeom prst="rect">
